--- a/ゲーム科2年/00_前期/ゲーム開発Ⅰ/05_オブジェクトの複数配置.pptx
+++ b/ゲーム科2年/00_前期/ゲーム開発Ⅰ/05_オブジェクトの複数配置.pptx
@@ -13,27 +13,24 @@
     <p:sldId id="262" r:id="rId7"/>
     <p:sldId id="264" r:id="rId8"/>
     <p:sldId id="263" r:id="rId9"/>
-    <p:sldId id="265" r:id="rId10"/>
-    <p:sldId id="266" r:id="rId11"/>
-    <p:sldId id="267" r:id="rId12"/>
-    <p:sldId id="268" r:id="rId13"/>
-    <p:sldId id="269" r:id="rId14"/>
-    <p:sldId id="270" r:id="rId15"/>
-    <p:sldId id="271" r:id="rId16"/>
-    <p:sldId id="272" r:id="rId17"/>
-    <p:sldId id="273" r:id="rId18"/>
-    <p:sldId id="274" r:id="rId19"/>
-    <p:sldId id="275" r:id="rId20"/>
-    <p:sldId id="276" r:id="rId21"/>
-    <p:sldId id="277" r:id="rId22"/>
-    <p:sldId id="278" r:id="rId23"/>
-    <p:sldId id="279" r:id="rId24"/>
-    <p:sldId id="280" r:id="rId25"/>
-    <p:sldId id="281" r:id="rId26"/>
-    <p:sldId id="282" r:id="rId27"/>
-    <p:sldId id="283" r:id="rId28"/>
-    <p:sldId id="284" r:id="rId29"/>
-    <p:sldId id="285" r:id="rId30"/>
+    <p:sldId id="268" r:id="rId10"/>
+    <p:sldId id="269" r:id="rId11"/>
+    <p:sldId id="270" r:id="rId12"/>
+    <p:sldId id="271" r:id="rId13"/>
+    <p:sldId id="272" r:id="rId14"/>
+    <p:sldId id="273" r:id="rId15"/>
+    <p:sldId id="274" r:id="rId16"/>
+    <p:sldId id="275" r:id="rId17"/>
+    <p:sldId id="276" r:id="rId18"/>
+    <p:sldId id="277" r:id="rId19"/>
+    <p:sldId id="278" r:id="rId20"/>
+    <p:sldId id="279" r:id="rId21"/>
+    <p:sldId id="280" r:id="rId22"/>
+    <p:sldId id="281" r:id="rId23"/>
+    <p:sldId id="282" r:id="rId24"/>
+    <p:sldId id="283" r:id="rId25"/>
+    <p:sldId id="284" r:id="rId26"/>
+    <p:sldId id="285" r:id="rId27"/>
   </p:sldIdLst>
   <p:sldSz cx="12192000" cy="6858000"/>
   <p:notesSz cx="6858000" cy="9144000"/>
@@ -287,7 +284,7 @@
           <a:p>
             <a:fld id="{E9CC885B-4903-4D54-9A93-00025F12DED9}" type="datetimeFigureOut">
               <a:rPr kumimoji="1" lang="ja-JP" altLang="en-US" smtClean="0"/>
-              <a:t>2024/9/30</a:t>
+              <a:t>2025/1/6</a:t>
             </a:fld>
             <a:endParaRPr kumimoji="1" lang="ja-JP" altLang="en-US"/>
           </a:p>
@@ -517,7 +514,7 @@
           <a:p>
             <a:fld id="{E9CC885B-4903-4D54-9A93-00025F12DED9}" type="datetimeFigureOut">
               <a:rPr kumimoji="1" lang="ja-JP" altLang="en-US" smtClean="0"/>
-              <a:t>2024/9/30</a:t>
+              <a:t>2025/1/6</a:t>
             </a:fld>
             <a:endParaRPr kumimoji="1" lang="ja-JP" altLang="en-US"/>
           </a:p>
@@ -757,7 +754,7 @@
           <a:p>
             <a:fld id="{E9CC885B-4903-4D54-9A93-00025F12DED9}" type="datetimeFigureOut">
               <a:rPr kumimoji="1" lang="ja-JP" altLang="en-US" smtClean="0"/>
-              <a:t>2024/9/30</a:t>
+              <a:t>2025/1/6</a:t>
             </a:fld>
             <a:endParaRPr kumimoji="1" lang="ja-JP" altLang="en-US"/>
           </a:p>
@@ -987,7 +984,7 @@
           <a:p>
             <a:fld id="{E9CC885B-4903-4D54-9A93-00025F12DED9}" type="datetimeFigureOut">
               <a:rPr kumimoji="1" lang="ja-JP" altLang="en-US" smtClean="0"/>
-              <a:t>2024/9/30</a:t>
+              <a:t>2025/1/6</a:t>
             </a:fld>
             <a:endParaRPr kumimoji="1" lang="ja-JP" altLang="en-US"/>
           </a:p>
@@ -1262,7 +1259,7 @@
           <a:p>
             <a:fld id="{E9CC885B-4903-4D54-9A93-00025F12DED9}" type="datetimeFigureOut">
               <a:rPr kumimoji="1" lang="ja-JP" altLang="en-US" smtClean="0"/>
-              <a:t>2024/9/30</a:t>
+              <a:t>2025/1/6</a:t>
             </a:fld>
             <a:endParaRPr kumimoji="1" lang="ja-JP" altLang="en-US"/>
           </a:p>
@@ -1591,7 +1588,7 @@
           <a:p>
             <a:fld id="{E9CC885B-4903-4D54-9A93-00025F12DED9}" type="datetimeFigureOut">
               <a:rPr kumimoji="1" lang="ja-JP" altLang="en-US" smtClean="0"/>
-              <a:t>2024/9/30</a:t>
+              <a:t>2025/1/6</a:t>
             </a:fld>
             <a:endParaRPr kumimoji="1" lang="ja-JP" altLang="en-US"/>
           </a:p>
@@ -2067,7 +2064,7 @@
           <a:p>
             <a:fld id="{E9CC885B-4903-4D54-9A93-00025F12DED9}" type="datetimeFigureOut">
               <a:rPr kumimoji="1" lang="ja-JP" altLang="en-US" smtClean="0"/>
-              <a:t>2024/9/30</a:t>
+              <a:t>2025/1/6</a:t>
             </a:fld>
             <a:endParaRPr kumimoji="1" lang="ja-JP" altLang="en-US"/>
           </a:p>
@@ -2208,7 +2205,7 @@
           <a:p>
             <a:fld id="{E9CC885B-4903-4D54-9A93-00025F12DED9}" type="datetimeFigureOut">
               <a:rPr kumimoji="1" lang="ja-JP" altLang="en-US" smtClean="0"/>
-              <a:t>2024/9/30</a:t>
+              <a:t>2025/1/6</a:t>
             </a:fld>
             <a:endParaRPr kumimoji="1" lang="ja-JP" altLang="en-US"/>
           </a:p>
@@ -2321,7 +2318,7 @@
           <a:p>
             <a:fld id="{E9CC885B-4903-4D54-9A93-00025F12DED9}" type="datetimeFigureOut">
               <a:rPr kumimoji="1" lang="ja-JP" altLang="en-US" smtClean="0"/>
-              <a:t>2024/9/30</a:t>
+              <a:t>2025/1/6</a:t>
             </a:fld>
             <a:endParaRPr kumimoji="1" lang="ja-JP" altLang="en-US"/>
           </a:p>
@@ -2664,7 +2661,7 @@
           <a:p>
             <a:fld id="{E9CC885B-4903-4D54-9A93-00025F12DED9}" type="datetimeFigureOut">
               <a:rPr kumimoji="1" lang="ja-JP" altLang="en-US" smtClean="0"/>
-              <a:t>2024/9/30</a:t>
+              <a:t>2025/1/6</a:t>
             </a:fld>
             <a:endParaRPr kumimoji="1" lang="ja-JP" altLang="en-US"/>
           </a:p>
@@ -2952,7 +2949,7 @@
           <a:p>
             <a:fld id="{E9CC885B-4903-4D54-9A93-00025F12DED9}" type="datetimeFigureOut">
               <a:rPr kumimoji="1" lang="ja-JP" altLang="en-US" smtClean="0"/>
-              <a:t>2024/9/30</a:t>
+              <a:t>2025/1/6</a:t>
             </a:fld>
             <a:endParaRPr kumimoji="1" lang="ja-JP" altLang="en-US"/>
           </a:p>
@@ -3225,7 +3222,7 @@
           <a:p>
             <a:fld id="{E9CC885B-4903-4D54-9A93-00025F12DED9}" type="datetimeFigureOut">
               <a:rPr kumimoji="1" lang="ja-JP" altLang="en-US" smtClean="0"/>
-              <a:t>2024/9/30</a:t>
+              <a:t>2025/1/6</a:t>
             </a:fld>
             <a:endParaRPr kumimoji="1" lang="ja-JP" altLang="en-US"/>
           </a:p>
@@ -3828,52 +3825,6 @@
       </p:grpSpPr>
       <p:sp>
         <p:nvSpPr>
-          <p:cNvPr id="5" name="直方体 4">
-            <a:extLst>
-              <a:ext uri="{FF2B5EF4-FFF2-40B4-BE49-F238E27FC236}">
-                <a16:creationId xmlns:a16="http://schemas.microsoft.com/office/drawing/2014/main" id="{395755B8-E8CE-4726-BC2D-35C66DCCDE3C}"/>
-              </a:ext>
-            </a:extLst>
-          </p:cNvPr>
-          <p:cNvSpPr/>
-          <p:nvPr/>
-        </p:nvSpPr>
-        <p:spPr>
-          <a:xfrm rot="3202373">
-            <a:off x="2469062" y="3554468"/>
-            <a:ext cx="988722" cy="890488"/>
-          </a:xfrm>
-          <a:prstGeom prst="cube">
-            <a:avLst/>
-          </a:prstGeom>
-        </p:spPr>
-        <p:style>
-          <a:lnRef idx="2">
-            <a:schemeClr val="accent1">
-              <a:shade val="50000"/>
-            </a:schemeClr>
-          </a:lnRef>
-          <a:fillRef idx="1">
-            <a:schemeClr val="accent1"/>
-          </a:fillRef>
-          <a:effectRef idx="0">
-            <a:schemeClr val="accent1"/>
-          </a:effectRef>
-          <a:fontRef idx="minor">
-            <a:schemeClr val="lt1"/>
-          </a:fontRef>
-        </p:style>
-        <p:txBody>
-          <a:bodyPr rtlCol="0" anchor="ctr"/>
-          <a:lstStyle/>
-          <a:p>
-            <a:pPr algn="ctr"/>
-            <a:endParaRPr kumimoji="1" lang="ja-JP" altLang="en-US"/>
-          </a:p>
-        </p:txBody>
-      </p:sp>
-      <p:sp>
-        <p:nvSpPr>
           <p:cNvPr id="4" name="テキスト ボックス 3">
             <a:extLst>
               <a:ext uri="{FF2B5EF4-FFF2-40B4-BE49-F238E27FC236}">
@@ -3923,7 +3874,7 @@
         <p:spPr>
           <a:xfrm>
             <a:off x="567542" y="1216429"/>
-            <a:ext cx="7571303" cy="830997"/>
+            <a:ext cx="9748181" cy="461665"/>
           </a:xfrm>
           <a:prstGeom prst="rect">
             <a:avLst/>
@@ -3937,625 +3888,63 @@
           <a:lstStyle/>
           <a:p>
             <a:r>
-              <a:rPr kumimoji="1" lang="ja-JP" altLang="en-US" sz="2400" dirty="0"/>
-              <a:t>配置された</a:t>
-            </a:r>
-            <a:r>
-              <a:rPr lang="ja-JP" altLang="en-US" sz="2400" dirty="0"/>
-              <a:t>画像</a:t>
-            </a:r>
-            <a:r>
-              <a:rPr kumimoji="1" lang="ja-JP" altLang="en-US" sz="2400" dirty="0"/>
-              <a:t>は</a:t>
-            </a:r>
-            <a:r>
-              <a:rPr kumimoji="1" lang="ja-JP" altLang="en-US" sz="2400" b="1" dirty="0">
+              <a:rPr lang="en-US" altLang="ja-JP" sz="2400" b="1" dirty="0">
                 <a:solidFill>
                   <a:srgbClr val="FF0000"/>
                 </a:solidFill>
               </a:rPr>
-              <a:t>カメラによって写真撮影</a:t>
-            </a:r>
-            <a:r>
-              <a:rPr kumimoji="1" lang="ja-JP" altLang="en-US" sz="2400" dirty="0"/>
-              <a:t>されます。</a:t>
-            </a:r>
-            <a:endParaRPr kumimoji="1" lang="en-US" altLang="ja-JP" sz="2400" dirty="0"/>
-          </a:p>
-          <a:p>
+              <a:t>BlockManager.cpp</a:t>
+            </a:r>
             <a:r>
               <a:rPr lang="ja-JP" altLang="en-US" sz="2400" dirty="0"/>
-              <a:t>そして</a:t>
-            </a:r>
-            <a:r>
-              <a:rPr lang="ja-JP" altLang="en-US" sz="2400" b="1" dirty="0">
-                <a:solidFill>
-                  <a:srgbClr val="FF0000"/>
-                </a:solidFill>
-              </a:rPr>
-              <a:t>撮影後の写真がそのまま画面に描画されます。</a:t>
-            </a:r>
-            <a:endParaRPr lang="en-US" altLang="ja-JP" sz="2400" b="1" dirty="0">
-              <a:solidFill>
-                <a:srgbClr val="FF0000"/>
-              </a:solidFill>
-            </a:endParaRPr>
-          </a:p>
-        </p:txBody>
-      </p:sp>
-      <p:sp>
-        <p:nvSpPr>
-          <p:cNvPr id="2" name="直方体 1">
-            <a:extLst>
-              <a:ext uri="{FF2B5EF4-FFF2-40B4-BE49-F238E27FC236}">
-                <a16:creationId xmlns:a16="http://schemas.microsoft.com/office/drawing/2014/main" id="{80291F9A-27BD-4701-9276-EBF199C18DDD}"/>
-              </a:ext>
-            </a:extLst>
-          </p:cNvPr>
-          <p:cNvSpPr/>
-          <p:nvPr/>
-        </p:nvSpPr>
-        <p:spPr>
-          <a:xfrm>
-            <a:off x="1899758" y="4397543"/>
-            <a:ext cx="1841500" cy="1828800"/>
-          </a:xfrm>
-          <a:prstGeom prst="cube">
-            <a:avLst/>
-          </a:prstGeom>
-        </p:spPr>
-        <p:style>
-          <a:lnRef idx="2">
-            <a:schemeClr val="accent1">
-              <a:shade val="50000"/>
-            </a:schemeClr>
-          </a:lnRef>
-          <a:fillRef idx="1">
-            <a:schemeClr val="accent1"/>
-          </a:fillRef>
-          <a:effectRef idx="0">
-            <a:schemeClr val="accent1"/>
-          </a:effectRef>
-          <a:fontRef idx="minor">
-            <a:schemeClr val="lt1"/>
-          </a:fontRef>
-        </p:style>
-        <p:txBody>
-          <a:bodyPr rtlCol="0" anchor="ctr"/>
-          <a:lstStyle/>
-          <a:p>
-            <a:pPr algn="ctr"/>
-            <a:endParaRPr kumimoji="1" lang="ja-JP" altLang="en-US"/>
-          </a:p>
-        </p:txBody>
-      </p:sp>
-      <p:sp>
-        <p:nvSpPr>
-          <p:cNvPr id="7" name="直方体 6">
-            <a:extLst>
-              <a:ext uri="{FF2B5EF4-FFF2-40B4-BE49-F238E27FC236}">
-                <a16:creationId xmlns:a16="http://schemas.microsoft.com/office/drawing/2014/main" id="{636436CF-AAEB-47CF-9491-2E9FDE038B03}"/>
-              </a:ext>
-            </a:extLst>
-          </p:cNvPr>
-          <p:cNvSpPr/>
-          <p:nvPr/>
-        </p:nvSpPr>
-        <p:spPr>
-          <a:xfrm rot="1748454">
-            <a:off x="851745" y="3446605"/>
-            <a:ext cx="917453" cy="774700"/>
-          </a:xfrm>
-          <a:prstGeom prst="cube">
-            <a:avLst/>
-          </a:prstGeom>
-        </p:spPr>
-        <p:style>
-          <a:lnRef idx="2">
-            <a:schemeClr val="accent1">
-              <a:shade val="50000"/>
-            </a:schemeClr>
-          </a:lnRef>
-          <a:fillRef idx="1">
-            <a:schemeClr val="accent1"/>
-          </a:fillRef>
-          <a:effectRef idx="0">
-            <a:schemeClr val="accent1"/>
-          </a:effectRef>
-          <a:fontRef idx="minor">
-            <a:schemeClr val="lt1"/>
-          </a:fontRef>
-        </p:style>
-        <p:txBody>
-          <a:bodyPr rtlCol="0" anchor="ctr"/>
-          <a:lstStyle/>
-          <a:p>
-            <a:pPr algn="ctr"/>
-            <a:endParaRPr kumimoji="1" lang="ja-JP" altLang="en-US"/>
-          </a:p>
-        </p:txBody>
-      </p:sp>
-      <p:grpSp>
-        <p:nvGrpSpPr>
-          <p:cNvPr id="9" name="グループ化 8">
-            <a:extLst>
-              <a:ext uri="{FF2B5EF4-FFF2-40B4-BE49-F238E27FC236}">
-                <a16:creationId xmlns:a16="http://schemas.microsoft.com/office/drawing/2014/main" id="{64C48475-6B89-4A51-9CE2-CF77FB0FB1CC}"/>
-              </a:ext>
-            </a:extLst>
-          </p:cNvPr>
-          <p:cNvGrpSpPr/>
-          <p:nvPr/>
-        </p:nvGrpSpPr>
-        <p:grpSpPr>
-          <a:xfrm rot="19453458">
-            <a:off x="4527650" y="2414112"/>
-            <a:ext cx="1389859" cy="685800"/>
-            <a:chOff x="8203123" y="4824923"/>
-            <a:chExt cx="1425676" cy="685800"/>
-          </a:xfrm>
-          <a:solidFill>
-            <a:schemeClr val="accent5">
-              <a:lumMod val="40000"/>
-              <a:lumOff val="60000"/>
-            </a:schemeClr>
-          </a:solidFill>
-        </p:grpSpPr>
-        <p:sp>
-          <p:nvSpPr>
-            <p:cNvPr id="3" name="二等辺三角形 2">
-              <a:extLst>
-                <a:ext uri="{FF2B5EF4-FFF2-40B4-BE49-F238E27FC236}">
-                  <a16:creationId xmlns:a16="http://schemas.microsoft.com/office/drawing/2014/main" id="{02379B06-0B18-4202-A721-4AE5300CE3D9}"/>
-                </a:ext>
-              </a:extLst>
-            </p:cNvPr>
-            <p:cNvSpPr/>
-            <p:nvPr/>
-          </p:nvSpPr>
-          <p:spPr>
-            <a:xfrm rot="5400000">
-              <a:off x="8128000" y="4900046"/>
-              <a:ext cx="685800" cy="535554"/>
-            </a:xfrm>
-            <a:prstGeom prst="triangle">
-              <a:avLst/>
-            </a:prstGeom>
-            <a:grpFill/>
-          </p:spPr>
-          <p:style>
-            <a:lnRef idx="2">
-              <a:schemeClr val="accent1">
-                <a:shade val="50000"/>
-              </a:schemeClr>
-            </a:lnRef>
-            <a:fillRef idx="1">
-              <a:schemeClr val="accent1"/>
-            </a:fillRef>
-            <a:effectRef idx="0">
-              <a:schemeClr val="accent1"/>
-            </a:effectRef>
-            <a:fontRef idx="minor">
-              <a:schemeClr val="lt1"/>
-            </a:fontRef>
-          </p:style>
-          <p:txBody>
-            <a:bodyPr rtlCol="0" anchor="ctr"/>
-            <a:lstStyle/>
-            <a:p>
-              <a:pPr algn="ctr"/>
-              <a:endParaRPr kumimoji="1" lang="ja-JP" altLang="en-US"/>
-            </a:p>
-          </p:txBody>
-        </p:sp>
-        <p:sp>
-          <p:nvSpPr>
-            <p:cNvPr id="8" name="四角形: 角を丸くする 7">
-              <a:extLst>
-                <a:ext uri="{FF2B5EF4-FFF2-40B4-BE49-F238E27FC236}">
-                  <a16:creationId xmlns:a16="http://schemas.microsoft.com/office/drawing/2014/main" id="{3B5DFFA1-9594-48C4-B2EB-5A2E965AE580}"/>
-                </a:ext>
-              </a:extLst>
-            </p:cNvPr>
-            <p:cNvSpPr/>
-            <p:nvPr/>
-          </p:nvSpPr>
-          <p:spPr>
-            <a:xfrm>
-              <a:off x="8446622" y="4864100"/>
-              <a:ext cx="1182177" cy="607446"/>
-            </a:xfrm>
-            <a:prstGeom prst="roundRect">
-              <a:avLst/>
-            </a:prstGeom>
-            <a:grpFill/>
-          </p:spPr>
-          <p:style>
-            <a:lnRef idx="2">
-              <a:schemeClr val="accent1">
-                <a:shade val="50000"/>
-              </a:schemeClr>
-            </a:lnRef>
-            <a:fillRef idx="1">
-              <a:schemeClr val="accent1"/>
-            </a:fillRef>
-            <a:effectRef idx="0">
-              <a:schemeClr val="accent1"/>
-            </a:effectRef>
-            <a:fontRef idx="minor">
-              <a:schemeClr val="lt1"/>
-            </a:fontRef>
-          </p:style>
-          <p:txBody>
-            <a:bodyPr rtlCol="0" anchor="ctr"/>
-            <a:lstStyle/>
-            <a:p>
-              <a:pPr algn="ctr"/>
-              <a:endParaRPr kumimoji="1" lang="ja-JP" altLang="en-US"/>
-            </a:p>
-          </p:txBody>
-        </p:sp>
-      </p:grpSp>
-      <p:grpSp>
-        <p:nvGrpSpPr>
-          <p:cNvPr id="13" name="グループ化 12">
-            <a:extLst>
-              <a:ext uri="{FF2B5EF4-FFF2-40B4-BE49-F238E27FC236}">
-                <a16:creationId xmlns:a16="http://schemas.microsoft.com/office/drawing/2014/main" id="{5F8F9CEC-26DE-40CC-B831-082D3450A817}"/>
-              </a:ext>
-            </a:extLst>
-          </p:cNvPr>
-          <p:cNvGrpSpPr/>
-          <p:nvPr/>
-        </p:nvGrpSpPr>
-        <p:grpSpPr>
-          <a:xfrm>
-            <a:off x="4226372" y="3360760"/>
-            <a:ext cx="1562100" cy="1448548"/>
-            <a:chOff x="3739246" y="1961644"/>
-            <a:chExt cx="1562100" cy="1448548"/>
-          </a:xfrm>
-        </p:grpSpPr>
-        <p:sp>
-          <p:nvSpPr>
-            <p:cNvPr id="10" name="爆発: 8 pt 9">
-              <a:extLst>
-                <a:ext uri="{FF2B5EF4-FFF2-40B4-BE49-F238E27FC236}">
-                  <a16:creationId xmlns:a16="http://schemas.microsoft.com/office/drawing/2014/main" id="{8218DF73-C80D-4CC5-84B9-1247CDF99AFD}"/>
-                </a:ext>
-              </a:extLst>
-            </p:cNvPr>
-            <p:cNvSpPr/>
-            <p:nvPr/>
-          </p:nvSpPr>
-          <p:spPr>
-            <a:xfrm>
-              <a:off x="3739246" y="1961644"/>
-              <a:ext cx="1562100" cy="1448548"/>
-            </a:xfrm>
-            <a:prstGeom prst="irregularSeal1">
-              <a:avLst/>
-            </a:prstGeom>
-            <a:solidFill>
-              <a:srgbClr val="FFFF00"/>
-            </a:solidFill>
-          </p:spPr>
-          <p:style>
-            <a:lnRef idx="2">
-              <a:schemeClr val="accent1">
-                <a:shade val="50000"/>
-              </a:schemeClr>
-            </a:lnRef>
-            <a:fillRef idx="1">
-              <a:schemeClr val="accent1"/>
-            </a:fillRef>
-            <a:effectRef idx="0">
-              <a:schemeClr val="accent1"/>
-            </a:effectRef>
-            <a:fontRef idx="minor">
-              <a:schemeClr val="lt1"/>
-            </a:fontRef>
-          </p:style>
-          <p:txBody>
-            <a:bodyPr rtlCol="0" anchor="ctr"/>
-            <a:lstStyle/>
-            <a:p>
-              <a:pPr algn="ctr"/>
-              <a:endParaRPr kumimoji="1" lang="ja-JP" altLang="en-US"/>
-            </a:p>
-          </p:txBody>
-        </p:sp>
-        <p:sp>
-          <p:nvSpPr>
-            <p:cNvPr id="11" name="テキスト ボックス 10">
-              <a:extLst>
-                <a:ext uri="{FF2B5EF4-FFF2-40B4-BE49-F238E27FC236}">
-                  <a16:creationId xmlns:a16="http://schemas.microsoft.com/office/drawing/2014/main" id="{F6CEF66C-B6BD-477C-A497-2B99D2CBE388}"/>
-                </a:ext>
-              </a:extLst>
-            </p:cNvPr>
-            <p:cNvSpPr txBox="1"/>
-            <p:nvPr/>
-          </p:nvSpPr>
-          <p:spPr>
-            <a:xfrm>
-              <a:off x="3977857" y="2439705"/>
-              <a:ext cx="1107996" cy="461665"/>
-            </a:xfrm>
-            <a:prstGeom prst="rect">
-              <a:avLst/>
-            </a:prstGeom>
-            <a:noFill/>
-          </p:spPr>
-          <p:txBody>
-            <a:bodyPr wrap="none" rtlCol="0">
-              <a:spAutoFit/>
-            </a:bodyPr>
-            <a:lstStyle/>
-            <a:p>
-              <a:r>
-                <a:rPr kumimoji="1" lang="ja-JP" altLang="en-US" sz="2400" dirty="0"/>
-                <a:t>パシャ</a:t>
-              </a:r>
-              <a:endParaRPr lang="en-US" altLang="ja-JP" sz="2400" b="1" dirty="0">
-                <a:solidFill>
-                  <a:srgbClr val="FF0000"/>
-                </a:solidFill>
-              </a:endParaRPr>
-            </a:p>
-          </p:txBody>
-        </p:sp>
-      </p:grpSp>
-      <p:sp>
-        <p:nvSpPr>
-          <p:cNvPr id="12" name="正方形/長方形 11">
-            <a:extLst>
-              <a:ext uri="{FF2B5EF4-FFF2-40B4-BE49-F238E27FC236}">
-                <a16:creationId xmlns:a16="http://schemas.microsoft.com/office/drawing/2014/main" id="{733AF0EF-44E9-473E-B953-3E8B23FFC088}"/>
-              </a:ext>
-            </a:extLst>
-          </p:cNvPr>
-          <p:cNvSpPr/>
-          <p:nvPr/>
-        </p:nvSpPr>
-        <p:spPr>
-          <a:xfrm>
-            <a:off x="6148015" y="3218261"/>
-            <a:ext cx="4597213" cy="2392388"/>
+              <a:t>側から各ブロックのロード処理を呼びましょう。</a:t>
+            </a:r>
+            <a:endParaRPr lang="en-US" altLang="ja-JP" sz="2400" dirty="0"/>
+          </a:p>
+        </p:txBody>
+      </p:sp>
+      <p:pic>
+        <p:nvPicPr>
+          <p:cNvPr id="5" name="図 4">
+            <a:extLst>
+              <a:ext uri="{FF2B5EF4-FFF2-40B4-BE49-F238E27FC236}">
+                <a16:creationId xmlns:a16="http://schemas.microsoft.com/office/drawing/2014/main" id="{09F2C7FF-BCA4-4801-A350-5BDE377929C6}"/>
+              </a:ext>
+            </a:extLst>
+          </p:cNvPr>
+          <p:cNvPicPr>
+            <a:picLocks noChangeAspect="1"/>
+          </p:cNvPicPr>
+          <p:nvPr/>
+        </p:nvPicPr>
+        <p:blipFill>
+          <a:blip r:embed="rId2">
+            <a:extLst>
+              <a:ext uri="{28A0092B-C50C-407E-A947-70E740481C1C}">
+                <a14:useLocalDpi xmlns:a14="http://schemas.microsoft.com/office/drawing/2010/main" val="0"/>
+              </a:ext>
+            </a:extLst>
+          </a:blip>
+          <a:stretch>
+            <a:fillRect/>
+          </a:stretch>
+        </p:blipFill>
+        <p:spPr>
+          <a:xfrm>
+            <a:off x="567542" y="1817794"/>
+            <a:ext cx="7483742" cy="2385906"/>
           </a:xfrm>
           <a:prstGeom prst="rect">
             <a:avLst/>
           </a:prstGeom>
-          <a:noFill/>
-          <a:ln>
-            <a:solidFill>
-              <a:schemeClr val="tx1"/>
-            </a:solidFill>
-          </a:ln>
-        </p:spPr>
-        <p:style>
-          <a:lnRef idx="2">
-            <a:schemeClr val="accent1">
-              <a:shade val="50000"/>
-            </a:schemeClr>
-          </a:lnRef>
-          <a:fillRef idx="1">
-            <a:schemeClr val="accent1"/>
-          </a:fillRef>
-          <a:effectRef idx="0">
-            <a:schemeClr val="accent1"/>
-          </a:effectRef>
-          <a:fontRef idx="minor">
-            <a:schemeClr val="lt1"/>
-          </a:fontRef>
-        </p:style>
-        <p:txBody>
-          <a:bodyPr rtlCol="0" anchor="ctr"/>
-          <a:lstStyle/>
-          <a:p>
-            <a:pPr algn="ctr"/>
-            <a:endParaRPr kumimoji="1" lang="ja-JP" altLang="en-US"/>
-          </a:p>
-        </p:txBody>
-      </p:sp>
-      <p:sp>
-        <p:nvSpPr>
-          <p:cNvPr id="14" name="直方体 13">
-            <a:extLst>
-              <a:ext uri="{FF2B5EF4-FFF2-40B4-BE49-F238E27FC236}">
-                <a16:creationId xmlns:a16="http://schemas.microsoft.com/office/drawing/2014/main" id="{7CE3C910-E113-481B-A6A8-22A1943DB9AD}"/>
-              </a:ext>
-            </a:extLst>
-          </p:cNvPr>
-          <p:cNvSpPr/>
-          <p:nvPr/>
-        </p:nvSpPr>
-        <p:spPr>
-          <a:xfrm>
-            <a:off x="8294468" y="4224627"/>
-            <a:ext cx="949472" cy="948560"/>
-          </a:xfrm>
-          <a:prstGeom prst="cube">
-            <a:avLst/>
-          </a:prstGeom>
-        </p:spPr>
-        <p:style>
-          <a:lnRef idx="2">
-            <a:schemeClr val="accent1">
-              <a:shade val="50000"/>
-            </a:schemeClr>
-          </a:lnRef>
-          <a:fillRef idx="1">
-            <a:schemeClr val="accent1"/>
-          </a:fillRef>
-          <a:effectRef idx="0">
-            <a:schemeClr val="accent1"/>
-          </a:effectRef>
-          <a:fontRef idx="minor">
-            <a:schemeClr val="lt1"/>
-          </a:fontRef>
-        </p:style>
-        <p:txBody>
-          <a:bodyPr rtlCol="0" anchor="ctr"/>
-          <a:lstStyle/>
-          <a:p>
-            <a:pPr algn="ctr"/>
-            <a:endParaRPr kumimoji="1" lang="ja-JP" altLang="en-US"/>
-          </a:p>
-        </p:txBody>
-      </p:sp>
-      <p:sp>
-        <p:nvSpPr>
-          <p:cNvPr id="15" name="直方体 14">
-            <a:extLst>
-              <a:ext uri="{FF2B5EF4-FFF2-40B4-BE49-F238E27FC236}">
-                <a16:creationId xmlns:a16="http://schemas.microsoft.com/office/drawing/2014/main" id="{DF1D682F-EB23-49E0-BDC7-C50877E2258C}"/>
-              </a:ext>
-            </a:extLst>
-          </p:cNvPr>
-          <p:cNvSpPr/>
-          <p:nvPr/>
-        </p:nvSpPr>
-        <p:spPr>
-          <a:xfrm rot="3202373">
-            <a:off x="9195059" y="3559011"/>
-            <a:ext cx="988722" cy="890488"/>
-          </a:xfrm>
-          <a:prstGeom prst="cube">
-            <a:avLst/>
-          </a:prstGeom>
-        </p:spPr>
-        <p:style>
-          <a:lnRef idx="2">
-            <a:schemeClr val="accent1">
-              <a:shade val="50000"/>
-            </a:schemeClr>
-          </a:lnRef>
-          <a:fillRef idx="1">
-            <a:schemeClr val="accent1"/>
-          </a:fillRef>
-          <a:effectRef idx="0">
-            <a:schemeClr val="accent1"/>
-          </a:effectRef>
-          <a:fontRef idx="minor">
-            <a:schemeClr val="lt1"/>
-          </a:fontRef>
-        </p:style>
-        <p:txBody>
-          <a:bodyPr rtlCol="0" anchor="ctr"/>
-          <a:lstStyle/>
-          <a:p>
-            <a:pPr algn="ctr"/>
-            <a:endParaRPr kumimoji="1" lang="ja-JP" altLang="en-US"/>
-          </a:p>
-        </p:txBody>
-      </p:sp>
-      <p:sp>
-        <p:nvSpPr>
-          <p:cNvPr id="16" name="直方体 15">
-            <a:extLst>
-              <a:ext uri="{FF2B5EF4-FFF2-40B4-BE49-F238E27FC236}">
-                <a16:creationId xmlns:a16="http://schemas.microsoft.com/office/drawing/2014/main" id="{D34ACEFC-BC54-49DC-AB60-5245140C145E}"/>
-              </a:ext>
-            </a:extLst>
-          </p:cNvPr>
-          <p:cNvSpPr/>
-          <p:nvPr/>
-        </p:nvSpPr>
-        <p:spPr>
-          <a:xfrm rot="1748454">
-            <a:off x="7676760" y="3835229"/>
-            <a:ext cx="602823" cy="554624"/>
-          </a:xfrm>
-          <a:prstGeom prst="cube">
-            <a:avLst/>
-          </a:prstGeom>
-        </p:spPr>
-        <p:style>
-          <a:lnRef idx="2">
-            <a:schemeClr val="accent1">
-              <a:shade val="50000"/>
-            </a:schemeClr>
-          </a:lnRef>
-          <a:fillRef idx="1">
-            <a:schemeClr val="accent1"/>
-          </a:fillRef>
-          <a:effectRef idx="0">
-            <a:schemeClr val="accent1"/>
-          </a:effectRef>
-          <a:fontRef idx="minor">
-            <a:schemeClr val="lt1"/>
-          </a:fontRef>
-        </p:style>
-        <p:txBody>
-          <a:bodyPr rtlCol="0" anchor="ctr"/>
-          <a:lstStyle/>
-          <a:p>
-            <a:pPr algn="ctr"/>
-            <a:endParaRPr kumimoji="1" lang="ja-JP" altLang="en-US"/>
-          </a:p>
-        </p:txBody>
-      </p:sp>
-      <p:sp>
-        <p:nvSpPr>
-          <p:cNvPr id="17" name="矢印: 右 16">
-            <a:extLst>
-              <a:ext uri="{FF2B5EF4-FFF2-40B4-BE49-F238E27FC236}">
-                <a16:creationId xmlns:a16="http://schemas.microsoft.com/office/drawing/2014/main" id="{CC21B4A6-2206-40ED-BEEC-42BE389524D4}"/>
-              </a:ext>
-            </a:extLst>
-          </p:cNvPr>
-          <p:cNvSpPr/>
-          <p:nvPr/>
-        </p:nvSpPr>
-        <p:spPr>
-          <a:xfrm>
-            <a:off x="4226372" y="4809308"/>
-            <a:ext cx="1661339" cy="594306"/>
-          </a:xfrm>
-          <a:prstGeom prst="rightArrow">
-            <a:avLst/>
-          </a:prstGeom>
-          <a:solidFill>
-            <a:srgbClr val="FF0000"/>
-          </a:solidFill>
-          <a:ln>
-            <a:solidFill>
-              <a:schemeClr val="tx1"/>
-            </a:solidFill>
-          </a:ln>
-        </p:spPr>
-        <p:style>
-          <a:lnRef idx="2">
-            <a:schemeClr val="accent1">
-              <a:shade val="50000"/>
-            </a:schemeClr>
-          </a:lnRef>
-          <a:fillRef idx="1">
-            <a:schemeClr val="accent1"/>
-          </a:fillRef>
-          <a:effectRef idx="0">
-            <a:schemeClr val="accent1"/>
-          </a:effectRef>
-          <a:fontRef idx="minor">
-            <a:schemeClr val="lt1"/>
-          </a:fontRef>
-        </p:style>
-        <p:txBody>
-          <a:bodyPr rtlCol="0" anchor="ctr"/>
-          <a:lstStyle/>
-          <a:p>
-            <a:pPr algn="ctr"/>
-            <a:endParaRPr kumimoji="1" lang="ja-JP" altLang="en-US"/>
-          </a:p>
-        </p:txBody>
-      </p:sp>
-      <p:sp>
-        <p:nvSpPr>
-          <p:cNvPr id="18" name="テキスト ボックス 17">
-            <a:extLst>
-              <a:ext uri="{FF2B5EF4-FFF2-40B4-BE49-F238E27FC236}">
-                <a16:creationId xmlns:a16="http://schemas.microsoft.com/office/drawing/2014/main" id="{5D482F5D-F389-4AD3-AEDA-7335A26C1F65}"/>
+        </p:spPr>
+      </p:pic>
+      <p:sp>
+        <p:nvSpPr>
+          <p:cNvPr id="7" name="テキスト ボックス 6">
+            <a:extLst>
+              <a:ext uri="{FF2B5EF4-FFF2-40B4-BE49-F238E27FC236}">
+                <a16:creationId xmlns:a16="http://schemas.microsoft.com/office/drawing/2014/main" id="{ECBDAE3D-54E5-46B0-8115-23259695C4C3}"/>
               </a:ext>
             </a:extLst>
           </p:cNvPr>
@@ -4564,8 +3953,8 @@
         </p:nvSpPr>
         <p:spPr>
           <a:xfrm>
-            <a:off x="6353740" y="5721586"/>
-            <a:ext cx="4185761" cy="461665"/>
+            <a:off x="567542" y="4343400"/>
+            <a:ext cx="7879080" cy="830997"/>
           </a:xfrm>
           <a:prstGeom prst="rect">
             <a:avLst/>
@@ -4579,25 +3968,24 @@
           <a:lstStyle/>
           <a:p>
             <a:r>
-              <a:rPr kumimoji="1" lang="ja-JP" altLang="en-US" sz="2400" b="1" dirty="0">
-                <a:solidFill>
-                  <a:srgbClr val="FF0000"/>
-                </a:solidFill>
-              </a:rPr>
-              <a:t>写った写真を画面に描画する</a:t>
-            </a:r>
-            <a:endParaRPr lang="en-US" altLang="ja-JP" sz="2400" b="1" dirty="0">
-              <a:solidFill>
-                <a:srgbClr val="FF0000"/>
-              </a:solidFill>
-            </a:endParaRPr>
+              <a:rPr lang="ja-JP" altLang="en-US" sz="2400" dirty="0"/>
+              <a:t>これですべてのブロックの画像は１つずつロードされ、</a:t>
+            </a:r>
+            <a:endParaRPr lang="en-US" altLang="ja-JP" sz="2400" dirty="0"/>
+          </a:p>
+          <a:p>
+            <a:r>
+              <a:rPr lang="ja-JP" altLang="en-US" sz="2400" dirty="0"/>
+              <a:t>別々の画像ハンドルが設定されます。</a:t>
+            </a:r>
+            <a:endParaRPr lang="en-US" altLang="ja-JP" sz="2400" dirty="0"/>
           </a:p>
         </p:txBody>
       </p:sp>
     </p:spTree>
     <p:extLst>
       <p:ext uri="{BB962C8B-B14F-4D97-AF65-F5344CB8AC3E}">
-        <p14:creationId xmlns:p14="http://schemas.microsoft.com/office/powerpoint/2010/main" val="1630810342"/>
+        <p14:creationId xmlns:p14="http://schemas.microsoft.com/office/powerpoint/2010/main" val="109084377"/>
       </p:ext>
     </p:extLst>
   </p:cSld>
@@ -4639,7 +4027,7 @@
         <p:spPr>
           <a:xfrm>
             <a:off x="567542" y="491954"/>
-            <a:ext cx="6046848" cy="584775"/>
+            <a:ext cx="4698722" cy="584775"/>
           </a:xfrm>
           <a:prstGeom prst="rect">
             <a:avLst/>
@@ -4654,7 +4042,7 @@
           <a:p>
             <a:r>
               <a:rPr kumimoji="1" lang="ja-JP" altLang="en-US" sz="3200" b="1" u="sng" dirty="0"/>
-              <a:t>オブジェクトの複数配置 ロード</a:t>
+              <a:t>オブジェクトの複数配置</a:t>
             </a:r>
             <a:endParaRPr kumimoji="1" lang="en-US" altLang="ja-JP" sz="3200" b="1" u="sng" dirty="0"/>
           </a:p>
@@ -4675,7 +4063,7 @@
         <p:spPr>
           <a:xfrm>
             <a:off x="567542" y="1216429"/>
-            <a:ext cx="11264622" cy="830997"/>
+            <a:ext cx="8805616" cy="461665"/>
           </a:xfrm>
           <a:prstGeom prst="rect">
             <a:avLst/>
@@ -4689,237 +4077,61 @@
           <a:lstStyle/>
           <a:p>
             <a:r>
-              <a:rPr kumimoji="1" lang="ja-JP" altLang="en-US" sz="2400" dirty="0"/>
-              <a:t>配置されたモデルは撮影されるまで、</a:t>
-            </a:r>
-            <a:r>
-              <a:rPr kumimoji="1" lang="ja-JP" altLang="en-US" sz="2400" b="1" dirty="0">
+              <a:rPr lang="en-US" altLang="ja-JP" sz="2400" b="1" dirty="0" err="1">
                 <a:solidFill>
-                  <a:srgbClr val="FF0000"/>
+                  <a:srgbClr val="00B050"/>
                 </a:solidFill>
               </a:rPr>
-              <a:t>どれがどれかを識別する必要があります。</a:t>
-            </a:r>
-            <a:endParaRPr kumimoji="1" lang="en-US" altLang="ja-JP" sz="2400" b="1" dirty="0">
-              <a:solidFill>
-                <a:srgbClr val="FF0000"/>
-              </a:solidFill>
-            </a:endParaRPr>
-          </a:p>
-          <a:p>
+              <a:t>BlockManager</a:t>
+            </a:r>
             <a:r>
               <a:rPr lang="ja-JP" altLang="en-US" sz="2400" dirty="0"/>
-              <a:t>つまり、それぞれのモデルは</a:t>
-            </a:r>
-            <a:r>
-              <a:rPr lang="ja-JP" altLang="en-US" sz="2400" b="1" dirty="0">
-                <a:solidFill>
-                  <a:srgbClr val="FF0000"/>
-                </a:solidFill>
-              </a:rPr>
-              <a:t>別々の画像ハンドル</a:t>
-            </a:r>
-            <a:r>
-              <a:rPr lang="ja-JP" altLang="en-US" sz="2400" dirty="0"/>
-              <a:t>となります。</a:t>
+              <a:t>の残りの関数も完成させましょう。（その１）</a:t>
             </a:r>
             <a:endParaRPr lang="en-US" altLang="ja-JP" sz="2400" dirty="0"/>
           </a:p>
         </p:txBody>
       </p:sp>
-      <p:sp>
-        <p:nvSpPr>
-          <p:cNvPr id="19" name="直方体 18">
-            <a:extLst>
-              <a:ext uri="{FF2B5EF4-FFF2-40B4-BE49-F238E27FC236}">
-                <a16:creationId xmlns:a16="http://schemas.microsoft.com/office/drawing/2014/main" id="{32C7B65C-DCF5-4016-A5D2-8B11616A5A06}"/>
-              </a:ext>
-            </a:extLst>
-          </p:cNvPr>
-          <p:cNvSpPr/>
-          <p:nvPr/>
-        </p:nvSpPr>
-        <p:spPr>
-          <a:xfrm rot="3202373">
-            <a:off x="3096604" y="3132025"/>
-            <a:ext cx="988722" cy="890488"/>
-          </a:xfrm>
-          <a:prstGeom prst="cube">
-            <a:avLst/>
-          </a:prstGeom>
-        </p:spPr>
-        <p:style>
-          <a:lnRef idx="2">
-            <a:schemeClr val="accent1">
-              <a:shade val="50000"/>
-            </a:schemeClr>
-          </a:lnRef>
-          <a:fillRef idx="1">
-            <a:schemeClr val="accent1"/>
-          </a:fillRef>
-          <a:effectRef idx="0">
-            <a:schemeClr val="accent1"/>
-          </a:effectRef>
-          <a:fontRef idx="minor">
-            <a:schemeClr val="lt1"/>
-          </a:fontRef>
-        </p:style>
-        <p:txBody>
-          <a:bodyPr rtlCol="0" anchor="ctr"/>
-          <a:lstStyle/>
-          <a:p>
-            <a:pPr algn="ctr"/>
-            <a:endParaRPr kumimoji="1" lang="ja-JP" altLang="en-US"/>
-          </a:p>
-        </p:txBody>
-      </p:sp>
-      <p:sp>
-        <p:nvSpPr>
-          <p:cNvPr id="20" name="直方体 19">
-            <a:extLst>
-              <a:ext uri="{FF2B5EF4-FFF2-40B4-BE49-F238E27FC236}">
-                <a16:creationId xmlns:a16="http://schemas.microsoft.com/office/drawing/2014/main" id="{013499AE-310E-4178-93B7-ECF08631C02B}"/>
-              </a:ext>
-            </a:extLst>
-          </p:cNvPr>
-          <p:cNvSpPr/>
-          <p:nvPr/>
-        </p:nvSpPr>
-        <p:spPr>
-          <a:xfrm>
-            <a:off x="2527300" y="3975100"/>
-            <a:ext cx="1841500" cy="1828800"/>
-          </a:xfrm>
-          <a:prstGeom prst="cube">
-            <a:avLst/>
-          </a:prstGeom>
-        </p:spPr>
-        <p:style>
-          <a:lnRef idx="2">
-            <a:schemeClr val="accent1">
-              <a:shade val="50000"/>
-            </a:schemeClr>
-          </a:lnRef>
-          <a:fillRef idx="1">
-            <a:schemeClr val="accent1"/>
-          </a:fillRef>
-          <a:effectRef idx="0">
-            <a:schemeClr val="accent1"/>
-          </a:effectRef>
-          <a:fontRef idx="minor">
-            <a:schemeClr val="lt1"/>
-          </a:fontRef>
-        </p:style>
-        <p:txBody>
-          <a:bodyPr rtlCol="0" anchor="ctr"/>
-          <a:lstStyle/>
-          <a:p>
-            <a:pPr algn="ctr"/>
-            <a:endParaRPr kumimoji="1" lang="ja-JP" altLang="en-US"/>
-          </a:p>
-        </p:txBody>
-      </p:sp>
-      <p:sp>
-        <p:nvSpPr>
-          <p:cNvPr id="21" name="直方体 20">
-            <a:extLst>
-              <a:ext uri="{FF2B5EF4-FFF2-40B4-BE49-F238E27FC236}">
-                <a16:creationId xmlns:a16="http://schemas.microsoft.com/office/drawing/2014/main" id="{C149F038-E165-48D3-9CAC-4F10D7B29C5B}"/>
-              </a:ext>
-            </a:extLst>
-          </p:cNvPr>
-          <p:cNvSpPr/>
-          <p:nvPr/>
-        </p:nvSpPr>
-        <p:spPr>
-          <a:xfrm rot="1748454">
-            <a:off x="1479287" y="3024162"/>
-            <a:ext cx="917453" cy="774700"/>
-          </a:xfrm>
-          <a:prstGeom prst="cube">
-            <a:avLst/>
-          </a:prstGeom>
-        </p:spPr>
-        <p:style>
-          <a:lnRef idx="2">
-            <a:schemeClr val="accent1">
-              <a:shade val="50000"/>
-            </a:schemeClr>
-          </a:lnRef>
-          <a:fillRef idx="1">
-            <a:schemeClr val="accent1"/>
-          </a:fillRef>
-          <a:effectRef idx="0">
-            <a:schemeClr val="accent1"/>
-          </a:effectRef>
-          <a:fontRef idx="minor">
-            <a:schemeClr val="lt1"/>
-          </a:fontRef>
-        </p:style>
-        <p:txBody>
-          <a:bodyPr rtlCol="0" anchor="ctr"/>
-          <a:lstStyle/>
-          <a:p>
-            <a:pPr algn="ctr"/>
-            <a:endParaRPr kumimoji="1" lang="ja-JP" altLang="en-US"/>
-          </a:p>
-        </p:txBody>
-      </p:sp>
-      <p:sp>
-        <p:nvSpPr>
-          <p:cNvPr id="22" name="テキスト ボックス 21">
-            <a:extLst>
-              <a:ext uri="{FF2B5EF4-FFF2-40B4-BE49-F238E27FC236}">
-                <a16:creationId xmlns:a16="http://schemas.microsoft.com/office/drawing/2014/main" id="{99A971CF-995A-4159-BD96-1187C16C341B}"/>
-              </a:ext>
-            </a:extLst>
-          </p:cNvPr>
-          <p:cNvSpPr txBox="1"/>
-          <p:nvPr/>
-        </p:nvSpPr>
-        <p:spPr>
-          <a:xfrm>
-            <a:off x="845821" y="5015850"/>
-            <a:ext cx="4185761" cy="461665"/>
+      <p:pic>
+        <p:nvPicPr>
+          <p:cNvPr id="3" name="図 2">
+            <a:extLst>
+              <a:ext uri="{FF2B5EF4-FFF2-40B4-BE49-F238E27FC236}">
+                <a16:creationId xmlns:a16="http://schemas.microsoft.com/office/drawing/2014/main" id="{8EFE4406-D534-4BF2-BA78-FD82EC9D1571}"/>
+              </a:ext>
+            </a:extLst>
+          </p:cNvPr>
+          <p:cNvPicPr>
+            <a:picLocks noChangeAspect="1"/>
+          </p:cNvPicPr>
+          <p:nvPr/>
+        </p:nvPicPr>
+        <p:blipFill>
+          <a:blip r:embed="rId2">
+            <a:extLst>
+              <a:ext uri="{28A0092B-C50C-407E-A947-70E740481C1C}">
+                <a14:useLocalDpi xmlns:a14="http://schemas.microsoft.com/office/drawing/2010/main" val="0"/>
+              </a:ext>
+            </a:extLst>
+          </a:blip>
+          <a:stretch>
+            <a:fillRect/>
+          </a:stretch>
+        </p:blipFill>
+        <p:spPr>
+          <a:xfrm>
+            <a:off x="567542" y="1817794"/>
+            <a:ext cx="5911511" cy="4278206"/>
           </a:xfrm>
           <a:prstGeom prst="rect">
             <a:avLst/>
           </a:prstGeom>
-          <a:solidFill>
-            <a:schemeClr val="bg1"/>
-          </a:solidFill>
-          <a:ln>
-            <a:solidFill>
-              <a:schemeClr val="tx1"/>
-            </a:solidFill>
-          </a:ln>
-        </p:spPr>
-        <p:txBody>
-          <a:bodyPr wrap="none" rtlCol="0">
-            <a:spAutoFit/>
-          </a:bodyPr>
-          <a:lstStyle/>
-          <a:p>
-            <a:r>
-              <a:rPr lang="ja-JP" altLang="en-US" sz="2400" b="1" dirty="0">
-                <a:solidFill>
-                  <a:srgbClr val="FF0000"/>
-                </a:solidFill>
-              </a:rPr>
-              <a:t>同じ画像でもハンドルは別々</a:t>
-            </a:r>
-            <a:endParaRPr lang="en-US" altLang="ja-JP" sz="2400" b="1" dirty="0">
-              <a:solidFill>
-                <a:srgbClr val="FF0000"/>
-              </a:solidFill>
-            </a:endParaRPr>
-          </a:p>
-        </p:txBody>
-      </p:sp>
+        </p:spPr>
+      </p:pic>
     </p:spTree>
     <p:extLst>
       <p:ext uri="{BB962C8B-B14F-4D97-AF65-F5344CB8AC3E}">
-        <p14:creationId xmlns:p14="http://schemas.microsoft.com/office/powerpoint/2010/main" val="1621534128"/>
+        <p14:creationId xmlns:p14="http://schemas.microsoft.com/office/powerpoint/2010/main" val="4104289261"/>
       </p:ext>
     </p:extLst>
   </p:cSld>
@@ -4961,7 +4173,7 @@
         <p:spPr>
           <a:xfrm>
             <a:off x="567542" y="491954"/>
-            <a:ext cx="6046848" cy="584775"/>
+            <a:ext cx="4698722" cy="584775"/>
           </a:xfrm>
           <a:prstGeom prst="rect">
             <a:avLst/>
@@ -4976,7 +4188,7 @@
           <a:p>
             <a:r>
               <a:rPr kumimoji="1" lang="ja-JP" altLang="en-US" sz="3200" b="1" u="sng" dirty="0"/>
-              <a:t>オブジェクトの複数配置 ロード</a:t>
+              <a:t>オブジェクトの複数配置</a:t>
             </a:r>
             <a:endParaRPr kumimoji="1" lang="en-US" altLang="ja-JP" sz="3200" b="1" u="sng" dirty="0"/>
           </a:p>
@@ -4997,7 +4209,7 @@
         <p:spPr>
           <a:xfrm>
             <a:off x="567542" y="1216429"/>
-            <a:ext cx="7103227" cy="461665"/>
+            <a:ext cx="8805616" cy="461665"/>
           </a:xfrm>
           <a:prstGeom prst="rect">
             <a:avLst/>
@@ -5011,12 +4223,16 @@
           <a:lstStyle/>
           <a:p>
             <a:r>
-              <a:rPr lang="en-US" altLang="ja-JP" sz="2400" dirty="0"/>
-              <a:t>Block.cpp</a:t>
+              <a:rPr lang="en-US" altLang="ja-JP" sz="2400" b="1" dirty="0" err="1">
+                <a:solidFill>
+                  <a:srgbClr val="00B050"/>
+                </a:solidFill>
+              </a:rPr>
+              <a:t>BlockManager</a:t>
             </a:r>
             <a:r>
               <a:rPr lang="ja-JP" altLang="en-US" sz="2400" dirty="0"/>
-              <a:t>のロード関数にロード処理を書きます。</a:t>
+              <a:t>の残りの関数も完成させましょう。（その２）</a:t>
             </a:r>
             <a:endParaRPr lang="en-US" altLang="ja-JP" sz="2400" dirty="0"/>
           </a:p>
@@ -5024,10 +4240,10 @@
       </p:sp>
       <p:pic>
         <p:nvPicPr>
-          <p:cNvPr id="3" name="図 2">
-            <a:extLst>
-              <a:ext uri="{FF2B5EF4-FFF2-40B4-BE49-F238E27FC236}">
-                <a16:creationId xmlns:a16="http://schemas.microsoft.com/office/drawing/2014/main" id="{CB4322E2-4619-4A5C-A233-E9CEFBC1A4DC}"/>
+          <p:cNvPr id="5" name="図 4">
+            <a:extLst>
+              <a:ext uri="{FF2B5EF4-FFF2-40B4-BE49-F238E27FC236}">
+                <a16:creationId xmlns:a16="http://schemas.microsoft.com/office/drawing/2014/main" id="{427564FA-4A65-4147-9DB0-35750CD4897F}"/>
               </a:ext>
             </a:extLst>
           </p:cNvPr>
@@ -5050,8 +4266,8 @@
         </p:blipFill>
         <p:spPr>
           <a:xfrm>
-            <a:off x="567542" y="1817794"/>
-            <a:ext cx="9937254" cy="1789006"/>
+            <a:off x="567542" y="1817795"/>
+            <a:ext cx="4537858" cy="4672646"/>
           </a:xfrm>
           <a:prstGeom prst="rect">
             <a:avLst/>
@@ -5061,7 +4277,7 @@
     </p:spTree>
     <p:extLst>
       <p:ext uri="{BB962C8B-B14F-4D97-AF65-F5344CB8AC3E}">
-        <p14:creationId xmlns:p14="http://schemas.microsoft.com/office/powerpoint/2010/main" val="1368374807"/>
+        <p14:creationId xmlns:p14="http://schemas.microsoft.com/office/powerpoint/2010/main" val="1234483258"/>
       </p:ext>
     </p:extLst>
   </p:cSld>
@@ -5103,7 +4319,7 @@
         <p:spPr>
           <a:xfrm>
             <a:off x="567542" y="491954"/>
-            <a:ext cx="6046848" cy="584775"/>
+            <a:ext cx="4698722" cy="584775"/>
           </a:xfrm>
           <a:prstGeom prst="rect">
             <a:avLst/>
@@ -5118,7 +4334,7 @@
           <a:p>
             <a:r>
               <a:rPr kumimoji="1" lang="ja-JP" altLang="en-US" sz="3200" b="1" u="sng" dirty="0"/>
-              <a:t>オブジェクトの複数配置 ロード</a:t>
+              <a:t>オブジェクトの複数配置</a:t>
             </a:r>
             <a:endParaRPr kumimoji="1" lang="en-US" altLang="ja-JP" sz="3200" b="1" u="sng" dirty="0"/>
           </a:p>
@@ -5139,7 +4355,7 @@
         <p:spPr>
           <a:xfrm>
             <a:off x="567542" y="1216429"/>
-            <a:ext cx="9589485" cy="461665"/>
+            <a:ext cx="8805616" cy="461665"/>
           </a:xfrm>
           <a:prstGeom prst="rect">
             <a:avLst/>
@@ -5153,12 +4369,16 @@
           <a:lstStyle/>
           <a:p>
             <a:r>
-              <a:rPr lang="en-US" altLang="ja-JP" sz="2400" dirty="0"/>
-              <a:t>BlockManager.cpp</a:t>
+              <a:rPr lang="en-US" altLang="ja-JP" sz="2400" b="1" dirty="0" err="1">
+                <a:solidFill>
+                  <a:srgbClr val="00B050"/>
+                </a:solidFill>
+              </a:rPr>
+              <a:t>BlockManager</a:t>
             </a:r>
             <a:r>
               <a:rPr lang="ja-JP" altLang="en-US" sz="2400" dirty="0"/>
-              <a:t>側から各ブロックのロード処理を呼びましょう。</a:t>
+              <a:t>の残りの関数も完成させましょう。（その３）</a:t>
             </a:r>
             <a:endParaRPr lang="en-US" altLang="ja-JP" sz="2400" dirty="0"/>
           </a:p>
@@ -5166,10 +4386,10 @@
       </p:sp>
       <p:pic>
         <p:nvPicPr>
-          <p:cNvPr id="5" name="図 4">
-            <a:extLst>
-              <a:ext uri="{FF2B5EF4-FFF2-40B4-BE49-F238E27FC236}">
-                <a16:creationId xmlns:a16="http://schemas.microsoft.com/office/drawing/2014/main" id="{09F2C7FF-BCA4-4801-A350-5BDE377929C6}"/>
+          <p:cNvPr id="8" name="図 7">
+            <a:extLst>
+              <a:ext uri="{FF2B5EF4-FFF2-40B4-BE49-F238E27FC236}">
+                <a16:creationId xmlns:a16="http://schemas.microsoft.com/office/drawing/2014/main" id="{F51B1831-C54C-43C9-ACA1-3D784AC579CE}"/>
               </a:ext>
             </a:extLst>
           </p:cNvPr>
@@ -5193,60 +4413,17 @@
         <p:spPr>
           <a:xfrm>
             <a:off x="567542" y="1817794"/>
-            <a:ext cx="7483742" cy="2385906"/>
+            <a:ext cx="8065478" cy="2639906"/>
           </a:xfrm>
           <a:prstGeom prst="rect">
             <a:avLst/>
           </a:prstGeom>
         </p:spPr>
       </p:pic>
-      <p:sp>
-        <p:nvSpPr>
-          <p:cNvPr id="7" name="テキスト ボックス 6">
-            <a:extLst>
-              <a:ext uri="{FF2B5EF4-FFF2-40B4-BE49-F238E27FC236}">
-                <a16:creationId xmlns:a16="http://schemas.microsoft.com/office/drawing/2014/main" id="{ECBDAE3D-54E5-46B0-8115-23259695C4C3}"/>
-              </a:ext>
-            </a:extLst>
-          </p:cNvPr>
-          <p:cNvSpPr txBox="1"/>
-          <p:nvPr/>
-        </p:nvSpPr>
-        <p:spPr>
-          <a:xfrm>
-            <a:off x="567542" y="4343400"/>
-            <a:ext cx="7879080" cy="830997"/>
-          </a:xfrm>
-          <a:prstGeom prst="rect">
-            <a:avLst/>
-          </a:prstGeom>
-          <a:noFill/>
-        </p:spPr>
-        <p:txBody>
-          <a:bodyPr wrap="none" rtlCol="0">
-            <a:spAutoFit/>
-          </a:bodyPr>
-          <a:lstStyle/>
-          <a:p>
-            <a:r>
-              <a:rPr lang="ja-JP" altLang="en-US" sz="2400" dirty="0"/>
-              <a:t>これですべてのブロックの画像は１つずつロードされ、</a:t>
-            </a:r>
-            <a:endParaRPr lang="en-US" altLang="ja-JP" sz="2400" dirty="0"/>
-          </a:p>
-          <a:p>
-            <a:r>
-              <a:rPr lang="ja-JP" altLang="en-US" sz="2400" dirty="0"/>
-              <a:t>別々の画像ハンドルが設定されます。</a:t>
-            </a:r>
-            <a:endParaRPr lang="en-US" altLang="ja-JP" sz="2400" dirty="0"/>
-          </a:p>
-        </p:txBody>
-      </p:sp>
     </p:spTree>
     <p:extLst>
       <p:ext uri="{BB962C8B-B14F-4D97-AF65-F5344CB8AC3E}">
-        <p14:creationId xmlns:p14="http://schemas.microsoft.com/office/powerpoint/2010/main" val="109084377"/>
+        <p14:creationId xmlns:p14="http://schemas.microsoft.com/office/powerpoint/2010/main" val="3503140131"/>
       </p:ext>
     </p:extLst>
   </p:cSld>
@@ -5288,7 +4465,7 @@
         <p:spPr>
           <a:xfrm>
             <a:off x="567542" y="491954"/>
-            <a:ext cx="4698722" cy="584775"/>
+            <a:ext cx="4815742" cy="584775"/>
           </a:xfrm>
           <a:prstGeom prst="rect">
             <a:avLst/>
@@ -5324,7 +4501,7 @@
         <p:spPr>
           <a:xfrm>
             <a:off x="567542" y="1216429"/>
-            <a:ext cx="8686993" cy="461665"/>
+            <a:ext cx="10956846" cy="830997"/>
           </a:xfrm>
           <a:prstGeom prst="rect">
             <a:avLst/>
@@ -5338,12 +4515,23 @@
           <a:lstStyle/>
           <a:p>
             <a:r>
-              <a:rPr lang="en-US" altLang="ja-JP" sz="2400" dirty="0" err="1"/>
-              <a:t>BlockManager</a:t>
+              <a:rPr lang="en-US" altLang="ja-JP" sz="2400" b="1" dirty="0">
+                <a:solidFill>
+                  <a:srgbClr val="FF0000"/>
+                </a:solidFill>
+              </a:rPr>
+              <a:t>Main.cpp</a:t>
             </a:r>
             <a:r>
               <a:rPr lang="ja-JP" altLang="en-US" sz="2400" dirty="0"/>
-              <a:t>の残りの関数も完成させましょう。（その１）</a:t>
+              <a:t>の呼び出し側はこれまで通りです。（書くのは省略）</a:t>
+            </a:r>
+            <a:endParaRPr lang="en-US" altLang="ja-JP" sz="2400" dirty="0"/>
+          </a:p>
+          <a:p>
+            <a:r>
+              <a:rPr lang="ja-JP" altLang="en-US" sz="2400" dirty="0"/>
+              <a:t>呼び出し側を考慮しなくて良いのがマネージャークラスの利点でもあります。</a:t>
             </a:r>
             <a:endParaRPr lang="en-US" altLang="ja-JP" sz="2400" dirty="0"/>
           </a:p>
@@ -5351,10 +4539,10 @@
       </p:sp>
       <p:pic>
         <p:nvPicPr>
-          <p:cNvPr id="3" name="図 2">
-            <a:extLst>
-              <a:ext uri="{FF2B5EF4-FFF2-40B4-BE49-F238E27FC236}">
-                <a16:creationId xmlns:a16="http://schemas.microsoft.com/office/drawing/2014/main" id="{8EFE4406-D534-4BF2-BA78-FD82EC9D1571}"/>
+          <p:cNvPr id="5" name="図 4">
+            <a:extLst>
+              <a:ext uri="{FF2B5EF4-FFF2-40B4-BE49-F238E27FC236}">
+                <a16:creationId xmlns:a16="http://schemas.microsoft.com/office/drawing/2014/main" id="{7166C132-D169-4DE1-A313-A86EB7EE544E}"/>
               </a:ext>
             </a:extLst>
           </p:cNvPr>
@@ -5377,8 +4565,8 @@
         </p:blipFill>
         <p:spPr>
           <a:xfrm>
-            <a:off x="567542" y="1817794"/>
-            <a:ext cx="5911511" cy="4278206"/>
+            <a:off x="567542" y="2415731"/>
+            <a:ext cx="10584618" cy="2394843"/>
           </a:xfrm>
           <a:prstGeom prst="rect">
             <a:avLst/>
@@ -5388,7 +4576,7 @@
     </p:spTree>
     <p:extLst>
       <p:ext uri="{BB962C8B-B14F-4D97-AF65-F5344CB8AC3E}">
-        <p14:creationId xmlns:p14="http://schemas.microsoft.com/office/powerpoint/2010/main" val="4104289261"/>
+        <p14:creationId xmlns:p14="http://schemas.microsoft.com/office/powerpoint/2010/main" val="3451196840"/>
       </p:ext>
     </p:extLst>
   </p:cSld>
@@ -5466,7 +4654,7 @@
         <p:spPr>
           <a:xfrm>
             <a:off x="567542" y="1216429"/>
-            <a:ext cx="8686993" cy="461665"/>
+            <a:ext cx="6163867" cy="461665"/>
           </a:xfrm>
           <a:prstGeom prst="rect">
             <a:avLst/>
@@ -5480,12 +4668,16 @@
           <a:lstStyle/>
           <a:p>
             <a:r>
-              <a:rPr lang="en-US" altLang="ja-JP" sz="2400" dirty="0" err="1"/>
-              <a:t>BlockManager</a:t>
-            </a:r>
-            <a:r>
               <a:rPr lang="ja-JP" altLang="en-US" sz="2400" dirty="0"/>
-              <a:t>の残りの関数も完成させましょう。（その２）</a:t>
+              <a:t>ブロックが４つ表示されていれば</a:t>
+            </a:r>
+            <a:r>
+              <a:rPr lang="en-US" altLang="ja-JP" sz="2400" dirty="0"/>
+              <a:t>OK</a:t>
+            </a:r>
+            <a:r>
+              <a:rPr lang="ja-JP" altLang="en-US" sz="2400" dirty="0"/>
+              <a:t>です！</a:t>
             </a:r>
             <a:endParaRPr lang="en-US" altLang="ja-JP" sz="2400" dirty="0"/>
           </a:p>
@@ -5493,10 +4685,10 @@
       </p:sp>
       <p:pic>
         <p:nvPicPr>
-          <p:cNvPr id="5" name="図 4">
-            <a:extLst>
-              <a:ext uri="{FF2B5EF4-FFF2-40B4-BE49-F238E27FC236}">
-                <a16:creationId xmlns:a16="http://schemas.microsoft.com/office/drawing/2014/main" id="{427564FA-4A65-4147-9DB0-35750CD4897F}"/>
+          <p:cNvPr id="7" name="図 6">
+            <a:extLst>
+              <a:ext uri="{FF2B5EF4-FFF2-40B4-BE49-F238E27FC236}">
+                <a16:creationId xmlns:a16="http://schemas.microsoft.com/office/drawing/2014/main" id="{FE9301F6-67D8-4133-928C-08D904C38908}"/>
               </a:ext>
             </a:extLst>
           </p:cNvPr>
@@ -5519,8 +4711,8 @@
         </p:blipFill>
         <p:spPr>
           <a:xfrm>
-            <a:off x="567542" y="1817795"/>
-            <a:ext cx="4537858" cy="4672646"/>
+            <a:off x="567542" y="1817794"/>
+            <a:ext cx="8735420" cy="4548252"/>
           </a:xfrm>
           <a:prstGeom prst="rect">
             <a:avLst/>
@@ -5530,7 +4722,7 @@
     </p:spTree>
     <p:extLst>
       <p:ext uri="{BB962C8B-B14F-4D97-AF65-F5344CB8AC3E}">
-        <p14:creationId xmlns:p14="http://schemas.microsoft.com/office/powerpoint/2010/main" val="1234483258"/>
+        <p14:creationId xmlns:p14="http://schemas.microsoft.com/office/powerpoint/2010/main" val="3285632289"/>
       </p:ext>
     </p:extLst>
   </p:cSld>
@@ -5572,443 +4764,6 @@
         <p:spPr>
           <a:xfrm>
             <a:off x="567542" y="491954"/>
-            <a:ext cx="4698722" cy="584775"/>
-          </a:xfrm>
-          <a:prstGeom prst="rect">
-            <a:avLst/>
-          </a:prstGeom>
-          <a:noFill/>
-        </p:spPr>
-        <p:txBody>
-          <a:bodyPr wrap="none" rtlCol="0">
-            <a:spAutoFit/>
-          </a:bodyPr>
-          <a:lstStyle/>
-          <a:p>
-            <a:r>
-              <a:rPr kumimoji="1" lang="ja-JP" altLang="en-US" sz="3200" b="1" u="sng" dirty="0"/>
-              <a:t>オブジェクトの複数配置</a:t>
-            </a:r>
-            <a:endParaRPr kumimoji="1" lang="en-US" altLang="ja-JP" sz="3200" b="1" u="sng" dirty="0"/>
-          </a:p>
-        </p:txBody>
-      </p:sp>
-      <p:sp>
-        <p:nvSpPr>
-          <p:cNvPr id="6" name="テキスト ボックス 5">
-            <a:extLst>
-              <a:ext uri="{FF2B5EF4-FFF2-40B4-BE49-F238E27FC236}">
-                <a16:creationId xmlns:a16="http://schemas.microsoft.com/office/drawing/2014/main" id="{55830AD6-028B-4C4E-80BF-B70DFC1C3A46}"/>
-              </a:ext>
-            </a:extLst>
-          </p:cNvPr>
-          <p:cNvSpPr txBox="1"/>
-          <p:nvPr/>
-        </p:nvSpPr>
-        <p:spPr>
-          <a:xfrm>
-            <a:off x="567542" y="1216429"/>
-            <a:ext cx="8686993" cy="461665"/>
-          </a:xfrm>
-          <a:prstGeom prst="rect">
-            <a:avLst/>
-          </a:prstGeom>
-          <a:noFill/>
-        </p:spPr>
-        <p:txBody>
-          <a:bodyPr wrap="none" rtlCol="0">
-            <a:spAutoFit/>
-          </a:bodyPr>
-          <a:lstStyle/>
-          <a:p>
-            <a:r>
-              <a:rPr lang="en-US" altLang="ja-JP" sz="2400" dirty="0" err="1"/>
-              <a:t>BlockManager</a:t>
-            </a:r>
-            <a:r>
-              <a:rPr lang="ja-JP" altLang="en-US" sz="2400" dirty="0"/>
-              <a:t>の残りの関数も完成させましょう。（その３）</a:t>
-            </a:r>
-            <a:endParaRPr lang="en-US" altLang="ja-JP" sz="2400" dirty="0"/>
-          </a:p>
-        </p:txBody>
-      </p:sp>
-      <p:pic>
-        <p:nvPicPr>
-          <p:cNvPr id="8" name="図 7">
-            <a:extLst>
-              <a:ext uri="{FF2B5EF4-FFF2-40B4-BE49-F238E27FC236}">
-                <a16:creationId xmlns:a16="http://schemas.microsoft.com/office/drawing/2014/main" id="{F51B1831-C54C-43C9-ACA1-3D784AC579CE}"/>
-              </a:ext>
-            </a:extLst>
-          </p:cNvPr>
-          <p:cNvPicPr>
-            <a:picLocks noChangeAspect="1"/>
-          </p:cNvPicPr>
-          <p:nvPr/>
-        </p:nvPicPr>
-        <p:blipFill>
-          <a:blip r:embed="rId2">
-            <a:extLst>
-              <a:ext uri="{28A0092B-C50C-407E-A947-70E740481C1C}">
-                <a14:useLocalDpi xmlns:a14="http://schemas.microsoft.com/office/drawing/2010/main" val="0"/>
-              </a:ext>
-            </a:extLst>
-          </a:blip>
-          <a:stretch>
-            <a:fillRect/>
-          </a:stretch>
-        </p:blipFill>
-        <p:spPr>
-          <a:xfrm>
-            <a:off x="567542" y="1817794"/>
-            <a:ext cx="8065478" cy="2639906"/>
-          </a:xfrm>
-          <a:prstGeom prst="rect">
-            <a:avLst/>
-          </a:prstGeom>
-        </p:spPr>
-      </p:pic>
-    </p:spTree>
-    <p:extLst>
-      <p:ext uri="{BB962C8B-B14F-4D97-AF65-F5344CB8AC3E}">
-        <p14:creationId xmlns:p14="http://schemas.microsoft.com/office/powerpoint/2010/main" val="3503140131"/>
-      </p:ext>
-    </p:extLst>
-  </p:cSld>
-  <p:clrMapOvr>
-    <a:masterClrMapping/>
-  </p:clrMapOvr>
-</p:sld>
-</file>
-
-<file path=ppt/slides/slide17.xml><?xml version="1.0" encoding="utf-8"?>
-<p:sld xmlns:a="http://schemas.openxmlformats.org/drawingml/2006/main" xmlns:r="http://schemas.openxmlformats.org/officeDocument/2006/relationships" xmlns:p="http://schemas.openxmlformats.org/presentationml/2006/main">
-  <p:cSld>
-    <p:spTree>
-      <p:nvGrpSpPr>
-        <p:cNvPr id="1" name=""/>
-        <p:cNvGrpSpPr/>
-        <p:nvPr/>
-      </p:nvGrpSpPr>
-      <p:grpSpPr>
-        <a:xfrm>
-          <a:off x="0" y="0"/>
-          <a:ext cx="0" cy="0"/>
-          <a:chOff x="0" y="0"/>
-          <a:chExt cx="0" cy="0"/>
-        </a:xfrm>
-      </p:grpSpPr>
-      <p:sp>
-        <p:nvSpPr>
-          <p:cNvPr id="4" name="テキスト ボックス 3">
-            <a:extLst>
-              <a:ext uri="{FF2B5EF4-FFF2-40B4-BE49-F238E27FC236}">
-                <a16:creationId xmlns:a16="http://schemas.microsoft.com/office/drawing/2014/main" id="{5A13BF46-B8C5-48AA-8308-C9ECFF431A18}"/>
-              </a:ext>
-            </a:extLst>
-          </p:cNvPr>
-          <p:cNvSpPr txBox="1"/>
-          <p:nvPr/>
-        </p:nvSpPr>
-        <p:spPr>
-          <a:xfrm>
-            <a:off x="567542" y="491954"/>
-            <a:ext cx="4815742" cy="584775"/>
-          </a:xfrm>
-          <a:prstGeom prst="rect">
-            <a:avLst/>
-          </a:prstGeom>
-          <a:noFill/>
-        </p:spPr>
-        <p:txBody>
-          <a:bodyPr wrap="none" rtlCol="0">
-            <a:spAutoFit/>
-          </a:bodyPr>
-          <a:lstStyle/>
-          <a:p>
-            <a:r>
-              <a:rPr kumimoji="1" lang="ja-JP" altLang="en-US" sz="3200" b="1" u="sng" dirty="0"/>
-              <a:t>オブジェクトの複数配置</a:t>
-            </a:r>
-            <a:endParaRPr kumimoji="1" lang="en-US" altLang="ja-JP" sz="3200" b="1" u="sng" dirty="0"/>
-          </a:p>
-        </p:txBody>
-      </p:sp>
-      <p:sp>
-        <p:nvSpPr>
-          <p:cNvPr id="6" name="テキスト ボックス 5">
-            <a:extLst>
-              <a:ext uri="{FF2B5EF4-FFF2-40B4-BE49-F238E27FC236}">
-                <a16:creationId xmlns:a16="http://schemas.microsoft.com/office/drawing/2014/main" id="{55830AD6-028B-4C4E-80BF-B70DFC1C3A46}"/>
-              </a:ext>
-            </a:extLst>
-          </p:cNvPr>
-          <p:cNvSpPr txBox="1"/>
-          <p:nvPr/>
-        </p:nvSpPr>
-        <p:spPr>
-          <a:xfrm>
-            <a:off x="567542" y="1216429"/>
-            <a:ext cx="10956846" cy="830997"/>
-          </a:xfrm>
-          <a:prstGeom prst="rect">
-            <a:avLst/>
-          </a:prstGeom>
-          <a:noFill/>
-        </p:spPr>
-        <p:txBody>
-          <a:bodyPr wrap="none" rtlCol="0">
-            <a:spAutoFit/>
-          </a:bodyPr>
-          <a:lstStyle/>
-          <a:p>
-            <a:r>
-              <a:rPr lang="en-US" altLang="ja-JP" sz="2400" dirty="0"/>
-              <a:t>Main.cpp</a:t>
-            </a:r>
-            <a:r>
-              <a:rPr lang="ja-JP" altLang="en-US" sz="2400" dirty="0"/>
-              <a:t>の呼び出し側はこれまで通りです。（書くのは省略）</a:t>
-            </a:r>
-            <a:endParaRPr lang="en-US" altLang="ja-JP" sz="2400" dirty="0"/>
-          </a:p>
-          <a:p>
-            <a:r>
-              <a:rPr lang="ja-JP" altLang="en-US" sz="2400" dirty="0"/>
-              <a:t>呼び出し側を考慮しなくて良いのがマネージャークラスの利点でもあります。</a:t>
-            </a:r>
-            <a:endParaRPr lang="en-US" altLang="ja-JP" sz="2400" dirty="0"/>
-          </a:p>
-        </p:txBody>
-      </p:sp>
-      <p:pic>
-        <p:nvPicPr>
-          <p:cNvPr id="5" name="図 4">
-            <a:extLst>
-              <a:ext uri="{FF2B5EF4-FFF2-40B4-BE49-F238E27FC236}">
-                <a16:creationId xmlns:a16="http://schemas.microsoft.com/office/drawing/2014/main" id="{7166C132-D169-4DE1-A313-A86EB7EE544E}"/>
-              </a:ext>
-            </a:extLst>
-          </p:cNvPr>
-          <p:cNvPicPr>
-            <a:picLocks noChangeAspect="1"/>
-          </p:cNvPicPr>
-          <p:nvPr/>
-        </p:nvPicPr>
-        <p:blipFill>
-          <a:blip r:embed="rId2">
-            <a:extLst>
-              <a:ext uri="{28A0092B-C50C-407E-A947-70E740481C1C}">
-                <a14:useLocalDpi xmlns:a14="http://schemas.microsoft.com/office/drawing/2010/main" val="0"/>
-              </a:ext>
-            </a:extLst>
-          </a:blip>
-          <a:stretch>
-            <a:fillRect/>
-          </a:stretch>
-        </p:blipFill>
-        <p:spPr>
-          <a:xfrm>
-            <a:off x="567542" y="2415731"/>
-            <a:ext cx="10584618" cy="2394843"/>
-          </a:xfrm>
-          <a:prstGeom prst="rect">
-            <a:avLst/>
-          </a:prstGeom>
-        </p:spPr>
-      </p:pic>
-    </p:spTree>
-    <p:extLst>
-      <p:ext uri="{BB962C8B-B14F-4D97-AF65-F5344CB8AC3E}">
-        <p14:creationId xmlns:p14="http://schemas.microsoft.com/office/powerpoint/2010/main" val="3451196840"/>
-      </p:ext>
-    </p:extLst>
-  </p:cSld>
-  <p:clrMapOvr>
-    <a:masterClrMapping/>
-  </p:clrMapOvr>
-</p:sld>
-</file>
-
-<file path=ppt/slides/slide18.xml><?xml version="1.0" encoding="utf-8"?>
-<p:sld xmlns:a="http://schemas.openxmlformats.org/drawingml/2006/main" xmlns:r="http://schemas.openxmlformats.org/officeDocument/2006/relationships" xmlns:p="http://schemas.openxmlformats.org/presentationml/2006/main">
-  <p:cSld>
-    <p:spTree>
-      <p:nvGrpSpPr>
-        <p:cNvPr id="1" name=""/>
-        <p:cNvGrpSpPr/>
-        <p:nvPr/>
-      </p:nvGrpSpPr>
-      <p:grpSpPr>
-        <a:xfrm>
-          <a:off x="0" y="0"/>
-          <a:ext cx="0" cy="0"/>
-          <a:chOff x="0" y="0"/>
-          <a:chExt cx="0" cy="0"/>
-        </a:xfrm>
-      </p:grpSpPr>
-      <p:sp>
-        <p:nvSpPr>
-          <p:cNvPr id="4" name="テキスト ボックス 3">
-            <a:extLst>
-              <a:ext uri="{FF2B5EF4-FFF2-40B4-BE49-F238E27FC236}">
-                <a16:creationId xmlns:a16="http://schemas.microsoft.com/office/drawing/2014/main" id="{5A13BF46-B8C5-48AA-8308-C9ECFF431A18}"/>
-              </a:ext>
-            </a:extLst>
-          </p:cNvPr>
-          <p:cNvSpPr txBox="1"/>
-          <p:nvPr/>
-        </p:nvSpPr>
-        <p:spPr>
-          <a:xfrm>
-            <a:off x="567542" y="491954"/>
-            <a:ext cx="4698722" cy="584775"/>
-          </a:xfrm>
-          <a:prstGeom prst="rect">
-            <a:avLst/>
-          </a:prstGeom>
-          <a:noFill/>
-        </p:spPr>
-        <p:txBody>
-          <a:bodyPr wrap="none" rtlCol="0">
-            <a:spAutoFit/>
-          </a:bodyPr>
-          <a:lstStyle/>
-          <a:p>
-            <a:r>
-              <a:rPr kumimoji="1" lang="ja-JP" altLang="en-US" sz="3200" b="1" u="sng" dirty="0"/>
-              <a:t>オブジェクトの複数配置</a:t>
-            </a:r>
-            <a:endParaRPr kumimoji="1" lang="en-US" altLang="ja-JP" sz="3200" b="1" u="sng" dirty="0"/>
-          </a:p>
-        </p:txBody>
-      </p:sp>
-      <p:sp>
-        <p:nvSpPr>
-          <p:cNvPr id="6" name="テキスト ボックス 5">
-            <a:extLst>
-              <a:ext uri="{FF2B5EF4-FFF2-40B4-BE49-F238E27FC236}">
-                <a16:creationId xmlns:a16="http://schemas.microsoft.com/office/drawing/2014/main" id="{55830AD6-028B-4C4E-80BF-B70DFC1C3A46}"/>
-              </a:ext>
-            </a:extLst>
-          </p:cNvPr>
-          <p:cNvSpPr txBox="1"/>
-          <p:nvPr/>
-        </p:nvSpPr>
-        <p:spPr>
-          <a:xfrm>
-            <a:off x="567542" y="1216429"/>
-            <a:ext cx="6163867" cy="461665"/>
-          </a:xfrm>
-          <a:prstGeom prst="rect">
-            <a:avLst/>
-          </a:prstGeom>
-          <a:noFill/>
-        </p:spPr>
-        <p:txBody>
-          <a:bodyPr wrap="none" rtlCol="0">
-            <a:spAutoFit/>
-          </a:bodyPr>
-          <a:lstStyle/>
-          <a:p>
-            <a:r>
-              <a:rPr lang="ja-JP" altLang="en-US" sz="2400" dirty="0"/>
-              <a:t>ブロックが４つ表示されていれば</a:t>
-            </a:r>
-            <a:r>
-              <a:rPr lang="en-US" altLang="ja-JP" sz="2400" dirty="0"/>
-              <a:t>OK</a:t>
-            </a:r>
-            <a:r>
-              <a:rPr lang="ja-JP" altLang="en-US" sz="2400" dirty="0"/>
-              <a:t>です！</a:t>
-            </a:r>
-            <a:endParaRPr lang="en-US" altLang="ja-JP" sz="2400" dirty="0"/>
-          </a:p>
-        </p:txBody>
-      </p:sp>
-      <p:pic>
-        <p:nvPicPr>
-          <p:cNvPr id="7" name="図 6">
-            <a:extLst>
-              <a:ext uri="{FF2B5EF4-FFF2-40B4-BE49-F238E27FC236}">
-                <a16:creationId xmlns:a16="http://schemas.microsoft.com/office/drawing/2014/main" id="{FE9301F6-67D8-4133-928C-08D904C38908}"/>
-              </a:ext>
-            </a:extLst>
-          </p:cNvPr>
-          <p:cNvPicPr>
-            <a:picLocks noChangeAspect="1"/>
-          </p:cNvPicPr>
-          <p:nvPr/>
-        </p:nvPicPr>
-        <p:blipFill>
-          <a:blip r:embed="rId2">
-            <a:extLst>
-              <a:ext uri="{28A0092B-C50C-407E-A947-70E740481C1C}">
-                <a14:useLocalDpi xmlns:a14="http://schemas.microsoft.com/office/drawing/2010/main" val="0"/>
-              </a:ext>
-            </a:extLst>
-          </a:blip>
-          <a:stretch>
-            <a:fillRect/>
-          </a:stretch>
-        </p:blipFill>
-        <p:spPr>
-          <a:xfrm>
-            <a:off x="567542" y="1817794"/>
-            <a:ext cx="8735420" cy="4548252"/>
-          </a:xfrm>
-          <a:prstGeom prst="rect">
-            <a:avLst/>
-          </a:prstGeom>
-        </p:spPr>
-      </p:pic>
-    </p:spTree>
-    <p:extLst>
-      <p:ext uri="{BB962C8B-B14F-4D97-AF65-F5344CB8AC3E}">
-        <p14:creationId xmlns:p14="http://schemas.microsoft.com/office/powerpoint/2010/main" val="3285632289"/>
-      </p:ext>
-    </p:extLst>
-  </p:cSld>
-  <p:clrMapOvr>
-    <a:masterClrMapping/>
-  </p:clrMapOvr>
-</p:sld>
-</file>
-
-<file path=ppt/slides/slide19.xml><?xml version="1.0" encoding="utf-8"?>
-<p:sld xmlns:a="http://schemas.openxmlformats.org/drawingml/2006/main" xmlns:r="http://schemas.openxmlformats.org/officeDocument/2006/relationships" xmlns:p="http://schemas.openxmlformats.org/presentationml/2006/main">
-  <p:cSld>
-    <p:spTree>
-      <p:nvGrpSpPr>
-        <p:cNvPr id="1" name=""/>
-        <p:cNvGrpSpPr/>
-        <p:nvPr/>
-      </p:nvGrpSpPr>
-      <p:grpSpPr>
-        <a:xfrm>
-          <a:off x="0" y="0"/>
-          <a:ext cx="0" cy="0"/>
-          <a:chOff x="0" y="0"/>
-          <a:chExt cx="0" cy="0"/>
-        </a:xfrm>
-      </p:grpSpPr>
-      <p:sp>
-        <p:nvSpPr>
-          <p:cNvPr id="4" name="テキスト ボックス 3">
-            <a:extLst>
-              <a:ext uri="{FF2B5EF4-FFF2-40B4-BE49-F238E27FC236}">
-                <a16:creationId xmlns:a16="http://schemas.microsoft.com/office/drawing/2014/main" id="{5A13BF46-B8C5-48AA-8308-C9ECFF431A18}"/>
-              </a:ext>
-            </a:extLst>
-          </p:cNvPr>
-          <p:cNvSpPr txBox="1"/>
-          <p:nvPr/>
-        </p:nvSpPr>
-        <p:spPr>
-          <a:xfrm>
-            <a:off x="567542" y="491954"/>
             <a:ext cx="6046848" cy="584775"/>
           </a:xfrm>
           <a:prstGeom prst="rect">
@@ -6170,164 +4925,7 @@
 </p:sld>
 </file>
 
-<file path=ppt/slides/slide2.xml><?xml version="1.0" encoding="utf-8"?>
-<p:sld xmlns:a="http://schemas.openxmlformats.org/drawingml/2006/main" xmlns:r="http://schemas.openxmlformats.org/officeDocument/2006/relationships" xmlns:p="http://schemas.openxmlformats.org/presentationml/2006/main">
-  <p:cSld>
-    <p:spTree>
-      <p:nvGrpSpPr>
-        <p:cNvPr id="1" name=""/>
-        <p:cNvGrpSpPr/>
-        <p:nvPr/>
-      </p:nvGrpSpPr>
-      <p:grpSpPr>
-        <a:xfrm>
-          <a:off x="0" y="0"/>
-          <a:ext cx="0" cy="0"/>
-          <a:chOff x="0" y="0"/>
-          <a:chExt cx="0" cy="0"/>
-        </a:xfrm>
-      </p:grpSpPr>
-      <p:sp>
-        <p:nvSpPr>
-          <p:cNvPr id="4" name="テキスト ボックス 3">
-            <a:extLst>
-              <a:ext uri="{FF2B5EF4-FFF2-40B4-BE49-F238E27FC236}">
-                <a16:creationId xmlns:a16="http://schemas.microsoft.com/office/drawing/2014/main" id="{5A13BF46-B8C5-48AA-8308-C9ECFF431A18}"/>
-              </a:ext>
-            </a:extLst>
-          </p:cNvPr>
-          <p:cNvSpPr txBox="1"/>
-          <p:nvPr/>
-        </p:nvSpPr>
-        <p:spPr>
-          <a:xfrm>
-            <a:off x="567542" y="491954"/>
-            <a:ext cx="4698722" cy="584775"/>
-          </a:xfrm>
-          <a:prstGeom prst="rect">
-            <a:avLst/>
-          </a:prstGeom>
-          <a:noFill/>
-        </p:spPr>
-        <p:txBody>
-          <a:bodyPr wrap="none" rtlCol="0">
-            <a:spAutoFit/>
-          </a:bodyPr>
-          <a:lstStyle/>
-          <a:p>
-            <a:r>
-              <a:rPr kumimoji="1" lang="ja-JP" altLang="en-US" sz="3200" b="1" u="sng" dirty="0"/>
-              <a:t>オブジェクトの複数配置</a:t>
-            </a:r>
-            <a:endParaRPr kumimoji="1" lang="en-US" altLang="ja-JP" sz="3200" b="1" u="sng" dirty="0"/>
-          </a:p>
-        </p:txBody>
-      </p:sp>
-      <p:sp>
-        <p:nvSpPr>
-          <p:cNvPr id="6" name="テキスト ボックス 5">
-            <a:extLst>
-              <a:ext uri="{FF2B5EF4-FFF2-40B4-BE49-F238E27FC236}">
-                <a16:creationId xmlns:a16="http://schemas.microsoft.com/office/drawing/2014/main" id="{55830AD6-028B-4C4E-80BF-B70DFC1C3A46}"/>
-              </a:ext>
-            </a:extLst>
-          </p:cNvPr>
-          <p:cNvSpPr txBox="1"/>
-          <p:nvPr/>
-        </p:nvSpPr>
-        <p:spPr>
-          <a:xfrm>
-            <a:off x="567542" y="1216429"/>
-            <a:ext cx="8467383" cy="830997"/>
-          </a:xfrm>
-          <a:prstGeom prst="rect">
-            <a:avLst/>
-          </a:prstGeom>
-          <a:noFill/>
-        </p:spPr>
-        <p:txBody>
-          <a:bodyPr wrap="none" rtlCol="0">
-            <a:spAutoFit/>
-          </a:bodyPr>
-          <a:lstStyle/>
-          <a:p>
-            <a:r>
-              <a:rPr kumimoji="1" lang="ja-JP" altLang="en-US" sz="2400" dirty="0"/>
-              <a:t>ブロックを複数管理して配置まで実装します。</a:t>
-            </a:r>
-            <a:endParaRPr kumimoji="1" lang="en-US" altLang="ja-JP" sz="2400" dirty="0"/>
-          </a:p>
-          <a:p>
-            <a:r>
-              <a:rPr lang="ja-JP" altLang="en-US" sz="2400" dirty="0"/>
-              <a:t>配布したプロジェクトの</a:t>
-            </a:r>
-            <a:r>
-              <a:rPr lang="en-US" altLang="ja-JP" sz="2400" b="1" dirty="0" err="1">
-                <a:solidFill>
-                  <a:srgbClr val="FF0000"/>
-                </a:solidFill>
-              </a:rPr>
-              <a:t>BlockManager.h</a:t>
-            </a:r>
-            <a:r>
-              <a:rPr lang="ja-JP" altLang="en-US" sz="2400" dirty="0"/>
-              <a:t>を開きましょう。</a:t>
-            </a:r>
-            <a:endParaRPr kumimoji="1" lang="en-US" altLang="ja-JP" sz="2400" dirty="0"/>
-          </a:p>
-        </p:txBody>
-      </p:sp>
-      <p:pic>
-        <p:nvPicPr>
-          <p:cNvPr id="5" name="図 4">
-            <a:extLst>
-              <a:ext uri="{FF2B5EF4-FFF2-40B4-BE49-F238E27FC236}">
-                <a16:creationId xmlns:a16="http://schemas.microsoft.com/office/drawing/2014/main" id="{B24B0C31-A85D-48A4-8AEE-C28C30CC38DE}"/>
-              </a:ext>
-            </a:extLst>
-          </p:cNvPr>
-          <p:cNvPicPr>
-            <a:picLocks noChangeAspect="1"/>
-          </p:cNvPicPr>
-          <p:nvPr/>
-        </p:nvPicPr>
-        <p:blipFill>
-          <a:blip r:embed="rId2">
-            <a:extLst>
-              <a:ext uri="{28A0092B-C50C-407E-A947-70E740481C1C}">
-                <a14:useLocalDpi xmlns:a14="http://schemas.microsoft.com/office/drawing/2010/main" val="0"/>
-              </a:ext>
-            </a:extLst>
-          </a:blip>
-          <a:stretch>
-            <a:fillRect/>
-          </a:stretch>
-        </p:blipFill>
-        <p:spPr>
-          <a:xfrm>
-            <a:off x="567543" y="2187126"/>
-            <a:ext cx="5820558" cy="4310765"/>
-          </a:xfrm>
-          <a:prstGeom prst="rect">
-            <a:avLst/>
-          </a:prstGeom>
-        </p:spPr>
-      </p:pic>
-    </p:spTree>
-    <p:extLst>
-      <p:ext uri="{BB962C8B-B14F-4D97-AF65-F5344CB8AC3E}">
-        <p14:creationId xmlns:p14="http://schemas.microsoft.com/office/powerpoint/2010/main" val="2896326812"/>
-      </p:ext>
-    </p:extLst>
-  </p:cSld>
-  <p:clrMapOvr>
-    <a:masterClrMapping/>
-  </p:clrMapOvr>
-</p:sld>
-</file>
-
-<file path=ppt/slides/slide20.xml><?xml version="1.0" encoding="utf-8"?>
+<file path=ppt/slides/slide17.xml><?xml version="1.0" encoding="utf-8"?>
 <p:sld xmlns:a="http://schemas.openxmlformats.org/drawingml/2006/main" xmlns:r="http://schemas.openxmlformats.org/officeDocument/2006/relationships" xmlns:p="http://schemas.openxmlformats.org/presentationml/2006/main">
   <p:cSld>
     <p:spTree>
@@ -6905,6 +5503,1228 @@
 </p:sld>
 </file>
 
+<file path=ppt/slides/slide18.xml><?xml version="1.0" encoding="utf-8"?>
+<p:sld xmlns:a="http://schemas.openxmlformats.org/drawingml/2006/main" xmlns:r="http://schemas.openxmlformats.org/officeDocument/2006/relationships" xmlns:p="http://schemas.openxmlformats.org/presentationml/2006/main">
+  <p:cSld>
+    <p:spTree>
+      <p:nvGrpSpPr>
+        <p:cNvPr id="1" name=""/>
+        <p:cNvGrpSpPr/>
+        <p:nvPr/>
+      </p:nvGrpSpPr>
+      <p:grpSpPr>
+        <a:xfrm>
+          <a:off x="0" y="0"/>
+          <a:ext cx="0" cy="0"/>
+          <a:chOff x="0" y="0"/>
+          <a:chExt cx="0" cy="0"/>
+        </a:xfrm>
+      </p:grpSpPr>
+      <p:sp>
+        <p:nvSpPr>
+          <p:cNvPr id="4" name="テキスト ボックス 3">
+            <a:extLst>
+              <a:ext uri="{FF2B5EF4-FFF2-40B4-BE49-F238E27FC236}">
+                <a16:creationId xmlns:a16="http://schemas.microsoft.com/office/drawing/2014/main" id="{5A13BF46-B8C5-48AA-8308-C9ECFF431A18}"/>
+              </a:ext>
+            </a:extLst>
+          </p:cNvPr>
+          <p:cNvSpPr txBox="1"/>
+          <p:nvPr/>
+        </p:nvSpPr>
+        <p:spPr>
+          <a:xfrm>
+            <a:off x="567542" y="491954"/>
+            <a:ext cx="6046848" cy="584775"/>
+          </a:xfrm>
+          <a:prstGeom prst="rect">
+            <a:avLst/>
+          </a:prstGeom>
+          <a:noFill/>
+        </p:spPr>
+        <p:txBody>
+          <a:bodyPr wrap="none" rtlCol="0">
+            <a:spAutoFit/>
+          </a:bodyPr>
+          <a:lstStyle/>
+          <a:p>
+            <a:r>
+              <a:rPr kumimoji="1" lang="ja-JP" altLang="en-US" sz="3200" b="1" u="sng" dirty="0"/>
+              <a:t>オブジェクトの複数配置 問題点</a:t>
+            </a:r>
+            <a:endParaRPr kumimoji="1" lang="en-US" altLang="ja-JP" sz="3200" b="1" u="sng" dirty="0"/>
+          </a:p>
+        </p:txBody>
+      </p:sp>
+      <p:sp>
+        <p:nvSpPr>
+          <p:cNvPr id="6" name="テキスト ボックス 5">
+            <a:extLst>
+              <a:ext uri="{FF2B5EF4-FFF2-40B4-BE49-F238E27FC236}">
+                <a16:creationId xmlns:a16="http://schemas.microsoft.com/office/drawing/2014/main" id="{55830AD6-028B-4C4E-80BF-B70DFC1C3A46}"/>
+              </a:ext>
+            </a:extLst>
+          </p:cNvPr>
+          <p:cNvSpPr txBox="1"/>
+          <p:nvPr/>
+        </p:nvSpPr>
+        <p:spPr>
+          <a:xfrm>
+            <a:off x="567542" y="1216429"/>
+            <a:ext cx="8802410" cy="830997"/>
+          </a:xfrm>
+          <a:prstGeom prst="rect">
+            <a:avLst/>
+          </a:prstGeom>
+          <a:noFill/>
+        </p:spPr>
+        <p:txBody>
+          <a:bodyPr wrap="none" rtlCol="0">
+            <a:spAutoFit/>
+          </a:bodyPr>
+          <a:lstStyle/>
+          <a:p>
+            <a:r>
+              <a:rPr lang="ja-JP" altLang="en-US" sz="2400" dirty="0"/>
+              <a:t>同じ画像が複数必要な場合は、</a:t>
+            </a:r>
+            <a:endParaRPr lang="en-US" altLang="ja-JP" sz="2400" dirty="0"/>
+          </a:p>
+          <a:p>
+            <a:r>
+              <a:rPr lang="ja-JP" altLang="en-US" sz="2400" dirty="0"/>
+              <a:t>１度だけロードして、その後はコピーすると効率が良いです。</a:t>
+            </a:r>
+            <a:endParaRPr lang="en-US" altLang="ja-JP" sz="2400" dirty="0"/>
+          </a:p>
+        </p:txBody>
+      </p:sp>
+      <p:sp>
+        <p:nvSpPr>
+          <p:cNvPr id="29" name="直方体 28">
+            <a:extLst>
+              <a:ext uri="{FF2B5EF4-FFF2-40B4-BE49-F238E27FC236}">
+                <a16:creationId xmlns:a16="http://schemas.microsoft.com/office/drawing/2014/main" id="{B71D7A3B-C72B-4E32-8A82-C0900EE8AA85}"/>
+              </a:ext>
+            </a:extLst>
+          </p:cNvPr>
+          <p:cNvSpPr/>
+          <p:nvPr/>
+        </p:nvSpPr>
+        <p:spPr>
+          <a:xfrm>
+            <a:off x="1543151" y="3397546"/>
+            <a:ext cx="1054100" cy="983976"/>
+          </a:xfrm>
+          <a:prstGeom prst="cube">
+            <a:avLst/>
+          </a:prstGeom>
+        </p:spPr>
+        <p:style>
+          <a:lnRef idx="2">
+            <a:schemeClr val="accent1">
+              <a:shade val="50000"/>
+            </a:schemeClr>
+          </a:lnRef>
+          <a:fillRef idx="1">
+            <a:schemeClr val="accent1"/>
+          </a:fillRef>
+          <a:effectRef idx="0">
+            <a:schemeClr val="accent1"/>
+          </a:effectRef>
+          <a:fontRef idx="minor">
+            <a:schemeClr val="lt1"/>
+          </a:fontRef>
+        </p:style>
+        <p:txBody>
+          <a:bodyPr rtlCol="0" anchor="ctr"/>
+          <a:lstStyle/>
+          <a:p>
+            <a:pPr algn="ctr"/>
+            <a:endParaRPr kumimoji="1" lang="ja-JP" altLang="en-US" dirty="0"/>
+          </a:p>
+        </p:txBody>
+      </p:sp>
+      <p:sp>
+        <p:nvSpPr>
+          <p:cNvPr id="30" name="円柱 29">
+            <a:extLst>
+              <a:ext uri="{FF2B5EF4-FFF2-40B4-BE49-F238E27FC236}">
+                <a16:creationId xmlns:a16="http://schemas.microsoft.com/office/drawing/2014/main" id="{856E0899-A956-4C92-838F-1D21DE092963}"/>
+              </a:ext>
+            </a:extLst>
+          </p:cNvPr>
+          <p:cNvSpPr/>
+          <p:nvPr/>
+        </p:nvSpPr>
+        <p:spPr>
+          <a:xfrm>
+            <a:off x="806550" y="2209559"/>
+            <a:ext cx="2593340" cy="2855877"/>
+          </a:xfrm>
+          <a:prstGeom prst="can">
+            <a:avLst/>
+          </a:prstGeom>
+          <a:noFill/>
+        </p:spPr>
+        <p:style>
+          <a:lnRef idx="2">
+            <a:schemeClr val="accent1">
+              <a:shade val="50000"/>
+            </a:schemeClr>
+          </a:lnRef>
+          <a:fillRef idx="1">
+            <a:schemeClr val="accent1"/>
+          </a:fillRef>
+          <a:effectRef idx="0">
+            <a:schemeClr val="accent1"/>
+          </a:effectRef>
+          <a:fontRef idx="minor">
+            <a:schemeClr val="lt1"/>
+          </a:fontRef>
+        </p:style>
+        <p:txBody>
+          <a:bodyPr rtlCol="0" anchor="ctr"/>
+          <a:lstStyle/>
+          <a:p>
+            <a:pPr algn="ctr"/>
+            <a:endParaRPr kumimoji="1" lang="ja-JP" altLang="en-US"/>
+          </a:p>
+        </p:txBody>
+      </p:sp>
+      <p:sp>
+        <p:nvSpPr>
+          <p:cNvPr id="31" name="テキスト ボックス 30">
+            <a:extLst>
+              <a:ext uri="{FF2B5EF4-FFF2-40B4-BE49-F238E27FC236}">
+                <a16:creationId xmlns:a16="http://schemas.microsoft.com/office/drawing/2014/main" id="{D1858A99-8ACD-4111-947B-0E528C87F301}"/>
+              </a:ext>
+            </a:extLst>
+          </p:cNvPr>
+          <p:cNvSpPr txBox="1"/>
+          <p:nvPr/>
+        </p:nvSpPr>
+        <p:spPr>
+          <a:xfrm>
+            <a:off x="567542" y="5179906"/>
+            <a:ext cx="3262432" cy="461665"/>
+          </a:xfrm>
+          <a:prstGeom prst="rect">
+            <a:avLst/>
+          </a:prstGeom>
+          <a:noFill/>
+        </p:spPr>
+        <p:txBody>
+          <a:bodyPr wrap="none" rtlCol="0">
+            <a:spAutoFit/>
+          </a:bodyPr>
+          <a:lstStyle/>
+          <a:p>
+            <a:r>
+              <a:rPr lang="ja-JP" altLang="en-US" sz="2400" dirty="0"/>
+              <a:t>１度ロードして。。。</a:t>
+            </a:r>
+            <a:endParaRPr lang="en-US" altLang="ja-JP" sz="2400" dirty="0"/>
+          </a:p>
+        </p:txBody>
+      </p:sp>
+      <p:sp>
+        <p:nvSpPr>
+          <p:cNvPr id="32" name="直方体 31">
+            <a:extLst>
+              <a:ext uri="{FF2B5EF4-FFF2-40B4-BE49-F238E27FC236}">
+                <a16:creationId xmlns:a16="http://schemas.microsoft.com/office/drawing/2014/main" id="{D7A13C9A-D116-47FB-B317-D1F7D52456CB}"/>
+              </a:ext>
+            </a:extLst>
+          </p:cNvPr>
+          <p:cNvSpPr/>
+          <p:nvPr/>
+        </p:nvSpPr>
+        <p:spPr>
+          <a:xfrm>
+            <a:off x="6335008" y="3192017"/>
+            <a:ext cx="461157" cy="411057"/>
+          </a:xfrm>
+          <a:prstGeom prst="cube">
+            <a:avLst/>
+          </a:prstGeom>
+        </p:spPr>
+        <p:style>
+          <a:lnRef idx="2">
+            <a:schemeClr val="accent1">
+              <a:shade val="50000"/>
+            </a:schemeClr>
+          </a:lnRef>
+          <a:fillRef idx="1">
+            <a:schemeClr val="accent1"/>
+          </a:fillRef>
+          <a:effectRef idx="0">
+            <a:schemeClr val="accent1"/>
+          </a:effectRef>
+          <a:fontRef idx="minor">
+            <a:schemeClr val="lt1"/>
+          </a:fontRef>
+        </p:style>
+        <p:txBody>
+          <a:bodyPr rtlCol="0" anchor="ctr"/>
+          <a:lstStyle/>
+          <a:p>
+            <a:pPr algn="ctr"/>
+            <a:endParaRPr kumimoji="1" lang="ja-JP" altLang="en-US" dirty="0"/>
+          </a:p>
+        </p:txBody>
+      </p:sp>
+      <p:sp>
+        <p:nvSpPr>
+          <p:cNvPr id="33" name="円柱 32">
+            <a:extLst>
+              <a:ext uri="{FF2B5EF4-FFF2-40B4-BE49-F238E27FC236}">
+                <a16:creationId xmlns:a16="http://schemas.microsoft.com/office/drawing/2014/main" id="{2C07F27A-4C32-478E-856F-80D889F69BB5}"/>
+              </a:ext>
+            </a:extLst>
+          </p:cNvPr>
+          <p:cNvSpPr/>
+          <p:nvPr/>
+        </p:nvSpPr>
+        <p:spPr>
+          <a:xfrm>
+            <a:off x="6077050" y="2209559"/>
+            <a:ext cx="2593340" cy="2855877"/>
+          </a:xfrm>
+          <a:prstGeom prst="can">
+            <a:avLst/>
+          </a:prstGeom>
+          <a:noFill/>
+        </p:spPr>
+        <p:style>
+          <a:lnRef idx="2">
+            <a:schemeClr val="accent1">
+              <a:shade val="50000"/>
+            </a:schemeClr>
+          </a:lnRef>
+          <a:fillRef idx="1">
+            <a:schemeClr val="accent1"/>
+          </a:fillRef>
+          <a:effectRef idx="0">
+            <a:schemeClr val="accent1"/>
+          </a:effectRef>
+          <a:fontRef idx="minor">
+            <a:schemeClr val="lt1"/>
+          </a:fontRef>
+        </p:style>
+        <p:txBody>
+          <a:bodyPr rtlCol="0" anchor="ctr"/>
+          <a:lstStyle/>
+          <a:p>
+            <a:pPr algn="ctr"/>
+            <a:endParaRPr kumimoji="1" lang="ja-JP" altLang="en-US"/>
+          </a:p>
+        </p:txBody>
+      </p:sp>
+      <p:sp>
+        <p:nvSpPr>
+          <p:cNvPr id="34" name="直方体 33">
+            <a:extLst>
+              <a:ext uri="{FF2B5EF4-FFF2-40B4-BE49-F238E27FC236}">
+                <a16:creationId xmlns:a16="http://schemas.microsoft.com/office/drawing/2014/main" id="{F08B3BE9-485B-41B8-8527-5372EA142EB7}"/>
+              </a:ext>
+            </a:extLst>
+          </p:cNvPr>
+          <p:cNvSpPr/>
+          <p:nvPr/>
+        </p:nvSpPr>
+        <p:spPr>
+          <a:xfrm>
+            <a:off x="6954620" y="3192016"/>
+            <a:ext cx="461157" cy="411057"/>
+          </a:xfrm>
+          <a:prstGeom prst="cube">
+            <a:avLst/>
+          </a:prstGeom>
+        </p:spPr>
+        <p:style>
+          <a:lnRef idx="2">
+            <a:schemeClr val="accent1">
+              <a:shade val="50000"/>
+            </a:schemeClr>
+          </a:lnRef>
+          <a:fillRef idx="1">
+            <a:schemeClr val="accent1"/>
+          </a:fillRef>
+          <a:effectRef idx="0">
+            <a:schemeClr val="accent1"/>
+          </a:effectRef>
+          <a:fontRef idx="minor">
+            <a:schemeClr val="lt1"/>
+          </a:fontRef>
+        </p:style>
+        <p:txBody>
+          <a:bodyPr rtlCol="0" anchor="ctr"/>
+          <a:lstStyle/>
+          <a:p>
+            <a:pPr algn="ctr"/>
+            <a:endParaRPr kumimoji="1" lang="ja-JP" altLang="en-US" dirty="0"/>
+          </a:p>
+        </p:txBody>
+      </p:sp>
+      <p:sp>
+        <p:nvSpPr>
+          <p:cNvPr id="35" name="直方体 34">
+            <a:extLst>
+              <a:ext uri="{FF2B5EF4-FFF2-40B4-BE49-F238E27FC236}">
+                <a16:creationId xmlns:a16="http://schemas.microsoft.com/office/drawing/2014/main" id="{709A6337-DA30-4F7E-BF00-58FB807AC70F}"/>
+              </a:ext>
+            </a:extLst>
+          </p:cNvPr>
+          <p:cNvSpPr/>
+          <p:nvPr/>
+        </p:nvSpPr>
+        <p:spPr>
+          <a:xfrm>
+            <a:off x="7673735" y="3189248"/>
+            <a:ext cx="461157" cy="411057"/>
+          </a:xfrm>
+          <a:prstGeom prst="cube">
+            <a:avLst/>
+          </a:prstGeom>
+        </p:spPr>
+        <p:style>
+          <a:lnRef idx="2">
+            <a:schemeClr val="accent1">
+              <a:shade val="50000"/>
+            </a:schemeClr>
+          </a:lnRef>
+          <a:fillRef idx="1">
+            <a:schemeClr val="accent1"/>
+          </a:fillRef>
+          <a:effectRef idx="0">
+            <a:schemeClr val="accent1"/>
+          </a:effectRef>
+          <a:fontRef idx="minor">
+            <a:schemeClr val="lt1"/>
+          </a:fontRef>
+        </p:style>
+        <p:txBody>
+          <a:bodyPr rtlCol="0" anchor="ctr"/>
+          <a:lstStyle/>
+          <a:p>
+            <a:pPr algn="ctr"/>
+            <a:endParaRPr kumimoji="1" lang="ja-JP" altLang="en-US" dirty="0"/>
+          </a:p>
+        </p:txBody>
+      </p:sp>
+      <p:sp>
+        <p:nvSpPr>
+          <p:cNvPr id="36" name="直方体 35">
+            <a:extLst>
+              <a:ext uri="{FF2B5EF4-FFF2-40B4-BE49-F238E27FC236}">
+                <a16:creationId xmlns:a16="http://schemas.microsoft.com/office/drawing/2014/main" id="{11CC015A-DF18-4003-B919-5340E4D1DD58}"/>
+              </a:ext>
+            </a:extLst>
+          </p:cNvPr>
+          <p:cNvSpPr/>
+          <p:nvPr/>
+        </p:nvSpPr>
+        <p:spPr>
+          <a:xfrm>
+            <a:off x="6335008" y="3889534"/>
+            <a:ext cx="461157" cy="411057"/>
+          </a:xfrm>
+          <a:prstGeom prst="cube">
+            <a:avLst/>
+          </a:prstGeom>
+        </p:spPr>
+        <p:style>
+          <a:lnRef idx="2">
+            <a:schemeClr val="accent1">
+              <a:shade val="50000"/>
+            </a:schemeClr>
+          </a:lnRef>
+          <a:fillRef idx="1">
+            <a:schemeClr val="accent1"/>
+          </a:fillRef>
+          <a:effectRef idx="0">
+            <a:schemeClr val="accent1"/>
+          </a:effectRef>
+          <a:fontRef idx="minor">
+            <a:schemeClr val="lt1"/>
+          </a:fontRef>
+        </p:style>
+        <p:txBody>
+          <a:bodyPr rtlCol="0" anchor="ctr"/>
+          <a:lstStyle/>
+          <a:p>
+            <a:pPr algn="ctr"/>
+            <a:endParaRPr kumimoji="1" lang="ja-JP" altLang="en-US" dirty="0"/>
+          </a:p>
+        </p:txBody>
+      </p:sp>
+      <p:sp>
+        <p:nvSpPr>
+          <p:cNvPr id="37" name="直方体 36">
+            <a:extLst>
+              <a:ext uri="{FF2B5EF4-FFF2-40B4-BE49-F238E27FC236}">
+                <a16:creationId xmlns:a16="http://schemas.microsoft.com/office/drawing/2014/main" id="{66E75F4B-AAFB-43E5-BFF3-A70EFA3DEC52}"/>
+              </a:ext>
+            </a:extLst>
+          </p:cNvPr>
+          <p:cNvSpPr/>
+          <p:nvPr/>
+        </p:nvSpPr>
+        <p:spPr>
+          <a:xfrm>
+            <a:off x="7007400" y="3889534"/>
+            <a:ext cx="461157" cy="411057"/>
+          </a:xfrm>
+          <a:prstGeom prst="cube">
+            <a:avLst/>
+          </a:prstGeom>
+        </p:spPr>
+        <p:style>
+          <a:lnRef idx="2">
+            <a:schemeClr val="accent1">
+              <a:shade val="50000"/>
+            </a:schemeClr>
+          </a:lnRef>
+          <a:fillRef idx="1">
+            <a:schemeClr val="accent1"/>
+          </a:fillRef>
+          <a:effectRef idx="0">
+            <a:schemeClr val="accent1"/>
+          </a:effectRef>
+          <a:fontRef idx="minor">
+            <a:schemeClr val="lt1"/>
+          </a:fontRef>
+        </p:style>
+        <p:txBody>
+          <a:bodyPr rtlCol="0" anchor="ctr"/>
+          <a:lstStyle/>
+          <a:p>
+            <a:pPr algn="ctr"/>
+            <a:endParaRPr kumimoji="1" lang="ja-JP" altLang="en-US" dirty="0"/>
+          </a:p>
+        </p:txBody>
+      </p:sp>
+      <p:sp>
+        <p:nvSpPr>
+          <p:cNvPr id="38" name="直方体 37">
+            <a:extLst>
+              <a:ext uri="{FF2B5EF4-FFF2-40B4-BE49-F238E27FC236}">
+                <a16:creationId xmlns:a16="http://schemas.microsoft.com/office/drawing/2014/main" id="{B97CB423-24CD-461A-B596-438D5FB74BEE}"/>
+              </a:ext>
+            </a:extLst>
+          </p:cNvPr>
+          <p:cNvSpPr/>
+          <p:nvPr/>
+        </p:nvSpPr>
+        <p:spPr>
+          <a:xfrm>
+            <a:off x="7677693" y="3889534"/>
+            <a:ext cx="461157" cy="411057"/>
+          </a:xfrm>
+          <a:prstGeom prst="cube">
+            <a:avLst/>
+          </a:prstGeom>
+        </p:spPr>
+        <p:style>
+          <a:lnRef idx="2">
+            <a:schemeClr val="accent1">
+              <a:shade val="50000"/>
+            </a:schemeClr>
+          </a:lnRef>
+          <a:fillRef idx="1">
+            <a:schemeClr val="accent1"/>
+          </a:fillRef>
+          <a:effectRef idx="0">
+            <a:schemeClr val="accent1"/>
+          </a:effectRef>
+          <a:fontRef idx="minor">
+            <a:schemeClr val="lt1"/>
+          </a:fontRef>
+        </p:style>
+        <p:txBody>
+          <a:bodyPr rtlCol="0" anchor="ctr"/>
+          <a:lstStyle/>
+          <a:p>
+            <a:pPr algn="ctr"/>
+            <a:endParaRPr kumimoji="1" lang="ja-JP" altLang="en-US" dirty="0"/>
+          </a:p>
+        </p:txBody>
+      </p:sp>
+      <p:sp>
+        <p:nvSpPr>
+          <p:cNvPr id="39" name="テキスト ボックス 38">
+            <a:extLst>
+              <a:ext uri="{FF2B5EF4-FFF2-40B4-BE49-F238E27FC236}">
+                <a16:creationId xmlns:a16="http://schemas.microsoft.com/office/drawing/2014/main" id="{F86CCD8B-1CE2-4033-B407-543BFD007636}"/>
+              </a:ext>
+            </a:extLst>
+          </p:cNvPr>
+          <p:cNvSpPr txBox="1"/>
+          <p:nvPr/>
+        </p:nvSpPr>
+        <p:spPr>
+          <a:xfrm>
+            <a:off x="6096000" y="5179906"/>
+            <a:ext cx="2646878" cy="461665"/>
+          </a:xfrm>
+          <a:prstGeom prst="rect">
+            <a:avLst/>
+          </a:prstGeom>
+          <a:noFill/>
+        </p:spPr>
+        <p:txBody>
+          <a:bodyPr wrap="none" rtlCol="0">
+            <a:spAutoFit/>
+          </a:bodyPr>
+          <a:lstStyle/>
+          <a:p>
+            <a:r>
+              <a:rPr lang="ja-JP" altLang="en-US" sz="2400" dirty="0"/>
+              <a:t>あとはコピーする</a:t>
+            </a:r>
+            <a:endParaRPr lang="en-US" altLang="ja-JP" sz="2400" dirty="0"/>
+          </a:p>
+        </p:txBody>
+      </p:sp>
+      <p:sp>
+        <p:nvSpPr>
+          <p:cNvPr id="40" name="矢印: 右 39">
+            <a:extLst>
+              <a:ext uri="{FF2B5EF4-FFF2-40B4-BE49-F238E27FC236}">
+                <a16:creationId xmlns:a16="http://schemas.microsoft.com/office/drawing/2014/main" id="{19AC3BDC-F1BB-461D-B266-5A272E3B4D0C}"/>
+              </a:ext>
+            </a:extLst>
+          </p:cNvPr>
+          <p:cNvSpPr/>
+          <p:nvPr/>
+        </p:nvSpPr>
+        <p:spPr>
+          <a:xfrm>
+            <a:off x="3696747" y="3105150"/>
+            <a:ext cx="2221848" cy="647700"/>
+          </a:xfrm>
+          <a:prstGeom prst="rightArrow">
+            <a:avLst/>
+          </a:prstGeom>
+          <a:solidFill>
+            <a:srgbClr val="FF0000"/>
+          </a:solidFill>
+          <a:ln w="38100">
+            <a:solidFill>
+              <a:schemeClr val="tx1"/>
+            </a:solidFill>
+          </a:ln>
+        </p:spPr>
+        <p:style>
+          <a:lnRef idx="2">
+            <a:schemeClr val="accent1">
+              <a:shade val="50000"/>
+            </a:schemeClr>
+          </a:lnRef>
+          <a:fillRef idx="1">
+            <a:schemeClr val="accent1"/>
+          </a:fillRef>
+          <a:effectRef idx="0">
+            <a:schemeClr val="accent1"/>
+          </a:effectRef>
+          <a:fontRef idx="minor">
+            <a:schemeClr val="lt1"/>
+          </a:fontRef>
+        </p:style>
+        <p:txBody>
+          <a:bodyPr rtlCol="0" anchor="ctr"/>
+          <a:lstStyle/>
+          <a:p>
+            <a:pPr algn="ctr"/>
+            <a:endParaRPr kumimoji="1" lang="ja-JP" altLang="en-US"/>
+          </a:p>
+        </p:txBody>
+      </p:sp>
+    </p:spTree>
+    <p:extLst>
+      <p:ext uri="{BB962C8B-B14F-4D97-AF65-F5344CB8AC3E}">
+        <p14:creationId xmlns:p14="http://schemas.microsoft.com/office/powerpoint/2010/main" val="1788452148"/>
+      </p:ext>
+    </p:extLst>
+  </p:cSld>
+  <p:clrMapOvr>
+    <a:masterClrMapping/>
+  </p:clrMapOvr>
+</p:sld>
+</file>
+
+<file path=ppt/slides/slide19.xml><?xml version="1.0" encoding="utf-8"?>
+<p:sld xmlns:a="http://schemas.openxmlformats.org/drawingml/2006/main" xmlns:r="http://schemas.openxmlformats.org/officeDocument/2006/relationships" xmlns:p="http://schemas.openxmlformats.org/presentationml/2006/main">
+  <p:cSld>
+    <p:spTree>
+      <p:nvGrpSpPr>
+        <p:cNvPr id="1" name=""/>
+        <p:cNvGrpSpPr/>
+        <p:nvPr/>
+      </p:nvGrpSpPr>
+      <p:grpSpPr>
+        <a:xfrm>
+          <a:off x="0" y="0"/>
+          <a:ext cx="0" cy="0"/>
+          <a:chOff x="0" y="0"/>
+          <a:chExt cx="0" cy="0"/>
+        </a:xfrm>
+      </p:grpSpPr>
+      <p:sp>
+        <p:nvSpPr>
+          <p:cNvPr id="4" name="テキスト ボックス 3">
+            <a:extLst>
+              <a:ext uri="{FF2B5EF4-FFF2-40B4-BE49-F238E27FC236}">
+                <a16:creationId xmlns:a16="http://schemas.microsoft.com/office/drawing/2014/main" id="{5A13BF46-B8C5-48AA-8308-C9ECFF431A18}"/>
+              </a:ext>
+            </a:extLst>
+          </p:cNvPr>
+          <p:cNvSpPr txBox="1"/>
+          <p:nvPr/>
+        </p:nvSpPr>
+        <p:spPr>
+          <a:xfrm>
+            <a:off x="567542" y="491954"/>
+            <a:ext cx="6046848" cy="584775"/>
+          </a:xfrm>
+          <a:prstGeom prst="rect">
+            <a:avLst/>
+          </a:prstGeom>
+          <a:noFill/>
+        </p:spPr>
+        <p:txBody>
+          <a:bodyPr wrap="none" rtlCol="0">
+            <a:spAutoFit/>
+          </a:bodyPr>
+          <a:lstStyle/>
+          <a:p>
+            <a:r>
+              <a:rPr kumimoji="1" lang="ja-JP" altLang="en-US" sz="3200" b="1" u="sng" dirty="0"/>
+              <a:t>オブジェクトの複数配置 問題点</a:t>
+            </a:r>
+            <a:endParaRPr kumimoji="1" lang="en-US" altLang="ja-JP" sz="3200" b="1" u="sng" dirty="0"/>
+          </a:p>
+        </p:txBody>
+      </p:sp>
+      <p:sp>
+        <p:nvSpPr>
+          <p:cNvPr id="6" name="テキスト ボックス 5">
+            <a:extLst>
+              <a:ext uri="{FF2B5EF4-FFF2-40B4-BE49-F238E27FC236}">
+                <a16:creationId xmlns:a16="http://schemas.microsoft.com/office/drawing/2014/main" id="{55830AD6-028B-4C4E-80BF-B70DFC1C3A46}"/>
+              </a:ext>
+            </a:extLst>
+          </p:cNvPr>
+          <p:cNvSpPr txBox="1"/>
+          <p:nvPr/>
+        </p:nvSpPr>
+        <p:spPr>
+          <a:xfrm>
+            <a:off x="567542" y="1216429"/>
+            <a:ext cx="6135013" cy="461665"/>
+          </a:xfrm>
+          <a:prstGeom prst="rect">
+            <a:avLst/>
+          </a:prstGeom>
+          <a:noFill/>
+        </p:spPr>
+        <p:txBody>
+          <a:bodyPr wrap="none" rtlCol="0">
+            <a:spAutoFit/>
+          </a:bodyPr>
+          <a:lstStyle/>
+          <a:p>
+            <a:r>
+              <a:rPr lang="en-US" altLang="ja-JP" sz="2400" dirty="0" err="1"/>
+              <a:t>Dxlib</a:t>
+            </a:r>
+            <a:r>
+              <a:rPr lang="ja-JP" altLang="en-US" sz="2400" dirty="0"/>
+              <a:t>にはそのコピーする関数があります。</a:t>
+            </a:r>
+            <a:endParaRPr lang="en-US" altLang="ja-JP" sz="2400" dirty="0"/>
+          </a:p>
+        </p:txBody>
+      </p:sp>
+      <p:pic>
+        <p:nvPicPr>
+          <p:cNvPr id="3" name="図 2">
+            <a:extLst>
+              <a:ext uri="{FF2B5EF4-FFF2-40B4-BE49-F238E27FC236}">
+                <a16:creationId xmlns:a16="http://schemas.microsoft.com/office/drawing/2014/main" id="{7D4D1BF9-AF11-4F06-A772-39A6A114071D}"/>
+              </a:ext>
+            </a:extLst>
+          </p:cNvPr>
+          <p:cNvPicPr>
+            <a:picLocks noChangeAspect="1"/>
+          </p:cNvPicPr>
+          <p:nvPr/>
+        </p:nvPicPr>
+        <p:blipFill>
+          <a:blip r:embed="rId2">
+            <a:extLst>
+              <a:ext uri="{28A0092B-C50C-407E-A947-70E740481C1C}">
+                <a14:useLocalDpi xmlns:a14="http://schemas.microsoft.com/office/drawing/2010/main" val="0"/>
+              </a:ext>
+            </a:extLst>
+          </a:blip>
+          <a:stretch>
+            <a:fillRect/>
+          </a:stretch>
+        </p:blipFill>
+        <p:spPr>
+          <a:xfrm>
+            <a:off x="567541" y="1817794"/>
+            <a:ext cx="10392165" cy="2944706"/>
+          </a:xfrm>
+          <a:prstGeom prst="rect">
+            <a:avLst/>
+          </a:prstGeom>
+        </p:spPr>
+      </p:pic>
+    </p:spTree>
+    <p:extLst>
+      <p:ext uri="{BB962C8B-B14F-4D97-AF65-F5344CB8AC3E}">
+        <p14:creationId xmlns:p14="http://schemas.microsoft.com/office/powerpoint/2010/main" val="2632728014"/>
+      </p:ext>
+    </p:extLst>
+  </p:cSld>
+  <p:clrMapOvr>
+    <a:masterClrMapping/>
+  </p:clrMapOvr>
+</p:sld>
+</file>
+
+<file path=ppt/slides/slide2.xml><?xml version="1.0" encoding="utf-8"?>
+<p:sld xmlns:a="http://schemas.openxmlformats.org/drawingml/2006/main" xmlns:r="http://schemas.openxmlformats.org/officeDocument/2006/relationships" xmlns:p="http://schemas.openxmlformats.org/presentationml/2006/main">
+  <p:cSld>
+    <p:spTree>
+      <p:nvGrpSpPr>
+        <p:cNvPr id="1" name=""/>
+        <p:cNvGrpSpPr/>
+        <p:nvPr/>
+      </p:nvGrpSpPr>
+      <p:grpSpPr>
+        <a:xfrm>
+          <a:off x="0" y="0"/>
+          <a:ext cx="0" cy="0"/>
+          <a:chOff x="0" y="0"/>
+          <a:chExt cx="0" cy="0"/>
+        </a:xfrm>
+      </p:grpSpPr>
+      <p:sp>
+        <p:nvSpPr>
+          <p:cNvPr id="4" name="テキスト ボックス 3">
+            <a:extLst>
+              <a:ext uri="{FF2B5EF4-FFF2-40B4-BE49-F238E27FC236}">
+                <a16:creationId xmlns:a16="http://schemas.microsoft.com/office/drawing/2014/main" id="{5A13BF46-B8C5-48AA-8308-C9ECFF431A18}"/>
+              </a:ext>
+            </a:extLst>
+          </p:cNvPr>
+          <p:cNvSpPr txBox="1"/>
+          <p:nvPr/>
+        </p:nvSpPr>
+        <p:spPr>
+          <a:xfrm>
+            <a:off x="567542" y="491954"/>
+            <a:ext cx="4698722" cy="584775"/>
+          </a:xfrm>
+          <a:prstGeom prst="rect">
+            <a:avLst/>
+          </a:prstGeom>
+          <a:noFill/>
+        </p:spPr>
+        <p:txBody>
+          <a:bodyPr wrap="none" rtlCol="0">
+            <a:spAutoFit/>
+          </a:bodyPr>
+          <a:lstStyle/>
+          <a:p>
+            <a:r>
+              <a:rPr kumimoji="1" lang="ja-JP" altLang="en-US" sz="3200" b="1" u="sng" dirty="0"/>
+              <a:t>オブジェクトの複数配置</a:t>
+            </a:r>
+            <a:endParaRPr kumimoji="1" lang="en-US" altLang="ja-JP" sz="3200" b="1" u="sng" dirty="0"/>
+          </a:p>
+        </p:txBody>
+      </p:sp>
+      <p:sp>
+        <p:nvSpPr>
+          <p:cNvPr id="6" name="テキスト ボックス 5">
+            <a:extLst>
+              <a:ext uri="{FF2B5EF4-FFF2-40B4-BE49-F238E27FC236}">
+                <a16:creationId xmlns:a16="http://schemas.microsoft.com/office/drawing/2014/main" id="{55830AD6-028B-4C4E-80BF-B70DFC1C3A46}"/>
+              </a:ext>
+            </a:extLst>
+          </p:cNvPr>
+          <p:cNvSpPr txBox="1"/>
+          <p:nvPr/>
+        </p:nvSpPr>
+        <p:spPr>
+          <a:xfrm>
+            <a:off x="567542" y="1216429"/>
+            <a:ext cx="8467383" cy="830997"/>
+          </a:xfrm>
+          <a:prstGeom prst="rect">
+            <a:avLst/>
+          </a:prstGeom>
+          <a:noFill/>
+        </p:spPr>
+        <p:txBody>
+          <a:bodyPr wrap="none" rtlCol="0">
+            <a:spAutoFit/>
+          </a:bodyPr>
+          <a:lstStyle/>
+          <a:p>
+            <a:r>
+              <a:rPr kumimoji="1" lang="ja-JP" altLang="en-US" sz="2400" dirty="0"/>
+              <a:t>ブロックを複数管理して配置まで実装します。</a:t>
+            </a:r>
+            <a:endParaRPr kumimoji="1" lang="en-US" altLang="ja-JP" sz="2400" dirty="0"/>
+          </a:p>
+          <a:p>
+            <a:r>
+              <a:rPr lang="ja-JP" altLang="en-US" sz="2400" dirty="0"/>
+              <a:t>配布したプロジェクトの</a:t>
+            </a:r>
+            <a:r>
+              <a:rPr lang="en-US" altLang="ja-JP" sz="2400" b="1" dirty="0" err="1">
+                <a:solidFill>
+                  <a:srgbClr val="FF0000"/>
+                </a:solidFill>
+              </a:rPr>
+              <a:t>BlockManager.h</a:t>
+            </a:r>
+            <a:r>
+              <a:rPr lang="ja-JP" altLang="en-US" sz="2400" dirty="0"/>
+              <a:t>を開きましょう。</a:t>
+            </a:r>
+            <a:endParaRPr kumimoji="1" lang="en-US" altLang="ja-JP" sz="2400" dirty="0"/>
+          </a:p>
+        </p:txBody>
+      </p:sp>
+      <p:pic>
+        <p:nvPicPr>
+          <p:cNvPr id="5" name="図 4">
+            <a:extLst>
+              <a:ext uri="{FF2B5EF4-FFF2-40B4-BE49-F238E27FC236}">
+                <a16:creationId xmlns:a16="http://schemas.microsoft.com/office/drawing/2014/main" id="{B24B0C31-A85D-48A4-8AEE-C28C30CC38DE}"/>
+              </a:ext>
+            </a:extLst>
+          </p:cNvPr>
+          <p:cNvPicPr>
+            <a:picLocks noChangeAspect="1"/>
+          </p:cNvPicPr>
+          <p:nvPr/>
+        </p:nvPicPr>
+        <p:blipFill>
+          <a:blip r:embed="rId2">
+            <a:extLst>
+              <a:ext uri="{28A0092B-C50C-407E-A947-70E740481C1C}">
+                <a14:useLocalDpi xmlns:a14="http://schemas.microsoft.com/office/drawing/2010/main" val="0"/>
+              </a:ext>
+            </a:extLst>
+          </a:blip>
+          <a:stretch>
+            <a:fillRect/>
+          </a:stretch>
+        </p:blipFill>
+        <p:spPr>
+          <a:xfrm>
+            <a:off x="567543" y="2187126"/>
+            <a:ext cx="5820558" cy="4310765"/>
+          </a:xfrm>
+          <a:prstGeom prst="rect">
+            <a:avLst/>
+          </a:prstGeom>
+        </p:spPr>
+      </p:pic>
+    </p:spTree>
+    <p:extLst>
+      <p:ext uri="{BB962C8B-B14F-4D97-AF65-F5344CB8AC3E}">
+        <p14:creationId xmlns:p14="http://schemas.microsoft.com/office/powerpoint/2010/main" val="2896326812"/>
+      </p:ext>
+    </p:extLst>
+  </p:cSld>
+  <p:clrMapOvr>
+    <a:masterClrMapping/>
+  </p:clrMapOvr>
+</p:sld>
+</file>
+
+<file path=ppt/slides/slide20.xml><?xml version="1.0" encoding="utf-8"?>
+<p:sld xmlns:a="http://schemas.openxmlformats.org/drawingml/2006/main" xmlns:r="http://schemas.openxmlformats.org/officeDocument/2006/relationships" xmlns:p="http://schemas.openxmlformats.org/presentationml/2006/main">
+  <p:cSld>
+    <p:spTree>
+      <p:nvGrpSpPr>
+        <p:cNvPr id="1" name=""/>
+        <p:cNvGrpSpPr/>
+        <p:nvPr/>
+      </p:nvGrpSpPr>
+      <p:grpSpPr>
+        <a:xfrm>
+          <a:off x="0" y="0"/>
+          <a:ext cx="0" cy="0"/>
+          <a:chOff x="0" y="0"/>
+          <a:chExt cx="0" cy="0"/>
+        </a:xfrm>
+      </p:grpSpPr>
+      <p:sp>
+        <p:nvSpPr>
+          <p:cNvPr id="4" name="テキスト ボックス 3">
+            <a:extLst>
+              <a:ext uri="{FF2B5EF4-FFF2-40B4-BE49-F238E27FC236}">
+                <a16:creationId xmlns:a16="http://schemas.microsoft.com/office/drawing/2014/main" id="{5A13BF46-B8C5-48AA-8308-C9ECFF431A18}"/>
+              </a:ext>
+            </a:extLst>
+          </p:cNvPr>
+          <p:cNvSpPr txBox="1"/>
+          <p:nvPr/>
+        </p:nvSpPr>
+        <p:spPr>
+          <a:xfrm>
+            <a:off x="567542" y="491954"/>
+            <a:ext cx="6046848" cy="584775"/>
+          </a:xfrm>
+          <a:prstGeom prst="rect">
+            <a:avLst/>
+          </a:prstGeom>
+          <a:noFill/>
+        </p:spPr>
+        <p:txBody>
+          <a:bodyPr wrap="none" rtlCol="0">
+            <a:spAutoFit/>
+          </a:bodyPr>
+          <a:lstStyle/>
+          <a:p>
+            <a:r>
+              <a:rPr kumimoji="1" lang="ja-JP" altLang="en-US" sz="3200" b="1" u="sng" dirty="0"/>
+              <a:t>オブジェクトの複数配置 問題点</a:t>
+            </a:r>
+            <a:endParaRPr kumimoji="1" lang="en-US" altLang="ja-JP" sz="3200" b="1" u="sng" dirty="0"/>
+          </a:p>
+        </p:txBody>
+      </p:sp>
+      <p:sp>
+        <p:nvSpPr>
+          <p:cNvPr id="6" name="テキスト ボックス 5">
+            <a:extLst>
+              <a:ext uri="{FF2B5EF4-FFF2-40B4-BE49-F238E27FC236}">
+                <a16:creationId xmlns:a16="http://schemas.microsoft.com/office/drawing/2014/main" id="{55830AD6-028B-4C4E-80BF-B70DFC1C3A46}"/>
+              </a:ext>
+            </a:extLst>
+          </p:cNvPr>
+          <p:cNvSpPr txBox="1"/>
+          <p:nvPr/>
+        </p:nvSpPr>
+        <p:spPr>
+          <a:xfrm>
+            <a:off x="567542" y="1216429"/>
+            <a:ext cx="9725739" cy="1200329"/>
+          </a:xfrm>
+          <a:prstGeom prst="rect">
+            <a:avLst/>
+          </a:prstGeom>
+          <a:noFill/>
+        </p:spPr>
+        <p:txBody>
+          <a:bodyPr wrap="none" rtlCol="0">
+            <a:spAutoFit/>
+          </a:bodyPr>
+          <a:lstStyle/>
+          <a:p>
+            <a:r>
+              <a:rPr lang="ja-JP" altLang="en-US" sz="2400" dirty="0"/>
+              <a:t>ロード処理を修正します。</a:t>
+            </a:r>
+            <a:endParaRPr lang="en-US" altLang="ja-JP" sz="2400" dirty="0"/>
+          </a:p>
+          <a:p>
+            <a:r>
+              <a:rPr lang="ja-JP" altLang="en-US" sz="2400" b="1" dirty="0">
+                <a:solidFill>
+                  <a:srgbClr val="FF0000"/>
+                </a:solidFill>
+              </a:rPr>
+              <a:t>ロードは１度だけ</a:t>
+            </a:r>
+            <a:r>
+              <a:rPr lang="ja-JP" altLang="en-US" sz="2400" dirty="0"/>
+              <a:t>行うので、今回はマネージャークラスで行います。</a:t>
+            </a:r>
+            <a:endParaRPr lang="en-US" altLang="ja-JP" sz="2400" dirty="0"/>
+          </a:p>
+          <a:p>
+            <a:r>
+              <a:rPr lang="en-US" altLang="ja-JP" sz="2400" b="1" dirty="0" err="1">
+                <a:solidFill>
+                  <a:srgbClr val="00B050"/>
+                </a:solidFill>
+              </a:rPr>
+              <a:t>BlockManager</a:t>
+            </a:r>
+            <a:r>
+              <a:rPr lang="ja-JP" altLang="en-US" sz="2400" dirty="0"/>
+              <a:t>にメンバ変数を追加しましょう。</a:t>
+            </a:r>
+            <a:endParaRPr lang="en-US" altLang="ja-JP" sz="2400" dirty="0"/>
+          </a:p>
+        </p:txBody>
+      </p:sp>
+      <p:pic>
+        <p:nvPicPr>
+          <p:cNvPr id="5" name="図 4">
+            <a:extLst>
+              <a:ext uri="{FF2B5EF4-FFF2-40B4-BE49-F238E27FC236}">
+                <a16:creationId xmlns:a16="http://schemas.microsoft.com/office/drawing/2014/main" id="{7CF9FAB3-4E0A-4BFB-B86A-52ED6507CE7A}"/>
+              </a:ext>
+            </a:extLst>
+          </p:cNvPr>
+          <p:cNvPicPr>
+            <a:picLocks noChangeAspect="1"/>
+          </p:cNvPicPr>
+          <p:nvPr/>
+        </p:nvPicPr>
+        <p:blipFill>
+          <a:blip r:embed="rId2">
+            <a:extLst>
+              <a:ext uri="{28A0092B-C50C-407E-A947-70E740481C1C}">
+                <a14:useLocalDpi xmlns:a14="http://schemas.microsoft.com/office/drawing/2010/main" val="0"/>
+              </a:ext>
+            </a:extLst>
+          </a:blip>
+          <a:stretch>
+            <a:fillRect/>
+          </a:stretch>
+        </p:blipFill>
+        <p:spPr>
+          <a:xfrm>
+            <a:off x="567542" y="2556458"/>
+            <a:ext cx="9800012" cy="2523542"/>
+          </a:xfrm>
+          <a:prstGeom prst="rect">
+            <a:avLst/>
+          </a:prstGeom>
+        </p:spPr>
+      </p:pic>
+      <p:sp>
+        <p:nvSpPr>
+          <p:cNvPr id="7" name="正方形/長方形 6">
+            <a:extLst>
+              <a:ext uri="{FF2B5EF4-FFF2-40B4-BE49-F238E27FC236}">
+                <a16:creationId xmlns:a16="http://schemas.microsoft.com/office/drawing/2014/main" id="{86596066-9FE9-4973-8726-2ED0299E1E79}"/>
+              </a:ext>
+            </a:extLst>
+          </p:cNvPr>
+          <p:cNvSpPr/>
+          <p:nvPr/>
+        </p:nvSpPr>
+        <p:spPr>
+          <a:xfrm>
+            <a:off x="2463800" y="3429000"/>
+            <a:ext cx="7226300" cy="1295400"/>
+          </a:xfrm>
+          <a:prstGeom prst="rect">
+            <a:avLst/>
+          </a:prstGeom>
+          <a:noFill/>
+          <a:ln w="38100">
+            <a:solidFill>
+              <a:srgbClr val="FF0000"/>
+            </a:solidFill>
+          </a:ln>
+        </p:spPr>
+        <p:style>
+          <a:lnRef idx="2">
+            <a:schemeClr val="accent1">
+              <a:shade val="50000"/>
+            </a:schemeClr>
+          </a:lnRef>
+          <a:fillRef idx="1">
+            <a:schemeClr val="accent1"/>
+          </a:fillRef>
+          <a:effectRef idx="0">
+            <a:schemeClr val="accent1"/>
+          </a:effectRef>
+          <a:fontRef idx="minor">
+            <a:schemeClr val="lt1"/>
+          </a:fontRef>
+        </p:style>
+        <p:txBody>
+          <a:bodyPr rtlCol="0" anchor="ctr"/>
+          <a:lstStyle/>
+          <a:p>
+            <a:pPr algn="ctr"/>
+            <a:endParaRPr kumimoji="1" lang="ja-JP" altLang="en-US"/>
+          </a:p>
+        </p:txBody>
+      </p:sp>
+      <p:sp>
+        <p:nvSpPr>
+          <p:cNvPr id="8" name="テキスト ボックス 7">
+            <a:extLst>
+              <a:ext uri="{FF2B5EF4-FFF2-40B4-BE49-F238E27FC236}">
+                <a16:creationId xmlns:a16="http://schemas.microsoft.com/office/drawing/2014/main" id="{50A5F0AF-44F9-4538-8B2B-D45ECB1C2E33}"/>
+              </a:ext>
+            </a:extLst>
+          </p:cNvPr>
+          <p:cNvSpPr txBox="1"/>
+          <p:nvPr/>
+        </p:nvSpPr>
+        <p:spPr>
+          <a:xfrm>
+            <a:off x="567541" y="5219700"/>
+            <a:ext cx="7398179" cy="461665"/>
+          </a:xfrm>
+          <a:prstGeom prst="rect">
+            <a:avLst/>
+          </a:prstGeom>
+          <a:noFill/>
+        </p:spPr>
+        <p:txBody>
+          <a:bodyPr wrap="none" rtlCol="0">
+            <a:spAutoFit/>
+          </a:bodyPr>
+          <a:lstStyle/>
+          <a:p>
+            <a:r>
+              <a:rPr lang="en-US" altLang="ja-JP" sz="2400" b="1" dirty="0" err="1">
+                <a:solidFill>
+                  <a:srgbClr val="0070C0"/>
+                </a:solidFill>
+              </a:rPr>
+              <a:t>m_Handle</a:t>
+            </a:r>
+            <a:r>
+              <a:rPr lang="ja-JP" altLang="en-US" sz="2400" dirty="0"/>
+              <a:t>はコンストラクタで</a:t>
+            </a:r>
+            <a:r>
+              <a:rPr lang="en-US" altLang="ja-JP" sz="2400" dirty="0"/>
+              <a:t>0</a:t>
+            </a:r>
+            <a:r>
+              <a:rPr lang="ja-JP" altLang="en-US" sz="2400" dirty="0"/>
+              <a:t>初期化しましょう。</a:t>
+            </a:r>
+            <a:endParaRPr lang="en-US" altLang="ja-JP" sz="2400" dirty="0"/>
+          </a:p>
+        </p:txBody>
+      </p:sp>
+    </p:spTree>
+    <p:extLst>
+      <p:ext uri="{BB962C8B-B14F-4D97-AF65-F5344CB8AC3E}">
+        <p14:creationId xmlns:p14="http://schemas.microsoft.com/office/powerpoint/2010/main" val="731176080"/>
+      </p:ext>
+    </p:extLst>
+  </p:cSld>
+  <p:clrMapOvr>
+    <a:masterClrMapping/>
+  </p:clrMapOvr>
+</p:sld>
+</file>
+
 <file path=ppt/slides/slide21.xml><?xml version="1.0" encoding="utf-8"?>
 <p:sld xmlns:a="http://schemas.openxmlformats.org/drawingml/2006/main" xmlns:r="http://schemas.openxmlformats.org/officeDocument/2006/relationships" xmlns:p="http://schemas.openxmlformats.org/presentationml/2006/main">
   <p:cSld>
@@ -6973,7 +6793,7 @@
         <p:spPr>
           <a:xfrm>
             <a:off x="567542" y="1216429"/>
-            <a:ext cx="8802410" cy="830997"/>
+            <a:ext cx="7882286" cy="461665"/>
           </a:xfrm>
           <a:prstGeom prst="rect">
             <a:avLst/>
@@ -6987,566 +6807,61 @@
           <a:lstStyle/>
           <a:p>
             <a:r>
+              <a:rPr lang="en-US" altLang="ja-JP" sz="2400" b="1" dirty="0" err="1">
+                <a:solidFill>
+                  <a:srgbClr val="00B050"/>
+                </a:solidFill>
+              </a:rPr>
+              <a:t>BlockManager</a:t>
+            </a:r>
+            <a:r>
               <a:rPr lang="ja-JP" altLang="en-US" sz="2400" dirty="0"/>
-              <a:t>同じ画像が複数必要な場合は、</a:t>
+              <a:t>のロード関数でモデルをロードします。</a:t>
             </a:r>
             <a:endParaRPr lang="en-US" altLang="ja-JP" sz="2400" dirty="0"/>
           </a:p>
-          <a:p>
-            <a:r>
-              <a:rPr lang="ja-JP" altLang="en-US" sz="2400" dirty="0"/>
-              <a:t>１度だけロードして、その後はコピーすると効率が良いです。</a:t>
-            </a:r>
-            <a:endParaRPr lang="en-US" altLang="ja-JP" sz="2400" dirty="0"/>
-          </a:p>
-        </p:txBody>
-      </p:sp>
-      <p:sp>
-        <p:nvSpPr>
-          <p:cNvPr id="29" name="直方体 28">
-            <a:extLst>
-              <a:ext uri="{FF2B5EF4-FFF2-40B4-BE49-F238E27FC236}">
-                <a16:creationId xmlns:a16="http://schemas.microsoft.com/office/drawing/2014/main" id="{B71D7A3B-C72B-4E32-8A82-C0900EE8AA85}"/>
-              </a:ext>
-            </a:extLst>
-          </p:cNvPr>
-          <p:cNvSpPr/>
-          <p:nvPr/>
-        </p:nvSpPr>
-        <p:spPr>
-          <a:xfrm>
-            <a:off x="1543151" y="3397546"/>
-            <a:ext cx="1054100" cy="983976"/>
-          </a:xfrm>
-          <a:prstGeom prst="cube">
-            <a:avLst/>
-          </a:prstGeom>
-        </p:spPr>
-        <p:style>
-          <a:lnRef idx="2">
-            <a:schemeClr val="accent1">
-              <a:shade val="50000"/>
-            </a:schemeClr>
-          </a:lnRef>
-          <a:fillRef idx="1">
-            <a:schemeClr val="accent1"/>
-          </a:fillRef>
-          <a:effectRef idx="0">
-            <a:schemeClr val="accent1"/>
-          </a:effectRef>
-          <a:fontRef idx="minor">
-            <a:schemeClr val="lt1"/>
-          </a:fontRef>
-        </p:style>
-        <p:txBody>
-          <a:bodyPr rtlCol="0" anchor="ctr"/>
-          <a:lstStyle/>
-          <a:p>
-            <a:pPr algn="ctr"/>
-            <a:endParaRPr kumimoji="1" lang="ja-JP" altLang="en-US" dirty="0"/>
-          </a:p>
-        </p:txBody>
-      </p:sp>
-      <p:sp>
-        <p:nvSpPr>
-          <p:cNvPr id="30" name="円柱 29">
-            <a:extLst>
-              <a:ext uri="{FF2B5EF4-FFF2-40B4-BE49-F238E27FC236}">
-                <a16:creationId xmlns:a16="http://schemas.microsoft.com/office/drawing/2014/main" id="{856E0899-A956-4C92-838F-1D21DE092963}"/>
-              </a:ext>
-            </a:extLst>
-          </p:cNvPr>
-          <p:cNvSpPr/>
-          <p:nvPr/>
-        </p:nvSpPr>
-        <p:spPr>
-          <a:xfrm>
-            <a:off x="806550" y="2209559"/>
-            <a:ext cx="2593340" cy="2855877"/>
-          </a:xfrm>
-          <a:prstGeom prst="can">
-            <a:avLst/>
-          </a:prstGeom>
-          <a:noFill/>
-        </p:spPr>
-        <p:style>
-          <a:lnRef idx="2">
-            <a:schemeClr val="accent1">
-              <a:shade val="50000"/>
-            </a:schemeClr>
-          </a:lnRef>
-          <a:fillRef idx="1">
-            <a:schemeClr val="accent1"/>
-          </a:fillRef>
-          <a:effectRef idx="0">
-            <a:schemeClr val="accent1"/>
-          </a:effectRef>
-          <a:fontRef idx="minor">
-            <a:schemeClr val="lt1"/>
-          </a:fontRef>
-        </p:style>
-        <p:txBody>
-          <a:bodyPr rtlCol="0" anchor="ctr"/>
-          <a:lstStyle/>
-          <a:p>
-            <a:pPr algn="ctr"/>
-            <a:endParaRPr kumimoji="1" lang="ja-JP" altLang="en-US"/>
-          </a:p>
-        </p:txBody>
-      </p:sp>
-      <p:sp>
-        <p:nvSpPr>
-          <p:cNvPr id="31" name="テキスト ボックス 30">
-            <a:extLst>
-              <a:ext uri="{FF2B5EF4-FFF2-40B4-BE49-F238E27FC236}">
-                <a16:creationId xmlns:a16="http://schemas.microsoft.com/office/drawing/2014/main" id="{D1858A99-8ACD-4111-947B-0E528C87F301}"/>
-              </a:ext>
-            </a:extLst>
-          </p:cNvPr>
-          <p:cNvSpPr txBox="1"/>
-          <p:nvPr/>
-        </p:nvSpPr>
-        <p:spPr>
-          <a:xfrm>
-            <a:off x="567542" y="5179906"/>
-            <a:ext cx="3262432" cy="461665"/>
+        </p:txBody>
+      </p:sp>
+      <p:pic>
+        <p:nvPicPr>
+          <p:cNvPr id="10" name="図 9">
+            <a:extLst>
+              <a:ext uri="{FF2B5EF4-FFF2-40B4-BE49-F238E27FC236}">
+                <a16:creationId xmlns:a16="http://schemas.microsoft.com/office/drawing/2014/main" id="{09F05AC2-9A35-4F06-A557-5EF8934876FC}"/>
+              </a:ext>
+            </a:extLst>
+          </p:cNvPr>
+          <p:cNvPicPr>
+            <a:picLocks noChangeAspect="1"/>
+          </p:cNvPicPr>
+          <p:nvPr/>
+        </p:nvPicPr>
+        <p:blipFill>
+          <a:blip r:embed="rId2">
+            <a:extLst>
+              <a:ext uri="{28A0092B-C50C-407E-A947-70E740481C1C}">
+                <a14:useLocalDpi xmlns:a14="http://schemas.microsoft.com/office/drawing/2010/main" val="0"/>
+              </a:ext>
+            </a:extLst>
+          </a:blip>
+          <a:stretch>
+            <a:fillRect/>
+          </a:stretch>
+        </p:blipFill>
+        <p:spPr>
+          <a:xfrm>
+            <a:off x="567542" y="1817794"/>
+            <a:ext cx="10220024" cy="1801706"/>
           </a:xfrm>
           <a:prstGeom prst="rect">
             <a:avLst/>
           </a:prstGeom>
-          <a:noFill/>
-        </p:spPr>
-        <p:txBody>
-          <a:bodyPr wrap="none" rtlCol="0">
-            <a:spAutoFit/>
-          </a:bodyPr>
-          <a:lstStyle/>
-          <a:p>
-            <a:r>
-              <a:rPr lang="ja-JP" altLang="en-US" sz="2400" dirty="0"/>
-              <a:t>１度ロードして。。。</a:t>
-            </a:r>
-            <a:endParaRPr lang="en-US" altLang="ja-JP" sz="2400" dirty="0"/>
-          </a:p>
-        </p:txBody>
-      </p:sp>
-      <p:sp>
-        <p:nvSpPr>
-          <p:cNvPr id="32" name="直方体 31">
-            <a:extLst>
-              <a:ext uri="{FF2B5EF4-FFF2-40B4-BE49-F238E27FC236}">
-                <a16:creationId xmlns:a16="http://schemas.microsoft.com/office/drawing/2014/main" id="{D7A13C9A-D116-47FB-B317-D1F7D52456CB}"/>
-              </a:ext>
-            </a:extLst>
-          </p:cNvPr>
-          <p:cNvSpPr/>
-          <p:nvPr/>
-        </p:nvSpPr>
-        <p:spPr>
-          <a:xfrm>
-            <a:off x="6335008" y="3192017"/>
-            <a:ext cx="461157" cy="411057"/>
-          </a:xfrm>
-          <a:prstGeom prst="cube">
-            <a:avLst/>
-          </a:prstGeom>
-        </p:spPr>
-        <p:style>
-          <a:lnRef idx="2">
-            <a:schemeClr val="accent1">
-              <a:shade val="50000"/>
-            </a:schemeClr>
-          </a:lnRef>
-          <a:fillRef idx="1">
-            <a:schemeClr val="accent1"/>
-          </a:fillRef>
-          <a:effectRef idx="0">
-            <a:schemeClr val="accent1"/>
-          </a:effectRef>
-          <a:fontRef idx="minor">
-            <a:schemeClr val="lt1"/>
-          </a:fontRef>
-        </p:style>
-        <p:txBody>
-          <a:bodyPr rtlCol="0" anchor="ctr"/>
-          <a:lstStyle/>
-          <a:p>
-            <a:pPr algn="ctr"/>
-            <a:endParaRPr kumimoji="1" lang="ja-JP" altLang="en-US" dirty="0"/>
-          </a:p>
-        </p:txBody>
-      </p:sp>
-      <p:sp>
-        <p:nvSpPr>
-          <p:cNvPr id="33" name="円柱 32">
-            <a:extLst>
-              <a:ext uri="{FF2B5EF4-FFF2-40B4-BE49-F238E27FC236}">
-                <a16:creationId xmlns:a16="http://schemas.microsoft.com/office/drawing/2014/main" id="{2C07F27A-4C32-478E-856F-80D889F69BB5}"/>
-              </a:ext>
-            </a:extLst>
-          </p:cNvPr>
-          <p:cNvSpPr/>
-          <p:nvPr/>
-        </p:nvSpPr>
-        <p:spPr>
-          <a:xfrm>
-            <a:off x="6077050" y="2209559"/>
-            <a:ext cx="2593340" cy="2855877"/>
-          </a:xfrm>
-          <a:prstGeom prst="can">
-            <a:avLst/>
-          </a:prstGeom>
-          <a:noFill/>
-        </p:spPr>
-        <p:style>
-          <a:lnRef idx="2">
-            <a:schemeClr val="accent1">
-              <a:shade val="50000"/>
-            </a:schemeClr>
-          </a:lnRef>
-          <a:fillRef idx="1">
-            <a:schemeClr val="accent1"/>
-          </a:fillRef>
-          <a:effectRef idx="0">
-            <a:schemeClr val="accent1"/>
-          </a:effectRef>
-          <a:fontRef idx="minor">
-            <a:schemeClr val="lt1"/>
-          </a:fontRef>
-        </p:style>
-        <p:txBody>
-          <a:bodyPr rtlCol="0" anchor="ctr"/>
-          <a:lstStyle/>
-          <a:p>
-            <a:pPr algn="ctr"/>
-            <a:endParaRPr kumimoji="1" lang="ja-JP" altLang="en-US"/>
-          </a:p>
-        </p:txBody>
-      </p:sp>
-      <p:sp>
-        <p:nvSpPr>
-          <p:cNvPr id="34" name="直方体 33">
-            <a:extLst>
-              <a:ext uri="{FF2B5EF4-FFF2-40B4-BE49-F238E27FC236}">
-                <a16:creationId xmlns:a16="http://schemas.microsoft.com/office/drawing/2014/main" id="{F08B3BE9-485B-41B8-8527-5372EA142EB7}"/>
-              </a:ext>
-            </a:extLst>
-          </p:cNvPr>
-          <p:cNvSpPr/>
-          <p:nvPr/>
-        </p:nvSpPr>
-        <p:spPr>
-          <a:xfrm>
-            <a:off x="6954620" y="3192016"/>
-            <a:ext cx="461157" cy="411057"/>
-          </a:xfrm>
-          <a:prstGeom prst="cube">
-            <a:avLst/>
-          </a:prstGeom>
-        </p:spPr>
-        <p:style>
-          <a:lnRef idx="2">
-            <a:schemeClr val="accent1">
-              <a:shade val="50000"/>
-            </a:schemeClr>
-          </a:lnRef>
-          <a:fillRef idx="1">
-            <a:schemeClr val="accent1"/>
-          </a:fillRef>
-          <a:effectRef idx="0">
-            <a:schemeClr val="accent1"/>
-          </a:effectRef>
-          <a:fontRef idx="minor">
-            <a:schemeClr val="lt1"/>
-          </a:fontRef>
-        </p:style>
-        <p:txBody>
-          <a:bodyPr rtlCol="0" anchor="ctr"/>
-          <a:lstStyle/>
-          <a:p>
-            <a:pPr algn="ctr"/>
-            <a:endParaRPr kumimoji="1" lang="ja-JP" altLang="en-US" dirty="0"/>
-          </a:p>
-        </p:txBody>
-      </p:sp>
-      <p:sp>
-        <p:nvSpPr>
-          <p:cNvPr id="35" name="直方体 34">
-            <a:extLst>
-              <a:ext uri="{FF2B5EF4-FFF2-40B4-BE49-F238E27FC236}">
-                <a16:creationId xmlns:a16="http://schemas.microsoft.com/office/drawing/2014/main" id="{709A6337-DA30-4F7E-BF00-58FB807AC70F}"/>
-              </a:ext>
-            </a:extLst>
-          </p:cNvPr>
-          <p:cNvSpPr/>
-          <p:nvPr/>
-        </p:nvSpPr>
-        <p:spPr>
-          <a:xfrm>
-            <a:off x="7673735" y="3189248"/>
-            <a:ext cx="461157" cy="411057"/>
-          </a:xfrm>
-          <a:prstGeom prst="cube">
-            <a:avLst/>
-          </a:prstGeom>
-        </p:spPr>
-        <p:style>
-          <a:lnRef idx="2">
-            <a:schemeClr val="accent1">
-              <a:shade val="50000"/>
-            </a:schemeClr>
-          </a:lnRef>
-          <a:fillRef idx="1">
-            <a:schemeClr val="accent1"/>
-          </a:fillRef>
-          <a:effectRef idx="0">
-            <a:schemeClr val="accent1"/>
-          </a:effectRef>
-          <a:fontRef idx="minor">
-            <a:schemeClr val="lt1"/>
-          </a:fontRef>
-        </p:style>
-        <p:txBody>
-          <a:bodyPr rtlCol="0" anchor="ctr"/>
-          <a:lstStyle/>
-          <a:p>
-            <a:pPr algn="ctr"/>
-            <a:endParaRPr kumimoji="1" lang="ja-JP" altLang="en-US" dirty="0"/>
-          </a:p>
-        </p:txBody>
-      </p:sp>
-      <p:sp>
-        <p:nvSpPr>
-          <p:cNvPr id="36" name="直方体 35">
-            <a:extLst>
-              <a:ext uri="{FF2B5EF4-FFF2-40B4-BE49-F238E27FC236}">
-                <a16:creationId xmlns:a16="http://schemas.microsoft.com/office/drawing/2014/main" id="{11CC015A-DF18-4003-B919-5340E4D1DD58}"/>
-              </a:ext>
-            </a:extLst>
-          </p:cNvPr>
-          <p:cNvSpPr/>
-          <p:nvPr/>
-        </p:nvSpPr>
-        <p:spPr>
-          <a:xfrm>
-            <a:off x="6335008" y="3889534"/>
-            <a:ext cx="461157" cy="411057"/>
-          </a:xfrm>
-          <a:prstGeom prst="cube">
-            <a:avLst/>
-          </a:prstGeom>
-        </p:spPr>
-        <p:style>
-          <a:lnRef idx="2">
-            <a:schemeClr val="accent1">
-              <a:shade val="50000"/>
-            </a:schemeClr>
-          </a:lnRef>
-          <a:fillRef idx="1">
-            <a:schemeClr val="accent1"/>
-          </a:fillRef>
-          <a:effectRef idx="0">
-            <a:schemeClr val="accent1"/>
-          </a:effectRef>
-          <a:fontRef idx="minor">
-            <a:schemeClr val="lt1"/>
-          </a:fontRef>
-        </p:style>
-        <p:txBody>
-          <a:bodyPr rtlCol="0" anchor="ctr"/>
-          <a:lstStyle/>
-          <a:p>
-            <a:pPr algn="ctr"/>
-            <a:endParaRPr kumimoji="1" lang="ja-JP" altLang="en-US" dirty="0"/>
-          </a:p>
-        </p:txBody>
-      </p:sp>
-      <p:sp>
-        <p:nvSpPr>
-          <p:cNvPr id="37" name="直方体 36">
-            <a:extLst>
-              <a:ext uri="{FF2B5EF4-FFF2-40B4-BE49-F238E27FC236}">
-                <a16:creationId xmlns:a16="http://schemas.microsoft.com/office/drawing/2014/main" id="{66E75F4B-AAFB-43E5-BFF3-A70EFA3DEC52}"/>
-              </a:ext>
-            </a:extLst>
-          </p:cNvPr>
-          <p:cNvSpPr/>
-          <p:nvPr/>
-        </p:nvSpPr>
-        <p:spPr>
-          <a:xfrm>
-            <a:off x="7007400" y="3889534"/>
-            <a:ext cx="461157" cy="411057"/>
-          </a:xfrm>
-          <a:prstGeom prst="cube">
-            <a:avLst/>
-          </a:prstGeom>
-        </p:spPr>
-        <p:style>
-          <a:lnRef idx="2">
-            <a:schemeClr val="accent1">
-              <a:shade val="50000"/>
-            </a:schemeClr>
-          </a:lnRef>
-          <a:fillRef idx="1">
-            <a:schemeClr val="accent1"/>
-          </a:fillRef>
-          <a:effectRef idx="0">
-            <a:schemeClr val="accent1"/>
-          </a:effectRef>
-          <a:fontRef idx="minor">
-            <a:schemeClr val="lt1"/>
-          </a:fontRef>
-        </p:style>
-        <p:txBody>
-          <a:bodyPr rtlCol="0" anchor="ctr"/>
-          <a:lstStyle/>
-          <a:p>
-            <a:pPr algn="ctr"/>
-            <a:endParaRPr kumimoji="1" lang="ja-JP" altLang="en-US" dirty="0"/>
-          </a:p>
-        </p:txBody>
-      </p:sp>
-      <p:sp>
-        <p:nvSpPr>
-          <p:cNvPr id="38" name="直方体 37">
-            <a:extLst>
-              <a:ext uri="{FF2B5EF4-FFF2-40B4-BE49-F238E27FC236}">
-                <a16:creationId xmlns:a16="http://schemas.microsoft.com/office/drawing/2014/main" id="{B97CB423-24CD-461A-B596-438D5FB74BEE}"/>
-              </a:ext>
-            </a:extLst>
-          </p:cNvPr>
-          <p:cNvSpPr/>
-          <p:nvPr/>
-        </p:nvSpPr>
-        <p:spPr>
-          <a:xfrm>
-            <a:off x="7677693" y="3889534"/>
-            <a:ext cx="461157" cy="411057"/>
-          </a:xfrm>
-          <a:prstGeom prst="cube">
-            <a:avLst/>
-          </a:prstGeom>
-        </p:spPr>
-        <p:style>
-          <a:lnRef idx="2">
-            <a:schemeClr val="accent1">
-              <a:shade val="50000"/>
-            </a:schemeClr>
-          </a:lnRef>
-          <a:fillRef idx="1">
-            <a:schemeClr val="accent1"/>
-          </a:fillRef>
-          <a:effectRef idx="0">
-            <a:schemeClr val="accent1"/>
-          </a:effectRef>
-          <a:fontRef idx="minor">
-            <a:schemeClr val="lt1"/>
-          </a:fontRef>
-        </p:style>
-        <p:txBody>
-          <a:bodyPr rtlCol="0" anchor="ctr"/>
-          <a:lstStyle/>
-          <a:p>
-            <a:pPr algn="ctr"/>
-            <a:endParaRPr kumimoji="1" lang="ja-JP" altLang="en-US" dirty="0"/>
-          </a:p>
-        </p:txBody>
-      </p:sp>
-      <p:sp>
-        <p:nvSpPr>
-          <p:cNvPr id="39" name="テキスト ボックス 38">
-            <a:extLst>
-              <a:ext uri="{FF2B5EF4-FFF2-40B4-BE49-F238E27FC236}">
-                <a16:creationId xmlns:a16="http://schemas.microsoft.com/office/drawing/2014/main" id="{F86CCD8B-1CE2-4033-B407-543BFD007636}"/>
-              </a:ext>
-            </a:extLst>
-          </p:cNvPr>
-          <p:cNvSpPr txBox="1"/>
-          <p:nvPr/>
-        </p:nvSpPr>
-        <p:spPr>
-          <a:xfrm>
-            <a:off x="6096000" y="5179906"/>
-            <a:ext cx="2646878" cy="461665"/>
-          </a:xfrm>
-          <a:prstGeom prst="rect">
-            <a:avLst/>
-          </a:prstGeom>
-          <a:noFill/>
-        </p:spPr>
-        <p:txBody>
-          <a:bodyPr wrap="none" rtlCol="0">
-            <a:spAutoFit/>
-          </a:bodyPr>
-          <a:lstStyle/>
-          <a:p>
-            <a:r>
-              <a:rPr lang="ja-JP" altLang="en-US" sz="2400" dirty="0"/>
-              <a:t>あとはコピーする</a:t>
-            </a:r>
-            <a:endParaRPr lang="en-US" altLang="ja-JP" sz="2400" dirty="0"/>
-          </a:p>
-        </p:txBody>
-      </p:sp>
-      <p:sp>
-        <p:nvSpPr>
-          <p:cNvPr id="40" name="矢印: 右 39">
-            <a:extLst>
-              <a:ext uri="{FF2B5EF4-FFF2-40B4-BE49-F238E27FC236}">
-                <a16:creationId xmlns:a16="http://schemas.microsoft.com/office/drawing/2014/main" id="{19AC3BDC-F1BB-461D-B266-5A272E3B4D0C}"/>
-              </a:ext>
-            </a:extLst>
-          </p:cNvPr>
-          <p:cNvSpPr/>
-          <p:nvPr/>
-        </p:nvSpPr>
-        <p:spPr>
-          <a:xfrm>
-            <a:off x="3696747" y="3105150"/>
-            <a:ext cx="2221848" cy="647700"/>
-          </a:xfrm>
-          <a:prstGeom prst="rightArrow">
-            <a:avLst/>
-          </a:prstGeom>
-          <a:solidFill>
-            <a:srgbClr val="FF0000"/>
-          </a:solidFill>
-          <a:ln w="38100">
-            <a:solidFill>
-              <a:schemeClr val="tx1"/>
-            </a:solidFill>
-          </a:ln>
-        </p:spPr>
-        <p:style>
-          <a:lnRef idx="2">
-            <a:schemeClr val="accent1">
-              <a:shade val="50000"/>
-            </a:schemeClr>
-          </a:lnRef>
-          <a:fillRef idx="1">
-            <a:schemeClr val="accent1"/>
-          </a:fillRef>
-          <a:effectRef idx="0">
-            <a:schemeClr val="accent1"/>
-          </a:effectRef>
-          <a:fontRef idx="minor">
-            <a:schemeClr val="lt1"/>
-          </a:fontRef>
-        </p:style>
-        <p:txBody>
-          <a:bodyPr rtlCol="0" anchor="ctr"/>
-          <a:lstStyle/>
-          <a:p>
-            <a:pPr algn="ctr"/>
-            <a:endParaRPr kumimoji="1" lang="ja-JP" altLang="en-US"/>
-          </a:p>
-        </p:txBody>
-      </p:sp>
+        </p:spPr>
+      </p:pic>
     </p:spTree>
     <p:extLst>
       <p:ext uri="{BB962C8B-B14F-4D97-AF65-F5344CB8AC3E}">
-        <p14:creationId xmlns:p14="http://schemas.microsoft.com/office/powerpoint/2010/main" val="1788452148"/>
+        <p14:creationId xmlns:p14="http://schemas.microsoft.com/office/powerpoint/2010/main" val="3841103028"/>
       </p:ext>
     </p:extLst>
   </p:cSld>
@@ -7624,7 +6939,7 @@
         <p:spPr>
           <a:xfrm>
             <a:off x="567542" y="1216429"/>
-            <a:ext cx="6135013" cy="461665"/>
+            <a:ext cx="8355172" cy="830997"/>
           </a:xfrm>
           <a:prstGeom prst="rect">
             <a:avLst/>
@@ -7638,12 +6953,39 @@
           <a:lstStyle/>
           <a:p>
             <a:r>
-              <a:rPr lang="en-US" altLang="ja-JP" sz="2400" dirty="0" err="1"/>
-              <a:t>Dxlib</a:t>
+              <a:rPr lang="en-US" altLang="ja-JP" sz="2400" b="1" dirty="0">
+                <a:solidFill>
+                  <a:srgbClr val="00B050"/>
+                </a:solidFill>
+              </a:rPr>
+              <a:t>Block</a:t>
             </a:r>
             <a:r>
               <a:rPr lang="ja-JP" altLang="en-US" sz="2400" dirty="0"/>
-              <a:t>にはそのコピーする関数があります。</a:t>
+              <a:t>側は画像ハンドルを受け取る形でロードしましょう。</a:t>
+            </a:r>
+            <a:endParaRPr lang="en-US" altLang="ja-JP" sz="2400" dirty="0"/>
+          </a:p>
+          <a:p>
+            <a:r>
+              <a:rPr lang="en-US" altLang="ja-JP" sz="2400" b="1" dirty="0">
+                <a:solidFill>
+                  <a:srgbClr val="0070C0"/>
+                </a:solidFill>
+              </a:rPr>
+              <a:t>Load</a:t>
+            </a:r>
+            <a:r>
+              <a:rPr lang="ja-JP" altLang="en-US" sz="2400" b="1" dirty="0">
+                <a:solidFill>
+                  <a:srgbClr val="0070C0"/>
+                </a:solidFill>
+              </a:rPr>
+              <a:t>関数</a:t>
+            </a:r>
+            <a:r>
+              <a:rPr lang="ja-JP" altLang="en-US" sz="2400" dirty="0"/>
+              <a:t>に引数を追加して処理を書きましょう。</a:t>
             </a:r>
             <a:endParaRPr lang="en-US" altLang="ja-JP" sz="2400" dirty="0"/>
           </a:p>
@@ -7654,7 +6996,7 @@
           <p:cNvPr id="3" name="図 2">
             <a:extLst>
               <a:ext uri="{FF2B5EF4-FFF2-40B4-BE49-F238E27FC236}">
-                <a16:creationId xmlns:a16="http://schemas.microsoft.com/office/drawing/2014/main" id="{7D4D1BF9-AF11-4F06-A772-39A6A114071D}"/>
+                <a16:creationId xmlns:a16="http://schemas.microsoft.com/office/drawing/2014/main" id="{0CBD363C-2D7A-4273-A1DB-C8B2E5134547}"/>
               </a:ext>
             </a:extLst>
           </p:cNvPr>
@@ -7677,8 +7019,8 @@
         </p:blipFill>
         <p:spPr>
           <a:xfrm>
-            <a:off x="567541" y="1817794"/>
-            <a:ext cx="10392165" cy="2944706"/>
+            <a:off x="567542" y="2187126"/>
+            <a:ext cx="10041952" cy="2195406"/>
           </a:xfrm>
           <a:prstGeom prst="rect">
             <a:avLst/>
@@ -7688,7 +7030,7 @@
     </p:spTree>
     <p:extLst>
       <p:ext uri="{BB962C8B-B14F-4D97-AF65-F5344CB8AC3E}">
-        <p14:creationId xmlns:p14="http://schemas.microsoft.com/office/powerpoint/2010/main" val="2632728014"/>
+        <p14:creationId xmlns:p14="http://schemas.microsoft.com/office/powerpoint/2010/main" val="2615887464"/>
       </p:ext>
     </p:extLst>
   </p:cSld>
@@ -7766,7 +7108,7 @@
         <p:spPr>
           <a:xfrm>
             <a:off x="567542" y="1216429"/>
-            <a:ext cx="9725739" cy="1200329"/>
+            <a:ext cx="6343403" cy="461665"/>
           </a:xfrm>
           <a:prstGeom prst="rect">
             <a:avLst/>
@@ -7780,34 +7122,16 @@
           <a:lstStyle/>
           <a:p>
             <a:r>
-              <a:rPr lang="ja-JP" altLang="en-US" sz="2400" dirty="0"/>
-              <a:t>ロード処理を修正します。</a:t>
-            </a:r>
-            <a:endParaRPr lang="en-US" altLang="ja-JP" sz="2400" dirty="0"/>
-          </a:p>
-          <a:p>
-            <a:r>
-              <a:rPr lang="ja-JP" altLang="en-US" sz="2400" b="1" dirty="0">
+              <a:rPr lang="en-US" altLang="ja-JP" sz="2400" b="1" dirty="0" err="1">
                 <a:solidFill>
-                  <a:srgbClr val="FF0000"/>
+                  <a:srgbClr val="00B050"/>
                 </a:solidFill>
               </a:rPr>
-              <a:t>ロードは１度だけ</a:t>
+              <a:t>BlockManager</a:t>
             </a:r>
             <a:r>
               <a:rPr lang="ja-JP" altLang="en-US" sz="2400" dirty="0"/>
-              <a:t>行うので、今回はマネージャークラスで行います。</a:t>
-            </a:r>
-            <a:endParaRPr lang="en-US" altLang="ja-JP" sz="2400" dirty="0"/>
-          </a:p>
-          <a:p>
-            <a:r>
-              <a:rPr lang="en-US" altLang="ja-JP" sz="2400" dirty="0" err="1"/>
-              <a:t>BlockManager</a:t>
-            </a:r>
-            <a:r>
-              <a:rPr lang="ja-JP" altLang="en-US" sz="2400" dirty="0"/>
-              <a:t>にメンバ変数を追加しましょう。</a:t>
+              <a:t>のロード関数を修正します。</a:t>
             </a:r>
             <a:endParaRPr lang="en-US" altLang="ja-JP" sz="2400" dirty="0"/>
           </a:p>
@@ -7818,7 +7142,7 @@
           <p:cNvPr id="5" name="図 4">
             <a:extLst>
               <a:ext uri="{FF2B5EF4-FFF2-40B4-BE49-F238E27FC236}">
-                <a16:creationId xmlns:a16="http://schemas.microsoft.com/office/drawing/2014/main" id="{7CF9FAB3-4E0A-4BFB-B86A-52ED6507CE7A}"/>
+                <a16:creationId xmlns:a16="http://schemas.microsoft.com/office/drawing/2014/main" id="{BF40CEE0-C1C3-41EC-887A-0D75C37ED348}"/>
               </a:ext>
             </a:extLst>
           </p:cNvPr>
@@ -7841,8 +7165,8 @@
         </p:blipFill>
         <p:spPr>
           <a:xfrm>
-            <a:off x="567542" y="2556458"/>
-            <a:ext cx="9800012" cy="2523542"/>
+            <a:off x="567541" y="1817794"/>
+            <a:ext cx="8258137" cy="3706706"/>
           </a:xfrm>
           <a:prstGeom prst="rect">
             <a:avLst/>
@@ -7854,7 +7178,7 @@
           <p:cNvPr id="7" name="正方形/長方形 6">
             <a:extLst>
               <a:ext uri="{FF2B5EF4-FFF2-40B4-BE49-F238E27FC236}">
-                <a16:creationId xmlns:a16="http://schemas.microsoft.com/office/drawing/2014/main" id="{86596066-9FE9-4973-8726-2ED0299E1E79}"/>
+                <a16:creationId xmlns:a16="http://schemas.microsoft.com/office/drawing/2014/main" id="{A710BEA6-1E28-4AA1-9EBF-1FB2781E646F}"/>
               </a:ext>
             </a:extLst>
           </p:cNvPr>
@@ -7863,8 +7187,8 @@
         </p:nvSpPr>
         <p:spPr>
           <a:xfrm>
-            <a:off x="2463800" y="3429000"/>
-            <a:ext cx="7226300" cy="1295400"/>
+            <a:off x="2197100" y="3429000"/>
+            <a:ext cx="5575300" cy="1892300"/>
           </a:xfrm>
           <a:prstGeom prst="rect">
             <a:avLst/>
@@ -7901,58 +7225,10 @@
           </a:p>
         </p:txBody>
       </p:sp>
-      <p:sp>
-        <p:nvSpPr>
-          <p:cNvPr id="8" name="テキスト ボックス 7">
-            <a:extLst>
-              <a:ext uri="{FF2B5EF4-FFF2-40B4-BE49-F238E27FC236}">
-                <a16:creationId xmlns:a16="http://schemas.microsoft.com/office/drawing/2014/main" id="{50A5F0AF-44F9-4538-8B2B-D45ECB1C2E33}"/>
-              </a:ext>
-            </a:extLst>
-          </p:cNvPr>
-          <p:cNvSpPr txBox="1"/>
-          <p:nvPr/>
-        </p:nvSpPr>
-        <p:spPr>
-          <a:xfrm>
-            <a:off x="567541" y="5219700"/>
-            <a:ext cx="7322838" cy="461665"/>
-          </a:xfrm>
-          <a:prstGeom prst="rect">
-            <a:avLst/>
-          </a:prstGeom>
-          <a:noFill/>
-        </p:spPr>
-        <p:txBody>
-          <a:bodyPr wrap="none" rtlCol="0">
-            <a:spAutoFit/>
-          </a:bodyPr>
-          <a:lstStyle/>
-          <a:p>
-            <a:r>
-              <a:rPr lang="en-US" altLang="ja-JP" sz="2400" dirty="0" err="1"/>
-              <a:t>m_Handle</a:t>
-            </a:r>
-            <a:r>
-              <a:rPr lang="ja-JP" altLang="en-US" sz="2400" dirty="0"/>
-              <a:t>はコンストラクタで</a:t>
-            </a:r>
-            <a:r>
-              <a:rPr lang="en-US" altLang="ja-JP" sz="2400" dirty="0"/>
-              <a:t>0</a:t>
-            </a:r>
-            <a:r>
-              <a:rPr lang="ja-JP" altLang="en-US" sz="2400" dirty="0"/>
-              <a:t>初期化しましょう。</a:t>
-            </a:r>
-            <a:endParaRPr lang="en-US" altLang="ja-JP" sz="2400" dirty="0"/>
-          </a:p>
-        </p:txBody>
-      </p:sp>
     </p:spTree>
     <p:extLst>
       <p:ext uri="{BB962C8B-B14F-4D97-AF65-F5344CB8AC3E}">
-        <p14:creationId xmlns:p14="http://schemas.microsoft.com/office/powerpoint/2010/main" val="731176080"/>
+        <p14:creationId xmlns:p14="http://schemas.microsoft.com/office/powerpoint/2010/main" val="2729103074"/>
       </p:ext>
     </p:extLst>
   </p:cSld>
@@ -8030,7 +7306,7 @@
         <p:spPr>
           <a:xfrm>
             <a:off x="567542" y="1216429"/>
-            <a:ext cx="7763664" cy="461665"/>
+            <a:ext cx="2646878" cy="461665"/>
           </a:xfrm>
           <a:prstGeom prst="rect">
             <a:avLst/>
@@ -8044,12 +7320,8 @@
           <a:lstStyle/>
           <a:p>
             <a:r>
-              <a:rPr lang="en-US" altLang="ja-JP" sz="2400" dirty="0" err="1"/>
-              <a:t>BlockManager</a:t>
-            </a:r>
-            <a:r>
               <a:rPr lang="ja-JP" altLang="en-US" sz="2400" dirty="0"/>
-              <a:t>のロード関数でモデルをロードします。</a:t>
+              <a:t>後始末も忘れずに</a:t>
             </a:r>
             <a:endParaRPr lang="en-US" altLang="ja-JP" sz="2400" dirty="0"/>
           </a:p>
@@ -8057,10 +7329,10 @@
       </p:sp>
       <p:pic>
         <p:nvPicPr>
-          <p:cNvPr id="10" name="図 9">
-            <a:extLst>
-              <a:ext uri="{FF2B5EF4-FFF2-40B4-BE49-F238E27FC236}">
-                <a16:creationId xmlns:a16="http://schemas.microsoft.com/office/drawing/2014/main" id="{09F05AC2-9A35-4F06-A557-5EF8934876FC}"/>
+          <p:cNvPr id="3" name="図 2">
+            <a:extLst>
+              <a:ext uri="{FF2B5EF4-FFF2-40B4-BE49-F238E27FC236}">
+                <a16:creationId xmlns:a16="http://schemas.microsoft.com/office/drawing/2014/main" id="{C7DBBBD1-B775-488F-8645-2C080A3F864A}"/>
               </a:ext>
             </a:extLst>
           </p:cNvPr>
@@ -8084,17 +7356,73 @@
         <p:spPr>
           <a:xfrm>
             <a:off x="567542" y="1817794"/>
-            <a:ext cx="10220024" cy="1801706"/>
+            <a:ext cx="6905276" cy="3122506"/>
           </a:xfrm>
           <a:prstGeom prst="rect">
             <a:avLst/>
           </a:prstGeom>
         </p:spPr>
       </p:pic>
+      <p:sp>
+        <p:nvSpPr>
+          <p:cNvPr id="2" name="正方形/長方形 1">
+            <a:extLst>
+              <a:ext uri="{FF2B5EF4-FFF2-40B4-BE49-F238E27FC236}">
+                <a16:creationId xmlns:a16="http://schemas.microsoft.com/office/drawing/2014/main" id="{CD45E2CD-E90C-429A-9F03-189E7F56F0F6}"/>
+              </a:ext>
+            </a:extLst>
+          </p:cNvPr>
+          <p:cNvSpPr/>
+          <p:nvPr/>
+        </p:nvSpPr>
+        <p:spPr>
+          <a:xfrm>
+            <a:off x="2298700" y="2247900"/>
+            <a:ext cx="5295900" cy="863600"/>
+          </a:xfrm>
+          <a:prstGeom prst="rect">
+            <a:avLst/>
+          </a:prstGeom>
+          <a:noFill/>
+          <a:ln w="38100">
+            <a:solidFill>
+              <a:srgbClr val="FF0000"/>
+            </a:solidFill>
+          </a:ln>
+        </p:spPr>
+        <p:style>
+          <a:lnRef idx="2">
+            <a:schemeClr val="accent1">
+              <a:shade val="50000"/>
+            </a:schemeClr>
+          </a:lnRef>
+          <a:fillRef idx="1">
+            <a:schemeClr val="accent1"/>
+          </a:fillRef>
+          <a:effectRef idx="0">
+            <a:schemeClr val="accent1"/>
+          </a:effectRef>
+          <a:fontRef idx="minor">
+            <a:schemeClr val="lt1"/>
+          </a:fontRef>
+        </p:style>
+        <p:txBody>
+          <a:bodyPr rtlCol="0" anchor="ctr"/>
+          <a:lstStyle/>
+          <a:p>
+            <a:pPr algn="ctr"/>
+            <a:endParaRPr kumimoji="1" lang="ja-JP" altLang="en-US">
+              <a:solidFill>
+                <a:srgbClr val="FF0000"/>
+              </a:solidFill>
+            </a:endParaRPr>
+          </a:p>
+        </p:txBody>
+      </p:sp>
     </p:spTree>
     <p:extLst>
       <p:ext uri="{BB962C8B-B14F-4D97-AF65-F5344CB8AC3E}">
-        <p14:creationId xmlns:p14="http://schemas.microsoft.com/office/powerpoint/2010/main" val="3841103028"/>
+        <p14:creationId xmlns:p14="http://schemas.microsoft.com/office/powerpoint/2010/main" val="2094439452"/>
       </p:ext>
     </p:extLst>
   </p:cSld>
@@ -8136,547 +7464,6 @@
         <p:spPr>
           <a:xfrm>
             <a:off x="567542" y="491954"/>
-            <a:ext cx="6046848" cy="584775"/>
-          </a:xfrm>
-          <a:prstGeom prst="rect">
-            <a:avLst/>
-          </a:prstGeom>
-          <a:noFill/>
-        </p:spPr>
-        <p:txBody>
-          <a:bodyPr wrap="none" rtlCol="0">
-            <a:spAutoFit/>
-          </a:bodyPr>
-          <a:lstStyle/>
-          <a:p>
-            <a:r>
-              <a:rPr kumimoji="1" lang="ja-JP" altLang="en-US" sz="3200" b="1" u="sng" dirty="0"/>
-              <a:t>オブジェクトの複数配置 問題点</a:t>
-            </a:r>
-            <a:endParaRPr kumimoji="1" lang="en-US" altLang="ja-JP" sz="3200" b="1" u="sng" dirty="0"/>
-          </a:p>
-        </p:txBody>
-      </p:sp>
-      <p:sp>
-        <p:nvSpPr>
-          <p:cNvPr id="6" name="テキスト ボックス 5">
-            <a:extLst>
-              <a:ext uri="{FF2B5EF4-FFF2-40B4-BE49-F238E27FC236}">
-                <a16:creationId xmlns:a16="http://schemas.microsoft.com/office/drawing/2014/main" id="{55830AD6-028B-4C4E-80BF-B70DFC1C3A46}"/>
-              </a:ext>
-            </a:extLst>
-          </p:cNvPr>
-          <p:cNvSpPr txBox="1"/>
-          <p:nvPr/>
-        </p:nvSpPr>
-        <p:spPr>
-          <a:xfrm>
-            <a:off x="567542" y="1216429"/>
-            <a:ext cx="8355172" cy="830997"/>
-          </a:xfrm>
-          <a:prstGeom prst="rect">
-            <a:avLst/>
-          </a:prstGeom>
-          <a:noFill/>
-        </p:spPr>
-        <p:txBody>
-          <a:bodyPr wrap="none" rtlCol="0">
-            <a:spAutoFit/>
-          </a:bodyPr>
-          <a:lstStyle/>
-          <a:p>
-            <a:r>
-              <a:rPr lang="en-US" altLang="ja-JP" sz="2400" dirty="0"/>
-              <a:t>Block</a:t>
-            </a:r>
-            <a:r>
-              <a:rPr lang="ja-JP" altLang="en-US" sz="2400" dirty="0"/>
-              <a:t>側は画像ハンドルを受け取る形でロードしましょう。</a:t>
-            </a:r>
-            <a:endParaRPr lang="en-US" altLang="ja-JP" sz="2400" dirty="0"/>
-          </a:p>
-          <a:p>
-            <a:r>
-              <a:rPr lang="en-US" altLang="ja-JP" sz="2400" dirty="0"/>
-              <a:t>Load</a:t>
-            </a:r>
-            <a:r>
-              <a:rPr lang="ja-JP" altLang="en-US" sz="2400" dirty="0"/>
-              <a:t>関数に引数を追加して処理を書きましょう。</a:t>
-            </a:r>
-            <a:endParaRPr lang="en-US" altLang="ja-JP" sz="2400" dirty="0"/>
-          </a:p>
-        </p:txBody>
-      </p:sp>
-      <p:pic>
-        <p:nvPicPr>
-          <p:cNvPr id="3" name="図 2">
-            <a:extLst>
-              <a:ext uri="{FF2B5EF4-FFF2-40B4-BE49-F238E27FC236}">
-                <a16:creationId xmlns:a16="http://schemas.microsoft.com/office/drawing/2014/main" id="{0CBD363C-2D7A-4273-A1DB-C8B2E5134547}"/>
-              </a:ext>
-            </a:extLst>
-          </p:cNvPr>
-          <p:cNvPicPr>
-            <a:picLocks noChangeAspect="1"/>
-          </p:cNvPicPr>
-          <p:nvPr/>
-        </p:nvPicPr>
-        <p:blipFill>
-          <a:blip r:embed="rId2">
-            <a:extLst>
-              <a:ext uri="{28A0092B-C50C-407E-A947-70E740481C1C}">
-                <a14:useLocalDpi xmlns:a14="http://schemas.microsoft.com/office/drawing/2010/main" val="0"/>
-              </a:ext>
-            </a:extLst>
-          </a:blip>
-          <a:stretch>
-            <a:fillRect/>
-          </a:stretch>
-        </p:blipFill>
-        <p:spPr>
-          <a:xfrm>
-            <a:off x="567542" y="2187126"/>
-            <a:ext cx="10041952" cy="2195406"/>
-          </a:xfrm>
-          <a:prstGeom prst="rect">
-            <a:avLst/>
-          </a:prstGeom>
-        </p:spPr>
-      </p:pic>
-    </p:spTree>
-    <p:extLst>
-      <p:ext uri="{BB962C8B-B14F-4D97-AF65-F5344CB8AC3E}">
-        <p14:creationId xmlns:p14="http://schemas.microsoft.com/office/powerpoint/2010/main" val="2615887464"/>
-      </p:ext>
-    </p:extLst>
-  </p:cSld>
-  <p:clrMapOvr>
-    <a:masterClrMapping/>
-  </p:clrMapOvr>
-</p:sld>
-</file>
-
-<file path=ppt/slides/slide26.xml><?xml version="1.0" encoding="utf-8"?>
-<p:sld xmlns:a="http://schemas.openxmlformats.org/drawingml/2006/main" xmlns:r="http://schemas.openxmlformats.org/officeDocument/2006/relationships" xmlns:p="http://schemas.openxmlformats.org/presentationml/2006/main">
-  <p:cSld>
-    <p:spTree>
-      <p:nvGrpSpPr>
-        <p:cNvPr id="1" name=""/>
-        <p:cNvGrpSpPr/>
-        <p:nvPr/>
-      </p:nvGrpSpPr>
-      <p:grpSpPr>
-        <a:xfrm>
-          <a:off x="0" y="0"/>
-          <a:ext cx="0" cy="0"/>
-          <a:chOff x="0" y="0"/>
-          <a:chExt cx="0" cy="0"/>
-        </a:xfrm>
-      </p:grpSpPr>
-      <p:sp>
-        <p:nvSpPr>
-          <p:cNvPr id="4" name="テキスト ボックス 3">
-            <a:extLst>
-              <a:ext uri="{FF2B5EF4-FFF2-40B4-BE49-F238E27FC236}">
-                <a16:creationId xmlns:a16="http://schemas.microsoft.com/office/drawing/2014/main" id="{5A13BF46-B8C5-48AA-8308-C9ECFF431A18}"/>
-              </a:ext>
-            </a:extLst>
-          </p:cNvPr>
-          <p:cNvSpPr txBox="1"/>
-          <p:nvPr/>
-        </p:nvSpPr>
-        <p:spPr>
-          <a:xfrm>
-            <a:off x="567542" y="491954"/>
-            <a:ext cx="6046848" cy="584775"/>
-          </a:xfrm>
-          <a:prstGeom prst="rect">
-            <a:avLst/>
-          </a:prstGeom>
-          <a:noFill/>
-        </p:spPr>
-        <p:txBody>
-          <a:bodyPr wrap="none" rtlCol="0">
-            <a:spAutoFit/>
-          </a:bodyPr>
-          <a:lstStyle/>
-          <a:p>
-            <a:r>
-              <a:rPr kumimoji="1" lang="ja-JP" altLang="en-US" sz="3200" b="1" u="sng" dirty="0"/>
-              <a:t>オブジェクトの複数配置 問題点</a:t>
-            </a:r>
-            <a:endParaRPr kumimoji="1" lang="en-US" altLang="ja-JP" sz="3200" b="1" u="sng" dirty="0"/>
-          </a:p>
-        </p:txBody>
-      </p:sp>
-      <p:sp>
-        <p:nvSpPr>
-          <p:cNvPr id="6" name="テキスト ボックス 5">
-            <a:extLst>
-              <a:ext uri="{FF2B5EF4-FFF2-40B4-BE49-F238E27FC236}">
-                <a16:creationId xmlns:a16="http://schemas.microsoft.com/office/drawing/2014/main" id="{55830AD6-028B-4C4E-80BF-B70DFC1C3A46}"/>
-              </a:ext>
-            </a:extLst>
-          </p:cNvPr>
-          <p:cNvSpPr txBox="1"/>
-          <p:nvPr/>
-        </p:nvSpPr>
-        <p:spPr>
-          <a:xfrm>
-            <a:off x="567542" y="1216429"/>
-            <a:ext cx="6224781" cy="461665"/>
-          </a:xfrm>
-          <a:prstGeom prst="rect">
-            <a:avLst/>
-          </a:prstGeom>
-          <a:noFill/>
-        </p:spPr>
-        <p:txBody>
-          <a:bodyPr wrap="none" rtlCol="0">
-            <a:spAutoFit/>
-          </a:bodyPr>
-          <a:lstStyle/>
-          <a:p>
-            <a:r>
-              <a:rPr lang="en-US" altLang="ja-JP" sz="2400" dirty="0" err="1"/>
-              <a:t>BlockManager</a:t>
-            </a:r>
-            <a:r>
-              <a:rPr lang="ja-JP" altLang="en-US" sz="2400" dirty="0"/>
-              <a:t>のロード関数を修正します。</a:t>
-            </a:r>
-            <a:endParaRPr lang="en-US" altLang="ja-JP" sz="2400" dirty="0"/>
-          </a:p>
-        </p:txBody>
-      </p:sp>
-      <p:pic>
-        <p:nvPicPr>
-          <p:cNvPr id="5" name="図 4">
-            <a:extLst>
-              <a:ext uri="{FF2B5EF4-FFF2-40B4-BE49-F238E27FC236}">
-                <a16:creationId xmlns:a16="http://schemas.microsoft.com/office/drawing/2014/main" id="{BF40CEE0-C1C3-41EC-887A-0D75C37ED348}"/>
-              </a:ext>
-            </a:extLst>
-          </p:cNvPr>
-          <p:cNvPicPr>
-            <a:picLocks noChangeAspect="1"/>
-          </p:cNvPicPr>
-          <p:nvPr/>
-        </p:nvPicPr>
-        <p:blipFill>
-          <a:blip r:embed="rId2">
-            <a:extLst>
-              <a:ext uri="{28A0092B-C50C-407E-A947-70E740481C1C}">
-                <a14:useLocalDpi xmlns:a14="http://schemas.microsoft.com/office/drawing/2010/main" val="0"/>
-              </a:ext>
-            </a:extLst>
-          </a:blip>
-          <a:stretch>
-            <a:fillRect/>
-          </a:stretch>
-        </p:blipFill>
-        <p:spPr>
-          <a:xfrm>
-            <a:off x="567541" y="1817794"/>
-            <a:ext cx="8258137" cy="3706706"/>
-          </a:xfrm>
-          <a:prstGeom prst="rect">
-            <a:avLst/>
-          </a:prstGeom>
-        </p:spPr>
-      </p:pic>
-      <p:sp>
-        <p:nvSpPr>
-          <p:cNvPr id="7" name="正方形/長方形 6">
-            <a:extLst>
-              <a:ext uri="{FF2B5EF4-FFF2-40B4-BE49-F238E27FC236}">
-                <a16:creationId xmlns:a16="http://schemas.microsoft.com/office/drawing/2014/main" id="{A710BEA6-1E28-4AA1-9EBF-1FB2781E646F}"/>
-              </a:ext>
-            </a:extLst>
-          </p:cNvPr>
-          <p:cNvSpPr/>
-          <p:nvPr/>
-        </p:nvSpPr>
-        <p:spPr>
-          <a:xfrm>
-            <a:off x="2197100" y="3429000"/>
-            <a:ext cx="5575300" cy="1892300"/>
-          </a:xfrm>
-          <a:prstGeom prst="rect">
-            <a:avLst/>
-          </a:prstGeom>
-          <a:noFill/>
-          <a:ln w="38100">
-            <a:solidFill>
-              <a:srgbClr val="FF0000"/>
-            </a:solidFill>
-          </a:ln>
-        </p:spPr>
-        <p:style>
-          <a:lnRef idx="2">
-            <a:schemeClr val="accent1">
-              <a:shade val="50000"/>
-            </a:schemeClr>
-          </a:lnRef>
-          <a:fillRef idx="1">
-            <a:schemeClr val="accent1"/>
-          </a:fillRef>
-          <a:effectRef idx="0">
-            <a:schemeClr val="accent1"/>
-          </a:effectRef>
-          <a:fontRef idx="minor">
-            <a:schemeClr val="lt1"/>
-          </a:fontRef>
-        </p:style>
-        <p:txBody>
-          <a:bodyPr rtlCol="0" anchor="ctr"/>
-          <a:lstStyle/>
-          <a:p>
-            <a:pPr algn="ctr"/>
-            <a:endParaRPr kumimoji="1" lang="ja-JP" altLang="en-US"/>
-          </a:p>
-        </p:txBody>
-      </p:sp>
-    </p:spTree>
-    <p:extLst>
-      <p:ext uri="{BB962C8B-B14F-4D97-AF65-F5344CB8AC3E}">
-        <p14:creationId xmlns:p14="http://schemas.microsoft.com/office/powerpoint/2010/main" val="2729103074"/>
-      </p:ext>
-    </p:extLst>
-  </p:cSld>
-  <p:clrMapOvr>
-    <a:masterClrMapping/>
-  </p:clrMapOvr>
-</p:sld>
-</file>
-
-<file path=ppt/slides/slide27.xml><?xml version="1.0" encoding="utf-8"?>
-<p:sld xmlns:a="http://schemas.openxmlformats.org/drawingml/2006/main" xmlns:r="http://schemas.openxmlformats.org/officeDocument/2006/relationships" xmlns:p="http://schemas.openxmlformats.org/presentationml/2006/main">
-  <p:cSld>
-    <p:spTree>
-      <p:nvGrpSpPr>
-        <p:cNvPr id="1" name=""/>
-        <p:cNvGrpSpPr/>
-        <p:nvPr/>
-      </p:nvGrpSpPr>
-      <p:grpSpPr>
-        <a:xfrm>
-          <a:off x="0" y="0"/>
-          <a:ext cx="0" cy="0"/>
-          <a:chOff x="0" y="0"/>
-          <a:chExt cx="0" cy="0"/>
-        </a:xfrm>
-      </p:grpSpPr>
-      <p:sp>
-        <p:nvSpPr>
-          <p:cNvPr id="4" name="テキスト ボックス 3">
-            <a:extLst>
-              <a:ext uri="{FF2B5EF4-FFF2-40B4-BE49-F238E27FC236}">
-                <a16:creationId xmlns:a16="http://schemas.microsoft.com/office/drawing/2014/main" id="{5A13BF46-B8C5-48AA-8308-C9ECFF431A18}"/>
-              </a:ext>
-            </a:extLst>
-          </p:cNvPr>
-          <p:cNvSpPr txBox="1"/>
-          <p:nvPr/>
-        </p:nvSpPr>
-        <p:spPr>
-          <a:xfrm>
-            <a:off x="567542" y="491954"/>
-            <a:ext cx="6046848" cy="584775"/>
-          </a:xfrm>
-          <a:prstGeom prst="rect">
-            <a:avLst/>
-          </a:prstGeom>
-          <a:noFill/>
-        </p:spPr>
-        <p:txBody>
-          <a:bodyPr wrap="none" rtlCol="0">
-            <a:spAutoFit/>
-          </a:bodyPr>
-          <a:lstStyle/>
-          <a:p>
-            <a:r>
-              <a:rPr kumimoji="1" lang="ja-JP" altLang="en-US" sz="3200" b="1" u="sng" dirty="0"/>
-              <a:t>オブジェクトの複数配置 問題点</a:t>
-            </a:r>
-            <a:endParaRPr kumimoji="1" lang="en-US" altLang="ja-JP" sz="3200" b="1" u="sng" dirty="0"/>
-          </a:p>
-        </p:txBody>
-      </p:sp>
-      <p:sp>
-        <p:nvSpPr>
-          <p:cNvPr id="6" name="テキスト ボックス 5">
-            <a:extLst>
-              <a:ext uri="{FF2B5EF4-FFF2-40B4-BE49-F238E27FC236}">
-                <a16:creationId xmlns:a16="http://schemas.microsoft.com/office/drawing/2014/main" id="{55830AD6-028B-4C4E-80BF-B70DFC1C3A46}"/>
-              </a:ext>
-            </a:extLst>
-          </p:cNvPr>
-          <p:cNvSpPr txBox="1"/>
-          <p:nvPr/>
-        </p:nvSpPr>
-        <p:spPr>
-          <a:xfrm>
-            <a:off x="567542" y="1216429"/>
-            <a:ext cx="2646878" cy="461665"/>
-          </a:xfrm>
-          <a:prstGeom prst="rect">
-            <a:avLst/>
-          </a:prstGeom>
-          <a:noFill/>
-        </p:spPr>
-        <p:txBody>
-          <a:bodyPr wrap="none" rtlCol="0">
-            <a:spAutoFit/>
-          </a:bodyPr>
-          <a:lstStyle/>
-          <a:p>
-            <a:r>
-              <a:rPr lang="ja-JP" altLang="en-US" sz="2400" dirty="0"/>
-              <a:t>後始末も忘れずに</a:t>
-            </a:r>
-            <a:endParaRPr lang="en-US" altLang="ja-JP" sz="2400" dirty="0"/>
-          </a:p>
-        </p:txBody>
-      </p:sp>
-      <p:pic>
-        <p:nvPicPr>
-          <p:cNvPr id="3" name="図 2">
-            <a:extLst>
-              <a:ext uri="{FF2B5EF4-FFF2-40B4-BE49-F238E27FC236}">
-                <a16:creationId xmlns:a16="http://schemas.microsoft.com/office/drawing/2014/main" id="{C7DBBBD1-B775-488F-8645-2C080A3F864A}"/>
-              </a:ext>
-            </a:extLst>
-          </p:cNvPr>
-          <p:cNvPicPr>
-            <a:picLocks noChangeAspect="1"/>
-          </p:cNvPicPr>
-          <p:nvPr/>
-        </p:nvPicPr>
-        <p:blipFill>
-          <a:blip r:embed="rId2">
-            <a:extLst>
-              <a:ext uri="{28A0092B-C50C-407E-A947-70E740481C1C}">
-                <a14:useLocalDpi xmlns:a14="http://schemas.microsoft.com/office/drawing/2010/main" val="0"/>
-              </a:ext>
-            </a:extLst>
-          </a:blip>
-          <a:stretch>
-            <a:fillRect/>
-          </a:stretch>
-        </p:blipFill>
-        <p:spPr>
-          <a:xfrm>
-            <a:off x="567542" y="1817794"/>
-            <a:ext cx="6905276" cy="3122506"/>
-          </a:xfrm>
-          <a:prstGeom prst="rect">
-            <a:avLst/>
-          </a:prstGeom>
-        </p:spPr>
-      </p:pic>
-      <p:sp>
-        <p:nvSpPr>
-          <p:cNvPr id="2" name="正方形/長方形 1">
-            <a:extLst>
-              <a:ext uri="{FF2B5EF4-FFF2-40B4-BE49-F238E27FC236}">
-                <a16:creationId xmlns:a16="http://schemas.microsoft.com/office/drawing/2014/main" id="{CD45E2CD-E90C-429A-9F03-189E7F56F0F6}"/>
-              </a:ext>
-            </a:extLst>
-          </p:cNvPr>
-          <p:cNvSpPr/>
-          <p:nvPr/>
-        </p:nvSpPr>
-        <p:spPr>
-          <a:xfrm>
-            <a:off x="2298700" y="2247900"/>
-            <a:ext cx="5295900" cy="863600"/>
-          </a:xfrm>
-          <a:prstGeom prst="rect">
-            <a:avLst/>
-          </a:prstGeom>
-          <a:noFill/>
-          <a:ln w="38100">
-            <a:solidFill>
-              <a:srgbClr val="FF0000"/>
-            </a:solidFill>
-          </a:ln>
-        </p:spPr>
-        <p:style>
-          <a:lnRef idx="2">
-            <a:schemeClr val="accent1">
-              <a:shade val="50000"/>
-            </a:schemeClr>
-          </a:lnRef>
-          <a:fillRef idx="1">
-            <a:schemeClr val="accent1"/>
-          </a:fillRef>
-          <a:effectRef idx="0">
-            <a:schemeClr val="accent1"/>
-          </a:effectRef>
-          <a:fontRef idx="minor">
-            <a:schemeClr val="lt1"/>
-          </a:fontRef>
-        </p:style>
-        <p:txBody>
-          <a:bodyPr rtlCol="0" anchor="ctr"/>
-          <a:lstStyle/>
-          <a:p>
-            <a:pPr algn="ctr"/>
-            <a:endParaRPr kumimoji="1" lang="ja-JP" altLang="en-US">
-              <a:solidFill>
-                <a:srgbClr val="FF0000"/>
-              </a:solidFill>
-            </a:endParaRPr>
-          </a:p>
-        </p:txBody>
-      </p:sp>
-    </p:spTree>
-    <p:extLst>
-      <p:ext uri="{BB962C8B-B14F-4D97-AF65-F5344CB8AC3E}">
-        <p14:creationId xmlns:p14="http://schemas.microsoft.com/office/powerpoint/2010/main" val="2094439452"/>
-      </p:ext>
-    </p:extLst>
-  </p:cSld>
-  <p:clrMapOvr>
-    <a:masterClrMapping/>
-  </p:clrMapOvr>
-</p:sld>
-</file>
-
-<file path=ppt/slides/slide28.xml><?xml version="1.0" encoding="utf-8"?>
-<p:sld xmlns:a="http://schemas.openxmlformats.org/drawingml/2006/main" xmlns:r="http://schemas.openxmlformats.org/officeDocument/2006/relationships" xmlns:p="http://schemas.openxmlformats.org/presentationml/2006/main">
-  <p:cSld>
-    <p:spTree>
-      <p:nvGrpSpPr>
-        <p:cNvPr id="1" name=""/>
-        <p:cNvGrpSpPr/>
-        <p:nvPr/>
-      </p:nvGrpSpPr>
-      <p:grpSpPr>
-        <a:xfrm>
-          <a:off x="0" y="0"/>
-          <a:ext cx="0" cy="0"/>
-          <a:chOff x="0" y="0"/>
-          <a:chExt cx="0" cy="0"/>
-        </a:xfrm>
-      </p:grpSpPr>
-      <p:sp>
-        <p:nvSpPr>
-          <p:cNvPr id="4" name="テキスト ボックス 3">
-            <a:extLst>
-              <a:ext uri="{FF2B5EF4-FFF2-40B4-BE49-F238E27FC236}">
-                <a16:creationId xmlns:a16="http://schemas.microsoft.com/office/drawing/2014/main" id="{5A13BF46-B8C5-48AA-8308-C9ECFF431A18}"/>
-              </a:ext>
-            </a:extLst>
-          </p:cNvPr>
-          <p:cNvSpPr txBox="1"/>
-          <p:nvPr/>
-        </p:nvSpPr>
-        <p:spPr>
-          <a:xfrm>
-            <a:off x="567542" y="491954"/>
             <a:ext cx="4698722" cy="584775"/>
           </a:xfrm>
           <a:prstGeom prst="rect">
@@ -8783,7 +7570,7 @@
 </p:sld>
 </file>
 
-<file path=ppt/slides/slide29.xml><?xml version="1.0" encoding="utf-8"?>
+<file path=ppt/slides/slide26.xml><?xml version="1.0" encoding="utf-8"?>
 <p:sld xmlns:a="http://schemas.openxmlformats.org/drawingml/2006/main" xmlns:r="http://schemas.openxmlformats.org/officeDocument/2006/relationships" xmlns:p="http://schemas.openxmlformats.org/presentationml/2006/main">
   <p:cSld>
     <p:spTree>
@@ -9195,7 +7982,11 @@
           <a:lstStyle/>
           <a:p>
             <a:r>
-              <a:rPr kumimoji="1" lang="en-US" altLang="ja-JP" sz="2400" dirty="0"/>
+              <a:rPr kumimoji="1" lang="en-US" altLang="ja-JP" sz="2400" b="1" dirty="0">
+                <a:solidFill>
+                  <a:srgbClr val="FF0000"/>
+                </a:solidFill>
+              </a:rPr>
               <a:t>BlockManager.cpp</a:t>
             </a:r>
             <a:r>
@@ -9356,12 +8147,24 @@
           <a:lstStyle/>
           <a:p>
             <a:r>
-              <a:rPr kumimoji="1" lang="en-US" altLang="ja-JP" sz="2400" dirty="0"/>
+              <a:rPr kumimoji="1" lang="en-US" altLang="ja-JP" sz="2400" b="1" dirty="0">
+                <a:solidFill>
+                  <a:srgbClr val="0070C0"/>
+                </a:solidFill>
+              </a:rPr>
               <a:t>Init</a:t>
             </a:r>
             <a:r>
+              <a:rPr kumimoji="1" lang="ja-JP" altLang="en-US" sz="2400" b="1" dirty="0">
+                <a:solidFill>
+                  <a:srgbClr val="0070C0"/>
+                </a:solidFill>
+              </a:rPr>
+              <a:t>関数</a:t>
+            </a:r>
+            <a:r>
               <a:rPr kumimoji="1" lang="ja-JP" altLang="en-US" sz="2400" dirty="0"/>
-              <a:t>関数で各ブロックを生成します。</a:t>
+              <a:t>で各ブロックを生成します。</a:t>
             </a:r>
             <a:endParaRPr kumimoji="1" lang="en-US" altLang="ja-JP" sz="2400" dirty="0"/>
           </a:p>
@@ -9918,7 +8721,7 @@
         <p:spPr>
           <a:xfrm>
             <a:off x="567542" y="1216429"/>
-            <a:ext cx="11357596" cy="3785652"/>
+            <a:ext cx="9281708" cy="2308324"/>
           </a:xfrm>
           <a:prstGeom prst="rect">
             <a:avLst/>
@@ -9932,33 +8735,103 @@
           <a:lstStyle/>
           <a:p>
             <a:r>
+              <a:rPr lang="en-US" altLang="ja-JP" sz="2400" b="1" dirty="0">
+                <a:solidFill>
+                  <a:srgbClr val="FF0000"/>
+                </a:solidFill>
+              </a:rPr>
+              <a:t>3D</a:t>
+            </a:r>
+            <a:r>
+              <a:rPr lang="ja-JP" altLang="en-US" sz="2400" b="1" dirty="0">
+                <a:solidFill>
+                  <a:srgbClr val="FF0000"/>
+                </a:solidFill>
+              </a:rPr>
+              <a:t>の画像は</a:t>
+            </a:r>
+            <a:r>
+              <a:rPr lang="en-US" altLang="ja-JP" sz="2400" b="1" dirty="0">
+                <a:solidFill>
+                  <a:srgbClr val="FF0000"/>
+                </a:solidFill>
+              </a:rPr>
+              <a:t>2D</a:t>
+            </a:r>
+            <a:r>
+              <a:rPr lang="ja-JP" altLang="en-US" sz="2400" b="1" dirty="0">
+                <a:solidFill>
+                  <a:srgbClr val="FF0000"/>
+                </a:solidFill>
+              </a:rPr>
+              <a:t>の画像よりも情報量が非常に多く</a:t>
+            </a:r>
+            <a:r>
+              <a:rPr lang="ja-JP" altLang="en-US" sz="2400" dirty="0"/>
+              <a:t>、</a:t>
+            </a:r>
+            <a:endParaRPr lang="en-US" altLang="ja-JP" sz="2400" dirty="0"/>
+          </a:p>
+          <a:p>
+            <a:r>
+              <a:rPr kumimoji="1" lang="en-US" altLang="ja-JP" sz="2400" dirty="0"/>
+              <a:t>1</a:t>
+            </a:r>
+            <a:r>
               <a:rPr kumimoji="1" lang="ja-JP" altLang="en-US" sz="2400" dirty="0"/>
-              <a:t>続いて</a:t>
-            </a:r>
-            <a:r>
-              <a:rPr kumimoji="1" lang="en-US" altLang="ja-JP" sz="2400" dirty="0"/>
-              <a:t>3D</a:t>
-            </a:r>
+              <a:t>つの画像データを使いまわそうとすると、不具合が発生したり、</a:t>
+            </a:r>
+            <a:endParaRPr kumimoji="1" lang="en-US" altLang="ja-JP" sz="2400" dirty="0"/>
+          </a:p>
+          <a:p>
+            <a:r>
+              <a:rPr lang="ja-JP" altLang="en-US" sz="2400" dirty="0"/>
+              <a:t>それを防ぐための処理が必要だったりと、大変です。</a:t>
+            </a:r>
+            <a:endParaRPr lang="en-US" altLang="ja-JP" sz="2400" dirty="0"/>
+          </a:p>
+          <a:p>
             <a:r>
               <a:rPr kumimoji="1" lang="ja-JP" altLang="en-US" sz="2400" dirty="0"/>
-              <a:t>の描画を振り返ってみましょう。</a:t>
-            </a:r>
+              <a:t>（</a:t>
+            </a:r>
+            <a:r>
+              <a:rPr kumimoji="1" lang="en-US" altLang="ja-JP" sz="2400" b="1" dirty="0" err="1">
+                <a:solidFill>
+                  <a:srgbClr val="FF0000"/>
+                </a:solidFill>
+              </a:rPr>
+              <a:t>DxLib</a:t>
+            </a:r>
+            <a:r>
+              <a:rPr kumimoji="1" lang="ja-JP" altLang="en-US" sz="2400" b="1" dirty="0">
+                <a:solidFill>
+                  <a:srgbClr val="FF0000"/>
+                </a:solidFill>
+              </a:rPr>
+              <a:t>も推奨していません</a:t>
+            </a:r>
+            <a:r>
+              <a:rPr kumimoji="1" lang="ja-JP" altLang="en-US" sz="2400" dirty="0"/>
+              <a:t>）</a:t>
+            </a:r>
+            <a:endParaRPr kumimoji="1" lang="en-US" altLang="ja-JP" sz="2400" dirty="0"/>
+          </a:p>
+          <a:p>
             <a:endParaRPr lang="en-US" altLang="ja-JP" sz="2400" dirty="0"/>
           </a:p>
           <a:p>
             <a:r>
-              <a:rPr lang="ja-JP" altLang="en-US" sz="2400" dirty="0"/>
-              <a:t>モデルについては以下の関数を呼び、描画しています。</a:t>
-            </a:r>
-            <a:endParaRPr lang="en-US" altLang="ja-JP" sz="2400" dirty="0"/>
-          </a:p>
-          <a:p>
-            <a:endParaRPr lang="en-US" altLang="ja-JP" sz="2400" dirty="0"/>
-          </a:p>
-          <a:p>
-            <a:r>
-              <a:rPr kumimoji="1" lang="en-US" altLang="ja-JP" sz="2400" dirty="0"/>
-              <a:t>MV1SetPosition(int </a:t>
+              <a:rPr kumimoji="1" lang="ja-JP" altLang="en-US" sz="2400" dirty="0"/>
+              <a:t>よって</a:t>
+            </a:r>
+            <a:r>
+              <a:rPr kumimoji="1" lang="ja-JP" altLang="en-US" sz="2400" b="1" dirty="0">
+                <a:solidFill>
+                  <a:srgbClr val="FF0000"/>
+                </a:solidFill>
+              </a:rPr>
+              <a:t>画像は</a:t>
             </a:r>
             <a:r>
               <a:rPr kumimoji="1" lang="en-US" altLang="ja-JP" sz="2400" b="1" dirty="0">
@@ -9966,101 +8839,7 @@
                   <a:srgbClr val="FF0000"/>
                 </a:solidFill>
               </a:rPr>
-              <a:t>handle</a:t>
-            </a:r>
-            <a:r>
-              <a:rPr kumimoji="1" lang="en-US" altLang="ja-JP" sz="2400" dirty="0"/>
-              <a:t>, VECTOR position);</a:t>
-            </a:r>
-          </a:p>
-          <a:p>
-            <a:r>
-              <a:rPr kumimoji="1" lang="en-US" altLang="ja-JP" sz="2400" dirty="0"/>
-              <a:t>MV1SetRotationXYZ(int </a:t>
-            </a:r>
-            <a:r>
-              <a:rPr kumimoji="1" lang="en-US" altLang="ja-JP" sz="2400" b="1" dirty="0">
-                <a:solidFill>
-                  <a:srgbClr val="FF0000"/>
-                </a:solidFill>
-              </a:rPr>
-              <a:t>handle</a:t>
-            </a:r>
-            <a:r>
-              <a:rPr kumimoji="1" lang="en-US" altLang="ja-JP" sz="2400" dirty="0"/>
-              <a:t>, VECTOR rotation);</a:t>
-            </a:r>
-          </a:p>
-          <a:p>
-            <a:r>
-              <a:rPr lang="en-US" altLang="ja-JP" sz="2400" dirty="0"/>
-              <a:t>MV1SetScale(int </a:t>
-            </a:r>
-            <a:r>
-              <a:rPr kumimoji="1" lang="en-US" altLang="ja-JP" sz="2400" b="1" dirty="0">
-                <a:solidFill>
-                  <a:srgbClr val="FF0000"/>
-                </a:solidFill>
-              </a:rPr>
-              <a:t>handle</a:t>
-            </a:r>
-            <a:r>
-              <a:rPr lang="en-US" altLang="ja-JP" sz="2400" dirty="0"/>
-              <a:t>, VECTOR scale);</a:t>
-            </a:r>
-          </a:p>
-          <a:p>
-            <a:r>
-              <a:rPr kumimoji="1" lang="en-US" altLang="ja-JP" sz="2400" dirty="0"/>
-              <a:t>MV</a:t>
-            </a:r>
-            <a:r>
-              <a:rPr lang="en-US" altLang="ja-JP" sz="2400" dirty="0"/>
-              <a:t>1DrawModel(int </a:t>
-            </a:r>
-            <a:r>
-              <a:rPr kumimoji="1" lang="en-US" altLang="ja-JP" sz="2400" b="1" dirty="0">
-                <a:solidFill>
-                  <a:srgbClr val="FF0000"/>
-                </a:solidFill>
-              </a:rPr>
-              <a:t>handle</a:t>
-            </a:r>
-            <a:r>
-              <a:rPr lang="en-US" altLang="ja-JP" sz="2400" dirty="0"/>
-              <a:t>);</a:t>
-            </a:r>
-          </a:p>
-          <a:p>
-            <a:endParaRPr kumimoji="1" lang="en-US" altLang="ja-JP" sz="2400" dirty="0"/>
-          </a:p>
-          <a:p>
-            <a:r>
-              <a:rPr lang="en-US" altLang="ja-JP" sz="2400" dirty="0"/>
-              <a:t>2D</a:t>
-            </a:r>
-            <a:r>
-              <a:rPr lang="ja-JP" altLang="en-US" sz="2400" dirty="0"/>
-              <a:t>との違いは、</a:t>
-            </a:r>
-            <a:r>
-              <a:rPr lang="ja-JP" altLang="en-US" sz="2400" b="1" dirty="0">
-                <a:solidFill>
-                  <a:srgbClr val="FF0000"/>
-                </a:solidFill>
-              </a:rPr>
-              <a:t>位置、回転、拡縮、描画が別々の関数</a:t>
-            </a:r>
-            <a:r>
-              <a:rPr lang="ja-JP" altLang="en-US" sz="2400" dirty="0"/>
-              <a:t>に分かれていることです。</a:t>
-            </a:r>
-            <a:endParaRPr lang="en-US" altLang="ja-JP" sz="2400" dirty="0"/>
-          </a:p>
-          <a:p>
-            <a:r>
-              <a:rPr kumimoji="1" lang="ja-JP" altLang="en-US" sz="2400" dirty="0"/>
-              <a:t>そして、</a:t>
+              <a:t>1</a:t>
             </a:r>
             <a:r>
               <a:rPr kumimoji="1" lang="ja-JP" altLang="en-US" sz="2400" b="1" dirty="0">
@@ -10068,11 +8847,11 @@
                   <a:srgbClr val="FF0000"/>
                 </a:solidFill>
               </a:rPr>
-              <a:t>それぞれの関数に画像ハンドルが必要</a:t>
+              <a:t>つずつロード</a:t>
             </a:r>
             <a:r>
               <a:rPr kumimoji="1" lang="ja-JP" altLang="en-US" sz="2400" dirty="0"/>
-              <a:t>になります。</a:t>
+              <a:t>します。</a:t>
             </a:r>
             <a:endParaRPr kumimoji="1" lang="en-US" altLang="ja-JP" sz="2400" dirty="0"/>
           </a:p>
@@ -10110,52 +8889,6 @@
       </p:grpSpPr>
       <p:sp>
         <p:nvSpPr>
-          <p:cNvPr id="5" name="直方体 4">
-            <a:extLst>
-              <a:ext uri="{FF2B5EF4-FFF2-40B4-BE49-F238E27FC236}">
-                <a16:creationId xmlns:a16="http://schemas.microsoft.com/office/drawing/2014/main" id="{395755B8-E8CE-4726-BC2D-35C66DCCDE3C}"/>
-              </a:ext>
-            </a:extLst>
-          </p:cNvPr>
-          <p:cNvSpPr/>
-          <p:nvPr/>
-        </p:nvSpPr>
-        <p:spPr>
-          <a:xfrm rot="3202373">
-            <a:off x="3096604" y="3792425"/>
-            <a:ext cx="988722" cy="890488"/>
-          </a:xfrm>
-          <a:prstGeom prst="cube">
-            <a:avLst/>
-          </a:prstGeom>
-        </p:spPr>
-        <p:style>
-          <a:lnRef idx="2">
-            <a:schemeClr val="accent1">
-              <a:shade val="50000"/>
-            </a:schemeClr>
-          </a:lnRef>
-          <a:fillRef idx="1">
-            <a:schemeClr val="accent1"/>
-          </a:fillRef>
-          <a:effectRef idx="0">
-            <a:schemeClr val="accent1"/>
-          </a:effectRef>
-          <a:fontRef idx="minor">
-            <a:schemeClr val="lt1"/>
-          </a:fontRef>
-        </p:style>
-        <p:txBody>
-          <a:bodyPr rtlCol="0" anchor="ctr"/>
-          <a:lstStyle/>
-          <a:p>
-            <a:pPr algn="ctr"/>
-            <a:endParaRPr kumimoji="1" lang="ja-JP" altLang="en-US"/>
-          </a:p>
-        </p:txBody>
-      </p:sp>
-      <p:sp>
-        <p:nvSpPr>
           <p:cNvPr id="4" name="テキスト ボックス 3">
             <a:extLst>
               <a:ext uri="{FF2B5EF4-FFF2-40B4-BE49-F238E27FC236}">
@@ -10205,7 +8938,7 @@
         <p:spPr>
           <a:xfrm>
             <a:off x="567542" y="1216429"/>
-            <a:ext cx="11357596" cy="1938992"/>
+            <a:ext cx="7103227" cy="461665"/>
           </a:xfrm>
           <a:prstGeom prst="rect">
             <a:avLst/>
@@ -10219,181 +8952,57 @@
           <a:lstStyle/>
           <a:p>
             <a:r>
-              <a:rPr kumimoji="1" lang="ja-JP" altLang="en-US" sz="2400" dirty="0"/>
-              <a:t>これは</a:t>
-            </a:r>
-            <a:r>
-              <a:rPr kumimoji="1" lang="en-US" altLang="ja-JP" sz="2400" b="1" dirty="0">
-                <a:solidFill>
-                  <a:srgbClr val="FF0000"/>
-                </a:solidFill>
-              </a:rPr>
-              <a:t>MV1DrawModel</a:t>
-            </a:r>
-            <a:r>
-              <a:rPr kumimoji="1" lang="ja-JP" altLang="en-US" sz="2400" b="1" dirty="0">
-                <a:solidFill>
-                  <a:srgbClr val="FF0000"/>
-                </a:solidFill>
-              </a:rPr>
-              <a:t>関数が直接画面に描いていない</a:t>
-            </a:r>
-            <a:r>
-              <a:rPr kumimoji="1" lang="ja-JP" altLang="en-US" sz="2400" dirty="0"/>
-              <a:t>ため、</a:t>
-            </a:r>
-            <a:endParaRPr kumimoji="1" lang="en-US" altLang="ja-JP" sz="2400" dirty="0"/>
-          </a:p>
-          <a:p>
+              <a:rPr lang="en-US" altLang="ja-JP" sz="2400" dirty="0"/>
+              <a:t>Block.cpp</a:t>
+            </a:r>
             <a:r>
               <a:rPr lang="ja-JP" altLang="en-US" sz="2400" dirty="0"/>
-              <a:t>このような仕様になっています。</a:t>
+              <a:t>のロード関数にロード処理を書きます。</a:t>
             </a:r>
             <a:endParaRPr lang="en-US" altLang="ja-JP" sz="2400" dirty="0"/>
           </a:p>
-          <a:p>
-            <a:endParaRPr kumimoji="1" lang="en-US" altLang="ja-JP" sz="2400" dirty="0"/>
-          </a:p>
-          <a:p>
-            <a:r>
-              <a:rPr lang="en-US" altLang="ja-JP" sz="2400" dirty="0"/>
-              <a:t>3D</a:t>
-            </a:r>
-            <a:r>
-              <a:rPr lang="ja-JP" altLang="en-US" sz="2400" dirty="0"/>
-              <a:t>の描画は、まず画像の</a:t>
-            </a:r>
-            <a:r>
-              <a:rPr lang="ja-JP" altLang="en-US" sz="2400" b="1" dirty="0">
-                <a:solidFill>
-                  <a:srgbClr val="FF0000"/>
-                </a:solidFill>
-              </a:rPr>
-              <a:t>位置や回転、拡縮を決め、仮想の空間に配置</a:t>
-            </a:r>
-            <a:r>
-              <a:rPr lang="ja-JP" altLang="en-US" sz="2400" dirty="0"/>
-              <a:t>します。</a:t>
-            </a:r>
-            <a:endParaRPr lang="en-US" altLang="ja-JP" sz="2400" dirty="0"/>
-          </a:p>
-          <a:p>
-            <a:r>
-              <a:rPr lang="ja-JP" altLang="en-US" sz="2400" dirty="0"/>
-              <a:t>配置するだけで、</a:t>
-            </a:r>
-            <a:r>
-              <a:rPr lang="ja-JP" altLang="en-US" sz="2400" b="1" dirty="0">
-                <a:solidFill>
-                  <a:srgbClr val="FF0000"/>
-                </a:solidFill>
-              </a:rPr>
-              <a:t>まだ描画はしません。</a:t>
-            </a:r>
-            <a:endParaRPr lang="en-US" altLang="ja-JP" sz="2400" b="1" dirty="0">
-              <a:solidFill>
-                <a:srgbClr val="FF0000"/>
-              </a:solidFill>
-            </a:endParaRPr>
-          </a:p>
-        </p:txBody>
-      </p:sp>
-      <p:sp>
-        <p:nvSpPr>
-          <p:cNvPr id="2" name="直方体 1">
-            <a:extLst>
-              <a:ext uri="{FF2B5EF4-FFF2-40B4-BE49-F238E27FC236}">
-                <a16:creationId xmlns:a16="http://schemas.microsoft.com/office/drawing/2014/main" id="{80291F9A-27BD-4701-9276-EBF199C18DDD}"/>
-              </a:ext>
-            </a:extLst>
-          </p:cNvPr>
-          <p:cNvSpPr/>
-          <p:nvPr/>
-        </p:nvSpPr>
-        <p:spPr>
-          <a:xfrm>
-            <a:off x="2527300" y="4635500"/>
-            <a:ext cx="1841500" cy="1828800"/>
-          </a:xfrm>
-          <a:prstGeom prst="cube">
-            <a:avLst/>
-          </a:prstGeom>
-        </p:spPr>
-        <p:style>
-          <a:lnRef idx="2">
-            <a:schemeClr val="accent1">
-              <a:shade val="50000"/>
-            </a:schemeClr>
-          </a:lnRef>
-          <a:fillRef idx="1">
-            <a:schemeClr val="accent1"/>
-          </a:fillRef>
-          <a:effectRef idx="0">
-            <a:schemeClr val="accent1"/>
-          </a:effectRef>
-          <a:fontRef idx="minor">
-            <a:schemeClr val="lt1"/>
-          </a:fontRef>
-        </p:style>
-        <p:txBody>
-          <a:bodyPr rtlCol="0" anchor="ctr"/>
-          <a:lstStyle/>
-          <a:p>
-            <a:pPr algn="ctr"/>
-            <a:endParaRPr kumimoji="1" lang="ja-JP" altLang="en-US"/>
-          </a:p>
-        </p:txBody>
-      </p:sp>
-      <p:sp>
-        <p:nvSpPr>
-          <p:cNvPr id="7" name="直方体 6">
-            <a:extLst>
-              <a:ext uri="{FF2B5EF4-FFF2-40B4-BE49-F238E27FC236}">
-                <a16:creationId xmlns:a16="http://schemas.microsoft.com/office/drawing/2014/main" id="{636436CF-AAEB-47CF-9491-2E9FDE038B03}"/>
-              </a:ext>
-            </a:extLst>
-          </p:cNvPr>
-          <p:cNvSpPr/>
-          <p:nvPr/>
-        </p:nvSpPr>
-        <p:spPr>
-          <a:xfrm rot="1748454">
-            <a:off x="1479287" y="3684562"/>
-            <a:ext cx="917453" cy="774700"/>
-          </a:xfrm>
-          <a:prstGeom prst="cube">
-            <a:avLst/>
-          </a:prstGeom>
-        </p:spPr>
-        <p:style>
-          <a:lnRef idx="2">
-            <a:schemeClr val="accent1">
-              <a:shade val="50000"/>
-            </a:schemeClr>
-          </a:lnRef>
-          <a:fillRef idx="1">
-            <a:schemeClr val="accent1"/>
-          </a:fillRef>
-          <a:effectRef idx="0">
-            <a:schemeClr val="accent1"/>
-          </a:effectRef>
-          <a:fontRef idx="minor">
-            <a:schemeClr val="lt1"/>
-          </a:fontRef>
-        </p:style>
-        <p:txBody>
-          <a:bodyPr rtlCol="0" anchor="ctr"/>
-          <a:lstStyle/>
-          <a:p>
-            <a:pPr algn="ctr"/>
-            <a:endParaRPr kumimoji="1" lang="ja-JP" altLang="en-US"/>
-          </a:p>
-        </p:txBody>
-      </p:sp>
+        </p:txBody>
+      </p:sp>
+      <p:pic>
+        <p:nvPicPr>
+          <p:cNvPr id="3" name="図 2">
+            <a:extLst>
+              <a:ext uri="{FF2B5EF4-FFF2-40B4-BE49-F238E27FC236}">
+                <a16:creationId xmlns:a16="http://schemas.microsoft.com/office/drawing/2014/main" id="{CB4322E2-4619-4A5C-A233-E9CEFBC1A4DC}"/>
+              </a:ext>
+            </a:extLst>
+          </p:cNvPr>
+          <p:cNvPicPr>
+            <a:picLocks noChangeAspect="1"/>
+          </p:cNvPicPr>
+          <p:nvPr/>
+        </p:nvPicPr>
+        <p:blipFill>
+          <a:blip r:embed="rId2">
+            <a:extLst>
+              <a:ext uri="{28A0092B-C50C-407E-A947-70E740481C1C}">
+                <a14:useLocalDpi xmlns:a14="http://schemas.microsoft.com/office/drawing/2010/main" val="0"/>
+              </a:ext>
+            </a:extLst>
+          </a:blip>
+          <a:stretch>
+            <a:fillRect/>
+          </a:stretch>
+        </p:blipFill>
+        <p:spPr>
+          <a:xfrm>
+            <a:off x="567542" y="1817794"/>
+            <a:ext cx="9937254" cy="1789006"/>
+          </a:xfrm>
+          <a:prstGeom prst="rect">
+            <a:avLst/>
+          </a:prstGeom>
+        </p:spPr>
+      </p:pic>
     </p:spTree>
     <p:extLst>
       <p:ext uri="{BB962C8B-B14F-4D97-AF65-F5344CB8AC3E}">
-        <p14:creationId xmlns:p14="http://schemas.microsoft.com/office/powerpoint/2010/main" val="703100386"/>
+        <p14:creationId xmlns:p14="http://schemas.microsoft.com/office/powerpoint/2010/main" val="1368374807"/>
       </p:ext>
     </p:extLst>
   </p:cSld>

--- a/ゲーム科2年/00_前期/ゲーム開発Ⅰ/05_オブジェクトの複数配置.pptx
+++ b/ゲーム科2年/00_前期/ゲーム開発Ⅰ/05_オブジェクトの複数配置.pptx
@@ -284,7 +284,7 @@
           <a:p>
             <a:fld id="{E9CC885B-4903-4D54-9A93-00025F12DED9}" type="datetimeFigureOut">
               <a:rPr kumimoji="1" lang="ja-JP" altLang="en-US" smtClean="0"/>
-              <a:t>2025/1/6</a:t>
+              <a:t>2025/2/7</a:t>
             </a:fld>
             <a:endParaRPr kumimoji="1" lang="ja-JP" altLang="en-US"/>
           </a:p>
@@ -514,7 +514,7 @@
           <a:p>
             <a:fld id="{E9CC885B-4903-4D54-9A93-00025F12DED9}" type="datetimeFigureOut">
               <a:rPr kumimoji="1" lang="ja-JP" altLang="en-US" smtClean="0"/>
-              <a:t>2025/1/6</a:t>
+              <a:t>2025/2/7</a:t>
             </a:fld>
             <a:endParaRPr kumimoji="1" lang="ja-JP" altLang="en-US"/>
           </a:p>
@@ -754,7 +754,7 @@
           <a:p>
             <a:fld id="{E9CC885B-4903-4D54-9A93-00025F12DED9}" type="datetimeFigureOut">
               <a:rPr kumimoji="1" lang="ja-JP" altLang="en-US" smtClean="0"/>
-              <a:t>2025/1/6</a:t>
+              <a:t>2025/2/7</a:t>
             </a:fld>
             <a:endParaRPr kumimoji="1" lang="ja-JP" altLang="en-US"/>
           </a:p>
@@ -984,7 +984,7 @@
           <a:p>
             <a:fld id="{E9CC885B-4903-4D54-9A93-00025F12DED9}" type="datetimeFigureOut">
               <a:rPr kumimoji="1" lang="ja-JP" altLang="en-US" smtClean="0"/>
-              <a:t>2025/1/6</a:t>
+              <a:t>2025/2/7</a:t>
             </a:fld>
             <a:endParaRPr kumimoji="1" lang="ja-JP" altLang="en-US"/>
           </a:p>
@@ -1259,7 +1259,7 @@
           <a:p>
             <a:fld id="{E9CC885B-4903-4D54-9A93-00025F12DED9}" type="datetimeFigureOut">
               <a:rPr kumimoji="1" lang="ja-JP" altLang="en-US" smtClean="0"/>
-              <a:t>2025/1/6</a:t>
+              <a:t>2025/2/7</a:t>
             </a:fld>
             <a:endParaRPr kumimoji="1" lang="ja-JP" altLang="en-US"/>
           </a:p>
@@ -1588,7 +1588,7 @@
           <a:p>
             <a:fld id="{E9CC885B-4903-4D54-9A93-00025F12DED9}" type="datetimeFigureOut">
               <a:rPr kumimoji="1" lang="ja-JP" altLang="en-US" smtClean="0"/>
-              <a:t>2025/1/6</a:t>
+              <a:t>2025/2/7</a:t>
             </a:fld>
             <a:endParaRPr kumimoji="1" lang="ja-JP" altLang="en-US"/>
           </a:p>
@@ -2064,7 +2064,7 @@
           <a:p>
             <a:fld id="{E9CC885B-4903-4D54-9A93-00025F12DED9}" type="datetimeFigureOut">
               <a:rPr kumimoji="1" lang="ja-JP" altLang="en-US" smtClean="0"/>
-              <a:t>2025/1/6</a:t>
+              <a:t>2025/2/7</a:t>
             </a:fld>
             <a:endParaRPr kumimoji="1" lang="ja-JP" altLang="en-US"/>
           </a:p>
@@ -2205,7 +2205,7 @@
           <a:p>
             <a:fld id="{E9CC885B-4903-4D54-9A93-00025F12DED9}" type="datetimeFigureOut">
               <a:rPr kumimoji="1" lang="ja-JP" altLang="en-US" smtClean="0"/>
-              <a:t>2025/1/6</a:t>
+              <a:t>2025/2/7</a:t>
             </a:fld>
             <a:endParaRPr kumimoji="1" lang="ja-JP" altLang="en-US"/>
           </a:p>
@@ -2318,7 +2318,7 @@
           <a:p>
             <a:fld id="{E9CC885B-4903-4D54-9A93-00025F12DED9}" type="datetimeFigureOut">
               <a:rPr kumimoji="1" lang="ja-JP" altLang="en-US" smtClean="0"/>
-              <a:t>2025/1/6</a:t>
+              <a:t>2025/2/7</a:t>
             </a:fld>
             <a:endParaRPr kumimoji="1" lang="ja-JP" altLang="en-US"/>
           </a:p>
@@ -2661,7 +2661,7 @@
           <a:p>
             <a:fld id="{E9CC885B-4903-4D54-9A93-00025F12DED9}" type="datetimeFigureOut">
               <a:rPr kumimoji="1" lang="ja-JP" altLang="en-US" smtClean="0"/>
-              <a:t>2025/1/6</a:t>
+              <a:t>2025/2/7</a:t>
             </a:fld>
             <a:endParaRPr kumimoji="1" lang="ja-JP" altLang="en-US"/>
           </a:p>
@@ -2949,7 +2949,7 @@
           <a:p>
             <a:fld id="{E9CC885B-4903-4D54-9A93-00025F12DED9}" type="datetimeFigureOut">
               <a:rPr kumimoji="1" lang="ja-JP" altLang="en-US" smtClean="0"/>
-              <a:t>2025/1/6</a:t>
+              <a:t>2025/2/7</a:t>
             </a:fld>
             <a:endParaRPr kumimoji="1" lang="ja-JP" altLang="en-US"/>
           </a:p>
@@ -3222,7 +3222,7 @@
           <a:p>
             <a:fld id="{E9CC885B-4903-4D54-9A93-00025F12DED9}" type="datetimeFigureOut">
               <a:rPr kumimoji="1" lang="ja-JP" altLang="en-US" smtClean="0"/>
-              <a:t>2025/1/6</a:t>
+              <a:t>2025/2/7</a:t>
             </a:fld>
             <a:endParaRPr kumimoji="1" lang="ja-JP" altLang="en-US"/>
           </a:p>
@@ -8539,7 +8539,7 @@
             </a:r>
             <a:r>
               <a:rPr lang="ja-JP" altLang="en-US" sz="2400" dirty="0"/>
-              <a:t>しているからです。（板にスタンプを押すイメージ）</a:t>
+              <a:t>しているからです。</a:t>
             </a:r>
             <a:endParaRPr lang="en-US" altLang="ja-JP" sz="2400" dirty="0"/>
           </a:p>

--- a/ゲーム科2年/00_前期/ゲーム開発Ⅰ/05_オブジェクトの複数配置.pptx
+++ b/ゲーム科2年/00_前期/ゲーム開発Ⅰ/05_オブジェクトの複数配置.pptx
@@ -284,7 +284,7 @@
           <a:p>
             <a:fld id="{E9CC885B-4903-4D54-9A93-00025F12DED9}" type="datetimeFigureOut">
               <a:rPr kumimoji="1" lang="ja-JP" altLang="en-US" smtClean="0"/>
-              <a:t>2025/2/7</a:t>
+              <a:t>2025/4/7</a:t>
             </a:fld>
             <a:endParaRPr kumimoji="1" lang="ja-JP" altLang="en-US"/>
           </a:p>
@@ -514,7 +514,7 @@
           <a:p>
             <a:fld id="{E9CC885B-4903-4D54-9A93-00025F12DED9}" type="datetimeFigureOut">
               <a:rPr kumimoji="1" lang="ja-JP" altLang="en-US" smtClean="0"/>
-              <a:t>2025/2/7</a:t>
+              <a:t>2025/4/7</a:t>
             </a:fld>
             <a:endParaRPr kumimoji="1" lang="ja-JP" altLang="en-US"/>
           </a:p>
@@ -754,7 +754,7 @@
           <a:p>
             <a:fld id="{E9CC885B-4903-4D54-9A93-00025F12DED9}" type="datetimeFigureOut">
               <a:rPr kumimoji="1" lang="ja-JP" altLang="en-US" smtClean="0"/>
-              <a:t>2025/2/7</a:t>
+              <a:t>2025/4/7</a:t>
             </a:fld>
             <a:endParaRPr kumimoji="1" lang="ja-JP" altLang="en-US"/>
           </a:p>
@@ -984,7 +984,7 @@
           <a:p>
             <a:fld id="{E9CC885B-4903-4D54-9A93-00025F12DED9}" type="datetimeFigureOut">
               <a:rPr kumimoji="1" lang="ja-JP" altLang="en-US" smtClean="0"/>
-              <a:t>2025/2/7</a:t>
+              <a:t>2025/4/7</a:t>
             </a:fld>
             <a:endParaRPr kumimoji="1" lang="ja-JP" altLang="en-US"/>
           </a:p>
@@ -1259,7 +1259,7 @@
           <a:p>
             <a:fld id="{E9CC885B-4903-4D54-9A93-00025F12DED9}" type="datetimeFigureOut">
               <a:rPr kumimoji="1" lang="ja-JP" altLang="en-US" smtClean="0"/>
-              <a:t>2025/2/7</a:t>
+              <a:t>2025/4/7</a:t>
             </a:fld>
             <a:endParaRPr kumimoji="1" lang="ja-JP" altLang="en-US"/>
           </a:p>
@@ -1588,7 +1588,7 @@
           <a:p>
             <a:fld id="{E9CC885B-4903-4D54-9A93-00025F12DED9}" type="datetimeFigureOut">
               <a:rPr kumimoji="1" lang="ja-JP" altLang="en-US" smtClean="0"/>
-              <a:t>2025/2/7</a:t>
+              <a:t>2025/4/7</a:t>
             </a:fld>
             <a:endParaRPr kumimoji="1" lang="ja-JP" altLang="en-US"/>
           </a:p>
@@ -2064,7 +2064,7 @@
           <a:p>
             <a:fld id="{E9CC885B-4903-4D54-9A93-00025F12DED9}" type="datetimeFigureOut">
               <a:rPr kumimoji="1" lang="ja-JP" altLang="en-US" smtClean="0"/>
-              <a:t>2025/2/7</a:t>
+              <a:t>2025/4/7</a:t>
             </a:fld>
             <a:endParaRPr kumimoji="1" lang="ja-JP" altLang="en-US"/>
           </a:p>
@@ -2205,7 +2205,7 @@
           <a:p>
             <a:fld id="{E9CC885B-4903-4D54-9A93-00025F12DED9}" type="datetimeFigureOut">
               <a:rPr kumimoji="1" lang="ja-JP" altLang="en-US" smtClean="0"/>
-              <a:t>2025/2/7</a:t>
+              <a:t>2025/4/7</a:t>
             </a:fld>
             <a:endParaRPr kumimoji="1" lang="ja-JP" altLang="en-US"/>
           </a:p>
@@ -2318,7 +2318,7 @@
           <a:p>
             <a:fld id="{E9CC885B-4903-4D54-9A93-00025F12DED9}" type="datetimeFigureOut">
               <a:rPr kumimoji="1" lang="ja-JP" altLang="en-US" smtClean="0"/>
-              <a:t>2025/2/7</a:t>
+              <a:t>2025/4/7</a:t>
             </a:fld>
             <a:endParaRPr kumimoji="1" lang="ja-JP" altLang="en-US"/>
           </a:p>
@@ -2661,7 +2661,7 @@
           <a:p>
             <a:fld id="{E9CC885B-4903-4D54-9A93-00025F12DED9}" type="datetimeFigureOut">
               <a:rPr kumimoji="1" lang="ja-JP" altLang="en-US" smtClean="0"/>
-              <a:t>2025/2/7</a:t>
+              <a:t>2025/4/7</a:t>
             </a:fld>
             <a:endParaRPr kumimoji="1" lang="ja-JP" altLang="en-US"/>
           </a:p>
@@ -2949,7 +2949,7 @@
           <a:p>
             <a:fld id="{E9CC885B-4903-4D54-9A93-00025F12DED9}" type="datetimeFigureOut">
               <a:rPr kumimoji="1" lang="ja-JP" altLang="en-US" smtClean="0"/>
-              <a:t>2025/2/7</a:t>
+              <a:t>2025/4/7</a:t>
             </a:fld>
             <a:endParaRPr kumimoji="1" lang="ja-JP" altLang="en-US"/>
           </a:p>
@@ -3222,7 +3222,7 @@
           <a:p>
             <a:fld id="{E9CC885B-4903-4D54-9A93-00025F12DED9}" type="datetimeFigureOut">
               <a:rPr kumimoji="1" lang="ja-JP" altLang="en-US" smtClean="0"/>
-              <a:t>2025/2/7</a:t>
+              <a:t>2025/4/7</a:t>
             </a:fld>
             <a:endParaRPr kumimoji="1" lang="ja-JP" altLang="en-US"/>
           </a:p>
@@ -4842,10 +4842,10 @@
       </p:sp>
       <p:pic>
         <p:nvPicPr>
-          <p:cNvPr id="5" name="図 4">
-            <a:extLst>
-              <a:ext uri="{FF2B5EF4-FFF2-40B4-BE49-F238E27FC236}">
-                <a16:creationId xmlns:a16="http://schemas.microsoft.com/office/drawing/2014/main" id="{1922A69A-9F5A-486E-94F9-FA0C7C2B0EE3}"/>
+          <p:cNvPr id="8" name="図 7">
+            <a:extLst>
+              <a:ext uri="{FF2B5EF4-FFF2-40B4-BE49-F238E27FC236}">
+                <a16:creationId xmlns:a16="http://schemas.microsoft.com/office/drawing/2014/main" id="{B66097B0-295D-4F24-B40F-5EF2CAD77E97}"/>
               </a:ext>
             </a:extLst>
           </p:cNvPr>
@@ -4868,8 +4868,8 @@
         </p:blipFill>
         <p:spPr>
           <a:xfrm>
-            <a:off x="567542" y="2187126"/>
-            <a:ext cx="9937254" cy="1789006"/>
+            <a:off x="567542" y="4115832"/>
+            <a:ext cx="7483742" cy="2385906"/>
           </a:xfrm>
           <a:prstGeom prst="rect">
             <a:avLst/>
@@ -4878,10 +4878,10 @@
       </p:pic>
       <p:pic>
         <p:nvPicPr>
-          <p:cNvPr id="8" name="図 7">
-            <a:extLst>
-              <a:ext uri="{FF2B5EF4-FFF2-40B4-BE49-F238E27FC236}">
-                <a16:creationId xmlns:a16="http://schemas.microsoft.com/office/drawing/2014/main" id="{B66097B0-295D-4F24-B40F-5EF2CAD77E97}"/>
+          <p:cNvPr id="3" name="図 2">
+            <a:extLst>
+              <a:ext uri="{FF2B5EF4-FFF2-40B4-BE49-F238E27FC236}">
+                <a16:creationId xmlns:a16="http://schemas.microsoft.com/office/drawing/2014/main" id="{3340FC7D-F54A-42C5-824A-9AF6C2592D18}"/>
               </a:ext>
             </a:extLst>
           </p:cNvPr>
@@ -4891,21 +4891,15 @@
           <p:nvPr/>
         </p:nvPicPr>
         <p:blipFill>
-          <a:blip r:embed="rId3">
-            <a:extLst>
-              <a:ext uri="{28A0092B-C50C-407E-A947-70E740481C1C}">
-                <a14:useLocalDpi xmlns:a14="http://schemas.microsoft.com/office/drawing/2010/main" val="0"/>
-              </a:ext>
-            </a:extLst>
-          </a:blip>
+          <a:blip r:embed="rId3"/>
           <a:stretch>
             <a:fillRect/>
           </a:stretch>
         </p:blipFill>
         <p:spPr>
           <a:xfrm>
-            <a:off x="567542" y="4115832"/>
-            <a:ext cx="7483742" cy="2385906"/>
+            <a:off x="567542" y="2187126"/>
+            <a:ext cx="9770528" cy="1733233"/>
           </a:xfrm>
           <a:prstGeom prst="rect">
             <a:avLst/>
@@ -6824,10 +6818,10 @@
       </p:sp>
       <p:pic>
         <p:nvPicPr>
-          <p:cNvPr id="10" name="図 9">
-            <a:extLst>
-              <a:ext uri="{FF2B5EF4-FFF2-40B4-BE49-F238E27FC236}">
-                <a16:creationId xmlns:a16="http://schemas.microsoft.com/office/drawing/2014/main" id="{09F05AC2-9A35-4F06-A557-5EF8934876FC}"/>
+          <p:cNvPr id="7" name="図 6">
+            <a:extLst>
+              <a:ext uri="{FF2B5EF4-FFF2-40B4-BE49-F238E27FC236}">
+                <a16:creationId xmlns:a16="http://schemas.microsoft.com/office/drawing/2014/main" id="{81DE565B-D5AE-49E3-98E0-00EDABADE20C}"/>
               </a:ext>
             </a:extLst>
           </p:cNvPr>
@@ -6837,13 +6831,7 @@
           <p:nvPr/>
         </p:nvPicPr>
         <p:blipFill>
-          <a:blip r:embed="rId2">
-            <a:extLst>
-              <a:ext uri="{28A0092B-C50C-407E-A947-70E740481C1C}">
-                <a14:useLocalDpi xmlns:a14="http://schemas.microsoft.com/office/drawing/2010/main" val="0"/>
-              </a:ext>
-            </a:extLst>
-          </a:blip>
+          <a:blip r:embed="rId2"/>
           <a:stretch>
             <a:fillRect/>
           </a:stretch>
@@ -6851,7 +6839,7 @@
         <p:spPr>
           <a:xfrm>
             <a:off x="567542" y="1817794"/>
-            <a:ext cx="10220024" cy="1801706"/>
+            <a:ext cx="9279162" cy="1913378"/>
           </a:xfrm>
           <a:prstGeom prst="rect">
             <a:avLst/>
@@ -8965,10 +8953,10 @@
       </p:sp>
       <p:pic>
         <p:nvPicPr>
-          <p:cNvPr id="3" name="図 2">
-            <a:extLst>
-              <a:ext uri="{FF2B5EF4-FFF2-40B4-BE49-F238E27FC236}">
-                <a16:creationId xmlns:a16="http://schemas.microsoft.com/office/drawing/2014/main" id="{CB4322E2-4619-4A5C-A233-E9CEFBC1A4DC}"/>
+          <p:cNvPr id="5" name="図 4">
+            <a:extLst>
+              <a:ext uri="{FF2B5EF4-FFF2-40B4-BE49-F238E27FC236}">
+                <a16:creationId xmlns:a16="http://schemas.microsoft.com/office/drawing/2014/main" id="{289462DD-68A9-49AF-A333-B9B1B079A8CE}"/>
               </a:ext>
             </a:extLst>
           </p:cNvPr>
@@ -8978,21 +8966,15 @@
           <p:nvPr/>
         </p:nvPicPr>
         <p:blipFill>
-          <a:blip r:embed="rId2">
-            <a:extLst>
-              <a:ext uri="{28A0092B-C50C-407E-A947-70E740481C1C}">
-                <a14:useLocalDpi xmlns:a14="http://schemas.microsoft.com/office/drawing/2010/main" val="0"/>
-              </a:ext>
-            </a:extLst>
-          </a:blip>
+          <a:blip r:embed="rId2"/>
           <a:stretch>
             <a:fillRect/>
           </a:stretch>
         </p:blipFill>
         <p:spPr>
           <a:xfrm>
-            <a:off x="567542" y="1817794"/>
-            <a:ext cx="9937254" cy="1789006"/>
+            <a:off x="567541" y="1817794"/>
+            <a:ext cx="10193553" cy="1808275"/>
           </a:xfrm>
           <a:prstGeom prst="rect">
             <a:avLst/>

--- a/ゲーム科2年/00_前期/ゲーム開発Ⅰ/05_オブジェクトの複数配置.pptx
+++ b/ゲーム科2年/00_前期/ゲーム開発Ⅰ/05_オブジェクトの複数配置.pptx
@@ -8,29 +8,26 @@
     <p:sldId id="257" r:id="rId2"/>
     <p:sldId id="258" r:id="rId3"/>
     <p:sldId id="259" r:id="rId4"/>
-    <p:sldId id="260" r:id="rId5"/>
-    <p:sldId id="261" r:id="rId6"/>
-    <p:sldId id="262" r:id="rId7"/>
-    <p:sldId id="264" r:id="rId8"/>
-    <p:sldId id="263" r:id="rId9"/>
-    <p:sldId id="268" r:id="rId10"/>
-    <p:sldId id="269" r:id="rId11"/>
-    <p:sldId id="270" r:id="rId12"/>
-    <p:sldId id="271" r:id="rId13"/>
-    <p:sldId id="272" r:id="rId14"/>
-    <p:sldId id="273" r:id="rId15"/>
-    <p:sldId id="274" r:id="rId16"/>
-    <p:sldId id="275" r:id="rId17"/>
-    <p:sldId id="276" r:id="rId18"/>
-    <p:sldId id="277" r:id="rId19"/>
-    <p:sldId id="278" r:id="rId20"/>
-    <p:sldId id="279" r:id="rId21"/>
-    <p:sldId id="280" r:id="rId22"/>
-    <p:sldId id="281" r:id="rId23"/>
-    <p:sldId id="282" r:id="rId24"/>
-    <p:sldId id="283" r:id="rId25"/>
-    <p:sldId id="284" r:id="rId26"/>
-    <p:sldId id="285" r:id="rId27"/>
+    <p:sldId id="262" r:id="rId5"/>
+    <p:sldId id="264" r:id="rId6"/>
+    <p:sldId id="263" r:id="rId7"/>
+    <p:sldId id="268" r:id="rId8"/>
+    <p:sldId id="269" r:id="rId9"/>
+    <p:sldId id="270" r:id="rId10"/>
+    <p:sldId id="271" r:id="rId11"/>
+    <p:sldId id="273" r:id="rId12"/>
+    <p:sldId id="274" r:id="rId13"/>
+    <p:sldId id="275" r:id="rId14"/>
+    <p:sldId id="276" r:id="rId15"/>
+    <p:sldId id="277" r:id="rId16"/>
+    <p:sldId id="278" r:id="rId17"/>
+    <p:sldId id="279" r:id="rId18"/>
+    <p:sldId id="280" r:id="rId19"/>
+    <p:sldId id="281" r:id="rId20"/>
+    <p:sldId id="282" r:id="rId21"/>
+    <p:sldId id="283" r:id="rId22"/>
+    <p:sldId id="284" r:id="rId23"/>
+    <p:sldId id="285" r:id="rId24"/>
   </p:sldIdLst>
   <p:sldSz cx="12192000" cy="6858000"/>
   <p:notesSz cx="6858000" cy="9144000"/>
@@ -284,7 +281,7 @@
           <a:p>
             <a:fld id="{E9CC885B-4903-4D54-9A93-00025F12DED9}" type="datetimeFigureOut">
               <a:rPr kumimoji="1" lang="ja-JP" altLang="en-US" smtClean="0"/>
-              <a:t>2025/4/7</a:t>
+              <a:t>2026/2/5</a:t>
             </a:fld>
             <a:endParaRPr kumimoji="1" lang="ja-JP" altLang="en-US"/>
           </a:p>
@@ -514,7 +511,7 @@
           <a:p>
             <a:fld id="{E9CC885B-4903-4D54-9A93-00025F12DED9}" type="datetimeFigureOut">
               <a:rPr kumimoji="1" lang="ja-JP" altLang="en-US" smtClean="0"/>
-              <a:t>2025/4/7</a:t>
+              <a:t>2026/2/5</a:t>
             </a:fld>
             <a:endParaRPr kumimoji="1" lang="ja-JP" altLang="en-US"/>
           </a:p>
@@ -754,7 +751,7 @@
           <a:p>
             <a:fld id="{E9CC885B-4903-4D54-9A93-00025F12DED9}" type="datetimeFigureOut">
               <a:rPr kumimoji="1" lang="ja-JP" altLang="en-US" smtClean="0"/>
-              <a:t>2025/4/7</a:t>
+              <a:t>2026/2/5</a:t>
             </a:fld>
             <a:endParaRPr kumimoji="1" lang="ja-JP" altLang="en-US"/>
           </a:p>
@@ -984,7 +981,7 @@
           <a:p>
             <a:fld id="{E9CC885B-4903-4D54-9A93-00025F12DED9}" type="datetimeFigureOut">
               <a:rPr kumimoji="1" lang="ja-JP" altLang="en-US" smtClean="0"/>
-              <a:t>2025/4/7</a:t>
+              <a:t>2026/2/5</a:t>
             </a:fld>
             <a:endParaRPr kumimoji="1" lang="ja-JP" altLang="en-US"/>
           </a:p>
@@ -1259,7 +1256,7 @@
           <a:p>
             <a:fld id="{E9CC885B-4903-4D54-9A93-00025F12DED9}" type="datetimeFigureOut">
               <a:rPr kumimoji="1" lang="ja-JP" altLang="en-US" smtClean="0"/>
-              <a:t>2025/4/7</a:t>
+              <a:t>2026/2/5</a:t>
             </a:fld>
             <a:endParaRPr kumimoji="1" lang="ja-JP" altLang="en-US"/>
           </a:p>
@@ -1588,7 +1585,7 @@
           <a:p>
             <a:fld id="{E9CC885B-4903-4D54-9A93-00025F12DED9}" type="datetimeFigureOut">
               <a:rPr kumimoji="1" lang="ja-JP" altLang="en-US" smtClean="0"/>
-              <a:t>2025/4/7</a:t>
+              <a:t>2026/2/5</a:t>
             </a:fld>
             <a:endParaRPr kumimoji="1" lang="ja-JP" altLang="en-US"/>
           </a:p>
@@ -2064,7 +2061,7 @@
           <a:p>
             <a:fld id="{E9CC885B-4903-4D54-9A93-00025F12DED9}" type="datetimeFigureOut">
               <a:rPr kumimoji="1" lang="ja-JP" altLang="en-US" smtClean="0"/>
-              <a:t>2025/4/7</a:t>
+              <a:t>2026/2/5</a:t>
             </a:fld>
             <a:endParaRPr kumimoji="1" lang="ja-JP" altLang="en-US"/>
           </a:p>
@@ -2205,7 +2202,7 @@
           <a:p>
             <a:fld id="{E9CC885B-4903-4D54-9A93-00025F12DED9}" type="datetimeFigureOut">
               <a:rPr kumimoji="1" lang="ja-JP" altLang="en-US" smtClean="0"/>
-              <a:t>2025/4/7</a:t>
+              <a:t>2026/2/5</a:t>
             </a:fld>
             <a:endParaRPr kumimoji="1" lang="ja-JP" altLang="en-US"/>
           </a:p>
@@ -2318,7 +2315,7 @@
           <a:p>
             <a:fld id="{E9CC885B-4903-4D54-9A93-00025F12DED9}" type="datetimeFigureOut">
               <a:rPr kumimoji="1" lang="ja-JP" altLang="en-US" smtClean="0"/>
-              <a:t>2025/4/7</a:t>
+              <a:t>2026/2/5</a:t>
             </a:fld>
             <a:endParaRPr kumimoji="1" lang="ja-JP" altLang="en-US"/>
           </a:p>
@@ -2661,7 +2658,7 @@
           <a:p>
             <a:fld id="{E9CC885B-4903-4D54-9A93-00025F12DED9}" type="datetimeFigureOut">
               <a:rPr kumimoji="1" lang="ja-JP" altLang="en-US" smtClean="0"/>
-              <a:t>2025/4/7</a:t>
+              <a:t>2026/2/5</a:t>
             </a:fld>
             <a:endParaRPr kumimoji="1" lang="ja-JP" altLang="en-US"/>
           </a:p>
@@ -2949,7 +2946,7 @@
           <a:p>
             <a:fld id="{E9CC885B-4903-4D54-9A93-00025F12DED9}" type="datetimeFigureOut">
               <a:rPr kumimoji="1" lang="ja-JP" altLang="en-US" smtClean="0"/>
-              <a:t>2025/4/7</a:t>
+              <a:t>2026/2/5</a:t>
             </a:fld>
             <a:endParaRPr kumimoji="1" lang="ja-JP" altLang="en-US"/>
           </a:p>
@@ -3222,7 +3219,7 @@
           <a:p>
             <a:fld id="{E9CC885B-4903-4D54-9A93-00025F12DED9}" type="datetimeFigureOut">
               <a:rPr kumimoji="1" lang="ja-JP" altLang="en-US" smtClean="0"/>
-              <a:t>2025/4/7</a:t>
+              <a:t>2026/2/5</a:t>
             </a:fld>
             <a:endParaRPr kumimoji="1" lang="ja-JP" altLang="en-US"/>
           </a:p>
@@ -3838,7 +3835,7 @@
         <p:spPr>
           <a:xfrm>
             <a:off x="567542" y="491954"/>
-            <a:ext cx="6046848" cy="584775"/>
+            <a:ext cx="4698722" cy="584775"/>
           </a:xfrm>
           <a:prstGeom prst="rect">
             <a:avLst/>
@@ -3853,7 +3850,7 @@
           <a:p>
             <a:r>
               <a:rPr kumimoji="1" lang="ja-JP" altLang="en-US" sz="3200" b="1" u="sng" dirty="0"/>
-              <a:t>オブジェクトの複数配置 ロード</a:t>
+              <a:t>オブジェクトの複数配置</a:t>
             </a:r>
             <a:endParaRPr kumimoji="1" lang="en-US" altLang="ja-JP" sz="3200" b="1" u="sng" dirty="0"/>
           </a:p>
@@ -3874,7 +3871,7 @@
         <p:spPr>
           <a:xfrm>
             <a:off x="567542" y="1216429"/>
-            <a:ext cx="9748181" cy="461665"/>
+            <a:ext cx="8805616" cy="461665"/>
           </a:xfrm>
           <a:prstGeom prst="rect">
             <a:avLst/>
@@ -3888,16 +3885,16 @@
           <a:lstStyle/>
           <a:p>
             <a:r>
-              <a:rPr lang="en-US" altLang="ja-JP" sz="2400" b="1" dirty="0">
+              <a:rPr lang="en-US" altLang="ja-JP" sz="2400" b="1" dirty="0" err="1">
                 <a:solidFill>
-                  <a:srgbClr val="FF0000"/>
+                  <a:srgbClr val="00B050"/>
                 </a:solidFill>
               </a:rPr>
-              <a:t>BlockManager.cpp</a:t>
+              <a:t>BlockManager</a:t>
             </a:r>
             <a:r>
               <a:rPr lang="ja-JP" altLang="en-US" sz="2400" dirty="0"/>
-              <a:t>側から各ブロックのロード処理を呼びましょう。</a:t>
+              <a:t>の残りの関数も完成させましょう。（その２）</a:t>
             </a:r>
             <a:endParaRPr lang="en-US" altLang="ja-JP" sz="2400" dirty="0"/>
           </a:p>
@@ -3905,10 +3902,10 @@
       </p:sp>
       <p:pic>
         <p:nvPicPr>
-          <p:cNvPr id="5" name="図 4">
-            <a:extLst>
-              <a:ext uri="{FF2B5EF4-FFF2-40B4-BE49-F238E27FC236}">
-                <a16:creationId xmlns:a16="http://schemas.microsoft.com/office/drawing/2014/main" id="{09F2C7FF-BCA4-4801-A350-5BDE377929C6}"/>
+          <p:cNvPr id="3" name="図 2">
+            <a:extLst>
+              <a:ext uri="{FF2B5EF4-FFF2-40B4-BE49-F238E27FC236}">
+                <a16:creationId xmlns:a16="http://schemas.microsoft.com/office/drawing/2014/main" id="{2B419B4A-1D20-4E78-B048-1C58E4B8AD74}"/>
               </a:ext>
             </a:extLst>
           </p:cNvPr>
@@ -3918,74 +3915,25 @@
           <p:nvPr/>
         </p:nvPicPr>
         <p:blipFill>
-          <a:blip r:embed="rId2">
-            <a:extLst>
-              <a:ext uri="{28A0092B-C50C-407E-A947-70E740481C1C}">
-                <a14:useLocalDpi xmlns:a14="http://schemas.microsoft.com/office/drawing/2010/main" val="0"/>
-              </a:ext>
-            </a:extLst>
-          </a:blip>
+          <a:blip r:embed="rId2"/>
           <a:stretch>
             <a:fillRect/>
           </a:stretch>
         </p:blipFill>
         <p:spPr>
           <a:xfrm>
-            <a:off x="567542" y="1817794"/>
-            <a:ext cx="7483742" cy="2385906"/>
+            <a:off x="567542" y="1817795"/>
+            <a:ext cx="5024835" cy="4834018"/>
           </a:xfrm>
           <a:prstGeom prst="rect">
             <a:avLst/>
           </a:prstGeom>
         </p:spPr>
       </p:pic>
-      <p:sp>
-        <p:nvSpPr>
-          <p:cNvPr id="7" name="テキスト ボックス 6">
-            <a:extLst>
-              <a:ext uri="{FF2B5EF4-FFF2-40B4-BE49-F238E27FC236}">
-                <a16:creationId xmlns:a16="http://schemas.microsoft.com/office/drawing/2014/main" id="{ECBDAE3D-54E5-46B0-8115-23259695C4C3}"/>
-              </a:ext>
-            </a:extLst>
-          </p:cNvPr>
-          <p:cNvSpPr txBox="1"/>
-          <p:nvPr/>
-        </p:nvSpPr>
-        <p:spPr>
-          <a:xfrm>
-            <a:off x="567542" y="4343400"/>
-            <a:ext cx="7879080" cy="830997"/>
-          </a:xfrm>
-          <a:prstGeom prst="rect">
-            <a:avLst/>
-          </a:prstGeom>
-          <a:noFill/>
-        </p:spPr>
-        <p:txBody>
-          <a:bodyPr wrap="none" rtlCol="0">
-            <a:spAutoFit/>
-          </a:bodyPr>
-          <a:lstStyle/>
-          <a:p>
-            <a:r>
-              <a:rPr lang="ja-JP" altLang="en-US" sz="2400" dirty="0"/>
-              <a:t>これですべてのブロックの画像は１つずつロードされ、</a:t>
-            </a:r>
-            <a:endParaRPr lang="en-US" altLang="ja-JP" sz="2400" dirty="0"/>
-          </a:p>
-          <a:p>
-            <a:r>
-              <a:rPr lang="ja-JP" altLang="en-US" sz="2400" dirty="0"/>
-              <a:t>別々の画像ハンドルが設定されます。</a:t>
-            </a:r>
-            <a:endParaRPr lang="en-US" altLang="ja-JP" sz="2400" dirty="0"/>
-          </a:p>
-        </p:txBody>
-      </p:sp>
     </p:spTree>
     <p:extLst>
       <p:ext uri="{BB962C8B-B14F-4D97-AF65-F5344CB8AC3E}">
-        <p14:creationId xmlns:p14="http://schemas.microsoft.com/office/powerpoint/2010/main" val="109084377"/>
+        <p14:creationId xmlns:p14="http://schemas.microsoft.com/office/powerpoint/2010/main" val="1234483258"/>
       </p:ext>
     </p:extLst>
   </p:cSld>
@@ -4027,7 +3975,7 @@
         <p:spPr>
           <a:xfrm>
             <a:off x="567542" y="491954"/>
-            <a:ext cx="4698722" cy="584775"/>
+            <a:ext cx="4815742" cy="584775"/>
           </a:xfrm>
           <a:prstGeom prst="rect">
             <a:avLst/>
@@ -4063,7 +4011,7 @@
         <p:spPr>
           <a:xfrm>
             <a:off x="567542" y="1216429"/>
-            <a:ext cx="8805616" cy="461665"/>
+            <a:ext cx="10956846" cy="830997"/>
           </a:xfrm>
           <a:prstGeom prst="rect">
             <a:avLst/>
@@ -4077,16 +4025,23 @@
           <a:lstStyle/>
           <a:p>
             <a:r>
-              <a:rPr lang="en-US" altLang="ja-JP" sz="2400" b="1" dirty="0" err="1">
+              <a:rPr lang="en-US" altLang="ja-JP" sz="2400" b="1" dirty="0">
                 <a:solidFill>
-                  <a:srgbClr val="00B050"/>
+                  <a:srgbClr val="FF0000"/>
                 </a:solidFill>
               </a:rPr>
-              <a:t>BlockManager</a:t>
+              <a:t>Main.cpp</a:t>
             </a:r>
             <a:r>
               <a:rPr lang="ja-JP" altLang="en-US" sz="2400" dirty="0"/>
-              <a:t>の残りの関数も完成させましょう。（その１）</a:t>
+              <a:t>の呼び出し側はこれまで通りです。（書くのは省略）</a:t>
+            </a:r>
+            <a:endParaRPr lang="en-US" altLang="ja-JP" sz="2400" dirty="0"/>
+          </a:p>
+          <a:p>
+            <a:r>
+              <a:rPr lang="ja-JP" altLang="en-US" sz="2400" dirty="0"/>
+              <a:t>呼び出し側を考慮しなくて良いのがマネージャークラスの利点でもあります。</a:t>
             </a:r>
             <a:endParaRPr lang="en-US" altLang="ja-JP" sz="2400" dirty="0"/>
           </a:p>
@@ -4094,10 +4049,10 @@
       </p:sp>
       <p:pic>
         <p:nvPicPr>
-          <p:cNvPr id="3" name="図 2">
-            <a:extLst>
-              <a:ext uri="{FF2B5EF4-FFF2-40B4-BE49-F238E27FC236}">
-                <a16:creationId xmlns:a16="http://schemas.microsoft.com/office/drawing/2014/main" id="{8EFE4406-D534-4BF2-BA78-FD82EC9D1571}"/>
+          <p:cNvPr id="5" name="図 4">
+            <a:extLst>
+              <a:ext uri="{FF2B5EF4-FFF2-40B4-BE49-F238E27FC236}">
+                <a16:creationId xmlns:a16="http://schemas.microsoft.com/office/drawing/2014/main" id="{7166C132-D169-4DE1-A313-A86EB7EE544E}"/>
               </a:ext>
             </a:extLst>
           </p:cNvPr>
@@ -4120,8 +4075,8 @@
         </p:blipFill>
         <p:spPr>
           <a:xfrm>
-            <a:off x="567542" y="1817794"/>
-            <a:ext cx="5911511" cy="4278206"/>
+            <a:off x="567542" y="2415731"/>
+            <a:ext cx="10584618" cy="2394843"/>
           </a:xfrm>
           <a:prstGeom prst="rect">
             <a:avLst/>
@@ -4131,7 +4086,7 @@
     </p:spTree>
     <p:extLst>
       <p:ext uri="{BB962C8B-B14F-4D97-AF65-F5344CB8AC3E}">
-        <p14:creationId xmlns:p14="http://schemas.microsoft.com/office/powerpoint/2010/main" val="4104289261"/>
+        <p14:creationId xmlns:p14="http://schemas.microsoft.com/office/powerpoint/2010/main" val="3451196840"/>
       </p:ext>
     </p:extLst>
   </p:cSld>
@@ -4209,7 +4164,7 @@
         <p:spPr>
           <a:xfrm>
             <a:off x="567542" y="1216429"/>
-            <a:ext cx="8805616" cy="461665"/>
+            <a:ext cx="6163867" cy="461665"/>
           </a:xfrm>
           <a:prstGeom prst="rect">
             <a:avLst/>
@@ -4223,16 +4178,16 @@
           <a:lstStyle/>
           <a:p>
             <a:r>
-              <a:rPr lang="en-US" altLang="ja-JP" sz="2400" b="1" dirty="0" err="1">
-                <a:solidFill>
-                  <a:srgbClr val="00B050"/>
-                </a:solidFill>
-              </a:rPr>
-              <a:t>BlockManager</a:t>
-            </a:r>
-            <a:r>
               <a:rPr lang="ja-JP" altLang="en-US" sz="2400" dirty="0"/>
-              <a:t>の残りの関数も完成させましょう。（その２）</a:t>
+              <a:t>ブロックが４つ表示されていれば</a:t>
+            </a:r>
+            <a:r>
+              <a:rPr lang="en-US" altLang="ja-JP" sz="2400" dirty="0"/>
+              <a:t>OK</a:t>
+            </a:r>
+            <a:r>
+              <a:rPr lang="ja-JP" altLang="en-US" sz="2400" dirty="0"/>
+              <a:t>です！</a:t>
             </a:r>
             <a:endParaRPr lang="en-US" altLang="ja-JP" sz="2400" dirty="0"/>
           </a:p>
@@ -4240,10 +4195,10 @@
       </p:sp>
       <p:pic>
         <p:nvPicPr>
-          <p:cNvPr id="5" name="図 4">
-            <a:extLst>
-              <a:ext uri="{FF2B5EF4-FFF2-40B4-BE49-F238E27FC236}">
-                <a16:creationId xmlns:a16="http://schemas.microsoft.com/office/drawing/2014/main" id="{427564FA-4A65-4147-9DB0-35750CD4897F}"/>
+          <p:cNvPr id="7" name="図 6">
+            <a:extLst>
+              <a:ext uri="{FF2B5EF4-FFF2-40B4-BE49-F238E27FC236}">
+                <a16:creationId xmlns:a16="http://schemas.microsoft.com/office/drawing/2014/main" id="{FE9301F6-67D8-4133-928C-08D904C38908}"/>
               </a:ext>
             </a:extLst>
           </p:cNvPr>
@@ -4266,8 +4221,8 @@
         </p:blipFill>
         <p:spPr>
           <a:xfrm>
-            <a:off x="567542" y="1817795"/>
-            <a:ext cx="4537858" cy="4672646"/>
+            <a:off x="567542" y="1817794"/>
+            <a:ext cx="8735420" cy="4548252"/>
           </a:xfrm>
           <a:prstGeom prst="rect">
             <a:avLst/>
@@ -4277,7 +4232,7 @@
     </p:spTree>
     <p:extLst>
       <p:ext uri="{BB962C8B-B14F-4D97-AF65-F5344CB8AC3E}">
-        <p14:creationId xmlns:p14="http://schemas.microsoft.com/office/powerpoint/2010/main" val="1234483258"/>
+        <p14:creationId xmlns:p14="http://schemas.microsoft.com/office/powerpoint/2010/main" val="3285632289"/>
       </p:ext>
     </p:extLst>
   </p:cSld>
@@ -4319,451 +4274,6 @@
         <p:spPr>
           <a:xfrm>
             <a:off x="567542" y="491954"/>
-            <a:ext cx="4698722" cy="584775"/>
-          </a:xfrm>
-          <a:prstGeom prst="rect">
-            <a:avLst/>
-          </a:prstGeom>
-          <a:noFill/>
-        </p:spPr>
-        <p:txBody>
-          <a:bodyPr wrap="none" rtlCol="0">
-            <a:spAutoFit/>
-          </a:bodyPr>
-          <a:lstStyle/>
-          <a:p>
-            <a:r>
-              <a:rPr kumimoji="1" lang="ja-JP" altLang="en-US" sz="3200" b="1" u="sng" dirty="0"/>
-              <a:t>オブジェクトの複数配置</a:t>
-            </a:r>
-            <a:endParaRPr kumimoji="1" lang="en-US" altLang="ja-JP" sz="3200" b="1" u="sng" dirty="0"/>
-          </a:p>
-        </p:txBody>
-      </p:sp>
-      <p:sp>
-        <p:nvSpPr>
-          <p:cNvPr id="6" name="テキスト ボックス 5">
-            <a:extLst>
-              <a:ext uri="{FF2B5EF4-FFF2-40B4-BE49-F238E27FC236}">
-                <a16:creationId xmlns:a16="http://schemas.microsoft.com/office/drawing/2014/main" id="{55830AD6-028B-4C4E-80BF-B70DFC1C3A46}"/>
-              </a:ext>
-            </a:extLst>
-          </p:cNvPr>
-          <p:cNvSpPr txBox="1"/>
-          <p:nvPr/>
-        </p:nvSpPr>
-        <p:spPr>
-          <a:xfrm>
-            <a:off x="567542" y="1216429"/>
-            <a:ext cx="8805616" cy="461665"/>
-          </a:xfrm>
-          <a:prstGeom prst="rect">
-            <a:avLst/>
-          </a:prstGeom>
-          <a:noFill/>
-        </p:spPr>
-        <p:txBody>
-          <a:bodyPr wrap="none" rtlCol="0">
-            <a:spAutoFit/>
-          </a:bodyPr>
-          <a:lstStyle/>
-          <a:p>
-            <a:r>
-              <a:rPr lang="en-US" altLang="ja-JP" sz="2400" b="1" dirty="0" err="1">
-                <a:solidFill>
-                  <a:srgbClr val="00B050"/>
-                </a:solidFill>
-              </a:rPr>
-              <a:t>BlockManager</a:t>
-            </a:r>
-            <a:r>
-              <a:rPr lang="ja-JP" altLang="en-US" sz="2400" dirty="0"/>
-              <a:t>の残りの関数も完成させましょう。（その３）</a:t>
-            </a:r>
-            <a:endParaRPr lang="en-US" altLang="ja-JP" sz="2400" dirty="0"/>
-          </a:p>
-        </p:txBody>
-      </p:sp>
-      <p:pic>
-        <p:nvPicPr>
-          <p:cNvPr id="8" name="図 7">
-            <a:extLst>
-              <a:ext uri="{FF2B5EF4-FFF2-40B4-BE49-F238E27FC236}">
-                <a16:creationId xmlns:a16="http://schemas.microsoft.com/office/drawing/2014/main" id="{F51B1831-C54C-43C9-ACA1-3D784AC579CE}"/>
-              </a:ext>
-            </a:extLst>
-          </p:cNvPr>
-          <p:cNvPicPr>
-            <a:picLocks noChangeAspect="1"/>
-          </p:cNvPicPr>
-          <p:nvPr/>
-        </p:nvPicPr>
-        <p:blipFill>
-          <a:blip r:embed="rId2">
-            <a:extLst>
-              <a:ext uri="{28A0092B-C50C-407E-A947-70E740481C1C}">
-                <a14:useLocalDpi xmlns:a14="http://schemas.microsoft.com/office/drawing/2010/main" val="0"/>
-              </a:ext>
-            </a:extLst>
-          </a:blip>
-          <a:stretch>
-            <a:fillRect/>
-          </a:stretch>
-        </p:blipFill>
-        <p:spPr>
-          <a:xfrm>
-            <a:off x="567542" y="1817794"/>
-            <a:ext cx="8065478" cy="2639906"/>
-          </a:xfrm>
-          <a:prstGeom prst="rect">
-            <a:avLst/>
-          </a:prstGeom>
-        </p:spPr>
-      </p:pic>
-    </p:spTree>
-    <p:extLst>
-      <p:ext uri="{BB962C8B-B14F-4D97-AF65-F5344CB8AC3E}">
-        <p14:creationId xmlns:p14="http://schemas.microsoft.com/office/powerpoint/2010/main" val="3503140131"/>
-      </p:ext>
-    </p:extLst>
-  </p:cSld>
-  <p:clrMapOvr>
-    <a:masterClrMapping/>
-  </p:clrMapOvr>
-</p:sld>
-</file>
-
-<file path=ppt/slides/slide14.xml><?xml version="1.0" encoding="utf-8"?>
-<p:sld xmlns:a="http://schemas.openxmlformats.org/drawingml/2006/main" xmlns:r="http://schemas.openxmlformats.org/officeDocument/2006/relationships" xmlns:p="http://schemas.openxmlformats.org/presentationml/2006/main">
-  <p:cSld>
-    <p:spTree>
-      <p:nvGrpSpPr>
-        <p:cNvPr id="1" name=""/>
-        <p:cNvGrpSpPr/>
-        <p:nvPr/>
-      </p:nvGrpSpPr>
-      <p:grpSpPr>
-        <a:xfrm>
-          <a:off x="0" y="0"/>
-          <a:ext cx="0" cy="0"/>
-          <a:chOff x="0" y="0"/>
-          <a:chExt cx="0" cy="0"/>
-        </a:xfrm>
-      </p:grpSpPr>
-      <p:sp>
-        <p:nvSpPr>
-          <p:cNvPr id="4" name="テキスト ボックス 3">
-            <a:extLst>
-              <a:ext uri="{FF2B5EF4-FFF2-40B4-BE49-F238E27FC236}">
-                <a16:creationId xmlns:a16="http://schemas.microsoft.com/office/drawing/2014/main" id="{5A13BF46-B8C5-48AA-8308-C9ECFF431A18}"/>
-              </a:ext>
-            </a:extLst>
-          </p:cNvPr>
-          <p:cNvSpPr txBox="1"/>
-          <p:nvPr/>
-        </p:nvSpPr>
-        <p:spPr>
-          <a:xfrm>
-            <a:off x="567542" y="491954"/>
-            <a:ext cx="4815742" cy="584775"/>
-          </a:xfrm>
-          <a:prstGeom prst="rect">
-            <a:avLst/>
-          </a:prstGeom>
-          <a:noFill/>
-        </p:spPr>
-        <p:txBody>
-          <a:bodyPr wrap="none" rtlCol="0">
-            <a:spAutoFit/>
-          </a:bodyPr>
-          <a:lstStyle/>
-          <a:p>
-            <a:r>
-              <a:rPr kumimoji="1" lang="ja-JP" altLang="en-US" sz="3200" b="1" u="sng" dirty="0"/>
-              <a:t>オブジェクトの複数配置</a:t>
-            </a:r>
-            <a:endParaRPr kumimoji="1" lang="en-US" altLang="ja-JP" sz="3200" b="1" u="sng" dirty="0"/>
-          </a:p>
-        </p:txBody>
-      </p:sp>
-      <p:sp>
-        <p:nvSpPr>
-          <p:cNvPr id="6" name="テキスト ボックス 5">
-            <a:extLst>
-              <a:ext uri="{FF2B5EF4-FFF2-40B4-BE49-F238E27FC236}">
-                <a16:creationId xmlns:a16="http://schemas.microsoft.com/office/drawing/2014/main" id="{55830AD6-028B-4C4E-80BF-B70DFC1C3A46}"/>
-              </a:ext>
-            </a:extLst>
-          </p:cNvPr>
-          <p:cNvSpPr txBox="1"/>
-          <p:nvPr/>
-        </p:nvSpPr>
-        <p:spPr>
-          <a:xfrm>
-            <a:off x="567542" y="1216429"/>
-            <a:ext cx="10956846" cy="830997"/>
-          </a:xfrm>
-          <a:prstGeom prst="rect">
-            <a:avLst/>
-          </a:prstGeom>
-          <a:noFill/>
-        </p:spPr>
-        <p:txBody>
-          <a:bodyPr wrap="none" rtlCol="0">
-            <a:spAutoFit/>
-          </a:bodyPr>
-          <a:lstStyle/>
-          <a:p>
-            <a:r>
-              <a:rPr lang="en-US" altLang="ja-JP" sz="2400" b="1" dirty="0">
-                <a:solidFill>
-                  <a:srgbClr val="FF0000"/>
-                </a:solidFill>
-              </a:rPr>
-              <a:t>Main.cpp</a:t>
-            </a:r>
-            <a:r>
-              <a:rPr lang="ja-JP" altLang="en-US" sz="2400" dirty="0"/>
-              <a:t>の呼び出し側はこれまで通りです。（書くのは省略）</a:t>
-            </a:r>
-            <a:endParaRPr lang="en-US" altLang="ja-JP" sz="2400" dirty="0"/>
-          </a:p>
-          <a:p>
-            <a:r>
-              <a:rPr lang="ja-JP" altLang="en-US" sz="2400" dirty="0"/>
-              <a:t>呼び出し側を考慮しなくて良いのがマネージャークラスの利点でもあります。</a:t>
-            </a:r>
-            <a:endParaRPr lang="en-US" altLang="ja-JP" sz="2400" dirty="0"/>
-          </a:p>
-        </p:txBody>
-      </p:sp>
-      <p:pic>
-        <p:nvPicPr>
-          <p:cNvPr id="5" name="図 4">
-            <a:extLst>
-              <a:ext uri="{FF2B5EF4-FFF2-40B4-BE49-F238E27FC236}">
-                <a16:creationId xmlns:a16="http://schemas.microsoft.com/office/drawing/2014/main" id="{7166C132-D169-4DE1-A313-A86EB7EE544E}"/>
-              </a:ext>
-            </a:extLst>
-          </p:cNvPr>
-          <p:cNvPicPr>
-            <a:picLocks noChangeAspect="1"/>
-          </p:cNvPicPr>
-          <p:nvPr/>
-        </p:nvPicPr>
-        <p:blipFill>
-          <a:blip r:embed="rId2">
-            <a:extLst>
-              <a:ext uri="{28A0092B-C50C-407E-A947-70E740481C1C}">
-                <a14:useLocalDpi xmlns:a14="http://schemas.microsoft.com/office/drawing/2010/main" val="0"/>
-              </a:ext>
-            </a:extLst>
-          </a:blip>
-          <a:stretch>
-            <a:fillRect/>
-          </a:stretch>
-        </p:blipFill>
-        <p:spPr>
-          <a:xfrm>
-            <a:off x="567542" y="2415731"/>
-            <a:ext cx="10584618" cy="2394843"/>
-          </a:xfrm>
-          <a:prstGeom prst="rect">
-            <a:avLst/>
-          </a:prstGeom>
-        </p:spPr>
-      </p:pic>
-    </p:spTree>
-    <p:extLst>
-      <p:ext uri="{BB962C8B-B14F-4D97-AF65-F5344CB8AC3E}">
-        <p14:creationId xmlns:p14="http://schemas.microsoft.com/office/powerpoint/2010/main" val="3451196840"/>
-      </p:ext>
-    </p:extLst>
-  </p:cSld>
-  <p:clrMapOvr>
-    <a:masterClrMapping/>
-  </p:clrMapOvr>
-</p:sld>
-</file>
-
-<file path=ppt/slides/slide15.xml><?xml version="1.0" encoding="utf-8"?>
-<p:sld xmlns:a="http://schemas.openxmlformats.org/drawingml/2006/main" xmlns:r="http://schemas.openxmlformats.org/officeDocument/2006/relationships" xmlns:p="http://schemas.openxmlformats.org/presentationml/2006/main">
-  <p:cSld>
-    <p:spTree>
-      <p:nvGrpSpPr>
-        <p:cNvPr id="1" name=""/>
-        <p:cNvGrpSpPr/>
-        <p:nvPr/>
-      </p:nvGrpSpPr>
-      <p:grpSpPr>
-        <a:xfrm>
-          <a:off x="0" y="0"/>
-          <a:ext cx="0" cy="0"/>
-          <a:chOff x="0" y="0"/>
-          <a:chExt cx="0" cy="0"/>
-        </a:xfrm>
-      </p:grpSpPr>
-      <p:sp>
-        <p:nvSpPr>
-          <p:cNvPr id="4" name="テキスト ボックス 3">
-            <a:extLst>
-              <a:ext uri="{FF2B5EF4-FFF2-40B4-BE49-F238E27FC236}">
-                <a16:creationId xmlns:a16="http://schemas.microsoft.com/office/drawing/2014/main" id="{5A13BF46-B8C5-48AA-8308-C9ECFF431A18}"/>
-              </a:ext>
-            </a:extLst>
-          </p:cNvPr>
-          <p:cNvSpPr txBox="1"/>
-          <p:nvPr/>
-        </p:nvSpPr>
-        <p:spPr>
-          <a:xfrm>
-            <a:off x="567542" y="491954"/>
-            <a:ext cx="4698722" cy="584775"/>
-          </a:xfrm>
-          <a:prstGeom prst="rect">
-            <a:avLst/>
-          </a:prstGeom>
-          <a:noFill/>
-        </p:spPr>
-        <p:txBody>
-          <a:bodyPr wrap="none" rtlCol="0">
-            <a:spAutoFit/>
-          </a:bodyPr>
-          <a:lstStyle/>
-          <a:p>
-            <a:r>
-              <a:rPr kumimoji="1" lang="ja-JP" altLang="en-US" sz="3200" b="1" u="sng" dirty="0"/>
-              <a:t>オブジェクトの複数配置</a:t>
-            </a:r>
-            <a:endParaRPr kumimoji="1" lang="en-US" altLang="ja-JP" sz="3200" b="1" u="sng" dirty="0"/>
-          </a:p>
-        </p:txBody>
-      </p:sp>
-      <p:sp>
-        <p:nvSpPr>
-          <p:cNvPr id="6" name="テキスト ボックス 5">
-            <a:extLst>
-              <a:ext uri="{FF2B5EF4-FFF2-40B4-BE49-F238E27FC236}">
-                <a16:creationId xmlns:a16="http://schemas.microsoft.com/office/drawing/2014/main" id="{55830AD6-028B-4C4E-80BF-B70DFC1C3A46}"/>
-              </a:ext>
-            </a:extLst>
-          </p:cNvPr>
-          <p:cNvSpPr txBox="1"/>
-          <p:nvPr/>
-        </p:nvSpPr>
-        <p:spPr>
-          <a:xfrm>
-            <a:off x="567542" y="1216429"/>
-            <a:ext cx="6163867" cy="461665"/>
-          </a:xfrm>
-          <a:prstGeom prst="rect">
-            <a:avLst/>
-          </a:prstGeom>
-          <a:noFill/>
-        </p:spPr>
-        <p:txBody>
-          <a:bodyPr wrap="none" rtlCol="0">
-            <a:spAutoFit/>
-          </a:bodyPr>
-          <a:lstStyle/>
-          <a:p>
-            <a:r>
-              <a:rPr lang="ja-JP" altLang="en-US" sz="2400" dirty="0"/>
-              <a:t>ブロックが４つ表示されていれば</a:t>
-            </a:r>
-            <a:r>
-              <a:rPr lang="en-US" altLang="ja-JP" sz="2400" dirty="0"/>
-              <a:t>OK</a:t>
-            </a:r>
-            <a:r>
-              <a:rPr lang="ja-JP" altLang="en-US" sz="2400" dirty="0"/>
-              <a:t>です！</a:t>
-            </a:r>
-            <a:endParaRPr lang="en-US" altLang="ja-JP" sz="2400" dirty="0"/>
-          </a:p>
-        </p:txBody>
-      </p:sp>
-      <p:pic>
-        <p:nvPicPr>
-          <p:cNvPr id="7" name="図 6">
-            <a:extLst>
-              <a:ext uri="{FF2B5EF4-FFF2-40B4-BE49-F238E27FC236}">
-                <a16:creationId xmlns:a16="http://schemas.microsoft.com/office/drawing/2014/main" id="{FE9301F6-67D8-4133-928C-08D904C38908}"/>
-              </a:ext>
-            </a:extLst>
-          </p:cNvPr>
-          <p:cNvPicPr>
-            <a:picLocks noChangeAspect="1"/>
-          </p:cNvPicPr>
-          <p:nvPr/>
-        </p:nvPicPr>
-        <p:blipFill>
-          <a:blip r:embed="rId2">
-            <a:extLst>
-              <a:ext uri="{28A0092B-C50C-407E-A947-70E740481C1C}">
-                <a14:useLocalDpi xmlns:a14="http://schemas.microsoft.com/office/drawing/2010/main" val="0"/>
-              </a:ext>
-            </a:extLst>
-          </a:blip>
-          <a:stretch>
-            <a:fillRect/>
-          </a:stretch>
-        </p:blipFill>
-        <p:spPr>
-          <a:xfrm>
-            <a:off x="567542" y="1817794"/>
-            <a:ext cx="8735420" cy="4548252"/>
-          </a:xfrm>
-          <a:prstGeom prst="rect">
-            <a:avLst/>
-          </a:prstGeom>
-        </p:spPr>
-      </p:pic>
-    </p:spTree>
-    <p:extLst>
-      <p:ext uri="{BB962C8B-B14F-4D97-AF65-F5344CB8AC3E}">
-        <p14:creationId xmlns:p14="http://schemas.microsoft.com/office/powerpoint/2010/main" val="3285632289"/>
-      </p:ext>
-    </p:extLst>
-  </p:cSld>
-  <p:clrMapOvr>
-    <a:masterClrMapping/>
-  </p:clrMapOvr>
-</p:sld>
-</file>
-
-<file path=ppt/slides/slide16.xml><?xml version="1.0" encoding="utf-8"?>
-<p:sld xmlns:a="http://schemas.openxmlformats.org/drawingml/2006/main" xmlns:r="http://schemas.openxmlformats.org/officeDocument/2006/relationships" xmlns:p="http://schemas.openxmlformats.org/presentationml/2006/main">
-  <p:cSld>
-    <p:spTree>
-      <p:nvGrpSpPr>
-        <p:cNvPr id="1" name=""/>
-        <p:cNvGrpSpPr/>
-        <p:nvPr/>
-      </p:nvGrpSpPr>
-      <p:grpSpPr>
-        <a:xfrm>
-          <a:off x="0" y="0"/>
-          <a:ext cx="0" cy="0"/>
-          <a:chOff x="0" y="0"/>
-          <a:chExt cx="0" cy="0"/>
-        </a:xfrm>
-      </p:grpSpPr>
-      <p:sp>
-        <p:nvSpPr>
-          <p:cNvPr id="4" name="テキスト ボックス 3">
-            <a:extLst>
-              <a:ext uri="{FF2B5EF4-FFF2-40B4-BE49-F238E27FC236}">
-                <a16:creationId xmlns:a16="http://schemas.microsoft.com/office/drawing/2014/main" id="{5A13BF46-B8C5-48AA-8308-C9ECFF431A18}"/>
-              </a:ext>
-            </a:extLst>
-          </p:cNvPr>
-          <p:cNvSpPr txBox="1"/>
-          <p:nvPr/>
-        </p:nvSpPr>
-        <p:spPr>
-          <a:xfrm>
-            <a:off x="567542" y="491954"/>
             <a:ext cx="6046848" cy="584775"/>
           </a:xfrm>
           <a:prstGeom prst="rect">
@@ -4919,7 +4429,7 @@
 </p:sld>
 </file>
 
-<file path=ppt/slides/slide17.xml><?xml version="1.0" encoding="utf-8"?>
+<file path=ppt/slides/slide14.xml><?xml version="1.0" encoding="utf-8"?>
 <p:sld xmlns:a="http://schemas.openxmlformats.org/drawingml/2006/main" xmlns:r="http://schemas.openxmlformats.org/officeDocument/2006/relationships" xmlns:p="http://schemas.openxmlformats.org/presentationml/2006/main">
   <p:cSld>
     <p:spTree>
@@ -5497,6 +5007,1065 @@
 </p:sld>
 </file>
 
+<file path=ppt/slides/slide15.xml><?xml version="1.0" encoding="utf-8"?>
+<p:sld xmlns:a="http://schemas.openxmlformats.org/drawingml/2006/main" xmlns:r="http://schemas.openxmlformats.org/officeDocument/2006/relationships" xmlns:p="http://schemas.openxmlformats.org/presentationml/2006/main">
+  <p:cSld>
+    <p:spTree>
+      <p:nvGrpSpPr>
+        <p:cNvPr id="1" name=""/>
+        <p:cNvGrpSpPr/>
+        <p:nvPr/>
+      </p:nvGrpSpPr>
+      <p:grpSpPr>
+        <a:xfrm>
+          <a:off x="0" y="0"/>
+          <a:ext cx="0" cy="0"/>
+          <a:chOff x="0" y="0"/>
+          <a:chExt cx="0" cy="0"/>
+        </a:xfrm>
+      </p:grpSpPr>
+      <p:sp>
+        <p:nvSpPr>
+          <p:cNvPr id="4" name="テキスト ボックス 3">
+            <a:extLst>
+              <a:ext uri="{FF2B5EF4-FFF2-40B4-BE49-F238E27FC236}">
+                <a16:creationId xmlns:a16="http://schemas.microsoft.com/office/drawing/2014/main" id="{5A13BF46-B8C5-48AA-8308-C9ECFF431A18}"/>
+              </a:ext>
+            </a:extLst>
+          </p:cNvPr>
+          <p:cNvSpPr txBox="1"/>
+          <p:nvPr/>
+        </p:nvSpPr>
+        <p:spPr>
+          <a:xfrm>
+            <a:off x="567542" y="491954"/>
+            <a:ext cx="6046848" cy="584775"/>
+          </a:xfrm>
+          <a:prstGeom prst="rect">
+            <a:avLst/>
+          </a:prstGeom>
+          <a:noFill/>
+        </p:spPr>
+        <p:txBody>
+          <a:bodyPr wrap="none" rtlCol="0">
+            <a:spAutoFit/>
+          </a:bodyPr>
+          <a:lstStyle/>
+          <a:p>
+            <a:r>
+              <a:rPr kumimoji="1" lang="ja-JP" altLang="en-US" sz="3200" b="1" u="sng" dirty="0"/>
+              <a:t>オブジェクトの複数配置 問題点</a:t>
+            </a:r>
+            <a:endParaRPr kumimoji="1" lang="en-US" altLang="ja-JP" sz="3200" b="1" u="sng" dirty="0"/>
+          </a:p>
+        </p:txBody>
+      </p:sp>
+      <p:sp>
+        <p:nvSpPr>
+          <p:cNvPr id="6" name="テキスト ボックス 5">
+            <a:extLst>
+              <a:ext uri="{FF2B5EF4-FFF2-40B4-BE49-F238E27FC236}">
+                <a16:creationId xmlns:a16="http://schemas.microsoft.com/office/drawing/2014/main" id="{55830AD6-028B-4C4E-80BF-B70DFC1C3A46}"/>
+              </a:ext>
+            </a:extLst>
+          </p:cNvPr>
+          <p:cNvSpPr txBox="1"/>
+          <p:nvPr/>
+        </p:nvSpPr>
+        <p:spPr>
+          <a:xfrm>
+            <a:off x="567542" y="1216429"/>
+            <a:ext cx="8802410" cy="830997"/>
+          </a:xfrm>
+          <a:prstGeom prst="rect">
+            <a:avLst/>
+          </a:prstGeom>
+          <a:noFill/>
+        </p:spPr>
+        <p:txBody>
+          <a:bodyPr wrap="none" rtlCol="0">
+            <a:spAutoFit/>
+          </a:bodyPr>
+          <a:lstStyle/>
+          <a:p>
+            <a:r>
+              <a:rPr lang="ja-JP" altLang="en-US" sz="2400" dirty="0"/>
+              <a:t>同じ画像が複数必要な場合は、</a:t>
+            </a:r>
+            <a:endParaRPr lang="en-US" altLang="ja-JP" sz="2400" dirty="0"/>
+          </a:p>
+          <a:p>
+            <a:r>
+              <a:rPr lang="ja-JP" altLang="en-US" sz="2400" dirty="0"/>
+              <a:t>１度だけロードして、その後はコピーすると効率が良いです。</a:t>
+            </a:r>
+            <a:endParaRPr lang="en-US" altLang="ja-JP" sz="2400" dirty="0"/>
+          </a:p>
+        </p:txBody>
+      </p:sp>
+      <p:sp>
+        <p:nvSpPr>
+          <p:cNvPr id="29" name="直方体 28">
+            <a:extLst>
+              <a:ext uri="{FF2B5EF4-FFF2-40B4-BE49-F238E27FC236}">
+                <a16:creationId xmlns:a16="http://schemas.microsoft.com/office/drawing/2014/main" id="{B71D7A3B-C72B-4E32-8A82-C0900EE8AA85}"/>
+              </a:ext>
+            </a:extLst>
+          </p:cNvPr>
+          <p:cNvSpPr/>
+          <p:nvPr/>
+        </p:nvSpPr>
+        <p:spPr>
+          <a:xfrm>
+            <a:off x="1543151" y="3397546"/>
+            <a:ext cx="1054100" cy="983976"/>
+          </a:xfrm>
+          <a:prstGeom prst="cube">
+            <a:avLst/>
+          </a:prstGeom>
+        </p:spPr>
+        <p:style>
+          <a:lnRef idx="2">
+            <a:schemeClr val="accent1">
+              <a:shade val="50000"/>
+            </a:schemeClr>
+          </a:lnRef>
+          <a:fillRef idx="1">
+            <a:schemeClr val="accent1"/>
+          </a:fillRef>
+          <a:effectRef idx="0">
+            <a:schemeClr val="accent1"/>
+          </a:effectRef>
+          <a:fontRef idx="minor">
+            <a:schemeClr val="lt1"/>
+          </a:fontRef>
+        </p:style>
+        <p:txBody>
+          <a:bodyPr rtlCol="0" anchor="ctr"/>
+          <a:lstStyle/>
+          <a:p>
+            <a:pPr algn="ctr"/>
+            <a:endParaRPr kumimoji="1" lang="ja-JP" altLang="en-US" dirty="0"/>
+          </a:p>
+        </p:txBody>
+      </p:sp>
+      <p:sp>
+        <p:nvSpPr>
+          <p:cNvPr id="30" name="円柱 29">
+            <a:extLst>
+              <a:ext uri="{FF2B5EF4-FFF2-40B4-BE49-F238E27FC236}">
+                <a16:creationId xmlns:a16="http://schemas.microsoft.com/office/drawing/2014/main" id="{856E0899-A956-4C92-838F-1D21DE092963}"/>
+              </a:ext>
+            </a:extLst>
+          </p:cNvPr>
+          <p:cNvSpPr/>
+          <p:nvPr/>
+        </p:nvSpPr>
+        <p:spPr>
+          <a:xfrm>
+            <a:off x="806550" y="2209559"/>
+            <a:ext cx="2593340" cy="2855877"/>
+          </a:xfrm>
+          <a:prstGeom prst="can">
+            <a:avLst/>
+          </a:prstGeom>
+          <a:noFill/>
+        </p:spPr>
+        <p:style>
+          <a:lnRef idx="2">
+            <a:schemeClr val="accent1">
+              <a:shade val="50000"/>
+            </a:schemeClr>
+          </a:lnRef>
+          <a:fillRef idx="1">
+            <a:schemeClr val="accent1"/>
+          </a:fillRef>
+          <a:effectRef idx="0">
+            <a:schemeClr val="accent1"/>
+          </a:effectRef>
+          <a:fontRef idx="minor">
+            <a:schemeClr val="lt1"/>
+          </a:fontRef>
+        </p:style>
+        <p:txBody>
+          <a:bodyPr rtlCol="0" anchor="ctr"/>
+          <a:lstStyle/>
+          <a:p>
+            <a:pPr algn="ctr"/>
+            <a:endParaRPr kumimoji="1" lang="ja-JP" altLang="en-US"/>
+          </a:p>
+        </p:txBody>
+      </p:sp>
+      <p:sp>
+        <p:nvSpPr>
+          <p:cNvPr id="31" name="テキスト ボックス 30">
+            <a:extLst>
+              <a:ext uri="{FF2B5EF4-FFF2-40B4-BE49-F238E27FC236}">
+                <a16:creationId xmlns:a16="http://schemas.microsoft.com/office/drawing/2014/main" id="{D1858A99-8ACD-4111-947B-0E528C87F301}"/>
+              </a:ext>
+            </a:extLst>
+          </p:cNvPr>
+          <p:cNvSpPr txBox="1"/>
+          <p:nvPr/>
+        </p:nvSpPr>
+        <p:spPr>
+          <a:xfrm>
+            <a:off x="567542" y="5179906"/>
+            <a:ext cx="3262432" cy="461665"/>
+          </a:xfrm>
+          <a:prstGeom prst="rect">
+            <a:avLst/>
+          </a:prstGeom>
+          <a:noFill/>
+        </p:spPr>
+        <p:txBody>
+          <a:bodyPr wrap="none" rtlCol="0">
+            <a:spAutoFit/>
+          </a:bodyPr>
+          <a:lstStyle/>
+          <a:p>
+            <a:r>
+              <a:rPr lang="ja-JP" altLang="en-US" sz="2400" dirty="0"/>
+              <a:t>１度ロードして。。。</a:t>
+            </a:r>
+            <a:endParaRPr lang="en-US" altLang="ja-JP" sz="2400" dirty="0"/>
+          </a:p>
+        </p:txBody>
+      </p:sp>
+      <p:sp>
+        <p:nvSpPr>
+          <p:cNvPr id="32" name="直方体 31">
+            <a:extLst>
+              <a:ext uri="{FF2B5EF4-FFF2-40B4-BE49-F238E27FC236}">
+                <a16:creationId xmlns:a16="http://schemas.microsoft.com/office/drawing/2014/main" id="{D7A13C9A-D116-47FB-B317-D1F7D52456CB}"/>
+              </a:ext>
+            </a:extLst>
+          </p:cNvPr>
+          <p:cNvSpPr/>
+          <p:nvPr/>
+        </p:nvSpPr>
+        <p:spPr>
+          <a:xfrm>
+            <a:off x="6335008" y="3192017"/>
+            <a:ext cx="461157" cy="411057"/>
+          </a:xfrm>
+          <a:prstGeom prst="cube">
+            <a:avLst/>
+          </a:prstGeom>
+        </p:spPr>
+        <p:style>
+          <a:lnRef idx="2">
+            <a:schemeClr val="accent1">
+              <a:shade val="50000"/>
+            </a:schemeClr>
+          </a:lnRef>
+          <a:fillRef idx="1">
+            <a:schemeClr val="accent1"/>
+          </a:fillRef>
+          <a:effectRef idx="0">
+            <a:schemeClr val="accent1"/>
+          </a:effectRef>
+          <a:fontRef idx="minor">
+            <a:schemeClr val="lt1"/>
+          </a:fontRef>
+        </p:style>
+        <p:txBody>
+          <a:bodyPr rtlCol="0" anchor="ctr"/>
+          <a:lstStyle/>
+          <a:p>
+            <a:pPr algn="ctr"/>
+            <a:endParaRPr kumimoji="1" lang="ja-JP" altLang="en-US" dirty="0"/>
+          </a:p>
+        </p:txBody>
+      </p:sp>
+      <p:sp>
+        <p:nvSpPr>
+          <p:cNvPr id="33" name="円柱 32">
+            <a:extLst>
+              <a:ext uri="{FF2B5EF4-FFF2-40B4-BE49-F238E27FC236}">
+                <a16:creationId xmlns:a16="http://schemas.microsoft.com/office/drawing/2014/main" id="{2C07F27A-4C32-478E-856F-80D889F69BB5}"/>
+              </a:ext>
+            </a:extLst>
+          </p:cNvPr>
+          <p:cNvSpPr/>
+          <p:nvPr/>
+        </p:nvSpPr>
+        <p:spPr>
+          <a:xfrm>
+            <a:off x="6077050" y="2209559"/>
+            <a:ext cx="2593340" cy="2855877"/>
+          </a:xfrm>
+          <a:prstGeom prst="can">
+            <a:avLst/>
+          </a:prstGeom>
+          <a:noFill/>
+        </p:spPr>
+        <p:style>
+          <a:lnRef idx="2">
+            <a:schemeClr val="accent1">
+              <a:shade val="50000"/>
+            </a:schemeClr>
+          </a:lnRef>
+          <a:fillRef idx="1">
+            <a:schemeClr val="accent1"/>
+          </a:fillRef>
+          <a:effectRef idx="0">
+            <a:schemeClr val="accent1"/>
+          </a:effectRef>
+          <a:fontRef idx="minor">
+            <a:schemeClr val="lt1"/>
+          </a:fontRef>
+        </p:style>
+        <p:txBody>
+          <a:bodyPr rtlCol="0" anchor="ctr"/>
+          <a:lstStyle/>
+          <a:p>
+            <a:pPr algn="ctr"/>
+            <a:endParaRPr kumimoji="1" lang="ja-JP" altLang="en-US"/>
+          </a:p>
+        </p:txBody>
+      </p:sp>
+      <p:sp>
+        <p:nvSpPr>
+          <p:cNvPr id="34" name="直方体 33">
+            <a:extLst>
+              <a:ext uri="{FF2B5EF4-FFF2-40B4-BE49-F238E27FC236}">
+                <a16:creationId xmlns:a16="http://schemas.microsoft.com/office/drawing/2014/main" id="{F08B3BE9-485B-41B8-8527-5372EA142EB7}"/>
+              </a:ext>
+            </a:extLst>
+          </p:cNvPr>
+          <p:cNvSpPr/>
+          <p:nvPr/>
+        </p:nvSpPr>
+        <p:spPr>
+          <a:xfrm>
+            <a:off x="6954620" y="3192016"/>
+            <a:ext cx="461157" cy="411057"/>
+          </a:xfrm>
+          <a:prstGeom prst="cube">
+            <a:avLst/>
+          </a:prstGeom>
+        </p:spPr>
+        <p:style>
+          <a:lnRef idx="2">
+            <a:schemeClr val="accent1">
+              <a:shade val="50000"/>
+            </a:schemeClr>
+          </a:lnRef>
+          <a:fillRef idx="1">
+            <a:schemeClr val="accent1"/>
+          </a:fillRef>
+          <a:effectRef idx="0">
+            <a:schemeClr val="accent1"/>
+          </a:effectRef>
+          <a:fontRef idx="minor">
+            <a:schemeClr val="lt1"/>
+          </a:fontRef>
+        </p:style>
+        <p:txBody>
+          <a:bodyPr rtlCol="0" anchor="ctr"/>
+          <a:lstStyle/>
+          <a:p>
+            <a:pPr algn="ctr"/>
+            <a:endParaRPr kumimoji="1" lang="ja-JP" altLang="en-US" dirty="0"/>
+          </a:p>
+        </p:txBody>
+      </p:sp>
+      <p:sp>
+        <p:nvSpPr>
+          <p:cNvPr id="35" name="直方体 34">
+            <a:extLst>
+              <a:ext uri="{FF2B5EF4-FFF2-40B4-BE49-F238E27FC236}">
+                <a16:creationId xmlns:a16="http://schemas.microsoft.com/office/drawing/2014/main" id="{709A6337-DA30-4F7E-BF00-58FB807AC70F}"/>
+              </a:ext>
+            </a:extLst>
+          </p:cNvPr>
+          <p:cNvSpPr/>
+          <p:nvPr/>
+        </p:nvSpPr>
+        <p:spPr>
+          <a:xfrm>
+            <a:off x="7673735" y="3189248"/>
+            <a:ext cx="461157" cy="411057"/>
+          </a:xfrm>
+          <a:prstGeom prst="cube">
+            <a:avLst/>
+          </a:prstGeom>
+        </p:spPr>
+        <p:style>
+          <a:lnRef idx="2">
+            <a:schemeClr val="accent1">
+              <a:shade val="50000"/>
+            </a:schemeClr>
+          </a:lnRef>
+          <a:fillRef idx="1">
+            <a:schemeClr val="accent1"/>
+          </a:fillRef>
+          <a:effectRef idx="0">
+            <a:schemeClr val="accent1"/>
+          </a:effectRef>
+          <a:fontRef idx="minor">
+            <a:schemeClr val="lt1"/>
+          </a:fontRef>
+        </p:style>
+        <p:txBody>
+          <a:bodyPr rtlCol="0" anchor="ctr"/>
+          <a:lstStyle/>
+          <a:p>
+            <a:pPr algn="ctr"/>
+            <a:endParaRPr kumimoji="1" lang="ja-JP" altLang="en-US" dirty="0"/>
+          </a:p>
+        </p:txBody>
+      </p:sp>
+      <p:sp>
+        <p:nvSpPr>
+          <p:cNvPr id="36" name="直方体 35">
+            <a:extLst>
+              <a:ext uri="{FF2B5EF4-FFF2-40B4-BE49-F238E27FC236}">
+                <a16:creationId xmlns:a16="http://schemas.microsoft.com/office/drawing/2014/main" id="{11CC015A-DF18-4003-B919-5340E4D1DD58}"/>
+              </a:ext>
+            </a:extLst>
+          </p:cNvPr>
+          <p:cNvSpPr/>
+          <p:nvPr/>
+        </p:nvSpPr>
+        <p:spPr>
+          <a:xfrm>
+            <a:off x="6335008" y="3889534"/>
+            <a:ext cx="461157" cy="411057"/>
+          </a:xfrm>
+          <a:prstGeom prst="cube">
+            <a:avLst/>
+          </a:prstGeom>
+        </p:spPr>
+        <p:style>
+          <a:lnRef idx="2">
+            <a:schemeClr val="accent1">
+              <a:shade val="50000"/>
+            </a:schemeClr>
+          </a:lnRef>
+          <a:fillRef idx="1">
+            <a:schemeClr val="accent1"/>
+          </a:fillRef>
+          <a:effectRef idx="0">
+            <a:schemeClr val="accent1"/>
+          </a:effectRef>
+          <a:fontRef idx="minor">
+            <a:schemeClr val="lt1"/>
+          </a:fontRef>
+        </p:style>
+        <p:txBody>
+          <a:bodyPr rtlCol="0" anchor="ctr"/>
+          <a:lstStyle/>
+          <a:p>
+            <a:pPr algn="ctr"/>
+            <a:endParaRPr kumimoji="1" lang="ja-JP" altLang="en-US" dirty="0"/>
+          </a:p>
+        </p:txBody>
+      </p:sp>
+      <p:sp>
+        <p:nvSpPr>
+          <p:cNvPr id="37" name="直方体 36">
+            <a:extLst>
+              <a:ext uri="{FF2B5EF4-FFF2-40B4-BE49-F238E27FC236}">
+                <a16:creationId xmlns:a16="http://schemas.microsoft.com/office/drawing/2014/main" id="{66E75F4B-AAFB-43E5-BFF3-A70EFA3DEC52}"/>
+              </a:ext>
+            </a:extLst>
+          </p:cNvPr>
+          <p:cNvSpPr/>
+          <p:nvPr/>
+        </p:nvSpPr>
+        <p:spPr>
+          <a:xfrm>
+            <a:off x="7007400" y="3889534"/>
+            <a:ext cx="461157" cy="411057"/>
+          </a:xfrm>
+          <a:prstGeom prst="cube">
+            <a:avLst/>
+          </a:prstGeom>
+        </p:spPr>
+        <p:style>
+          <a:lnRef idx="2">
+            <a:schemeClr val="accent1">
+              <a:shade val="50000"/>
+            </a:schemeClr>
+          </a:lnRef>
+          <a:fillRef idx="1">
+            <a:schemeClr val="accent1"/>
+          </a:fillRef>
+          <a:effectRef idx="0">
+            <a:schemeClr val="accent1"/>
+          </a:effectRef>
+          <a:fontRef idx="minor">
+            <a:schemeClr val="lt1"/>
+          </a:fontRef>
+        </p:style>
+        <p:txBody>
+          <a:bodyPr rtlCol="0" anchor="ctr"/>
+          <a:lstStyle/>
+          <a:p>
+            <a:pPr algn="ctr"/>
+            <a:endParaRPr kumimoji="1" lang="ja-JP" altLang="en-US" dirty="0"/>
+          </a:p>
+        </p:txBody>
+      </p:sp>
+      <p:sp>
+        <p:nvSpPr>
+          <p:cNvPr id="38" name="直方体 37">
+            <a:extLst>
+              <a:ext uri="{FF2B5EF4-FFF2-40B4-BE49-F238E27FC236}">
+                <a16:creationId xmlns:a16="http://schemas.microsoft.com/office/drawing/2014/main" id="{B97CB423-24CD-461A-B596-438D5FB74BEE}"/>
+              </a:ext>
+            </a:extLst>
+          </p:cNvPr>
+          <p:cNvSpPr/>
+          <p:nvPr/>
+        </p:nvSpPr>
+        <p:spPr>
+          <a:xfrm>
+            <a:off x="7677693" y="3889534"/>
+            <a:ext cx="461157" cy="411057"/>
+          </a:xfrm>
+          <a:prstGeom prst="cube">
+            <a:avLst/>
+          </a:prstGeom>
+        </p:spPr>
+        <p:style>
+          <a:lnRef idx="2">
+            <a:schemeClr val="accent1">
+              <a:shade val="50000"/>
+            </a:schemeClr>
+          </a:lnRef>
+          <a:fillRef idx="1">
+            <a:schemeClr val="accent1"/>
+          </a:fillRef>
+          <a:effectRef idx="0">
+            <a:schemeClr val="accent1"/>
+          </a:effectRef>
+          <a:fontRef idx="minor">
+            <a:schemeClr val="lt1"/>
+          </a:fontRef>
+        </p:style>
+        <p:txBody>
+          <a:bodyPr rtlCol="0" anchor="ctr"/>
+          <a:lstStyle/>
+          <a:p>
+            <a:pPr algn="ctr"/>
+            <a:endParaRPr kumimoji="1" lang="ja-JP" altLang="en-US" dirty="0"/>
+          </a:p>
+        </p:txBody>
+      </p:sp>
+      <p:sp>
+        <p:nvSpPr>
+          <p:cNvPr id="39" name="テキスト ボックス 38">
+            <a:extLst>
+              <a:ext uri="{FF2B5EF4-FFF2-40B4-BE49-F238E27FC236}">
+                <a16:creationId xmlns:a16="http://schemas.microsoft.com/office/drawing/2014/main" id="{F86CCD8B-1CE2-4033-B407-543BFD007636}"/>
+              </a:ext>
+            </a:extLst>
+          </p:cNvPr>
+          <p:cNvSpPr txBox="1"/>
+          <p:nvPr/>
+        </p:nvSpPr>
+        <p:spPr>
+          <a:xfrm>
+            <a:off x="6096000" y="5179906"/>
+            <a:ext cx="2646878" cy="461665"/>
+          </a:xfrm>
+          <a:prstGeom prst="rect">
+            <a:avLst/>
+          </a:prstGeom>
+          <a:noFill/>
+        </p:spPr>
+        <p:txBody>
+          <a:bodyPr wrap="none" rtlCol="0">
+            <a:spAutoFit/>
+          </a:bodyPr>
+          <a:lstStyle/>
+          <a:p>
+            <a:r>
+              <a:rPr lang="ja-JP" altLang="en-US" sz="2400" dirty="0"/>
+              <a:t>あとはコピーする</a:t>
+            </a:r>
+            <a:endParaRPr lang="en-US" altLang="ja-JP" sz="2400" dirty="0"/>
+          </a:p>
+        </p:txBody>
+      </p:sp>
+      <p:sp>
+        <p:nvSpPr>
+          <p:cNvPr id="40" name="矢印: 右 39">
+            <a:extLst>
+              <a:ext uri="{FF2B5EF4-FFF2-40B4-BE49-F238E27FC236}">
+                <a16:creationId xmlns:a16="http://schemas.microsoft.com/office/drawing/2014/main" id="{19AC3BDC-F1BB-461D-B266-5A272E3B4D0C}"/>
+              </a:ext>
+            </a:extLst>
+          </p:cNvPr>
+          <p:cNvSpPr/>
+          <p:nvPr/>
+        </p:nvSpPr>
+        <p:spPr>
+          <a:xfrm>
+            <a:off x="3696747" y="3105150"/>
+            <a:ext cx="2221848" cy="647700"/>
+          </a:xfrm>
+          <a:prstGeom prst="rightArrow">
+            <a:avLst/>
+          </a:prstGeom>
+          <a:solidFill>
+            <a:srgbClr val="FF0000"/>
+          </a:solidFill>
+          <a:ln w="38100">
+            <a:solidFill>
+              <a:schemeClr val="tx1"/>
+            </a:solidFill>
+          </a:ln>
+        </p:spPr>
+        <p:style>
+          <a:lnRef idx="2">
+            <a:schemeClr val="accent1">
+              <a:shade val="50000"/>
+            </a:schemeClr>
+          </a:lnRef>
+          <a:fillRef idx="1">
+            <a:schemeClr val="accent1"/>
+          </a:fillRef>
+          <a:effectRef idx="0">
+            <a:schemeClr val="accent1"/>
+          </a:effectRef>
+          <a:fontRef idx="minor">
+            <a:schemeClr val="lt1"/>
+          </a:fontRef>
+        </p:style>
+        <p:txBody>
+          <a:bodyPr rtlCol="0" anchor="ctr"/>
+          <a:lstStyle/>
+          <a:p>
+            <a:pPr algn="ctr"/>
+            <a:endParaRPr kumimoji="1" lang="ja-JP" altLang="en-US"/>
+          </a:p>
+        </p:txBody>
+      </p:sp>
+    </p:spTree>
+    <p:extLst>
+      <p:ext uri="{BB962C8B-B14F-4D97-AF65-F5344CB8AC3E}">
+        <p14:creationId xmlns:p14="http://schemas.microsoft.com/office/powerpoint/2010/main" val="1788452148"/>
+      </p:ext>
+    </p:extLst>
+  </p:cSld>
+  <p:clrMapOvr>
+    <a:masterClrMapping/>
+  </p:clrMapOvr>
+</p:sld>
+</file>
+
+<file path=ppt/slides/slide16.xml><?xml version="1.0" encoding="utf-8"?>
+<p:sld xmlns:a="http://schemas.openxmlformats.org/drawingml/2006/main" xmlns:r="http://schemas.openxmlformats.org/officeDocument/2006/relationships" xmlns:p="http://schemas.openxmlformats.org/presentationml/2006/main">
+  <p:cSld>
+    <p:spTree>
+      <p:nvGrpSpPr>
+        <p:cNvPr id="1" name=""/>
+        <p:cNvGrpSpPr/>
+        <p:nvPr/>
+      </p:nvGrpSpPr>
+      <p:grpSpPr>
+        <a:xfrm>
+          <a:off x="0" y="0"/>
+          <a:ext cx="0" cy="0"/>
+          <a:chOff x="0" y="0"/>
+          <a:chExt cx="0" cy="0"/>
+        </a:xfrm>
+      </p:grpSpPr>
+      <p:sp>
+        <p:nvSpPr>
+          <p:cNvPr id="4" name="テキスト ボックス 3">
+            <a:extLst>
+              <a:ext uri="{FF2B5EF4-FFF2-40B4-BE49-F238E27FC236}">
+                <a16:creationId xmlns:a16="http://schemas.microsoft.com/office/drawing/2014/main" id="{5A13BF46-B8C5-48AA-8308-C9ECFF431A18}"/>
+              </a:ext>
+            </a:extLst>
+          </p:cNvPr>
+          <p:cNvSpPr txBox="1"/>
+          <p:nvPr/>
+        </p:nvSpPr>
+        <p:spPr>
+          <a:xfrm>
+            <a:off x="567542" y="491954"/>
+            <a:ext cx="6046848" cy="584775"/>
+          </a:xfrm>
+          <a:prstGeom prst="rect">
+            <a:avLst/>
+          </a:prstGeom>
+          <a:noFill/>
+        </p:spPr>
+        <p:txBody>
+          <a:bodyPr wrap="none" rtlCol="0">
+            <a:spAutoFit/>
+          </a:bodyPr>
+          <a:lstStyle/>
+          <a:p>
+            <a:r>
+              <a:rPr kumimoji="1" lang="ja-JP" altLang="en-US" sz="3200" b="1" u="sng" dirty="0"/>
+              <a:t>オブジェクトの複数配置 問題点</a:t>
+            </a:r>
+            <a:endParaRPr kumimoji="1" lang="en-US" altLang="ja-JP" sz="3200" b="1" u="sng" dirty="0"/>
+          </a:p>
+        </p:txBody>
+      </p:sp>
+      <p:sp>
+        <p:nvSpPr>
+          <p:cNvPr id="6" name="テキスト ボックス 5">
+            <a:extLst>
+              <a:ext uri="{FF2B5EF4-FFF2-40B4-BE49-F238E27FC236}">
+                <a16:creationId xmlns:a16="http://schemas.microsoft.com/office/drawing/2014/main" id="{55830AD6-028B-4C4E-80BF-B70DFC1C3A46}"/>
+              </a:ext>
+            </a:extLst>
+          </p:cNvPr>
+          <p:cNvSpPr txBox="1"/>
+          <p:nvPr/>
+        </p:nvSpPr>
+        <p:spPr>
+          <a:xfrm>
+            <a:off x="567542" y="1216429"/>
+            <a:ext cx="6135013" cy="461665"/>
+          </a:xfrm>
+          <a:prstGeom prst="rect">
+            <a:avLst/>
+          </a:prstGeom>
+          <a:noFill/>
+        </p:spPr>
+        <p:txBody>
+          <a:bodyPr wrap="none" rtlCol="0">
+            <a:spAutoFit/>
+          </a:bodyPr>
+          <a:lstStyle/>
+          <a:p>
+            <a:r>
+              <a:rPr lang="en-US" altLang="ja-JP" sz="2400" dirty="0" err="1"/>
+              <a:t>Dxlib</a:t>
+            </a:r>
+            <a:r>
+              <a:rPr lang="ja-JP" altLang="en-US" sz="2400" dirty="0"/>
+              <a:t>にはそのコピーする関数があります。</a:t>
+            </a:r>
+            <a:endParaRPr lang="en-US" altLang="ja-JP" sz="2400" dirty="0"/>
+          </a:p>
+        </p:txBody>
+      </p:sp>
+      <p:pic>
+        <p:nvPicPr>
+          <p:cNvPr id="3" name="図 2">
+            <a:extLst>
+              <a:ext uri="{FF2B5EF4-FFF2-40B4-BE49-F238E27FC236}">
+                <a16:creationId xmlns:a16="http://schemas.microsoft.com/office/drawing/2014/main" id="{7D4D1BF9-AF11-4F06-A772-39A6A114071D}"/>
+              </a:ext>
+            </a:extLst>
+          </p:cNvPr>
+          <p:cNvPicPr>
+            <a:picLocks noChangeAspect="1"/>
+          </p:cNvPicPr>
+          <p:nvPr/>
+        </p:nvPicPr>
+        <p:blipFill>
+          <a:blip r:embed="rId2">
+            <a:extLst>
+              <a:ext uri="{28A0092B-C50C-407E-A947-70E740481C1C}">
+                <a14:useLocalDpi xmlns:a14="http://schemas.microsoft.com/office/drawing/2010/main" val="0"/>
+              </a:ext>
+            </a:extLst>
+          </a:blip>
+          <a:stretch>
+            <a:fillRect/>
+          </a:stretch>
+        </p:blipFill>
+        <p:spPr>
+          <a:xfrm>
+            <a:off x="567541" y="1817794"/>
+            <a:ext cx="10392165" cy="2944706"/>
+          </a:xfrm>
+          <a:prstGeom prst="rect">
+            <a:avLst/>
+          </a:prstGeom>
+        </p:spPr>
+      </p:pic>
+    </p:spTree>
+    <p:extLst>
+      <p:ext uri="{BB962C8B-B14F-4D97-AF65-F5344CB8AC3E}">
+        <p14:creationId xmlns:p14="http://schemas.microsoft.com/office/powerpoint/2010/main" val="2632728014"/>
+      </p:ext>
+    </p:extLst>
+  </p:cSld>
+  <p:clrMapOvr>
+    <a:masterClrMapping/>
+  </p:clrMapOvr>
+</p:sld>
+</file>
+
+<file path=ppt/slides/slide17.xml><?xml version="1.0" encoding="utf-8"?>
+<p:sld xmlns:a="http://schemas.openxmlformats.org/drawingml/2006/main" xmlns:r="http://schemas.openxmlformats.org/officeDocument/2006/relationships" xmlns:p="http://schemas.openxmlformats.org/presentationml/2006/main">
+  <p:cSld>
+    <p:spTree>
+      <p:nvGrpSpPr>
+        <p:cNvPr id="1" name=""/>
+        <p:cNvGrpSpPr/>
+        <p:nvPr/>
+      </p:nvGrpSpPr>
+      <p:grpSpPr>
+        <a:xfrm>
+          <a:off x="0" y="0"/>
+          <a:ext cx="0" cy="0"/>
+          <a:chOff x="0" y="0"/>
+          <a:chExt cx="0" cy="0"/>
+        </a:xfrm>
+      </p:grpSpPr>
+      <p:sp>
+        <p:nvSpPr>
+          <p:cNvPr id="4" name="テキスト ボックス 3">
+            <a:extLst>
+              <a:ext uri="{FF2B5EF4-FFF2-40B4-BE49-F238E27FC236}">
+                <a16:creationId xmlns:a16="http://schemas.microsoft.com/office/drawing/2014/main" id="{5A13BF46-B8C5-48AA-8308-C9ECFF431A18}"/>
+              </a:ext>
+            </a:extLst>
+          </p:cNvPr>
+          <p:cNvSpPr txBox="1"/>
+          <p:nvPr/>
+        </p:nvSpPr>
+        <p:spPr>
+          <a:xfrm>
+            <a:off x="567542" y="491954"/>
+            <a:ext cx="6046848" cy="584775"/>
+          </a:xfrm>
+          <a:prstGeom prst="rect">
+            <a:avLst/>
+          </a:prstGeom>
+          <a:noFill/>
+        </p:spPr>
+        <p:txBody>
+          <a:bodyPr wrap="none" rtlCol="0">
+            <a:spAutoFit/>
+          </a:bodyPr>
+          <a:lstStyle/>
+          <a:p>
+            <a:r>
+              <a:rPr kumimoji="1" lang="ja-JP" altLang="en-US" sz="3200" b="1" u="sng" dirty="0"/>
+              <a:t>オブジェクトの複数配置 問題点</a:t>
+            </a:r>
+            <a:endParaRPr kumimoji="1" lang="en-US" altLang="ja-JP" sz="3200" b="1" u="sng" dirty="0"/>
+          </a:p>
+        </p:txBody>
+      </p:sp>
+      <p:sp>
+        <p:nvSpPr>
+          <p:cNvPr id="6" name="テキスト ボックス 5">
+            <a:extLst>
+              <a:ext uri="{FF2B5EF4-FFF2-40B4-BE49-F238E27FC236}">
+                <a16:creationId xmlns:a16="http://schemas.microsoft.com/office/drawing/2014/main" id="{55830AD6-028B-4C4E-80BF-B70DFC1C3A46}"/>
+              </a:ext>
+            </a:extLst>
+          </p:cNvPr>
+          <p:cNvSpPr txBox="1"/>
+          <p:nvPr/>
+        </p:nvSpPr>
+        <p:spPr>
+          <a:xfrm>
+            <a:off x="567542" y="1216429"/>
+            <a:ext cx="9725739" cy="1200329"/>
+          </a:xfrm>
+          <a:prstGeom prst="rect">
+            <a:avLst/>
+          </a:prstGeom>
+          <a:noFill/>
+        </p:spPr>
+        <p:txBody>
+          <a:bodyPr wrap="none" rtlCol="0">
+            <a:spAutoFit/>
+          </a:bodyPr>
+          <a:lstStyle/>
+          <a:p>
+            <a:r>
+              <a:rPr lang="ja-JP" altLang="en-US" sz="2400" dirty="0"/>
+              <a:t>ロード処理を修正します。</a:t>
+            </a:r>
+            <a:endParaRPr lang="en-US" altLang="ja-JP" sz="2400" dirty="0"/>
+          </a:p>
+          <a:p>
+            <a:r>
+              <a:rPr lang="ja-JP" altLang="en-US" sz="2400" b="1" dirty="0">
+                <a:solidFill>
+                  <a:srgbClr val="FF0000"/>
+                </a:solidFill>
+              </a:rPr>
+              <a:t>ロードは１度だけ</a:t>
+            </a:r>
+            <a:r>
+              <a:rPr lang="ja-JP" altLang="en-US" sz="2400" dirty="0"/>
+              <a:t>行うので、今回はマネージャークラスで行います。</a:t>
+            </a:r>
+            <a:endParaRPr lang="en-US" altLang="ja-JP" sz="2400" dirty="0"/>
+          </a:p>
+          <a:p>
+            <a:r>
+              <a:rPr lang="en-US" altLang="ja-JP" sz="2400" b="1" dirty="0" err="1">
+                <a:solidFill>
+                  <a:srgbClr val="00B050"/>
+                </a:solidFill>
+              </a:rPr>
+              <a:t>BlockManager</a:t>
+            </a:r>
+            <a:r>
+              <a:rPr lang="ja-JP" altLang="en-US" sz="2400" dirty="0"/>
+              <a:t>にメンバ変数を追加しましょう。</a:t>
+            </a:r>
+            <a:endParaRPr lang="en-US" altLang="ja-JP" sz="2400" dirty="0"/>
+          </a:p>
+        </p:txBody>
+      </p:sp>
+      <p:sp>
+        <p:nvSpPr>
+          <p:cNvPr id="8" name="テキスト ボックス 7">
+            <a:extLst>
+              <a:ext uri="{FF2B5EF4-FFF2-40B4-BE49-F238E27FC236}">
+                <a16:creationId xmlns:a16="http://schemas.microsoft.com/office/drawing/2014/main" id="{50A5F0AF-44F9-4538-8B2B-D45ECB1C2E33}"/>
+              </a:ext>
+            </a:extLst>
+          </p:cNvPr>
+          <p:cNvSpPr txBox="1"/>
+          <p:nvPr/>
+        </p:nvSpPr>
+        <p:spPr>
+          <a:xfrm>
+            <a:off x="567541" y="5219700"/>
+            <a:ext cx="7398179" cy="461665"/>
+          </a:xfrm>
+          <a:prstGeom prst="rect">
+            <a:avLst/>
+          </a:prstGeom>
+          <a:noFill/>
+        </p:spPr>
+        <p:txBody>
+          <a:bodyPr wrap="none" rtlCol="0">
+            <a:spAutoFit/>
+          </a:bodyPr>
+          <a:lstStyle/>
+          <a:p>
+            <a:r>
+              <a:rPr lang="en-US" altLang="ja-JP" sz="2400" b="1" dirty="0" err="1">
+                <a:solidFill>
+                  <a:srgbClr val="0070C0"/>
+                </a:solidFill>
+              </a:rPr>
+              <a:t>m_Handle</a:t>
+            </a:r>
+            <a:r>
+              <a:rPr lang="ja-JP" altLang="en-US" sz="2400" dirty="0"/>
+              <a:t>はコンストラクタで</a:t>
+            </a:r>
+            <a:r>
+              <a:rPr lang="en-US" altLang="ja-JP" sz="2400" dirty="0"/>
+              <a:t>0</a:t>
+            </a:r>
+            <a:r>
+              <a:rPr lang="ja-JP" altLang="en-US" sz="2400" dirty="0"/>
+              <a:t>初期化しましょう。</a:t>
+            </a:r>
+            <a:endParaRPr lang="en-US" altLang="ja-JP" sz="2400" dirty="0"/>
+          </a:p>
+        </p:txBody>
+      </p:sp>
+      <p:pic>
+        <p:nvPicPr>
+          <p:cNvPr id="3" name="図 2">
+            <a:extLst>
+              <a:ext uri="{FF2B5EF4-FFF2-40B4-BE49-F238E27FC236}">
+                <a16:creationId xmlns:a16="http://schemas.microsoft.com/office/drawing/2014/main" id="{906C9BEF-3ADC-438F-A8F7-5066BDB3A8CA}"/>
+              </a:ext>
+            </a:extLst>
+          </p:cNvPr>
+          <p:cNvPicPr>
+            <a:picLocks noChangeAspect="1"/>
+          </p:cNvPicPr>
+          <p:nvPr/>
+        </p:nvPicPr>
+        <p:blipFill>
+          <a:blip r:embed="rId2"/>
+          <a:stretch>
+            <a:fillRect/>
+          </a:stretch>
+        </p:blipFill>
+        <p:spPr>
+          <a:xfrm>
+            <a:off x="567541" y="2556458"/>
+            <a:ext cx="7367423" cy="2517566"/>
+          </a:xfrm>
+          <a:prstGeom prst="rect">
+            <a:avLst/>
+          </a:prstGeom>
+        </p:spPr>
+      </p:pic>
+      <p:sp>
+        <p:nvSpPr>
+          <p:cNvPr id="9" name="正方形/長方形 8">
+            <a:extLst>
+              <a:ext uri="{FF2B5EF4-FFF2-40B4-BE49-F238E27FC236}">
+                <a16:creationId xmlns:a16="http://schemas.microsoft.com/office/drawing/2014/main" id="{97375FD2-F85B-42A9-AE70-59E837656CBA}"/>
+              </a:ext>
+            </a:extLst>
+          </p:cNvPr>
+          <p:cNvSpPr/>
+          <p:nvPr/>
+        </p:nvSpPr>
+        <p:spPr>
+          <a:xfrm>
+            <a:off x="2000181" y="4155132"/>
+            <a:ext cx="5745325" cy="721668"/>
+          </a:xfrm>
+          <a:prstGeom prst="rect">
+            <a:avLst/>
+          </a:prstGeom>
+          <a:noFill/>
+          <a:ln w="38100">
+            <a:solidFill>
+              <a:srgbClr val="FF0000"/>
+            </a:solidFill>
+          </a:ln>
+        </p:spPr>
+        <p:style>
+          <a:lnRef idx="2">
+            <a:schemeClr val="accent1">
+              <a:shade val="50000"/>
+            </a:schemeClr>
+          </a:lnRef>
+          <a:fillRef idx="1">
+            <a:schemeClr val="accent1"/>
+          </a:fillRef>
+          <a:effectRef idx="0">
+            <a:schemeClr val="accent1"/>
+          </a:effectRef>
+          <a:fontRef idx="minor">
+            <a:schemeClr val="lt1"/>
+          </a:fontRef>
+        </p:style>
+        <p:txBody>
+          <a:bodyPr rtlCol="0" anchor="ctr"/>
+          <a:lstStyle/>
+          <a:p>
+            <a:pPr algn="ctr"/>
+            <a:endParaRPr kumimoji="1" lang="ja-JP" altLang="en-US"/>
+          </a:p>
+        </p:txBody>
+      </p:sp>
+    </p:spTree>
+    <p:extLst>
+      <p:ext uri="{BB962C8B-B14F-4D97-AF65-F5344CB8AC3E}">
+        <p14:creationId xmlns:p14="http://schemas.microsoft.com/office/powerpoint/2010/main" val="731176080"/>
+      </p:ext>
+    </p:extLst>
+  </p:cSld>
+  <p:clrMapOvr>
+    <a:masterClrMapping/>
+  </p:clrMapOvr>
+</p:sld>
+</file>
+
 <file path=ppt/slides/slide18.xml><?xml version="1.0" encoding="utf-8"?>
 <p:sld xmlns:a="http://schemas.openxmlformats.org/drawingml/2006/main" xmlns:r="http://schemas.openxmlformats.org/officeDocument/2006/relationships" xmlns:p="http://schemas.openxmlformats.org/presentationml/2006/main">
   <p:cSld>
@@ -5565,7 +6134,7 @@
         <p:spPr>
           <a:xfrm>
             <a:off x="567542" y="1216429"/>
-            <a:ext cx="8802410" cy="830997"/>
+            <a:ext cx="7882286" cy="461665"/>
           </a:xfrm>
           <a:prstGeom prst="rect">
             <a:avLst/>
@@ -5579,566 +6148,55 @@
           <a:lstStyle/>
           <a:p>
             <a:r>
+              <a:rPr lang="en-US" altLang="ja-JP" sz="2400" b="1" dirty="0" err="1">
+                <a:solidFill>
+                  <a:srgbClr val="00B050"/>
+                </a:solidFill>
+              </a:rPr>
+              <a:t>BlockManager</a:t>
+            </a:r>
+            <a:r>
               <a:rPr lang="ja-JP" altLang="en-US" sz="2400" dirty="0"/>
-              <a:t>同じ画像が複数必要な場合は、</a:t>
+              <a:t>のロード関数でモデルをロードします。</a:t>
             </a:r>
             <a:endParaRPr lang="en-US" altLang="ja-JP" sz="2400" dirty="0"/>
           </a:p>
-          <a:p>
-            <a:r>
-              <a:rPr lang="ja-JP" altLang="en-US" sz="2400" dirty="0"/>
-              <a:t>１度だけロードして、その後はコピーすると効率が良いです。</a:t>
-            </a:r>
-            <a:endParaRPr lang="en-US" altLang="ja-JP" sz="2400" dirty="0"/>
-          </a:p>
-        </p:txBody>
-      </p:sp>
-      <p:sp>
-        <p:nvSpPr>
-          <p:cNvPr id="29" name="直方体 28">
-            <a:extLst>
-              <a:ext uri="{FF2B5EF4-FFF2-40B4-BE49-F238E27FC236}">
-                <a16:creationId xmlns:a16="http://schemas.microsoft.com/office/drawing/2014/main" id="{B71D7A3B-C72B-4E32-8A82-C0900EE8AA85}"/>
-              </a:ext>
-            </a:extLst>
-          </p:cNvPr>
-          <p:cNvSpPr/>
+        </p:txBody>
+      </p:sp>
+      <p:pic>
+        <p:nvPicPr>
+          <p:cNvPr id="7" name="図 6">
+            <a:extLst>
+              <a:ext uri="{FF2B5EF4-FFF2-40B4-BE49-F238E27FC236}">
+                <a16:creationId xmlns:a16="http://schemas.microsoft.com/office/drawing/2014/main" id="{81DE565B-D5AE-49E3-98E0-00EDABADE20C}"/>
+              </a:ext>
+            </a:extLst>
+          </p:cNvPr>
+          <p:cNvPicPr>
+            <a:picLocks noChangeAspect="1"/>
+          </p:cNvPicPr>
           <p:nvPr/>
-        </p:nvSpPr>
-        <p:spPr>
-          <a:xfrm>
-            <a:off x="1543151" y="3397546"/>
-            <a:ext cx="1054100" cy="983976"/>
-          </a:xfrm>
-          <a:prstGeom prst="cube">
-            <a:avLst/>
-          </a:prstGeom>
-        </p:spPr>
-        <p:style>
-          <a:lnRef idx="2">
-            <a:schemeClr val="accent1">
-              <a:shade val="50000"/>
-            </a:schemeClr>
-          </a:lnRef>
-          <a:fillRef idx="1">
-            <a:schemeClr val="accent1"/>
-          </a:fillRef>
-          <a:effectRef idx="0">
-            <a:schemeClr val="accent1"/>
-          </a:effectRef>
-          <a:fontRef idx="minor">
-            <a:schemeClr val="lt1"/>
-          </a:fontRef>
-        </p:style>
-        <p:txBody>
-          <a:bodyPr rtlCol="0" anchor="ctr"/>
-          <a:lstStyle/>
-          <a:p>
-            <a:pPr algn="ctr"/>
-            <a:endParaRPr kumimoji="1" lang="ja-JP" altLang="en-US" dirty="0"/>
-          </a:p>
-        </p:txBody>
-      </p:sp>
-      <p:sp>
-        <p:nvSpPr>
-          <p:cNvPr id="30" name="円柱 29">
-            <a:extLst>
-              <a:ext uri="{FF2B5EF4-FFF2-40B4-BE49-F238E27FC236}">
-                <a16:creationId xmlns:a16="http://schemas.microsoft.com/office/drawing/2014/main" id="{856E0899-A956-4C92-838F-1D21DE092963}"/>
-              </a:ext>
-            </a:extLst>
-          </p:cNvPr>
-          <p:cNvSpPr/>
-          <p:nvPr/>
-        </p:nvSpPr>
-        <p:spPr>
-          <a:xfrm>
-            <a:off x="806550" y="2209559"/>
-            <a:ext cx="2593340" cy="2855877"/>
-          </a:xfrm>
-          <a:prstGeom prst="can">
-            <a:avLst/>
-          </a:prstGeom>
-          <a:noFill/>
-        </p:spPr>
-        <p:style>
-          <a:lnRef idx="2">
-            <a:schemeClr val="accent1">
-              <a:shade val="50000"/>
-            </a:schemeClr>
-          </a:lnRef>
-          <a:fillRef idx="1">
-            <a:schemeClr val="accent1"/>
-          </a:fillRef>
-          <a:effectRef idx="0">
-            <a:schemeClr val="accent1"/>
-          </a:effectRef>
-          <a:fontRef idx="minor">
-            <a:schemeClr val="lt1"/>
-          </a:fontRef>
-        </p:style>
-        <p:txBody>
-          <a:bodyPr rtlCol="0" anchor="ctr"/>
-          <a:lstStyle/>
-          <a:p>
-            <a:pPr algn="ctr"/>
-            <a:endParaRPr kumimoji="1" lang="ja-JP" altLang="en-US"/>
-          </a:p>
-        </p:txBody>
-      </p:sp>
-      <p:sp>
-        <p:nvSpPr>
-          <p:cNvPr id="31" name="テキスト ボックス 30">
-            <a:extLst>
-              <a:ext uri="{FF2B5EF4-FFF2-40B4-BE49-F238E27FC236}">
-                <a16:creationId xmlns:a16="http://schemas.microsoft.com/office/drawing/2014/main" id="{D1858A99-8ACD-4111-947B-0E528C87F301}"/>
-              </a:ext>
-            </a:extLst>
-          </p:cNvPr>
-          <p:cNvSpPr txBox="1"/>
-          <p:nvPr/>
-        </p:nvSpPr>
-        <p:spPr>
-          <a:xfrm>
-            <a:off x="567542" y="5179906"/>
-            <a:ext cx="3262432" cy="461665"/>
+        </p:nvPicPr>
+        <p:blipFill>
+          <a:blip r:embed="rId2"/>
+          <a:stretch>
+            <a:fillRect/>
+          </a:stretch>
+        </p:blipFill>
+        <p:spPr>
+          <a:xfrm>
+            <a:off x="567542" y="1817794"/>
+            <a:ext cx="9279162" cy="1913378"/>
           </a:xfrm>
           <a:prstGeom prst="rect">
             <a:avLst/>
           </a:prstGeom>
-          <a:noFill/>
-        </p:spPr>
-        <p:txBody>
-          <a:bodyPr wrap="none" rtlCol="0">
-            <a:spAutoFit/>
-          </a:bodyPr>
-          <a:lstStyle/>
-          <a:p>
-            <a:r>
-              <a:rPr lang="ja-JP" altLang="en-US" sz="2400" dirty="0"/>
-              <a:t>１度ロードして。。。</a:t>
-            </a:r>
-            <a:endParaRPr lang="en-US" altLang="ja-JP" sz="2400" dirty="0"/>
-          </a:p>
-        </p:txBody>
-      </p:sp>
-      <p:sp>
-        <p:nvSpPr>
-          <p:cNvPr id="32" name="直方体 31">
-            <a:extLst>
-              <a:ext uri="{FF2B5EF4-FFF2-40B4-BE49-F238E27FC236}">
-                <a16:creationId xmlns:a16="http://schemas.microsoft.com/office/drawing/2014/main" id="{D7A13C9A-D116-47FB-B317-D1F7D52456CB}"/>
-              </a:ext>
-            </a:extLst>
-          </p:cNvPr>
-          <p:cNvSpPr/>
-          <p:nvPr/>
-        </p:nvSpPr>
-        <p:spPr>
-          <a:xfrm>
-            <a:off x="6335008" y="3192017"/>
-            <a:ext cx="461157" cy="411057"/>
-          </a:xfrm>
-          <a:prstGeom prst="cube">
-            <a:avLst/>
-          </a:prstGeom>
-        </p:spPr>
-        <p:style>
-          <a:lnRef idx="2">
-            <a:schemeClr val="accent1">
-              <a:shade val="50000"/>
-            </a:schemeClr>
-          </a:lnRef>
-          <a:fillRef idx="1">
-            <a:schemeClr val="accent1"/>
-          </a:fillRef>
-          <a:effectRef idx="0">
-            <a:schemeClr val="accent1"/>
-          </a:effectRef>
-          <a:fontRef idx="minor">
-            <a:schemeClr val="lt1"/>
-          </a:fontRef>
-        </p:style>
-        <p:txBody>
-          <a:bodyPr rtlCol="0" anchor="ctr"/>
-          <a:lstStyle/>
-          <a:p>
-            <a:pPr algn="ctr"/>
-            <a:endParaRPr kumimoji="1" lang="ja-JP" altLang="en-US" dirty="0"/>
-          </a:p>
-        </p:txBody>
-      </p:sp>
-      <p:sp>
-        <p:nvSpPr>
-          <p:cNvPr id="33" name="円柱 32">
-            <a:extLst>
-              <a:ext uri="{FF2B5EF4-FFF2-40B4-BE49-F238E27FC236}">
-                <a16:creationId xmlns:a16="http://schemas.microsoft.com/office/drawing/2014/main" id="{2C07F27A-4C32-478E-856F-80D889F69BB5}"/>
-              </a:ext>
-            </a:extLst>
-          </p:cNvPr>
-          <p:cNvSpPr/>
-          <p:nvPr/>
-        </p:nvSpPr>
-        <p:spPr>
-          <a:xfrm>
-            <a:off x="6077050" y="2209559"/>
-            <a:ext cx="2593340" cy="2855877"/>
-          </a:xfrm>
-          <a:prstGeom prst="can">
-            <a:avLst/>
-          </a:prstGeom>
-          <a:noFill/>
-        </p:spPr>
-        <p:style>
-          <a:lnRef idx="2">
-            <a:schemeClr val="accent1">
-              <a:shade val="50000"/>
-            </a:schemeClr>
-          </a:lnRef>
-          <a:fillRef idx="1">
-            <a:schemeClr val="accent1"/>
-          </a:fillRef>
-          <a:effectRef idx="0">
-            <a:schemeClr val="accent1"/>
-          </a:effectRef>
-          <a:fontRef idx="minor">
-            <a:schemeClr val="lt1"/>
-          </a:fontRef>
-        </p:style>
-        <p:txBody>
-          <a:bodyPr rtlCol="0" anchor="ctr"/>
-          <a:lstStyle/>
-          <a:p>
-            <a:pPr algn="ctr"/>
-            <a:endParaRPr kumimoji="1" lang="ja-JP" altLang="en-US"/>
-          </a:p>
-        </p:txBody>
-      </p:sp>
-      <p:sp>
-        <p:nvSpPr>
-          <p:cNvPr id="34" name="直方体 33">
-            <a:extLst>
-              <a:ext uri="{FF2B5EF4-FFF2-40B4-BE49-F238E27FC236}">
-                <a16:creationId xmlns:a16="http://schemas.microsoft.com/office/drawing/2014/main" id="{F08B3BE9-485B-41B8-8527-5372EA142EB7}"/>
-              </a:ext>
-            </a:extLst>
-          </p:cNvPr>
-          <p:cNvSpPr/>
-          <p:nvPr/>
-        </p:nvSpPr>
-        <p:spPr>
-          <a:xfrm>
-            <a:off x="6954620" y="3192016"/>
-            <a:ext cx="461157" cy="411057"/>
-          </a:xfrm>
-          <a:prstGeom prst="cube">
-            <a:avLst/>
-          </a:prstGeom>
-        </p:spPr>
-        <p:style>
-          <a:lnRef idx="2">
-            <a:schemeClr val="accent1">
-              <a:shade val="50000"/>
-            </a:schemeClr>
-          </a:lnRef>
-          <a:fillRef idx="1">
-            <a:schemeClr val="accent1"/>
-          </a:fillRef>
-          <a:effectRef idx="0">
-            <a:schemeClr val="accent1"/>
-          </a:effectRef>
-          <a:fontRef idx="minor">
-            <a:schemeClr val="lt1"/>
-          </a:fontRef>
-        </p:style>
-        <p:txBody>
-          <a:bodyPr rtlCol="0" anchor="ctr"/>
-          <a:lstStyle/>
-          <a:p>
-            <a:pPr algn="ctr"/>
-            <a:endParaRPr kumimoji="1" lang="ja-JP" altLang="en-US" dirty="0"/>
-          </a:p>
-        </p:txBody>
-      </p:sp>
-      <p:sp>
-        <p:nvSpPr>
-          <p:cNvPr id="35" name="直方体 34">
-            <a:extLst>
-              <a:ext uri="{FF2B5EF4-FFF2-40B4-BE49-F238E27FC236}">
-                <a16:creationId xmlns:a16="http://schemas.microsoft.com/office/drawing/2014/main" id="{709A6337-DA30-4F7E-BF00-58FB807AC70F}"/>
-              </a:ext>
-            </a:extLst>
-          </p:cNvPr>
-          <p:cNvSpPr/>
-          <p:nvPr/>
-        </p:nvSpPr>
-        <p:spPr>
-          <a:xfrm>
-            <a:off x="7673735" y="3189248"/>
-            <a:ext cx="461157" cy="411057"/>
-          </a:xfrm>
-          <a:prstGeom prst="cube">
-            <a:avLst/>
-          </a:prstGeom>
-        </p:spPr>
-        <p:style>
-          <a:lnRef idx="2">
-            <a:schemeClr val="accent1">
-              <a:shade val="50000"/>
-            </a:schemeClr>
-          </a:lnRef>
-          <a:fillRef idx="1">
-            <a:schemeClr val="accent1"/>
-          </a:fillRef>
-          <a:effectRef idx="0">
-            <a:schemeClr val="accent1"/>
-          </a:effectRef>
-          <a:fontRef idx="minor">
-            <a:schemeClr val="lt1"/>
-          </a:fontRef>
-        </p:style>
-        <p:txBody>
-          <a:bodyPr rtlCol="0" anchor="ctr"/>
-          <a:lstStyle/>
-          <a:p>
-            <a:pPr algn="ctr"/>
-            <a:endParaRPr kumimoji="1" lang="ja-JP" altLang="en-US" dirty="0"/>
-          </a:p>
-        </p:txBody>
-      </p:sp>
-      <p:sp>
-        <p:nvSpPr>
-          <p:cNvPr id="36" name="直方体 35">
-            <a:extLst>
-              <a:ext uri="{FF2B5EF4-FFF2-40B4-BE49-F238E27FC236}">
-                <a16:creationId xmlns:a16="http://schemas.microsoft.com/office/drawing/2014/main" id="{11CC015A-DF18-4003-B919-5340E4D1DD58}"/>
-              </a:ext>
-            </a:extLst>
-          </p:cNvPr>
-          <p:cNvSpPr/>
-          <p:nvPr/>
-        </p:nvSpPr>
-        <p:spPr>
-          <a:xfrm>
-            <a:off x="6335008" y="3889534"/>
-            <a:ext cx="461157" cy="411057"/>
-          </a:xfrm>
-          <a:prstGeom prst="cube">
-            <a:avLst/>
-          </a:prstGeom>
-        </p:spPr>
-        <p:style>
-          <a:lnRef idx="2">
-            <a:schemeClr val="accent1">
-              <a:shade val="50000"/>
-            </a:schemeClr>
-          </a:lnRef>
-          <a:fillRef idx="1">
-            <a:schemeClr val="accent1"/>
-          </a:fillRef>
-          <a:effectRef idx="0">
-            <a:schemeClr val="accent1"/>
-          </a:effectRef>
-          <a:fontRef idx="minor">
-            <a:schemeClr val="lt1"/>
-          </a:fontRef>
-        </p:style>
-        <p:txBody>
-          <a:bodyPr rtlCol="0" anchor="ctr"/>
-          <a:lstStyle/>
-          <a:p>
-            <a:pPr algn="ctr"/>
-            <a:endParaRPr kumimoji="1" lang="ja-JP" altLang="en-US" dirty="0"/>
-          </a:p>
-        </p:txBody>
-      </p:sp>
-      <p:sp>
-        <p:nvSpPr>
-          <p:cNvPr id="37" name="直方体 36">
-            <a:extLst>
-              <a:ext uri="{FF2B5EF4-FFF2-40B4-BE49-F238E27FC236}">
-                <a16:creationId xmlns:a16="http://schemas.microsoft.com/office/drawing/2014/main" id="{66E75F4B-AAFB-43E5-BFF3-A70EFA3DEC52}"/>
-              </a:ext>
-            </a:extLst>
-          </p:cNvPr>
-          <p:cNvSpPr/>
-          <p:nvPr/>
-        </p:nvSpPr>
-        <p:spPr>
-          <a:xfrm>
-            <a:off x="7007400" y="3889534"/>
-            <a:ext cx="461157" cy="411057"/>
-          </a:xfrm>
-          <a:prstGeom prst="cube">
-            <a:avLst/>
-          </a:prstGeom>
-        </p:spPr>
-        <p:style>
-          <a:lnRef idx="2">
-            <a:schemeClr val="accent1">
-              <a:shade val="50000"/>
-            </a:schemeClr>
-          </a:lnRef>
-          <a:fillRef idx="1">
-            <a:schemeClr val="accent1"/>
-          </a:fillRef>
-          <a:effectRef idx="0">
-            <a:schemeClr val="accent1"/>
-          </a:effectRef>
-          <a:fontRef idx="minor">
-            <a:schemeClr val="lt1"/>
-          </a:fontRef>
-        </p:style>
-        <p:txBody>
-          <a:bodyPr rtlCol="0" anchor="ctr"/>
-          <a:lstStyle/>
-          <a:p>
-            <a:pPr algn="ctr"/>
-            <a:endParaRPr kumimoji="1" lang="ja-JP" altLang="en-US" dirty="0"/>
-          </a:p>
-        </p:txBody>
-      </p:sp>
-      <p:sp>
-        <p:nvSpPr>
-          <p:cNvPr id="38" name="直方体 37">
-            <a:extLst>
-              <a:ext uri="{FF2B5EF4-FFF2-40B4-BE49-F238E27FC236}">
-                <a16:creationId xmlns:a16="http://schemas.microsoft.com/office/drawing/2014/main" id="{B97CB423-24CD-461A-B596-438D5FB74BEE}"/>
-              </a:ext>
-            </a:extLst>
-          </p:cNvPr>
-          <p:cNvSpPr/>
-          <p:nvPr/>
-        </p:nvSpPr>
-        <p:spPr>
-          <a:xfrm>
-            <a:off x="7677693" y="3889534"/>
-            <a:ext cx="461157" cy="411057"/>
-          </a:xfrm>
-          <a:prstGeom prst="cube">
-            <a:avLst/>
-          </a:prstGeom>
-        </p:spPr>
-        <p:style>
-          <a:lnRef idx="2">
-            <a:schemeClr val="accent1">
-              <a:shade val="50000"/>
-            </a:schemeClr>
-          </a:lnRef>
-          <a:fillRef idx="1">
-            <a:schemeClr val="accent1"/>
-          </a:fillRef>
-          <a:effectRef idx="0">
-            <a:schemeClr val="accent1"/>
-          </a:effectRef>
-          <a:fontRef idx="minor">
-            <a:schemeClr val="lt1"/>
-          </a:fontRef>
-        </p:style>
-        <p:txBody>
-          <a:bodyPr rtlCol="0" anchor="ctr"/>
-          <a:lstStyle/>
-          <a:p>
-            <a:pPr algn="ctr"/>
-            <a:endParaRPr kumimoji="1" lang="ja-JP" altLang="en-US" dirty="0"/>
-          </a:p>
-        </p:txBody>
-      </p:sp>
-      <p:sp>
-        <p:nvSpPr>
-          <p:cNvPr id="39" name="テキスト ボックス 38">
-            <a:extLst>
-              <a:ext uri="{FF2B5EF4-FFF2-40B4-BE49-F238E27FC236}">
-                <a16:creationId xmlns:a16="http://schemas.microsoft.com/office/drawing/2014/main" id="{F86CCD8B-1CE2-4033-B407-543BFD007636}"/>
-              </a:ext>
-            </a:extLst>
-          </p:cNvPr>
-          <p:cNvSpPr txBox="1"/>
-          <p:nvPr/>
-        </p:nvSpPr>
-        <p:spPr>
-          <a:xfrm>
-            <a:off x="6096000" y="5179906"/>
-            <a:ext cx="2646878" cy="461665"/>
-          </a:xfrm>
-          <a:prstGeom prst="rect">
-            <a:avLst/>
-          </a:prstGeom>
-          <a:noFill/>
-        </p:spPr>
-        <p:txBody>
-          <a:bodyPr wrap="none" rtlCol="0">
-            <a:spAutoFit/>
-          </a:bodyPr>
-          <a:lstStyle/>
-          <a:p>
-            <a:r>
-              <a:rPr lang="ja-JP" altLang="en-US" sz="2400" dirty="0"/>
-              <a:t>あとはコピーする</a:t>
-            </a:r>
-            <a:endParaRPr lang="en-US" altLang="ja-JP" sz="2400" dirty="0"/>
-          </a:p>
-        </p:txBody>
-      </p:sp>
-      <p:sp>
-        <p:nvSpPr>
-          <p:cNvPr id="40" name="矢印: 右 39">
-            <a:extLst>
-              <a:ext uri="{FF2B5EF4-FFF2-40B4-BE49-F238E27FC236}">
-                <a16:creationId xmlns:a16="http://schemas.microsoft.com/office/drawing/2014/main" id="{19AC3BDC-F1BB-461D-B266-5A272E3B4D0C}"/>
-              </a:ext>
-            </a:extLst>
-          </p:cNvPr>
-          <p:cNvSpPr/>
-          <p:nvPr/>
-        </p:nvSpPr>
-        <p:spPr>
-          <a:xfrm>
-            <a:off x="3696747" y="3105150"/>
-            <a:ext cx="2221848" cy="647700"/>
-          </a:xfrm>
-          <a:prstGeom prst="rightArrow">
-            <a:avLst/>
-          </a:prstGeom>
-          <a:solidFill>
-            <a:srgbClr val="FF0000"/>
-          </a:solidFill>
-          <a:ln w="38100">
-            <a:solidFill>
-              <a:schemeClr val="tx1"/>
-            </a:solidFill>
-          </a:ln>
-        </p:spPr>
-        <p:style>
-          <a:lnRef idx="2">
-            <a:schemeClr val="accent1">
-              <a:shade val="50000"/>
-            </a:schemeClr>
-          </a:lnRef>
-          <a:fillRef idx="1">
-            <a:schemeClr val="accent1"/>
-          </a:fillRef>
-          <a:effectRef idx="0">
-            <a:schemeClr val="accent1"/>
-          </a:effectRef>
-          <a:fontRef idx="minor">
-            <a:schemeClr val="lt1"/>
-          </a:fontRef>
-        </p:style>
-        <p:txBody>
-          <a:bodyPr rtlCol="0" anchor="ctr"/>
-          <a:lstStyle/>
-          <a:p>
-            <a:pPr algn="ctr"/>
-            <a:endParaRPr kumimoji="1" lang="ja-JP" altLang="en-US"/>
-          </a:p>
-        </p:txBody>
-      </p:sp>
+        </p:spPr>
+      </p:pic>
     </p:spTree>
     <p:extLst>
       <p:ext uri="{BB962C8B-B14F-4D97-AF65-F5344CB8AC3E}">
-        <p14:creationId xmlns:p14="http://schemas.microsoft.com/office/powerpoint/2010/main" val="1788452148"/>
+        <p14:creationId xmlns:p14="http://schemas.microsoft.com/office/powerpoint/2010/main" val="3841103028"/>
       </p:ext>
     </p:extLst>
   </p:cSld>
@@ -6216,7 +6274,7 @@
         <p:spPr>
           <a:xfrm>
             <a:off x="567542" y="1216429"/>
-            <a:ext cx="6135013" cy="461665"/>
+            <a:ext cx="8355172" cy="830997"/>
           </a:xfrm>
           <a:prstGeom prst="rect">
             <a:avLst/>
@@ -6230,12 +6288,39 @@
           <a:lstStyle/>
           <a:p>
             <a:r>
-              <a:rPr lang="en-US" altLang="ja-JP" sz="2400" dirty="0" err="1"/>
-              <a:t>Dxlib</a:t>
+              <a:rPr lang="en-US" altLang="ja-JP" sz="2400" b="1" dirty="0">
+                <a:solidFill>
+                  <a:srgbClr val="00B050"/>
+                </a:solidFill>
+              </a:rPr>
+              <a:t>Block</a:t>
             </a:r>
             <a:r>
               <a:rPr lang="ja-JP" altLang="en-US" sz="2400" dirty="0"/>
-              <a:t>にはそのコピーする関数があります。</a:t>
+              <a:t>側は画像ハンドルを受け取る形でロードしましょう。</a:t>
+            </a:r>
+            <a:endParaRPr lang="en-US" altLang="ja-JP" sz="2400" dirty="0"/>
+          </a:p>
+          <a:p>
+            <a:r>
+              <a:rPr lang="en-US" altLang="ja-JP" sz="2400" b="1" dirty="0">
+                <a:solidFill>
+                  <a:srgbClr val="0070C0"/>
+                </a:solidFill>
+              </a:rPr>
+              <a:t>Load</a:t>
+            </a:r>
+            <a:r>
+              <a:rPr lang="ja-JP" altLang="en-US" sz="2400" b="1" dirty="0">
+                <a:solidFill>
+                  <a:srgbClr val="0070C0"/>
+                </a:solidFill>
+              </a:rPr>
+              <a:t>関数</a:t>
+            </a:r>
+            <a:r>
+              <a:rPr lang="ja-JP" altLang="en-US" sz="2400" dirty="0"/>
+              <a:t>に引数を追加して処理を書きましょう。</a:t>
             </a:r>
             <a:endParaRPr lang="en-US" altLang="ja-JP" sz="2400" dirty="0"/>
           </a:p>
@@ -6246,7 +6331,7 @@
           <p:cNvPr id="3" name="図 2">
             <a:extLst>
               <a:ext uri="{FF2B5EF4-FFF2-40B4-BE49-F238E27FC236}">
-                <a16:creationId xmlns:a16="http://schemas.microsoft.com/office/drawing/2014/main" id="{7D4D1BF9-AF11-4F06-A772-39A6A114071D}"/>
+                <a16:creationId xmlns:a16="http://schemas.microsoft.com/office/drawing/2014/main" id="{0CBD363C-2D7A-4273-A1DB-C8B2E5134547}"/>
               </a:ext>
             </a:extLst>
           </p:cNvPr>
@@ -6269,8 +6354,8 @@
         </p:blipFill>
         <p:spPr>
           <a:xfrm>
-            <a:off x="567541" y="1817794"/>
-            <a:ext cx="10392165" cy="2944706"/>
+            <a:off x="567542" y="2187126"/>
+            <a:ext cx="10041952" cy="2195406"/>
           </a:xfrm>
           <a:prstGeom prst="rect">
             <a:avLst/>
@@ -6280,7 +6365,7 @@
     </p:spTree>
     <p:extLst>
       <p:ext uri="{BB962C8B-B14F-4D97-AF65-F5344CB8AC3E}">
-        <p14:creationId xmlns:p14="http://schemas.microsoft.com/office/powerpoint/2010/main" val="2632728014"/>
+        <p14:creationId xmlns:p14="http://schemas.microsoft.com/office/powerpoint/2010/main" val="2615887464"/>
       </p:ext>
     </p:extLst>
   </p:cSld>
@@ -6400,10 +6485,10 @@
       </p:sp>
       <p:pic>
         <p:nvPicPr>
-          <p:cNvPr id="5" name="図 4">
-            <a:extLst>
-              <a:ext uri="{FF2B5EF4-FFF2-40B4-BE49-F238E27FC236}">
-                <a16:creationId xmlns:a16="http://schemas.microsoft.com/office/drawing/2014/main" id="{B24B0C31-A85D-48A4-8AEE-C28C30CC38DE}"/>
+          <p:cNvPr id="3" name="図 2">
+            <a:extLst>
+              <a:ext uri="{FF2B5EF4-FFF2-40B4-BE49-F238E27FC236}">
+                <a16:creationId xmlns:a16="http://schemas.microsoft.com/office/drawing/2014/main" id="{93623493-56C1-45C2-A4DB-F7EF4168D7B9}"/>
               </a:ext>
             </a:extLst>
           </p:cNvPr>
@@ -6413,21 +6498,15 @@
           <p:nvPr/>
         </p:nvPicPr>
         <p:blipFill>
-          <a:blip r:embed="rId2">
-            <a:extLst>
-              <a:ext uri="{28A0092B-C50C-407E-A947-70E740481C1C}">
-                <a14:useLocalDpi xmlns:a14="http://schemas.microsoft.com/office/drawing/2010/main" val="0"/>
-              </a:ext>
-            </a:extLst>
-          </a:blip>
+          <a:blip r:embed="rId2"/>
           <a:stretch>
             <a:fillRect/>
           </a:stretch>
         </p:blipFill>
         <p:spPr>
           <a:xfrm>
-            <a:off x="567543" y="2187126"/>
-            <a:ext cx="5820558" cy="4310765"/>
+            <a:off x="567542" y="2187126"/>
+            <a:ext cx="7774735" cy="4178920"/>
           </a:xfrm>
           <a:prstGeom prst="rect">
             <a:avLst/>
@@ -6515,7 +6594,7 @@
         <p:spPr>
           <a:xfrm>
             <a:off x="567542" y="1216429"/>
-            <a:ext cx="9725739" cy="1200329"/>
+            <a:ext cx="6343403" cy="461665"/>
           </a:xfrm>
           <a:prstGeom prst="rect">
             <a:avLst/>
@@ -6527,28 +6606,6 @@
             <a:spAutoFit/>
           </a:bodyPr>
           <a:lstStyle/>
-          <a:p>
-            <a:r>
-              <a:rPr lang="ja-JP" altLang="en-US" sz="2400" dirty="0"/>
-              <a:t>ロード処理を修正します。</a:t>
-            </a:r>
-            <a:endParaRPr lang="en-US" altLang="ja-JP" sz="2400" dirty="0"/>
-          </a:p>
-          <a:p>
-            <a:r>
-              <a:rPr lang="ja-JP" altLang="en-US" sz="2400" b="1" dirty="0">
-                <a:solidFill>
-                  <a:srgbClr val="FF0000"/>
-                </a:solidFill>
-              </a:rPr>
-              <a:t>ロードは１度だけ</a:t>
-            </a:r>
-            <a:r>
-              <a:rPr lang="ja-JP" altLang="en-US" sz="2400" dirty="0"/>
-              <a:t>行うので、今回はマネージャークラスで行います。</a:t>
-            </a:r>
-            <a:endParaRPr lang="en-US" altLang="ja-JP" sz="2400" dirty="0"/>
-          </a:p>
           <a:p>
             <a:r>
               <a:rPr lang="en-US" altLang="ja-JP" sz="2400" b="1" dirty="0" err="1">
@@ -6560,7 +6617,7 @@
             </a:r>
             <a:r>
               <a:rPr lang="ja-JP" altLang="en-US" sz="2400" dirty="0"/>
-              <a:t>にメンバ変数を追加しましょう。</a:t>
+              <a:t>のロード関数を修正します。</a:t>
             </a:r>
             <a:endParaRPr lang="en-US" altLang="ja-JP" sz="2400" dirty="0"/>
           </a:p>
@@ -6568,10 +6625,10 @@
       </p:sp>
       <p:pic>
         <p:nvPicPr>
-          <p:cNvPr id="5" name="図 4">
-            <a:extLst>
-              <a:ext uri="{FF2B5EF4-FFF2-40B4-BE49-F238E27FC236}">
-                <a16:creationId xmlns:a16="http://schemas.microsoft.com/office/drawing/2014/main" id="{7CF9FAB3-4E0A-4BFB-B86A-52ED6507CE7A}"/>
+          <p:cNvPr id="3" name="図 2">
+            <a:extLst>
+              <a:ext uri="{FF2B5EF4-FFF2-40B4-BE49-F238E27FC236}">
+                <a16:creationId xmlns:a16="http://schemas.microsoft.com/office/drawing/2014/main" id="{891873A2-CEBE-45EE-BBB3-86F56705EAFF}"/>
               </a:ext>
             </a:extLst>
           </p:cNvPr>
@@ -6581,21 +6638,15 @@
           <p:nvPr/>
         </p:nvPicPr>
         <p:blipFill>
-          <a:blip r:embed="rId2">
-            <a:extLst>
-              <a:ext uri="{28A0092B-C50C-407E-A947-70E740481C1C}">
-                <a14:useLocalDpi xmlns:a14="http://schemas.microsoft.com/office/drawing/2010/main" val="0"/>
-              </a:ext>
-            </a:extLst>
-          </a:blip>
+          <a:blip r:embed="rId2"/>
           <a:stretch>
             <a:fillRect/>
           </a:stretch>
         </p:blipFill>
         <p:spPr>
           <a:xfrm>
-            <a:off x="567542" y="2556458"/>
-            <a:ext cx="9800012" cy="2523542"/>
+            <a:off x="567542" y="1817794"/>
+            <a:ext cx="8870877" cy="4394747"/>
           </a:xfrm>
           <a:prstGeom prst="rect">
             <a:avLst/>
@@ -6604,10 +6655,10 @@
       </p:pic>
       <p:sp>
         <p:nvSpPr>
-          <p:cNvPr id="7" name="正方形/長方形 6">
-            <a:extLst>
-              <a:ext uri="{FF2B5EF4-FFF2-40B4-BE49-F238E27FC236}">
-                <a16:creationId xmlns:a16="http://schemas.microsoft.com/office/drawing/2014/main" id="{86596066-9FE9-4973-8726-2ED0299E1E79}"/>
+          <p:cNvPr id="8" name="正方形/長方形 7">
+            <a:extLst>
+              <a:ext uri="{FF2B5EF4-FFF2-40B4-BE49-F238E27FC236}">
+                <a16:creationId xmlns:a16="http://schemas.microsoft.com/office/drawing/2014/main" id="{A3295D6B-1DBE-4CBE-BAA8-883BB251B243}"/>
               </a:ext>
             </a:extLst>
           </p:cNvPr>
@@ -6616,8 +6667,8 @@
         </p:nvSpPr>
         <p:spPr>
           <a:xfrm>
-            <a:off x="2463800" y="3429000"/>
-            <a:ext cx="7226300" cy="1295400"/>
+            <a:off x="2358464" y="3567953"/>
+            <a:ext cx="6453842" cy="2259106"/>
           </a:xfrm>
           <a:prstGeom prst="rect">
             <a:avLst/>
@@ -6654,62 +6705,10 @@
           </a:p>
         </p:txBody>
       </p:sp>
-      <p:sp>
-        <p:nvSpPr>
-          <p:cNvPr id="8" name="テキスト ボックス 7">
-            <a:extLst>
-              <a:ext uri="{FF2B5EF4-FFF2-40B4-BE49-F238E27FC236}">
-                <a16:creationId xmlns:a16="http://schemas.microsoft.com/office/drawing/2014/main" id="{50A5F0AF-44F9-4538-8B2B-D45ECB1C2E33}"/>
-              </a:ext>
-            </a:extLst>
-          </p:cNvPr>
-          <p:cNvSpPr txBox="1"/>
-          <p:nvPr/>
-        </p:nvSpPr>
-        <p:spPr>
-          <a:xfrm>
-            <a:off x="567541" y="5219700"/>
-            <a:ext cx="7398179" cy="461665"/>
-          </a:xfrm>
-          <a:prstGeom prst="rect">
-            <a:avLst/>
-          </a:prstGeom>
-          <a:noFill/>
-        </p:spPr>
-        <p:txBody>
-          <a:bodyPr wrap="none" rtlCol="0">
-            <a:spAutoFit/>
-          </a:bodyPr>
-          <a:lstStyle/>
-          <a:p>
-            <a:r>
-              <a:rPr lang="en-US" altLang="ja-JP" sz="2400" b="1" dirty="0" err="1">
-                <a:solidFill>
-                  <a:srgbClr val="0070C0"/>
-                </a:solidFill>
-              </a:rPr>
-              <a:t>m_Handle</a:t>
-            </a:r>
-            <a:r>
-              <a:rPr lang="ja-JP" altLang="en-US" sz="2400" dirty="0"/>
-              <a:t>はコンストラクタで</a:t>
-            </a:r>
-            <a:r>
-              <a:rPr lang="en-US" altLang="ja-JP" sz="2400" dirty="0"/>
-              <a:t>0</a:t>
-            </a:r>
-            <a:r>
-              <a:rPr lang="ja-JP" altLang="en-US" sz="2400" dirty="0"/>
-              <a:t>初期化しましょう。</a:t>
-            </a:r>
-            <a:endParaRPr lang="en-US" altLang="ja-JP" sz="2400" dirty="0"/>
-          </a:p>
-        </p:txBody>
-      </p:sp>
     </p:spTree>
     <p:extLst>
       <p:ext uri="{BB962C8B-B14F-4D97-AF65-F5344CB8AC3E}">
-        <p14:creationId xmlns:p14="http://schemas.microsoft.com/office/powerpoint/2010/main" val="731176080"/>
+        <p14:creationId xmlns:p14="http://schemas.microsoft.com/office/powerpoint/2010/main" val="2729103074"/>
       </p:ext>
     </p:extLst>
   </p:cSld>
@@ -6787,7 +6786,7 @@
         <p:spPr>
           <a:xfrm>
             <a:off x="567542" y="1216429"/>
-            <a:ext cx="7882286" cy="461665"/>
+            <a:ext cx="2646878" cy="461665"/>
           </a:xfrm>
           <a:prstGeom prst="rect">
             <a:avLst/>
@@ -6801,16 +6800,8 @@
           <a:lstStyle/>
           <a:p>
             <a:r>
-              <a:rPr lang="en-US" altLang="ja-JP" sz="2400" b="1" dirty="0" err="1">
-                <a:solidFill>
-                  <a:srgbClr val="00B050"/>
-                </a:solidFill>
-              </a:rPr>
-              <a:t>BlockManager</a:t>
-            </a:r>
-            <a:r>
               <a:rPr lang="ja-JP" altLang="en-US" sz="2400" dirty="0"/>
-              <a:t>のロード関数でモデルをロードします。</a:t>
+              <a:t>後始末も忘れずに</a:t>
             </a:r>
             <a:endParaRPr lang="en-US" altLang="ja-JP" sz="2400" dirty="0"/>
           </a:p>
@@ -6821,7 +6812,7 @@
           <p:cNvPr id="7" name="図 6">
             <a:extLst>
               <a:ext uri="{FF2B5EF4-FFF2-40B4-BE49-F238E27FC236}">
-                <a16:creationId xmlns:a16="http://schemas.microsoft.com/office/drawing/2014/main" id="{81DE565B-D5AE-49E3-98E0-00EDABADE20C}"/>
+                <a16:creationId xmlns:a16="http://schemas.microsoft.com/office/drawing/2014/main" id="{D142F0F7-1FBC-4542-A023-95CA74830802}"/>
               </a:ext>
             </a:extLst>
           </p:cNvPr>
@@ -6839,17 +6830,73 @@
         <p:spPr>
           <a:xfrm>
             <a:off x="567542" y="1817794"/>
-            <a:ext cx="9279162" cy="1913378"/>
+            <a:ext cx="6076158" cy="1611206"/>
           </a:xfrm>
           <a:prstGeom prst="rect">
             <a:avLst/>
           </a:prstGeom>
         </p:spPr>
       </p:pic>
+      <p:sp>
+        <p:nvSpPr>
+          <p:cNvPr id="8" name="正方形/長方形 7">
+            <a:extLst>
+              <a:ext uri="{FF2B5EF4-FFF2-40B4-BE49-F238E27FC236}">
+                <a16:creationId xmlns:a16="http://schemas.microsoft.com/office/drawing/2014/main" id="{105569E3-66C1-4A64-8473-846F6E4AB5D3}"/>
+              </a:ext>
+            </a:extLst>
+          </p:cNvPr>
+          <p:cNvSpPr/>
+          <p:nvPr/>
+        </p:nvSpPr>
+        <p:spPr>
+          <a:xfrm>
+            <a:off x="2315135" y="2191597"/>
+            <a:ext cx="4299255" cy="863600"/>
+          </a:xfrm>
+          <a:prstGeom prst="rect">
+            <a:avLst/>
+          </a:prstGeom>
+          <a:noFill/>
+          <a:ln w="38100">
+            <a:solidFill>
+              <a:srgbClr val="FF0000"/>
+            </a:solidFill>
+          </a:ln>
+        </p:spPr>
+        <p:style>
+          <a:lnRef idx="2">
+            <a:schemeClr val="accent1">
+              <a:shade val="50000"/>
+            </a:schemeClr>
+          </a:lnRef>
+          <a:fillRef idx="1">
+            <a:schemeClr val="accent1"/>
+          </a:fillRef>
+          <a:effectRef idx="0">
+            <a:schemeClr val="accent1"/>
+          </a:effectRef>
+          <a:fontRef idx="minor">
+            <a:schemeClr val="lt1"/>
+          </a:fontRef>
+        </p:style>
+        <p:txBody>
+          <a:bodyPr rtlCol="0" anchor="ctr"/>
+          <a:lstStyle/>
+          <a:p>
+            <a:pPr algn="ctr"/>
+            <a:endParaRPr kumimoji="1" lang="ja-JP" altLang="en-US">
+              <a:solidFill>
+                <a:srgbClr val="FF0000"/>
+              </a:solidFill>
+            </a:endParaRPr>
+          </a:p>
+        </p:txBody>
+      </p:sp>
     </p:spTree>
     <p:extLst>
       <p:ext uri="{BB962C8B-B14F-4D97-AF65-F5344CB8AC3E}">
-        <p14:creationId xmlns:p14="http://schemas.microsoft.com/office/powerpoint/2010/main" val="3841103028"/>
+        <p14:creationId xmlns:p14="http://schemas.microsoft.com/office/powerpoint/2010/main" val="2094439452"/>
       </p:ext>
     </p:extLst>
   </p:cSld>
@@ -6891,567 +6938,6 @@
         <p:spPr>
           <a:xfrm>
             <a:off x="567542" y="491954"/>
-            <a:ext cx="6046848" cy="584775"/>
-          </a:xfrm>
-          <a:prstGeom prst="rect">
-            <a:avLst/>
-          </a:prstGeom>
-          <a:noFill/>
-        </p:spPr>
-        <p:txBody>
-          <a:bodyPr wrap="none" rtlCol="0">
-            <a:spAutoFit/>
-          </a:bodyPr>
-          <a:lstStyle/>
-          <a:p>
-            <a:r>
-              <a:rPr kumimoji="1" lang="ja-JP" altLang="en-US" sz="3200" b="1" u="sng" dirty="0"/>
-              <a:t>オブジェクトの複数配置 問題点</a:t>
-            </a:r>
-            <a:endParaRPr kumimoji="1" lang="en-US" altLang="ja-JP" sz="3200" b="1" u="sng" dirty="0"/>
-          </a:p>
-        </p:txBody>
-      </p:sp>
-      <p:sp>
-        <p:nvSpPr>
-          <p:cNvPr id="6" name="テキスト ボックス 5">
-            <a:extLst>
-              <a:ext uri="{FF2B5EF4-FFF2-40B4-BE49-F238E27FC236}">
-                <a16:creationId xmlns:a16="http://schemas.microsoft.com/office/drawing/2014/main" id="{55830AD6-028B-4C4E-80BF-B70DFC1C3A46}"/>
-              </a:ext>
-            </a:extLst>
-          </p:cNvPr>
-          <p:cNvSpPr txBox="1"/>
-          <p:nvPr/>
-        </p:nvSpPr>
-        <p:spPr>
-          <a:xfrm>
-            <a:off x="567542" y="1216429"/>
-            <a:ext cx="8355172" cy="830997"/>
-          </a:xfrm>
-          <a:prstGeom prst="rect">
-            <a:avLst/>
-          </a:prstGeom>
-          <a:noFill/>
-        </p:spPr>
-        <p:txBody>
-          <a:bodyPr wrap="none" rtlCol="0">
-            <a:spAutoFit/>
-          </a:bodyPr>
-          <a:lstStyle/>
-          <a:p>
-            <a:r>
-              <a:rPr lang="en-US" altLang="ja-JP" sz="2400" b="1" dirty="0">
-                <a:solidFill>
-                  <a:srgbClr val="00B050"/>
-                </a:solidFill>
-              </a:rPr>
-              <a:t>Block</a:t>
-            </a:r>
-            <a:r>
-              <a:rPr lang="ja-JP" altLang="en-US" sz="2400" dirty="0"/>
-              <a:t>側は画像ハンドルを受け取る形でロードしましょう。</a:t>
-            </a:r>
-            <a:endParaRPr lang="en-US" altLang="ja-JP" sz="2400" dirty="0"/>
-          </a:p>
-          <a:p>
-            <a:r>
-              <a:rPr lang="en-US" altLang="ja-JP" sz="2400" b="1" dirty="0">
-                <a:solidFill>
-                  <a:srgbClr val="0070C0"/>
-                </a:solidFill>
-              </a:rPr>
-              <a:t>Load</a:t>
-            </a:r>
-            <a:r>
-              <a:rPr lang="ja-JP" altLang="en-US" sz="2400" b="1" dirty="0">
-                <a:solidFill>
-                  <a:srgbClr val="0070C0"/>
-                </a:solidFill>
-              </a:rPr>
-              <a:t>関数</a:t>
-            </a:r>
-            <a:r>
-              <a:rPr lang="ja-JP" altLang="en-US" sz="2400" dirty="0"/>
-              <a:t>に引数を追加して処理を書きましょう。</a:t>
-            </a:r>
-            <a:endParaRPr lang="en-US" altLang="ja-JP" sz="2400" dirty="0"/>
-          </a:p>
-        </p:txBody>
-      </p:sp>
-      <p:pic>
-        <p:nvPicPr>
-          <p:cNvPr id="3" name="図 2">
-            <a:extLst>
-              <a:ext uri="{FF2B5EF4-FFF2-40B4-BE49-F238E27FC236}">
-                <a16:creationId xmlns:a16="http://schemas.microsoft.com/office/drawing/2014/main" id="{0CBD363C-2D7A-4273-A1DB-C8B2E5134547}"/>
-              </a:ext>
-            </a:extLst>
-          </p:cNvPr>
-          <p:cNvPicPr>
-            <a:picLocks noChangeAspect="1"/>
-          </p:cNvPicPr>
-          <p:nvPr/>
-        </p:nvPicPr>
-        <p:blipFill>
-          <a:blip r:embed="rId2">
-            <a:extLst>
-              <a:ext uri="{28A0092B-C50C-407E-A947-70E740481C1C}">
-                <a14:useLocalDpi xmlns:a14="http://schemas.microsoft.com/office/drawing/2010/main" val="0"/>
-              </a:ext>
-            </a:extLst>
-          </a:blip>
-          <a:stretch>
-            <a:fillRect/>
-          </a:stretch>
-        </p:blipFill>
-        <p:spPr>
-          <a:xfrm>
-            <a:off x="567542" y="2187126"/>
-            <a:ext cx="10041952" cy="2195406"/>
-          </a:xfrm>
-          <a:prstGeom prst="rect">
-            <a:avLst/>
-          </a:prstGeom>
-        </p:spPr>
-      </p:pic>
-    </p:spTree>
-    <p:extLst>
-      <p:ext uri="{BB962C8B-B14F-4D97-AF65-F5344CB8AC3E}">
-        <p14:creationId xmlns:p14="http://schemas.microsoft.com/office/powerpoint/2010/main" val="2615887464"/>
-      </p:ext>
-    </p:extLst>
-  </p:cSld>
-  <p:clrMapOvr>
-    <a:masterClrMapping/>
-  </p:clrMapOvr>
-</p:sld>
-</file>
-
-<file path=ppt/slides/slide23.xml><?xml version="1.0" encoding="utf-8"?>
-<p:sld xmlns:a="http://schemas.openxmlformats.org/drawingml/2006/main" xmlns:r="http://schemas.openxmlformats.org/officeDocument/2006/relationships" xmlns:p="http://schemas.openxmlformats.org/presentationml/2006/main">
-  <p:cSld>
-    <p:spTree>
-      <p:nvGrpSpPr>
-        <p:cNvPr id="1" name=""/>
-        <p:cNvGrpSpPr/>
-        <p:nvPr/>
-      </p:nvGrpSpPr>
-      <p:grpSpPr>
-        <a:xfrm>
-          <a:off x="0" y="0"/>
-          <a:ext cx="0" cy="0"/>
-          <a:chOff x="0" y="0"/>
-          <a:chExt cx="0" cy="0"/>
-        </a:xfrm>
-      </p:grpSpPr>
-      <p:sp>
-        <p:nvSpPr>
-          <p:cNvPr id="4" name="テキスト ボックス 3">
-            <a:extLst>
-              <a:ext uri="{FF2B5EF4-FFF2-40B4-BE49-F238E27FC236}">
-                <a16:creationId xmlns:a16="http://schemas.microsoft.com/office/drawing/2014/main" id="{5A13BF46-B8C5-48AA-8308-C9ECFF431A18}"/>
-              </a:ext>
-            </a:extLst>
-          </p:cNvPr>
-          <p:cNvSpPr txBox="1"/>
-          <p:nvPr/>
-        </p:nvSpPr>
-        <p:spPr>
-          <a:xfrm>
-            <a:off x="567542" y="491954"/>
-            <a:ext cx="6046848" cy="584775"/>
-          </a:xfrm>
-          <a:prstGeom prst="rect">
-            <a:avLst/>
-          </a:prstGeom>
-          <a:noFill/>
-        </p:spPr>
-        <p:txBody>
-          <a:bodyPr wrap="none" rtlCol="0">
-            <a:spAutoFit/>
-          </a:bodyPr>
-          <a:lstStyle/>
-          <a:p>
-            <a:r>
-              <a:rPr kumimoji="1" lang="ja-JP" altLang="en-US" sz="3200" b="1" u="sng" dirty="0"/>
-              <a:t>オブジェクトの複数配置 問題点</a:t>
-            </a:r>
-            <a:endParaRPr kumimoji="1" lang="en-US" altLang="ja-JP" sz="3200" b="1" u="sng" dirty="0"/>
-          </a:p>
-        </p:txBody>
-      </p:sp>
-      <p:sp>
-        <p:nvSpPr>
-          <p:cNvPr id="6" name="テキスト ボックス 5">
-            <a:extLst>
-              <a:ext uri="{FF2B5EF4-FFF2-40B4-BE49-F238E27FC236}">
-                <a16:creationId xmlns:a16="http://schemas.microsoft.com/office/drawing/2014/main" id="{55830AD6-028B-4C4E-80BF-B70DFC1C3A46}"/>
-              </a:ext>
-            </a:extLst>
-          </p:cNvPr>
-          <p:cNvSpPr txBox="1"/>
-          <p:nvPr/>
-        </p:nvSpPr>
-        <p:spPr>
-          <a:xfrm>
-            <a:off x="567542" y="1216429"/>
-            <a:ext cx="6343403" cy="461665"/>
-          </a:xfrm>
-          <a:prstGeom prst="rect">
-            <a:avLst/>
-          </a:prstGeom>
-          <a:noFill/>
-        </p:spPr>
-        <p:txBody>
-          <a:bodyPr wrap="none" rtlCol="0">
-            <a:spAutoFit/>
-          </a:bodyPr>
-          <a:lstStyle/>
-          <a:p>
-            <a:r>
-              <a:rPr lang="en-US" altLang="ja-JP" sz="2400" b="1" dirty="0" err="1">
-                <a:solidFill>
-                  <a:srgbClr val="00B050"/>
-                </a:solidFill>
-              </a:rPr>
-              <a:t>BlockManager</a:t>
-            </a:r>
-            <a:r>
-              <a:rPr lang="ja-JP" altLang="en-US" sz="2400" dirty="0"/>
-              <a:t>のロード関数を修正します。</a:t>
-            </a:r>
-            <a:endParaRPr lang="en-US" altLang="ja-JP" sz="2400" dirty="0"/>
-          </a:p>
-        </p:txBody>
-      </p:sp>
-      <p:pic>
-        <p:nvPicPr>
-          <p:cNvPr id="5" name="図 4">
-            <a:extLst>
-              <a:ext uri="{FF2B5EF4-FFF2-40B4-BE49-F238E27FC236}">
-                <a16:creationId xmlns:a16="http://schemas.microsoft.com/office/drawing/2014/main" id="{BF40CEE0-C1C3-41EC-887A-0D75C37ED348}"/>
-              </a:ext>
-            </a:extLst>
-          </p:cNvPr>
-          <p:cNvPicPr>
-            <a:picLocks noChangeAspect="1"/>
-          </p:cNvPicPr>
-          <p:nvPr/>
-        </p:nvPicPr>
-        <p:blipFill>
-          <a:blip r:embed="rId2">
-            <a:extLst>
-              <a:ext uri="{28A0092B-C50C-407E-A947-70E740481C1C}">
-                <a14:useLocalDpi xmlns:a14="http://schemas.microsoft.com/office/drawing/2010/main" val="0"/>
-              </a:ext>
-            </a:extLst>
-          </a:blip>
-          <a:stretch>
-            <a:fillRect/>
-          </a:stretch>
-        </p:blipFill>
-        <p:spPr>
-          <a:xfrm>
-            <a:off x="567541" y="1817794"/>
-            <a:ext cx="8258137" cy="3706706"/>
-          </a:xfrm>
-          <a:prstGeom prst="rect">
-            <a:avLst/>
-          </a:prstGeom>
-        </p:spPr>
-      </p:pic>
-      <p:sp>
-        <p:nvSpPr>
-          <p:cNvPr id="7" name="正方形/長方形 6">
-            <a:extLst>
-              <a:ext uri="{FF2B5EF4-FFF2-40B4-BE49-F238E27FC236}">
-                <a16:creationId xmlns:a16="http://schemas.microsoft.com/office/drawing/2014/main" id="{A710BEA6-1E28-4AA1-9EBF-1FB2781E646F}"/>
-              </a:ext>
-            </a:extLst>
-          </p:cNvPr>
-          <p:cNvSpPr/>
-          <p:nvPr/>
-        </p:nvSpPr>
-        <p:spPr>
-          <a:xfrm>
-            <a:off x="2197100" y="3429000"/>
-            <a:ext cx="5575300" cy="1892300"/>
-          </a:xfrm>
-          <a:prstGeom prst="rect">
-            <a:avLst/>
-          </a:prstGeom>
-          <a:noFill/>
-          <a:ln w="38100">
-            <a:solidFill>
-              <a:srgbClr val="FF0000"/>
-            </a:solidFill>
-          </a:ln>
-        </p:spPr>
-        <p:style>
-          <a:lnRef idx="2">
-            <a:schemeClr val="accent1">
-              <a:shade val="50000"/>
-            </a:schemeClr>
-          </a:lnRef>
-          <a:fillRef idx="1">
-            <a:schemeClr val="accent1"/>
-          </a:fillRef>
-          <a:effectRef idx="0">
-            <a:schemeClr val="accent1"/>
-          </a:effectRef>
-          <a:fontRef idx="minor">
-            <a:schemeClr val="lt1"/>
-          </a:fontRef>
-        </p:style>
-        <p:txBody>
-          <a:bodyPr rtlCol="0" anchor="ctr"/>
-          <a:lstStyle/>
-          <a:p>
-            <a:pPr algn="ctr"/>
-            <a:endParaRPr kumimoji="1" lang="ja-JP" altLang="en-US"/>
-          </a:p>
-        </p:txBody>
-      </p:sp>
-    </p:spTree>
-    <p:extLst>
-      <p:ext uri="{BB962C8B-B14F-4D97-AF65-F5344CB8AC3E}">
-        <p14:creationId xmlns:p14="http://schemas.microsoft.com/office/powerpoint/2010/main" val="2729103074"/>
-      </p:ext>
-    </p:extLst>
-  </p:cSld>
-  <p:clrMapOvr>
-    <a:masterClrMapping/>
-  </p:clrMapOvr>
-</p:sld>
-</file>
-
-<file path=ppt/slides/slide24.xml><?xml version="1.0" encoding="utf-8"?>
-<p:sld xmlns:a="http://schemas.openxmlformats.org/drawingml/2006/main" xmlns:r="http://schemas.openxmlformats.org/officeDocument/2006/relationships" xmlns:p="http://schemas.openxmlformats.org/presentationml/2006/main">
-  <p:cSld>
-    <p:spTree>
-      <p:nvGrpSpPr>
-        <p:cNvPr id="1" name=""/>
-        <p:cNvGrpSpPr/>
-        <p:nvPr/>
-      </p:nvGrpSpPr>
-      <p:grpSpPr>
-        <a:xfrm>
-          <a:off x="0" y="0"/>
-          <a:ext cx="0" cy="0"/>
-          <a:chOff x="0" y="0"/>
-          <a:chExt cx="0" cy="0"/>
-        </a:xfrm>
-      </p:grpSpPr>
-      <p:sp>
-        <p:nvSpPr>
-          <p:cNvPr id="4" name="テキスト ボックス 3">
-            <a:extLst>
-              <a:ext uri="{FF2B5EF4-FFF2-40B4-BE49-F238E27FC236}">
-                <a16:creationId xmlns:a16="http://schemas.microsoft.com/office/drawing/2014/main" id="{5A13BF46-B8C5-48AA-8308-C9ECFF431A18}"/>
-              </a:ext>
-            </a:extLst>
-          </p:cNvPr>
-          <p:cNvSpPr txBox="1"/>
-          <p:nvPr/>
-        </p:nvSpPr>
-        <p:spPr>
-          <a:xfrm>
-            <a:off x="567542" y="491954"/>
-            <a:ext cx="6046848" cy="584775"/>
-          </a:xfrm>
-          <a:prstGeom prst="rect">
-            <a:avLst/>
-          </a:prstGeom>
-          <a:noFill/>
-        </p:spPr>
-        <p:txBody>
-          <a:bodyPr wrap="none" rtlCol="0">
-            <a:spAutoFit/>
-          </a:bodyPr>
-          <a:lstStyle/>
-          <a:p>
-            <a:r>
-              <a:rPr kumimoji="1" lang="ja-JP" altLang="en-US" sz="3200" b="1" u="sng" dirty="0"/>
-              <a:t>オブジェクトの複数配置 問題点</a:t>
-            </a:r>
-            <a:endParaRPr kumimoji="1" lang="en-US" altLang="ja-JP" sz="3200" b="1" u="sng" dirty="0"/>
-          </a:p>
-        </p:txBody>
-      </p:sp>
-      <p:sp>
-        <p:nvSpPr>
-          <p:cNvPr id="6" name="テキスト ボックス 5">
-            <a:extLst>
-              <a:ext uri="{FF2B5EF4-FFF2-40B4-BE49-F238E27FC236}">
-                <a16:creationId xmlns:a16="http://schemas.microsoft.com/office/drawing/2014/main" id="{55830AD6-028B-4C4E-80BF-B70DFC1C3A46}"/>
-              </a:ext>
-            </a:extLst>
-          </p:cNvPr>
-          <p:cNvSpPr txBox="1"/>
-          <p:nvPr/>
-        </p:nvSpPr>
-        <p:spPr>
-          <a:xfrm>
-            <a:off x="567542" y="1216429"/>
-            <a:ext cx="2646878" cy="461665"/>
-          </a:xfrm>
-          <a:prstGeom prst="rect">
-            <a:avLst/>
-          </a:prstGeom>
-          <a:noFill/>
-        </p:spPr>
-        <p:txBody>
-          <a:bodyPr wrap="none" rtlCol="0">
-            <a:spAutoFit/>
-          </a:bodyPr>
-          <a:lstStyle/>
-          <a:p>
-            <a:r>
-              <a:rPr lang="ja-JP" altLang="en-US" sz="2400" dirty="0"/>
-              <a:t>後始末も忘れずに</a:t>
-            </a:r>
-            <a:endParaRPr lang="en-US" altLang="ja-JP" sz="2400" dirty="0"/>
-          </a:p>
-        </p:txBody>
-      </p:sp>
-      <p:pic>
-        <p:nvPicPr>
-          <p:cNvPr id="3" name="図 2">
-            <a:extLst>
-              <a:ext uri="{FF2B5EF4-FFF2-40B4-BE49-F238E27FC236}">
-                <a16:creationId xmlns:a16="http://schemas.microsoft.com/office/drawing/2014/main" id="{C7DBBBD1-B775-488F-8645-2C080A3F864A}"/>
-              </a:ext>
-            </a:extLst>
-          </p:cNvPr>
-          <p:cNvPicPr>
-            <a:picLocks noChangeAspect="1"/>
-          </p:cNvPicPr>
-          <p:nvPr/>
-        </p:nvPicPr>
-        <p:blipFill>
-          <a:blip r:embed="rId2">
-            <a:extLst>
-              <a:ext uri="{28A0092B-C50C-407E-A947-70E740481C1C}">
-                <a14:useLocalDpi xmlns:a14="http://schemas.microsoft.com/office/drawing/2010/main" val="0"/>
-              </a:ext>
-            </a:extLst>
-          </a:blip>
-          <a:stretch>
-            <a:fillRect/>
-          </a:stretch>
-        </p:blipFill>
-        <p:spPr>
-          <a:xfrm>
-            <a:off x="567542" y="1817794"/>
-            <a:ext cx="6905276" cy="3122506"/>
-          </a:xfrm>
-          <a:prstGeom prst="rect">
-            <a:avLst/>
-          </a:prstGeom>
-        </p:spPr>
-      </p:pic>
-      <p:sp>
-        <p:nvSpPr>
-          <p:cNvPr id="2" name="正方形/長方形 1">
-            <a:extLst>
-              <a:ext uri="{FF2B5EF4-FFF2-40B4-BE49-F238E27FC236}">
-                <a16:creationId xmlns:a16="http://schemas.microsoft.com/office/drawing/2014/main" id="{CD45E2CD-E90C-429A-9F03-189E7F56F0F6}"/>
-              </a:ext>
-            </a:extLst>
-          </p:cNvPr>
-          <p:cNvSpPr/>
-          <p:nvPr/>
-        </p:nvSpPr>
-        <p:spPr>
-          <a:xfrm>
-            <a:off x="2298700" y="2247900"/>
-            <a:ext cx="5295900" cy="863600"/>
-          </a:xfrm>
-          <a:prstGeom prst="rect">
-            <a:avLst/>
-          </a:prstGeom>
-          <a:noFill/>
-          <a:ln w="38100">
-            <a:solidFill>
-              <a:srgbClr val="FF0000"/>
-            </a:solidFill>
-          </a:ln>
-        </p:spPr>
-        <p:style>
-          <a:lnRef idx="2">
-            <a:schemeClr val="accent1">
-              <a:shade val="50000"/>
-            </a:schemeClr>
-          </a:lnRef>
-          <a:fillRef idx="1">
-            <a:schemeClr val="accent1"/>
-          </a:fillRef>
-          <a:effectRef idx="0">
-            <a:schemeClr val="accent1"/>
-          </a:effectRef>
-          <a:fontRef idx="minor">
-            <a:schemeClr val="lt1"/>
-          </a:fontRef>
-        </p:style>
-        <p:txBody>
-          <a:bodyPr rtlCol="0" anchor="ctr"/>
-          <a:lstStyle/>
-          <a:p>
-            <a:pPr algn="ctr"/>
-            <a:endParaRPr kumimoji="1" lang="ja-JP" altLang="en-US">
-              <a:solidFill>
-                <a:srgbClr val="FF0000"/>
-              </a:solidFill>
-            </a:endParaRPr>
-          </a:p>
-        </p:txBody>
-      </p:sp>
-    </p:spTree>
-    <p:extLst>
-      <p:ext uri="{BB962C8B-B14F-4D97-AF65-F5344CB8AC3E}">
-        <p14:creationId xmlns:p14="http://schemas.microsoft.com/office/powerpoint/2010/main" val="2094439452"/>
-      </p:ext>
-    </p:extLst>
-  </p:cSld>
-  <p:clrMapOvr>
-    <a:masterClrMapping/>
-  </p:clrMapOvr>
-</p:sld>
-</file>
-
-<file path=ppt/slides/slide25.xml><?xml version="1.0" encoding="utf-8"?>
-<p:sld xmlns:a="http://schemas.openxmlformats.org/drawingml/2006/main" xmlns:r="http://schemas.openxmlformats.org/officeDocument/2006/relationships" xmlns:p="http://schemas.openxmlformats.org/presentationml/2006/main">
-  <p:cSld>
-    <p:spTree>
-      <p:nvGrpSpPr>
-        <p:cNvPr id="1" name=""/>
-        <p:cNvGrpSpPr/>
-        <p:nvPr/>
-      </p:nvGrpSpPr>
-      <p:grpSpPr>
-        <a:xfrm>
-          <a:off x="0" y="0"/>
-          <a:ext cx="0" cy="0"/>
-          <a:chOff x="0" y="0"/>
-          <a:chExt cx="0" cy="0"/>
-        </a:xfrm>
-      </p:grpSpPr>
-      <p:sp>
-        <p:nvSpPr>
-          <p:cNvPr id="4" name="テキスト ボックス 3">
-            <a:extLst>
-              <a:ext uri="{FF2B5EF4-FFF2-40B4-BE49-F238E27FC236}">
-                <a16:creationId xmlns:a16="http://schemas.microsoft.com/office/drawing/2014/main" id="{5A13BF46-B8C5-48AA-8308-C9ECFF431A18}"/>
-              </a:ext>
-            </a:extLst>
-          </p:cNvPr>
-          <p:cNvSpPr txBox="1"/>
-          <p:nvPr/>
-        </p:nvSpPr>
-        <p:spPr>
-          <a:xfrm>
-            <a:off x="567542" y="491954"/>
             <a:ext cx="4698722" cy="584775"/>
           </a:xfrm>
           <a:prstGeom prst="rect">
@@ -7558,7 +7044,7 @@
 </p:sld>
 </file>
 
-<file path=ppt/slides/slide26.xml><?xml version="1.0" encoding="utf-8"?>
+<file path=ppt/slides/slide23.xml><?xml version="1.0" encoding="utf-8"?>
 <p:sld xmlns:a="http://schemas.openxmlformats.org/drawingml/2006/main" xmlns:r="http://schemas.openxmlformats.org/officeDocument/2006/relationships" xmlns:p="http://schemas.openxmlformats.org/presentationml/2006/main">
   <p:cSld>
     <p:spTree>
@@ -7789,10 +7275,10 @@
       </p:sp>
       <p:pic>
         <p:nvPicPr>
-          <p:cNvPr id="5" name="図 4">
-            <a:extLst>
-              <a:ext uri="{FF2B5EF4-FFF2-40B4-BE49-F238E27FC236}">
-                <a16:creationId xmlns:a16="http://schemas.microsoft.com/office/drawing/2014/main" id="{F9D977F1-497F-4615-B655-619104CD9F26}"/>
+          <p:cNvPr id="3" name="図 2">
+            <a:extLst>
+              <a:ext uri="{FF2B5EF4-FFF2-40B4-BE49-F238E27FC236}">
+                <a16:creationId xmlns:a16="http://schemas.microsoft.com/office/drawing/2014/main" id="{8009D5ED-0533-4AAF-9CDA-3E5571ECEC03}"/>
               </a:ext>
             </a:extLst>
           </p:cNvPr>
@@ -7802,13 +7288,7 @@
           <p:nvPr/>
         </p:nvPicPr>
         <p:blipFill>
-          <a:blip r:embed="rId2">
-            <a:extLst>
-              <a:ext uri="{28A0092B-C50C-407E-A947-70E740481C1C}">
-                <a14:useLocalDpi xmlns:a14="http://schemas.microsoft.com/office/drawing/2010/main" val="0"/>
-              </a:ext>
-            </a:extLst>
-          </a:blip>
+          <a:blip r:embed="rId2"/>
           <a:stretch>
             <a:fillRect/>
           </a:stretch>
@@ -7816,7 +7296,7 @@
         <p:spPr>
           <a:xfrm>
             <a:off x="567542" y="2187126"/>
-            <a:ext cx="9353981" cy="2118174"/>
+            <a:ext cx="8732935" cy="2098003"/>
           </a:xfrm>
           <a:prstGeom prst="rect">
             <a:avLst/>
@@ -7825,10 +7305,10 @@
       </p:pic>
       <p:sp>
         <p:nvSpPr>
-          <p:cNvPr id="9" name="正方形/長方形 8">
-            <a:extLst>
-              <a:ext uri="{FF2B5EF4-FFF2-40B4-BE49-F238E27FC236}">
-                <a16:creationId xmlns:a16="http://schemas.microsoft.com/office/drawing/2014/main" id="{76AFB36D-9215-43FA-A289-50A2888E95BA}"/>
+          <p:cNvPr id="8" name="正方形/長方形 7">
+            <a:extLst>
+              <a:ext uri="{FF2B5EF4-FFF2-40B4-BE49-F238E27FC236}">
+                <a16:creationId xmlns:a16="http://schemas.microsoft.com/office/drawing/2014/main" id="{F80D7EED-EB06-471D-A776-0A20C32199DE}"/>
               </a:ext>
             </a:extLst>
           </p:cNvPr>
@@ -7837,7 +7317,7 @@
         </p:nvSpPr>
         <p:spPr>
           <a:xfrm>
-            <a:off x="2246663" y="3429000"/>
+            <a:off x="1900758" y="3091329"/>
             <a:ext cx="7674859" cy="1193800"/>
           </a:xfrm>
           <a:prstGeom prst="rect">
@@ -7872,6 +7352,70 @@
           <a:p>
             <a:pPr algn="ctr"/>
             <a:endParaRPr kumimoji="1" lang="ja-JP" altLang="en-US"/>
+          </a:p>
+        </p:txBody>
+      </p:sp>
+      <p:sp>
+        <p:nvSpPr>
+          <p:cNvPr id="10" name="テキスト ボックス 9">
+            <a:extLst>
+              <a:ext uri="{FF2B5EF4-FFF2-40B4-BE49-F238E27FC236}">
+                <a16:creationId xmlns:a16="http://schemas.microsoft.com/office/drawing/2014/main" id="{9192C37D-FB32-4458-B59F-00EED5F99C43}"/>
+              </a:ext>
+            </a:extLst>
+          </p:cNvPr>
+          <p:cNvSpPr txBox="1"/>
+          <p:nvPr/>
+        </p:nvSpPr>
+        <p:spPr>
+          <a:xfrm>
+            <a:off x="567542" y="4913533"/>
+            <a:ext cx="9619941" cy="461665"/>
+          </a:xfrm>
+          <a:prstGeom prst="rect">
+            <a:avLst/>
+          </a:prstGeom>
+          <a:noFill/>
+        </p:spPr>
+        <p:txBody>
+          <a:bodyPr wrap="none" rtlCol="0">
+            <a:spAutoFit/>
+          </a:bodyPr>
+          <a:lstStyle/>
+          <a:p>
+            <a:r>
+              <a:rPr kumimoji="1" lang="en-US" altLang="ja-JP" sz="2400" dirty="0"/>
+              <a:t>※</a:t>
+            </a:r>
+            <a:r>
+              <a:rPr kumimoji="1" lang="ja-JP" altLang="en-US" sz="2400" dirty="0"/>
+              <a:t>実体として宣言してるので、</a:t>
+            </a:r>
+            <a:r>
+              <a:rPr kumimoji="1" lang="en-US" altLang="ja-JP" sz="2400" b="1" dirty="0">
+                <a:solidFill>
+                  <a:srgbClr val="0070C0"/>
+                </a:solidFill>
+              </a:rPr>
+              <a:t>Init</a:t>
+            </a:r>
+            <a:r>
+              <a:rPr kumimoji="1" lang="ja-JP" altLang="en-US" sz="2400" dirty="0"/>
+              <a:t>で</a:t>
+            </a:r>
+            <a:r>
+              <a:rPr kumimoji="1" lang="en-US" altLang="ja-JP" sz="2400" b="1" dirty="0">
+                <a:solidFill>
+                  <a:srgbClr val="0070C0"/>
+                </a:solidFill>
+              </a:rPr>
+              <a:t>new</a:t>
+            </a:r>
+            <a:r>
+              <a:rPr kumimoji="1" lang="ja-JP" altLang="en-US" sz="2400" dirty="0"/>
+              <a:t>する必要はありません。</a:t>
+            </a:r>
+            <a:endParaRPr kumimoji="1" lang="en-US" altLang="ja-JP" sz="2400" dirty="0"/>
           </a:p>
         </p:txBody>
       </p:sp>
@@ -7920,7 +7464,7 @@
         <p:spPr>
           <a:xfrm>
             <a:off x="567542" y="491954"/>
-            <a:ext cx="4698722" cy="584775"/>
+            <a:ext cx="6046848" cy="584775"/>
           </a:xfrm>
           <a:prstGeom prst="rect">
             <a:avLst/>
@@ -7935,7 +7479,7 @@
           <a:p>
             <a:r>
               <a:rPr kumimoji="1" lang="ja-JP" altLang="en-US" sz="3200" b="1" u="sng" dirty="0"/>
-              <a:t>オブジェクトの複数配置</a:t>
+              <a:t>オブジェクトの複数配置 ロード</a:t>
             </a:r>
             <a:endParaRPr kumimoji="1" lang="en-US" altLang="ja-JP" sz="3200" b="1" u="sng" dirty="0"/>
           </a:p>
@@ -7956,7 +7500,7 @@
         <p:spPr>
           <a:xfrm>
             <a:off x="567542" y="1216429"/>
-            <a:ext cx="8180445" cy="830997"/>
+            <a:ext cx="10434267" cy="1569660"/>
           </a:xfrm>
           <a:prstGeom prst="rect">
             <a:avLst/>
@@ -7970,37 +7514,55 @@
           <a:lstStyle/>
           <a:p>
             <a:r>
-              <a:rPr kumimoji="1" lang="en-US" altLang="ja-JP" sz="2400" b="1" dirty="0">
+              <a:rPr kumimoji="1" lang="ja-JP" altLang="en-US" sz="2400" dirty="0"/>
+              <a:t>続いてロード処理になりますが、その前に</a:t>
+            </a:r>
+            <a:r>
+              <a:rPr kumimoji="1" lang="en-US" altLang="ja-JP" sz="2400" dirty="0"/>
+              <a:t>2D</a:t>
+            </a:r>
+            <a:r>
+              <a:rPr kumimoji="1" lang="ja-JP" altLang="en-US" sz="2400" dirty="0"/>
+              <a:t>の描画について復習します。</a:t>
+            </a:r>
+            <a:endParaRPr kumimoji="1" lang="en-US" altLang="ja-JP" sz="2400" dirty="0"/>
+          </a:p>
+          <a:p>
+            <a:endParaRPr lang="en-US" altLang="ja-JP" sz="2400" dirty="0"/>
+          </a:p>
+          <a:p>
+            <a:r>
+              <a:rPr lang="en-US" altLang="ja-JP" sz="2400" dirty="0"/>
+              <a:t>2D</a:t>
+            </a:r>
+            <a:r>
+              <a:rPr lang="ja-JP" altLang="en-US" sz="2400" dirty="0"/>
+              <a:t>画像を複数描画する場合は、</a:t>
+            </a:r>
+            <a:endParaRPr lang="en-US" altLang="ja-JP" sz="2400" dirty="0"/>
+          </a:p>
+          <a:p>
+            <a:r>
+              <a:rPr lang="en-US" altLang="ja-JP" sz="2400" b="1" dirty="0" err="1">
                 <a:solidFill>
                   <a:srgbClr val="FF0000"/>
                 </a:solidFill>
               </a:rPr>
-              <a:t>BlockManager.cpp</a:t>
-            </a:r>
-            <a:r>
-              <a:rPr kumimoji="1" lang="ja-JP" altLang="en-US" sz="2400" dirty="0"/>
-              <a:t>側に処理を書きます。</a:t>
-            </a:r>
-            <a:endParaRPr kumimoji="1" lang="en-US" altLang="ja-JP" sz="2400" dirty="0"/>
-          </a:p>
-          <a:p>
-            <a:r>
-              <a:rPr lang="ja-JP" altLang="en-US" sz="2400" dirty="0"/>
-              <a:t>コンストラクタでは、配列を</a:t>
-            </a:r>
-            <a:r>
-              <a:rPr lang="en-US" altLang="ja-JP" sz="2400" b="1" dirty="0" err="1">
+              <a:t>DrawGraph</a:t>
+            </a:r>
+            <a:r>
+              <a:rPr lang="ja-JP" altLang="en-US" sz="2400" b="1" dirty="0">
                 <a:solidFill>
-                  <a:srgbClr val="0070C0"/>
+                  <a:srgbClr val="FF0000"/>
                 </a:solidFill>
               </a:rPr>
-              <a:t>nullptr</a:t>
+              <a:t>関数</a:t>
             </a:r>
             <a:r>
               <a:rPr lang="ja-JP" altLang="en-US" sz="2400" dirty="0"/>
-              <a:t>で初期化しましょう。</a:t>
-            </a:r>
-            <a:endParaRPr kumimoji="1" lang="en-US" altLang="ja-JP" sz="2400" dirty="0"/>
+              <a:t>を何度も呼ぶだけで良かったと思います。</a:t>
+            </a:r>
+            <a:endParaRPr lang="en-US" altLang="ja-JP" sz="2400" dirty="0"/>
           </a:p>
         </p:txBody>
       </p:sp>
@@ -8009,7 +7571,7 @@
           <p:cNvPr id="5" name="図 4">
             <a:extLst>
               <a:ext uri="{FF2B5EF4-FFF2-40B4-BE49-F238E27FC236}">
-                <a16:creationId xmlns:a16="http://schemas.microsoft.com/office/drawing/2014/main" id="{A1FFA449-B660-40EE-9967-79D2551A1330}"/>
+                <a16:creationId xmlns:a16="http://schemas.microsoft.com/office/drawing/2014/main" id="{7001821B-C04C-45AA-821C-75022EB90161}"/>
               </a:ext>
             </a:extLst>
           </p:cNvPr>
@@ -8032,8 +7594,8 @@
         </p:blipFill>
         <p:spPr>
           <a:xfrm>
-            <a:off x="567542" y="2187125"/>
-            <a:ext cx="6963558" cy="2912033"/>
+            <a:off x="567541" y="2925789"/>
+            <a:ext cx="6653909" cy="3440257"/>
           </a:xfrm>
           <a:prstGeom prst="rect">
             <a:avLst/>
@@ -8043,7 +7605,7 @@
     </p:spTree>
     <p:extLst>
       <p:ext uri="{BB962C8B-B14F-4D97-AF65-F5344CB8AC3E}">
-        <p14:creationId xmlns:p14="http://schemas.microsoft.com/office/powerpoint/2010/main" val="2193046133"/>
+        <p14:creationId xmlns:p14="http://schemas.microsoft.com/office/powerpoint/2010/main" val="180706601"/>
       </p:ext>
     </p:extLst>
   </p:cSld>
@@ -8085,7 +7647,7 @@
         <p:spPr>
           <a:xfrm>
             <a:off x="567542" y="491954"/>
-            <a:ext cx="4698722" cy="584775"/>
+            <a:ext cx="6046848" cy="584775"/>
           </a:xfrm>
           <a:prstGeom prst="rect">
             <a:avLst/>
@@ -8100,7 +7662,7 @@
           <a:p>
             <a:r>
               <a:rPr kumimoji="1" lang="ja-JP" altLang="en-US" sz="3200" b="1" u="sng" dirty="0"/>
-              <a:t>オブジェクトの複数配置</a:t>
+              <a:t>オブジェクトの複数配置 ロード</a:t>
             </a:r>
             <a:endParaRPr kumimoji="1" lang="en-US" altLang="ja-JP" sz="3200" b="1" u="sng" dirty="0"/>
           </a:p>
@@ -8121,7 +7683,7 @@
         <p:spPr>
           <a:xfrm>
             <a:off x="567542" y="1216429"/>
-            <a:ext cx="5258171" cy="461665"/>
+            <a:ext cx="11264622" cy="1200329"/>
           </a:xfrm>
           <a:prstGeom prst="rect">
             <a:avLst/>
@@ -8135,35 +7697,73 @@
           <a:lstStyle/>
           <a:p>
             <a:r>
-              <a:rPr kumimoji="1" lang="en-US" altLang="ja-JP" sz="2400" b="1" dirty="0">
+              <a:rPr kumimoji="1" lang="ja-JP" altLang="en-US" sz="2400" dirty="0"/>
+              <a:t>このとき、引数の画像ハンドルは、</a:t>
+            </a:r>
+            <a:r>
+              <a:rPr kumimoji="1" lang="ja-JP" altLang="en-US" sz="2400" b="1" dirty="0">
                 <a:solidFill>
-                  <a:srgbClr val="0070C0"/>
+                  <a:srgbClr val="FF0000"/>
                 </a:solidFill>
               </a:rPr>
-              <a:t>Init</a:t>
-            </a:r>
-            <a:r>
-              <a:rPr kumimoji="1" lang="ja-JP" altLang="en-US" sz="2400" b="1" dirty="0">
+              <a:t>同じ画像ハンドル</a:t>
+            </a:r>
+            <a:r>
+              <a:rPr kumimoji="1" lang="ja-JP" altLang="en-US" sz="2400" dirty="0"/>
+              <a:t>で問題ありませんでした。</a:t>
+            </a:r>
+            <a:endParaRPr kumimoji="1" lang="en-US" altLang="ja-JP" sz="2400" dirty="0"/>
+          </a:p>
+          <a:p>
+            <a:r>
+              <a:rPr lang="ja-JP" altLang="en-US" sz="2400" dirty="0"/>
+              <a:t>これは</a:t>
+            </a:r>
+            <a:r>
+              <a:rPr lang="en-US" altLang="ja-JP" sz="2400" b="1" dirty="0" err="1">
                 <a:solidFill>
-                  <a:srgbClr val="0070C0"/>
+                  <a:srgbClr val="FF0000"/>
+                </a:solidFill>
+              </a:rPr>
+              <a:t>DrawGraph</a:t>
+            </a:r>
+            <a:r>
+              <a:rPr lang="ja-JP" altLang="en-US" sz="2400" b="1" dirty="0">
+                <a:solidFill>
+                  <a:srgbClr val="FF0000"/>
                 </a:solidFill>
               </a:rPr>
               <a:t>関数</a:t>
             </a:r>
             <a:r>
-              <a:rPr kumimoji="1" lang="ja-JP" altLang="en-US" sz="2400" dirty="0"/>
-              <a:t>で各ブロックを生成します。</a:t>
-            </a:r>
-            <a:endParaRPr kumimoji="1" lang="en-US" altLang="ja-JP" sz="2400" dirty="0"/>
+              <a:rPr lang="ja-JP" altLang="en-US" sz="2400" dirty="0"/>
+              <a:t>が、画像ハンドルに対応した画像を、</a:t>
+            </a:r>
+            <a:endParaRPr lang="en-US" altLang="ja-JP" sz="2400" dirty="0"/>
+          </a:p>
+          <a:p>
+            <a:r>
+              <a:rPr lang="ja-JP" altLang="en-US" sz="2400" b="1" dirty="0">
+                <a:solidFill>
+                  <a:srgbClr val="FF0000"/>
+                </a:solidFill>
+              </a:rPr>
+              <a:t>画面に直接描画</a:t>
+            </a:r>
+            <a:r>
+              <a:rPr lang="ja-JP" altLang="en-US" sz="2400" dirty="0"/>
+              <a:t>しているからです。</a:t>
+            </a:r>
+            <a:endParaRPr lang="en-US" altLang="ja-JP" sz="2400" dirty="0"/>
           </a:p>
         </p:txBody>
       </p:sp>
       <p:pic>
         <p:nvPicPr>
-          <p:cNvPr id="3" name="図 2">
-            <a:extLst>
-              <a:ext uri="{FF2B5EF4-FFF2-40B4-BE49-F238E27FC236}">
-                <a16:creationId xmlns:a16="http://schemas.microsoft.com/office/drawing/2014/main" id="{79C7F370-8514-40C7-B9F9-735472676898}"/>
+          <p:cNvPr id="8" name="図 7">
+            <a:extLst>
+              <a:ext uri="{FF2B5EF4-FFF2-40B4-BE49-F238E27FC236}">
+                <a16:creationId xmlns:a16="http://schemas.microsoft.com/office/drawing/2014/main" id="{E721B8C0-12E7-4898-B3C0-74D1BE76B7DA}"/>
               </a:ext>
             </a:extLst>
           </p:cNvPr>
@@ -8186,18 +7786,77 @@
         </p:blipFill>
         <p:spPr>
           <a:xfrm>
-            <a:off x="567542" y="1817794"/>
-            <a:ext cx="7539267" cy="2817706"/>
+            <a:off x="567541" y="2925789"/>
+            <a:ext cx="6653909" cy="3440257"/>
           </a:xfrm>
           <a:prstGeom prst="rect">
             <a:avLst/>
           </a:prstGeom>
         </p:spPr>
       </p:pic>
+      <p:sp>
+        <p:nvSpPr>
+          <p:cNvPr id="9" name="テキスト ボックス 8">
+            <a:extLst>
+              <a:ext uri="{FF2B5EF4-FFF2-40B4-BE49-F238E27FC236}">
+                <a16:creationId xmlns:a16="http://schemas.microsoft.com/office/drawing/2014/main" id="{16FFD049-B147-4295-BB29-FC122A64D069}"/>
+              </a:ext>
+            </a:extLst>
+          </p:cNvPr>
+          <p:cNvSpPr txBox="1"/>
+          <p:nvPr/>
+        </p:nvSpPr>
+        <p:spPr>
+          <a:xfrm>
+            <a:off x="2458123" y="5610707"/>
+            <a:ext cx="3741730" cy="461665"/>
+          </a:xfrm>
+          <a:prstGeom prst="rect">
+            <a:avLst/>
+          </a:prstGeom>
+          <a:solidFill>
+            <a:schemeClr val="bg1"/>
+          </a:solidFill>
+          <a:ln>
+            <a:solidFill>
+              <a:schemeClr val="tx1"/>
+            </a:solidFill>
+          </a:ln>
+        </p:spPr>
+        <p:txBody>
+          <a:bodyPr wrap="none" rtlCol="0">
+            <a:spAutoFit/>
+          </a:bodyPr>
+          <a:lstStyle/>
+          <a:p>
+            <a:r>
+              <a:rPr kumimoji="1" lang="en-US" altLang="ja-JP" sz="2400" b="1" dirty="0">
+                <a:solidFill>
+                  <a:srgbClr val="FF0000"/>
+                </a:solidFill>
+              </a:rPr>
+              <a:t>8</a:t>
+            </a:r>
+            <a:r>
+              <a:rPr kumimoji="1" lang="ja-JP" altLang="en-US" sz="2400" b="1" dirty="0">
+                <a:solidFill>
+                  <a:srgbClr val="FF0000"/>
+                </a:solidFill>
+              </a:rPr>
+              <a:t>つとも同じ画像ハンドル</a:t>
+            </a:r>
+            <a:endParaRPr lang="en-US" altLang="ja-JP" sz="2400" b="1" dirty="0">
+              <a:solidFill>
+                <a:srgbClr val="FF0000"/>
+              </a:solidFill>
+            </a:endParaRPr>
+          </a:p>
+        </p:txBody>
+      </p:sp>
     </p:spTree>
     <p:extLst>
       <p:ext uri="{BB962C8B-B14F-4D97-AF65-F5344CB8AC3E}">
-        <p14:creationId xmlns:p14="http://schemas.microsoft.com/office/powerpoint/2010/main" val="4005581918"/>
+        <p14:creationId xmlns:p14="http://schemas.microsoft.com/office/powerpoint/2010/main" val="2146092843"/>
       </p:ext>
     </p:extLst>
   </p:cSld>
@@ -8275,7 +7934,7 @@
         <p:spPr>
           <a:xfrm>
             <a:off x="567542" y="1216429"/>
-            <a:ext cx="10434267" cy="1569660"/>
+            <a:ext cx="9281708" cy="2308324"/>
           </a:xfrm>
           <a:prstGeom prst="rect">
             <a:avLst/>
@@ -8289,41 +7948,12 @@
           <a:lstStyle/>
           <a:p>
             <a:r>
-              <a:rPr kumimoji="1" lang="ja-JP" altLang="en-US" sz="2400" dirty="0"/>
-              <a:t>続いてロード処理になりますが、その前に</a:t>
-            </a:r>
-            <a:r>
-              <a:rPr kumimoji="1" lang="en-US" altLang="ja-JP" sz="2400" dirty="0"/>
-              <a:t>2D</a:t>
-            </a:r>
-            <a:r>
-              <a:rPr kumimoji="1" lang="ja-JP" altLang="en-US" sz="2400" dirty="0"/>
-              <a:t>の描画について復習します。</a:t>
-            </a:r>
-            <a:endParaRPr kumimoji="1" lang="en-US" altLang="ja-JP" sz="2400" dirty="0"/>
-          </a:p>
-          <a:p>
-            <a:endParaRPr lang="en-US" altLang="ja-JP" sz="2400" dirty="0"/>
-          </a:p>
-          <a:p>
-            <a:r>
-              <a:rPr lang="en-US" altLang="ja-JP" sz="2400" dirty="0"/>
-              <a:t>2D</a:t>
-            </a:r>
-            <a:r>
-              <a:rPr lang="ja-JP" altLang="en-US" sz="2400" dirty="0"/>
-              <a:t>画像を複数描画する場合は、</a:t>
-            </a:r>
-            <a:endParaRPr lang="en-US" altLang="ja-JP" sz="2400" dirty="0"/>
-          </a:p>
-          <a:p>
-            <a:r>
-              <a:rPr lang="en-US" altLang="ja-JP" sz="2400" b="1" dirty="0" err="1">
+              <a:rPr lang="en-US" altLang="ja-JP" sz="2400" b="1" dirty="0">
                 <a:solidFill>
                   <a:srgbClr val="FF0000"/>
                 </a:solidFill>
               </a:rPr>
-              <a:t>DrawGraph</a:t>
+              <a:t>3D</a:t>
             </a:r>
             <a:r>
               <a:rPr lang="ja-JP" altLang="en-US" sz="2400" b="1" dirty="0">
@@ -8331,56 +7961,119 @@
                   <a:srgbClr val="FF0000"/>
                 </a:solidFill>
               </a:rPr>
-              <a:t>関数</a:t>
+              <a:t>の画像は</a:t>
+            </a:r>
+            <a:r>
+              <a:rPr lang="en-US" altLang="ja-JP" sz="2400" b="1" dirty="0">
+                <a:solidFill>
+                  <a:srgbClr val="FF0000"/>
+                </a:solidFill>
+              </a:rPr>
+              <a:t>2D</a:t>
+            </a:r>
+            <a:r>
+              <a:rPr lang="ja-JP" altLang="en-US" sz="2400" b="1" dirty="0">
+                <a:solidFill>
+                  <a:srgbClr val="FF0000"/>
+                </a:solidFill>
+              </a:rPr>
+              <a:t>の画像よりも情報量が非常に多く</a:t>
             </a:r>
             <a:r>
               <a:rPr lang="ja-JP" altLang="en-US" sz="2400" dirty="0"/>
-              <a:t>を何度も呼ぶだけで良かったと思います。</a:t>
+              <a:t>、</a:t>
             </a:r>
             <a:endParaRPr lang="en-US" altLang="ja-JP" sz="2400" dirty="0"/>
           </a:p>
-        </p:txBody>
-      </p:sp>
-      <p:pic>
-        <p:nvPicPr>
-          <p:cNvPr id="5" name="図 4">
-            <a:extLst>
-              <a:ext uri="{FF2B5EF4-FFF2-40B4-BE49-F238E27FC236}">
-                <a16:creationId xmlns:a16="http://schemas.microsoft.com/office/drawing/2014/main" id="{7001821B-C04C-45AA-821C-75022EB90161}"/>
-              </a:ext>
-            </a:extLst>
-          </p:cNvPr>
-          <p:cNvPicPr>
-            <a:picLocks noChangeAspect="1"/>
-          </p:cNvPicPr>
-          <p:nvPr/>
-        </p:nvPicPr>
-        <p:blipFill>
-          <a:blip r:embed="rId2">
-            <a:extLst>
-              <a:ext uri="{28A0092B-C50C-407E-A947-70E740481C1C}">
-                <a14:useLocalDpi xmlns:a14="http://schemas.microsoft.com/office/drawing/2010/main" val="0"/>
-              </a:ext>
-            </a:extLst>
-          </a:blip>
-          <a:stretch>
-            <a:fillRect/>
-          </a:stretch>
-        </p:blipFill>
-        <p:spPr>
-          <a:xfrm>
-            <a:off x="567541" y="2925789"/>
-            <a:ext cx="6653909" cy="3440257"/>
-          </a:xfrm>
-          <a:prstGeom prst="rect">
-            <a:avLst/>
-          </a:prstGeom>
-        </p:spPr>
-      </p:pic>
+          <a:p>
+            <a:r>
+              <a:rPr kumimoji="1" lang="en-US" altLang="ja-JP" sz="2400" dirty="0"/>
+              <a:t>1</a:t>
+            </a:r>
+            <a:r>
+              <a:rPr kumimoji="1" lang="ja-JP" altLang="en-US" sz="2400" dirty="0"/>
+              <a:t>つの画像データを使いまわそうとすると、不具合が発生したり、</a:t>
+            </a:r>
+            <a:endParaRPr kumimoji="1" lang="en-US" altLang="ja-JP" sz="2400" dirty="0"/>
+          </a:p>
+          <a:p>
+            <a:r>
+              <a:rPr lang="ja-JP" altLang="en-US" sz="2400" dirty="0"/>
+              <a:t>それを防ぐための処理が必要だったりと、大変です。</a:t>
+            </a:r>
+            <a:endParaRPr lang="en-US" altLang="ja-JP" sz="2400" dirty="0"/>
+          </a:p>
+          <a:p>
+            <a:r>
+              <a:rPr kumimoji="1" lang="ja-JP" altLang="en-US" sz="2400" dirty="0"/>
+              <a:t>（</a:t>
+            </a:r>
+            <a:r>
+              <a:rPr kumimoji="1" lang="en-US" altLang="ja-JP" sz="2400" b="1" dirty="0" err="1">
+                <a:solidFill>
+                  <a:srgbClr val="FF0000"/>
+                </a:solidFill>
+              </a:rPr>
+              <a:t>DxLib</a:t>
+            </a:r>
+            <a:r>
+              <a:rPr kumimoji="1" lang="ja-JP" altLang="en-US" sz="2400" b="1" dirty="0">
+                <a:solidFill>
+                  <a:srgbClr val="FF0000"/>
+                </a:solidFill>
+              </a:rPr>
+              <a:t>も推奨していません</a:t>
+            </a:r>
+            <a:r>
+              <a:rPr kumimoji="1" lang="ja-JP" altLang="en-US" sz="2400" dirty="0"/>
+              <a:t>）</a:t>
+            </a:r>
+            <a:endParaRPr kumimoji="1" lang="en-US" altLang="ja-JP" sz="2400" dirty="0"/>
+          </a:p>
+          <a:p>
+            <a:endParaRPr lang="en-US" altLang="ja-JP" sz="2400" dirty="0"/>
+          </a:p>
+          <a:p>
+            <a:r>
+              <a:rPr kumimoji="1" lang="ja-JP" altLang="en-US" sz="2400" dirty="0"/>
+              <a:t>よって</a:t>
+            </a:r>
+            <a:r>
+              <a:rPr kumimoji="1" lang="ja-JP" altLang="en-US" sz="2400" b="1" dirty="0">
+                <a:solidFill>
+                  <a:srgbClr val="FF0000"/>
+                </a:solidFill>
+              </a:rPr>
+              <a:t>画像は</a:t>
+            </a:r>
+            <a:r>
+              <a:rPr kumimoji="1" lang="en-US" altLang="ja-JP" sz="2400" b="1" dirty="0">
+                <a:solidFill>
+                  <a:srgbClr val="FF0000"/>
+                </a:solidFill>
+              </a:rPr>
+              <a:t>1</a:t>
+            </a:r>
+            <a:r>
+              <a:rPr kumimoji="1" lang="ja-JP" altLang="en-US" sz="2400" b="1" dirty="0">
+                <a:solidFill>
+                  <a:srgbClr val="FF0000"/>
+                </a:solidFill>
+              </a:rPr>
+              <a:t>つだけロード</a:t>
+            </a:r>
+            <a:r>
+              <a:rPr kumimoji="1" lang="ja-JP" altLang="en-US" sz="2400" dirty="0"/>
+              <a:t>します。</a:t>
+            </a:r>
+            <a:endParaRPr kumimoji="1" lang="en-US" altLang="ja-JP" sz="2400" dirty="0"/>
+          </a:p>
+        </p:txBody>
+      </p:sp>
     </p:spTree>
     <p:extLst>
       <p:ext uri="{BB962C8B-B14F-4D97-AF65-F5344CB8AC3E}">
-        <p14:creationId xmlns:p14="http://schemas.microsoft.com/office/powerpoint/2010/main" val="180706601"/>
+        <p14:creationId xmlns:p14="http://schemas.microsoft.com/office/powerpoint/2010/main" val="4213127706"/>
       </p:ext>
     </p:extLst>
   </p:cSld>
@@ -8458,7 +8151,7 @@
         <p:spPr>
           <a:xfrm>
             <a:off x="567542" y="1216429"/>
-            <a:ext cx="11264622" cy="1200329"/>
+            <a:ext cx="7192995" cy="461665"/>
           </a:xfrm>
           <a:prstGeom prst="rect">
             <a:avLst/>
@@ -8472,62 +8165,16 @@
           <a:lstStyle/>
           <a:p>
             <a:r>
-              <a:rPr kumimoji="1" lang="ja-JP" altLang="en-US" sz="2400" dirty="0"/>
-              <a:t>このとき、引数の画像ハンドルは、</a:t>
-            </a:r>
-            <a:r>
-              <a:rPr kumimoji="1" lang="ja-JP" altLang="en-US" sz="2400" b="1" dirty="0">
+              <a:rPr lang="en-US" altLang="ja-JP" sz="2400" b="1" dirty="0">
                 <a:solidFill>
                   <a:srgbClr val="FF0000"/>
                 </a:solidFill>
               </a:rPr>
-              <a:t>同じ画像ハンドル</a:t>
-            </a:r>
-            <a:r>
-              <a:rPr kumimoji="1" lang="ja-JP" altLang="en-US" sz="2400" dirty="0"/>
-              <a:t>で問題ありませんでした。</a:t>
-            </a:r>
-            <a:endParaRPr kumimoji="1" lang="en-US" altLang="ja-JP" sz="2400" dirty="0"/>
-          </a:p>
-          <a:p>
+              <a:t>Block.cpp</a:t>
+            </a:r>
             <a:r>
               <a:rPr lang="ja-JP" altLang="en-US" sz="2400" dirty="0"/>
-              <a:t>これは</a:t>
-            </a:r>
-            <a:r>
-              <a:rPr lang="en-US" altLang="ja-JP" sz="2400" b="1" dirty="0" err="1">
-                <a:solidFill>
-                  <a:srgbClr val="FF0000"/>
-                </a:solidFill>
-              </a:rPr>
-              <a:t>DrawGraph</a:t>
-            </a:r>
-            <a:r>
-              <a:rPr lang="ja-JP" altLang="en-US" sz="2400" b="1" dirty="0">
-                <a:solidFill>
-                  <a:srgbClr val="FF0000"/>
-                </a:solidFill>
-              </a:rPr>
-              <a:t>関数</a:t>
-            </a:r>
-            <a:r>
-              <a:rPr lang="ja-JP" altLang="en-US" sz="2400" dirty="0"/>
-              <a:t>が、画像ハンドルに対応した画像を、</a:t>
-            </a:r>
-            <a:endParaRPr lang="en-US" altLang="ja-JP" sz="2400" dirty="0"/>
-          </a:p>
-          <a:p>
-            <a:r>
-              <a:rPr lang="ja-JP" altLang="en-US" sz="2400" b="1" dirty="0">
-                <a:solidFill>
-                  <a:srgbClr val="FF0000"/>
-                </a:solidFill>
-              </a:rPr>
-              <a:t>画面に直接描画</a:t>
-            </a:r>
-            <a:r>
-              <a:rPr lang="ja-JP" altLang="en-US" sz="2400" dirty="0"/>
-              <a:t>しているからです。</a:t>
+              <a:t>のロード関数にロード処理を書きます。</a:t>
             </a:r>
             <a:endParaRPr lang="en-US" altLang="ja-JP" sz="2400" dirty="0"/>
           </a:p>
@@ -8535,10 +8182,10 @@
       </p:sp>
       <p:pic>
         <p:nvPicPr>
-          <p:cNvPr id="8" name="図 7">
-            <a:extLst>
-              <a:ext uri="{FF2B5EF4-FFF2-40B4-BE49-F238E27FC236}">
-                <a16:creationId xmlns:a16="http://schemas.microsoft.com/office/drawing/2014/main" id="{E721B8C0-12E7-4898-B3C0-74D1BE76B7DA}"/>
+          <p:cNvPr id="5" name="図 4">
+            <a:extLst>
+              <a:ext uri="{FF2B5EF4-FFF2-40B4-BE49-F238E27FC236}">
+                <a16:creationId xmlns:a16="http://schemas.microsoft.com/office/drawing/2014/main" id="{289462DD-68A9-49AF-A333-B9B1B079A8CE}"/>
               </a:ext>
             </a:extLst>
           </p:cNvPr>
@@ -8548,90 +8195,25 @@
           <p:nvPr/>
         </p:nvPicPr>
         <p:blipFill>
-          <a:blip r:embed="rId2">
-            <a:extLst>
-              <a:ext uri="{28A0092B-C50C-407E-A947-70E740481C1C}">
-                <a14:useLocalDpi xmlns:a14="http://schemas.microsoft.com/office/drawing/2010/main" val="0"/>
-              </a:ext>
-            </a:extLst>
-          </a:blip>
+          <a:blip r:embed="rId2"/>
           <a:stretch>
             <a:fillRect/>
           </a:stretch>
         </p:blipFill>
         <p:spPr>
           <a:xfrm>
-            <a:off x="567541" y="2925789"/>
-            <a:ext cx="6653909" cy="3440257"/>
+            <a:off x="567541" y="1817794"/>
+            <a:ext cx="10193553" cy="1808275"/>
           </a:xfrm>
           <a:prstGeom prst="rect">
             <a:avLst/>
           </a:prstGeom>
         </p:spPr>
       </p:pic>
-      <p:sp>
-        <p:nvSpPr>
-          <p:cNvPr id="9" name="テキスト ボックス 8">
-            <a:extLst>
-              <a:ext uri="{FF2B5EF4-FFF2-40B4-BE49-F238E27FC236}">
-                <a16:creationId xmlns:a16="http://schemas.microsoft.com/office/drawing/2014/main" id="{16FFD049-B147-4295-BB29-FC122A64D069}"/>
-              </a:ext>
-            </a:extLst>
-          </p:cNvPr>
-          <p:cNvSpPr txBox="1"/>
-          <p:nvPr/>
-        </p:nvSpPr>
-        <p:spPr>
-          <a:xfrm>
-            <a:off x="2458123" y="5610707"/>
-            <a:ext cx="3741730" cy="461665"/>
-          </a:xfrm>
-          <a:prstGeom prst="rect">
-            <a:avLst/>
-          </a:prstGeom>
-          <a:solidFill>
-            <a:schemeClr val="bg1"/>
-          </a:solidFill>
-          <a:ln>
-            <a:solidFill>
-              <a:schemeClr val="tx1"/>
-            </a:solidFill>
-          </a:ln>
-        </p:spPr>
-        <p:txBody>
-          <a:bodyPr wrap="none" rtlCol="0">
-            <a:spAutoFit/>
-          </a:bodyPr>
-          <a:lstStyle/>
-          <a:p>
-            <a:r>
-              <a:rPr kumimoji="1" lang="en-US" altLang="ja-JP" sz="2400" b="1" dirty="0">
-                <a:solidFill>
-                  <a:srgbClr val="FF0000"/>
-                </a:solidFill>
-              </a:rPr>
-              <a:t>8</a:t>
-            </a:r>
-            <a:r>
-              <a:rPr kumimoji="1" lang="ja-JP" altLang="en-US" sz="2400" b="1" dirty="0">
-                <a:solidFill>
-                  <a:srgbClr val="FF0000"/>
-                </a:solidFill>
-              </a:rPr>
-              <a:t>つとも同じ画像ハンドル</a:t>
-            </a:r>
-            <a:endParaRPr lang="en-US" altLang="ja-JP" sz="2400" b="1" dirty="0">
-              <a:solidFill>
-                <a:srgbClr val="FF0000"/>
-              </a:solidFill>
-            </a:endParaRPr>
-          </a:p>
-        </p:txBody>
-      </p:sp>
     </p:spTree>
     <p:extLst>
       <p:ext uri="{BB962C8B-B14F-4D97-AF65-F5344CB8AC3E}">
-        <p14:creationId xmlns:p14="http://schemas.microsoft.com/office/powerpoint/2010/main" val="2146092843"/>
+        <p14:creationId xmlns:p14="http://schemas.microsoft.com/office/powerpoint/2010/main" val="1368374807"/>
       </p:ext>
     </p:extLst>
   </p:cSld>
@@ -8709,7 +8291,7 @@
         <p:spPr>
           <a:xfrm>
             <a:off x="567542" y="1216429"/>
-            <a:ext cx="9281708" cy="2308324"/>
+            <a:ext cx="9748181" cy="461665"/>
           </a:xfrm>
           <a:prstGeom prst="rect">
             <a:avLst/>
@@ -8728,127 +8310,93 @@
                   <a:srgbClr val="FF0000"/>
                 </a:solidFill>
               </a:rPr>
-              <a:t>3D</a:t>
-            </a:r>
-            <a:r>
-              <a:rPr lang="ja-JP" altLang="en-US" sz="2400" b="1" dirty="0">
-                <a:solidFill>
-                  <a:srgbClr val="FF0000"/>
-                </a:solidFill>
-              </a:rPr>
-              <a:t>の画像は</a:t>
-            </a:r>
-            <a:r>
-              <a:rPr lang="en-US" altLang="ja-JP" sz="2400" b="1" dirty="0">
-                <a:solidFill>
-                  <a:srgbClr val="FF0000"/>
-                </a:solidFill>
-              </a:rPr>
-              <a:t>2D</a:t>
-            </a:r>
-            <a:r>
-              <a:rPr lang="ja-JP" altLang="en-US" sz="2400" b="1" dirty="0">
-                <a:solidFill>
-                  <a:srgbClr val="FF0000"/>
-                </a:solidFill>
-              </a:rPr>
-              <a:t>の画像よりも情報量が非常に多く</a:t>
+              <a:t>BlockManager.cpp</a:t>
             </a:r>
             <a:r>
               <a:rPr lang="ja-JP" altLang="en-US" sz="2400" dirty="0"/>
-              <a:t>、</a:t>
+              <a:t>側から各ブロックのロード処理を呼びましょう。</a:t>
             </a:r>
             <a:endParaRPr lang="en-US" altLang="ja-JP" sz="2400" dirty="0"/>
           </a:p>
-          <a:p>
-            <a:r>
-              <a:rPr kumimoji="1" lang="en-US" altLang="ja-JP" sz="2400" dirty="0"/>
-              <a:t>1</a:t>
-            </a:r>
-            <a:r>
-              <a:rPr kumimoji="1" lang="ja-JP" altLang="en-US" sz="2400" dirty="0"/>
-              <a:t>つの画像データを使いまわそうとすると、不具合が発生したり、</a:t>
-            </a:r>
-            <a:endParaRPr kumimoji="1" lang="en-US" altLang="ja-JP" sz="2400" dirty="0"/>
-          </a:p>
+        </p:txBody>
+      </p:sp>
+      <p:sp>
+        <p:nvSpPr>
+          <p:cNvPr id="7" name="テキスト ボックス 6">
+            <a:extLst>
+              <a:ext uri="{FF2B5EF4-FFF2-40B4-BE49-F238E27FC236}">
+                <a16:creationId xmlns:a16="http://schemas.microsoft.com/office/drawing/2014/main" id="{ECBDAE3D-54E5-46B0-8115-23259695C4C3}"/>
+              </a:ext>
+            </a:extLst>
+          </p:cNvPr>
+          <p:cNvSpPr txBox="1"/>
+          <p:nvPr/>
+        </p:nvSpPr>
+        <p:spPr>
+          <a:xfrm>
+            <a:off x="567542" y="4343400"/>
+            <a:ext cx="7879080" cy="830997"/>
+          </a:xfrm>
+          <a:prstGeom prst="rect">
+            <a:avLst/>
+          </a:prstGeom>
+          <a:noFill/>
+        </p:spPr>
+        <p:txBody>
+          <a:bodyPr wrap="none" rtlCol="0">
+            <a:spAutoFit/>
+          </a:bodyPr>
+          <a:lstStyle/>
           <a:p>
             <a:r>
               <a:rPr lang="ja-JP" altLang="en-US" sz="2400" dirty="0"/>
-              <a:t>それを防ぐための処理が必要だったりと、大変です。</a:t>
+              <a:t>これですべてのブロックの画像は１つずつロードされ、</a:t>
             </a:r>
             <a:endParaRPr lang="en-US" altLang="ja-JP" sz="2400" dirty="0"/>
           </a:p>
           <a:p>
             <a:r>
-              <a:rPr kumimoji="1" lang="ja-JP" altLang="en-US" sz="2400" dirty="0"/>
-              <a:t>（</a:t>
-            </a:r>
-            <a:r>
-              <a:rPr kumimoji="1" lang="en-US" altLang="ja-JP" sz="2400" b="1" dirty="0" err="1">
-                <a:solidFill>
-                  <a:srgbClr val="FF0000"/>
-                </a:solidFill>
-              </a:rPr>
-              <a:t>DxLib</a:t>
-            </a:r>
-            <a:r>
-              <a:rPr kumimoji="1" lang="ja-JP" altLang="en-US" sz="2400" b="1" dirty="0">
-                <a:solidFill>
-                  <a:srgbClr val="FF0000"/>
-                </a:solidFill>
-              </a:rPr>
-              <a:t>も推奨していません</a:t>
-            </a:r>
-            <a:r>
-              <a:rPr kumimoji="1" lang="ja-JP" altLang="en-US" sz="2400" dirty="0"/>
-              <a:t>）</a:t>
-            </a:r>
-            <a:endParaRPr kumimoji="1" lang="en-US" altLang="ja-JP" sz="2400" dirty="0"/>
-          </a:p>
-          <a:p>
+              <a:rPr lang="ja-JP" altLang="en-US" sz="2400" dirty="0"/>
+              <a:t>別々の画像ハンドルが設定されます。</a:t>
+            </a:r>
             <a:endParaRPr lang="en-US" altLang="ja-JP" sz="2400" dirty="0"/>
           </a:p>
-          <a:p>
-            <a:r>
-              <a:rPr kumimoji="1" lang="ja-JP" altLang="en-US" sz="2400" dirty="0"/>
-              <a:t>よって</a:t>
-            </a:r>
-            <a:r>
-              <a:rPr kumimoji="1" lang="ja-JP" altLang="en-US" sz="2400" b="1" dirty="0">
-                <a:solidFill>
-                  <a:srgbClr val="FF0000"/>
-                </a:solidFill>
-              </a:rPr>
-              <a:t>画像は</a:t>
-            </a:r>
-            <a:r>
-              <a:rPr kumimoji="1" lang="en-US" altLang="ja-JP" sz="2400" b="1" dirty="0">
-                <a:solidFill>
-                  <a:srgbClr val="FF0000"/>
-                </a:solidFill>
-              </a:rPr>
-              <a:t>1</a:t>
-            </a:r>
-            <a:r>
-              <a:rPr kumimoji="1" lang="ja-JP" altLang="en-US" sz="2400" b="1" dirty="0">
-                <a:solidFill>
-                  <a:srgbClr val="FF0000"/>
-                </a:solidFill>
-              </a:rPr>
-              <a:t>つずつロード</a:t>
-            </a:r>
-            <a:r>
-              <a:rPr kumimoji="1" lang="ja-JP" altLang="en-US" sz="2400" dirty="0"/>
-              <a:t>します。</a:t>
-            </a:r>
-            <a:endParaRPr kumimoji="1" lang="en-US" altLang="ja-JP" sz="2400" dirty="0"/>
-          </a:p>
-        </p:txBody>
-      </p:sp>
+        </p:txBody>
+      </p:sp>
+      <p:pic>
+        <p:nvPicPr>
+          <p:cNvPr id="3" name="図 2">
+            <a:extLst>
+              <a:ext uri="{FF2B5EF4-FFF2-40B4-BE49-F238E27FC236}">
+                <a16:creationId xmlns:a16="http://schemas.microsoft.com/office/drawing/2014/main" id="{E9477C63-9A9B-446B-BA2B-B045A87008D9}"/>
+              </a:ext>
+            </a:extLst>
+          </p:cNvPr>
+          <p:cNvPicPr>
+            <a:picLocks noChangeAspect="1"/>
+          </p:cNvPicPr>
+          <p:nvPr/>
+        </p:nvPicPr>
+        <p:blipFill>
+          <a:blip r:embed="rId2"/>
+          <a:stretch>
+            <a:fillRect/>
+          </a:stretch>
+        </p:blipFill>
+        <p:spPr>
+          <a:xfrm>
+            <a:off x="567541" y="1817794"/>
+            <a:ext cx="7814475" cy="2377688"/>
+          </a:xfrm>
+          <a:prstGeom prst="rect">
+            <a:avLst/>
+          </a:prstGeom>
+        </p:spPr>
+      </p:pic>
     </p:spTree>
     <p:extLst>
       <p:ext uri="{BB962C8B-B14F-4D97-AF65-F5344CB8AC3E}">
-        <p14:creationId xmlns:p14="http://schemas.microsoft.com/office/powerpoint/2010/main" val="4213127706"/>
+        <p14:creationId xmlns:p14="http://schemas.microsoft.com/office/powerpoint/2010/main" val="109084377"/>
       </p:ext>
     </p:extLst>
   </p:cSld>
@@ -8890,7 +8438,7 @@
         <p:spPr>
           <a:xfrm>
             <a:off x="567542" y="491954"/>
-            <a:ext cx="6046848" cy="584775"/>
+            <a:ext cx="4698722" cy="584775"/>
           </a:xfrm>
           <a:prstGeom prst="rect">
             <a:avLst/>
@@ -8905,7 +8453,7 @@
           <a:p>
             <a:r>
               <a:rPr kumimoji="1" lang="ja-JP" altLang="en-US" sz="3200" b="1" u="sng" dirty="0"/>
-              <a:t>オブジェクトの複数配置 ロード</a:t>
+              <a:t>オブジェクトの複数配置</a:t>
             </a:r>
             <a:endParaRPr kumimoji="1" lang="en-US" altLang="ja-JP" sz="3200" b="1" u="sng" dirty="0"/>
           </a:p>
@@ -8926,7 +8474,7 @@
         <p:spPr>
           <a:xfrm>
             <a:off x="567542" y="1216429"/>
-            <a:ext cx="7103227" cy="461665"/>
+            <a:ext cx="8805616" cy="461665"/>
           </a:xfrm>
           <a:prstGeom prst="rect">
             <a:avLst/>
@@ -8940,12 +8488,16 @@
           <a:lstStyle/>
           <a:p>
             <a:r>
-              <a:rPr lang="en-US" altLang="ja-JP" sz="2400" dirty="0"/>
-              <a:t>Block.cpp</a:t>
+              <a:rPr lang="en-US" altLang="ja-JP" sz="2400" b="1" dirty="0" err="1">
+                <a:solidFill>
+                  <a:srgbClr val="00B050"/>
+                </a:solidFill>
+              </a:rPr>
+              <a:t>BlockManager</a:t>
             </a:r>
             <a:r>
               <a:rPr lang="ja-JP" altLang="en-US" sz="2400" dirty="0"/>
-              <a:t>のロード関数にロード処理を書きます。</a:t>
+              <a:t>の残りの関数も完成させましょう。（その１）</a:t>
             </a:r>
             <a:endParaRPr lang="en-US" altLang="ja-JP" sz="2400" dirty="0"/>
           </a:p>
@@ -8956,7 +8508,7 @@
           <p:cNvPr id="5" name="図 4">
             <a:extLst>
               <a:ext uri="{FF2B5EF4-FFF2-40B4-BE49-F238E27FC236}">
-                <a16:creationId xmlns:a16="http://schemas.microsoft.com/office/drawing/2014/main" id="{289462DD-68A9-49AF-A333-B9B1B079A8CE}"/>
+                <a16:creationId xmlns:a16="http://schemas.microsoft.com/office/drawing/2014/main" id="{CCD55537-72B2-4C3E-A6FC-39F1A496F605}"/>
               </a:ext>
             </a:extLst>
           </p:cNvPr>
@@ -8973,8 +8525,8 @@
         </p:blipFill>
         <p:spPr>
           <a:xfrm>
-            <a:off x="567541" y="1817794"/>
-            <a:ext cx="10193553" cy="1808275"/>
+            <a:off x="567541" y="1822276"/>
+            <a:ext cx="6287741" cy="4668171"/>
           </a:xfrm>
           <a:prstGeom prst="rect">
             <a:avLst/>
@@ -8984,7 +8536,7 @@
     </p:spTree>
     <p:extLst>
       <p:ext uri="{BB962C8B-B14F-4D97-AF65-F5344CB8AC3E}">
-        <p14:creationId xmlns:p14="http://schemas.microsoft.com/office/powerpoint/2010/main" val="1368374807"/>
+        <p14:creationId xmlns:p14="http://schemas.microsoft.com/office/powerpoint/2010/main" val="4104289261"/>
       </p:ext>
     </p:extLst>
   </p:cSld>
